--- a/slides/pptx/第05回_自社専用AIをつくる.pptx
+++ b/slides/pptx/第05回_自社専用AIをつくる.pptx
@@ -12,9 +12,14 @@
     <p:sldId id="260" r:id="rId6"/>
     <p:sldId id="261" r:id="rId7"/>
     <p:sldId id="262" r:id="rId8"/>
+    <p:sldId id="263" r:id="rId9"/>
+    <p:sldId id="264" r:id="rId10"/>
+    <p:sldId id="265" r:id="rId11"/>
+    <p:sldId id="266" r:id="rId12"/>
+    <p:sldId id="267" r:id="rId13"/>
   </p:sldIdLst>
   <p:notesMasterIdLst>
-    <p:notesMasterId r:id="rId9"/>
+    <p:notesMasterId r:id="rId14"/>
   </p:notesMasterIdLst>
   <p:sldSz cx="12192000" cy="6858000"/>
   <p:notesSz cx="6858000" cy="12192000"/>
@@ -508,8 +513,7 @@
           <a:p>
             <a:r>
               <a:rPr lang="en-US" dirty="0"/>
-              <a:t>ここまでの成果物を、1つのツールに束ねます。
-【ゴール】自社資料を読む専用AIを1つ動かし、社員の方が触れる状態にします。</a:t>
+              <a:t>前回の宿題（月次レポートを1回回したか）を確認。足りなかった前提を書き足せているかまで見る。</a:t>
             </a:r>
             <a:endParaRPr lang="en-US" dirty="0"/>
           </a:p>
@@ -533,6 +537,270 @@
             <a:fld id="{F7021451-1387-4CA6-816F-3879F97B5CBC}" type="slidenum">
               <a:rPr lang="en-US"/>
               <a:t>1</a:t>
+            </a:fld>
+            <a:endParaRPr lang="en-US"/>
+          </a:p>
+        </p:txBody>
+      </p:sp>
+    </p:spTree>
+    <p:extLst>
+      <p:ext uri="{BB962C8B-B14F-4D97-AF65-F5344CB8AC3E}">
+        <p14:creationId xmlns:p14="http://schemas.microsoft.com/office/powerpoint/2010/main" val="1024086991"/>
+      </p:ext>
+    </p:extLst>
+  </p:cSld>
+  <p:clrMapOvr>
+    <a:masterClrMapping/>
+  </p:clrMapOvr>
+</p:notes>
+</file>
+
+<file path=ppt/notesSlides/notesSlide10.xml><?xml version="1.0" encoding="utf-8"?>
+<p:notes xmlns:a="http://schemas.openxmlformats.org/drawingml/2006/main" xmlns:r="http://schemas.openxmlformats.org/officeDocument/2006/relationships" xmlns:p="http://schemas.openxmlformats.org/presentationml/2006/main">
+  <p:cSld>
+    <p:spTree>
+      <p:nvGrpSpPr>
+        <p:cNvPr id="1" name=""/>
+        <p:cNvGrpSpPr/>
+        <p:nvPr/>
+      </p:nvGrpSpPr>
+      <p:grpSpPr>
+        <a:xfrm>
+          <a:off x="0" y="0"/>
+          <a:ext cx="0" cy="0"/>
+          <a:chOff x="0" y="0"/>
+          <a:chExt cx="0" cy="0"/>
+        </a:xfrm>
+      </p:grpSpPr>
+      <p:sp>
+        <p:nvSpPr>
+          <p:cNvPr id="2" name="Slide Image Placeholder 1"/>
+          <p:cNvSpPr>
+            <a:spLocks noGrp="1" noRot="1" noChangeAspect="1"/>
+          </p:cNvSpPr>
+          <p:nvPr>
+            <p:ph type="sldImg"/>
+          </p:nvPr>
+        </p:nvSpPr>
+        <p:spPr/>
+      </p:sp>
+      <p:sp>
+        <p:nvSpPr>
+          <p:cNvPr id="3" name="Notes Placeholder 2"/>
+          <p:cNvSpPr>
+            <a:spLocks noGrp="1"/>
+          </p:cNvSpPr>
+          <p:nvPr>
+            <p:ph type="body" idx="1"/>
+          </p:nvPr>
+        </p:nvSpPr>
+        <p:spPr/>
+        <p:txBody>
+          <a:bodyPr/>
+          <a:lstStyle/>
+          <a:p>
+            <a:r>
+              <a:rPr lang="en-US" dirty="0"/>
+              <a:t>置き場所は実際に開いて確認する。URLを共有フォルダに貼るところまでやると、翌週から使われる確率が上がる。</a:t>
+            </a:r>
+            <a:endParaRPr lang="en-US" dirty="0"/>
+          </a:p>
+        </p:txBody>
+      </p:sp>
+      <p:sp>
+        <p:nvSpPr>
+          <p:cNvPr id="4" name="Slide Number Placeholder 3"/>
+          <p:cNvSpPr>
+            <a:spLocks noGrp="1"/>
+          </p:cNvSpPr>
+          <p:nvPr>
+            <p:ph type="sldNum" sz="quarter" idx="10"/>
+          </p:nvPr>
+        </p:nvSpPr>
+        <p:spPr/>
+        <p:txBody>
+          <a:bodyPr/>
+          <a:lstStyle/>
+          <a:p>
+            <a:fld id="{F7021451-1387-4CA6-816F-3879F97B5CBC}" type="slidenum">
+              <a:rPr lang="en-US"/>
+              <a:t>10</a:t>
+            </a:fld>
+            <a:endParaRPr lang="en-US"/>
+          </a:p>
+        </p:txBody>
+      </p:sp>
+    </p:spTree>
+    <p:extLst>
+      <p:ext uri="{BB962C8B-B14F-4D97-AF65-F5344CB8AC3E}">
+        <p14:creationId xmlns:p14="http://schemas.microsoft.com/office/powerpoint/2010/main" val="1024086991"/>
+      </p:ext>
+    </p:extLst>
+  </p:cSld>
+  <p:clrMapOvr>
+    <a:masterClrMapping/>
+  </p:clrMapOvr>
+</p:notes>
+</file>
+
+<file path=ppt/notesSlides/notesSlide11.xml><?xml version="1.0" encoding="utf-8"?>
+<p:notes xmlns:a="http://schemas.openxmlformats.org/drawingml/2006/main" xmlns:r="http://schemas.openxmlformats.org/officeDocument/2006/relationships" xmlns:p="http://schemas.openxmlformats.org/presentationml/2006/main">
+  <p:cSld>
+    <p:spTree>
+      <p:nvGrpSpPr>
+        <p:cNvPr id="1" name=""/>
+        <p:cNvGrpSpPr/>
+        <p:nvPr/>
+      </p:nvGrpSpPr>
+      <p:grpSpPr>
+        <a:xfrm>
+          <a:off x="0" y="0"/>
+          <a:ext cx="0" cy="0"/>
+          <a:chOff x="0" y="0"/>
+          <a:chExt cx="0" cy="0"/>
+        </a:xfrm>
+      </p:grpSpPr>
+      <p:sp>
+        <p:nvSpPr>
+          <p:cNvPr id="2" name="Slide Image Placeholder 1"/>
+          <p:cNvSpPr>
+            <a:spLocks noGrp="1" noRot="1" noChangeAspect="1"/>
+          </p:cNvSpPr>
+          <p:nvPr>
+            <p:ph type="sldImg"/>
+          </p:nvPr>
+        </p:nvSpPr>
+        <p:spPr/>
+      </p:sp>
+      <p:sp>
+        <p:nvSpPr>
+          <p:cNvPr id="3" name="Notes Placeholder 2"/>
+          <p:cNvSpPr>
+            <a:spLocks noGrp="1"/>
+          </p:cNvSpPr>
+          <p:nvPr>
+            <p:ph type="body" idx="1"/>
+          </p:nvPr>
+        </p:nvSpPr>
+        <p:spPr/>
+        <p:txBody>
+          <a:bodyPr/>
+          <a:lstStyle/>
+          <a:p>
+            <a:r>
+              <a:rPr lang="en-US" dirty="0"/>
+              <a:t>時間が押したら、演習を削ってでもここを守る。持ち帰って試します、は試されない。この一点だけは譲らない。</a:t>
+            </a:r>
+            <a:endParaRPr lang="en-US" dirty="0"/>
+          </a:p>
+        </p:txBody>
+      </p:sp>
+      <p:sp>
+        <p:nvSpPr>
+          <p:cNvPr id="4" name="Slide Number Placeholder 3"/>
+          <p:cNvSpPr>
+            <a:spLocks noGrp="1"/>
+          </p:cNvSpPr>
+          <p:nvPr>
+            <p:ph type="sldNum" sz="quarter" idx="10"/>
+          </p:nvPr>
+        </p:nvSpPr>
+        <p:spPr/>
+        <p:txBody>
+          <a:bodyPr/>
+          <a:lstStyle/>
+          <a:p>
+            <a:fld id="{F7021451-1387-4CA6-816F-3879F97B5CBC}" type="slidenum">
+              <a:rPr lang="en-US"/>
+              <a:t>11</a:t>
+            </a:fld>
+            <a:endParaRPr lang="en-US"/>
+          </a:p>
+        </p:txBody>
+      </p:sp>
+    </p:spTree>
+    <p:extLst>
+      <p:ext uri="{BB962C8B-B14F-4D97-AF65-F5344CB8AC3E}">
+        <p14:creationId xmlns:p14="http://schemas.microsoft.com/office/powerpoint/2010/main" val="1024086991"/>
+      </p:ext>
+    </p:extLst>
+  </p:cSld>
+  <p:clrMapOvr>
+    <a:masterClrMapping/>
+  </p:clrMapOvr>
+</p:notes>
+</file>
+
+<file path=ppt/notesSlides/notesSlide12.xml><?xml version="1.0" encoding="utf-8"?>
+<p:notes xmlns:a="http://schemas.openxmlformats.org/drawingml/2006/main" xmlns:r="http://schemas.openxmlformats.org/officeDocument/2006/relationships" xmlns:p="http://schemas.openxmlformats.org/presentationml/2006/main">
+  <p:cSld>
+    <p:spTree>
+      <p:nvGrpSpPr>
+        <p:cNvPr id="1" name=""/>
+        <p:cNvGrpSpPr/>
+        <p:nvPr/>
+      </p:nvGrpSpPr>
+      <p:grpSpPr>
+        <a:xfrm>
+          <a:off x="0" y="0"/>
+          <a:ext cx="0" cy="0"/>
+          <a:chOff x="0" y="0"/>
+          <a:chExt cx="0" cy="0"/>
+        </a:xfrm>
+      </p:grpSpPr>
+      <p:sp>
+        <p:nvSpPr>
+          <p:cNvPr id="2" name="Slide Image Placeholder 1"/>
+          <p:cNvSpPr>
+            <a:spLocks noGrp="1" noRot="1" noChangeAspect="1"/>
+          </p:cNvSpPr>
+          <p:nvPr>
+            <p:ph type="sldImg"/>
+          </p:nvPr>
+        </p:nvSpPr>
+        <p:spPr/>
+      </p:sp>
+      <p:sp>
+        <p:nvSpPr>
+          <p:cNvPr id="3" name="Notes Placeholder 2"/>
+          <p:cNvSpPr>
+            <a:spLocks noGrp="1"/>
+          </p:cNvSpPr>
+          <p:nvPr>
+            <p:ph type="body" idx="1"/>
+          </p:nvPr>
+        </p:nvSpPr>
+        <p:spPr/>
+        <p:txBody>
+          <a:bodyPr/>
+          <a:lstStyle/>
+          <a:p>
+            <a:r>
+              <a:rPr lang="en-US" dirty="0"/>
+              <a:t>1名に触ってもらう、が次回の成否を分ける。誰に頼むかをその場で決め、頼み方の一言まで一緒に考える。</a:t>
+            </a:r>
+            <a:endParaRPr lang="en-US" dirty="0"/>
+          </a:p>
+        </p:txBody>
+      </p:sp>
+      <p:sp>
+        <p:nvSpPr>
+          <p:cNvPr id="4" name="Slide Number Placeholder 3"/>
+          <p:cNvSpPr>
+            <a:spLocks noGrp="1"/>
+          </p:cNvSpPr>
+          <p:nvPr>
+            <p:ph type="sldNum" sz="quarter" idx="10"/>
+          </p:nvPr>
+        </p:nvSpPr>
+        <p:spPr/>
+        <p:txBody>
+          <a:bodyPr/>
+          <a:lstStyle/>
+          <a:p>
+            <a:fld id="{F7021451-1387-4CA6-816F-3879F97B5CBC}" type="slidenum">
+              <a:rPr lang="en-US"/>
+              <a:t>12</a:t>
             </a:fld>
             <a:endParaRPr lang="en-US"/>
           </a:p>
@@ -597,7 +865,7 @@
           <a:p>
             <a:r>
               <a:rPr lang="en-US" dirty="0"/>
-              <a:t>ここは30秒で。今日の到達点だけ言って、すぐ本題へ。</a:t>
+              <a:t>成果物がバラバラに置かれている状態を、受講者自身に気づいてもらう。「いま指示文はどこにありますか」と聞くのが早い。</a:t>
             </a:r>
             <a:endParaRPr lang="en-US" dirty="0"/>
           </a:p>
@@ -685,7 +953,7 @@
           <a:p>
             <a:r>
               <a:rPr lang="en-US" dirty="0"/>
-              <a:t>先に結論を言わず、受講者の実物を題材にしてこの型に当てはめて見せる。</a:t>
+              <a:t>「動かないまま持ち帰らせません」を最初に宣言する。今日の時間配分の根拠になる。</a:t>
             </a:r>
             <a:endParaRPr lang="en-US" dirty="0"/>
           </a:p>
@@ -773,7 +1041,7 @@
           <a:p>
             <a:r>
               <a:rPr lang="en-US" dirty="0"/>
-              <a:t>必ず左（失敗例）から。自分の失敗として話す。うまくいく例だけ見せると、受講者は自分の失敗を言わなくなる。</a:t>
+              <a:t>3択は必ず受講者に選ばせる。講師が「これがいいですよ」と言った瞬間、その道具は他人のものになる。迷ったら第1回の棚卸し上位に戻す。</a:t>
             </a:r>
             <a:endParaRPr lang="en-US" dirty="0"/>
           </a:p>
@@ -861,7 +1129,7 @@
           <a:p>
             <a:r>
               <a:rPr lang="en-US" dirty="0"/>
-              <a:t>ここから講師は口頭指示のみ。画面を操作するのは必ず受講者。歯がゆくても手を出さない。</a:t>
+              <a:t>6行の仕様書は、その場で埋めながら作る。特に「守ること」の行を、次のデモで実証する。</a:t>
             </a:r>
             <a:endParaRPr lang="en-US" dirty="0"/>
           </a:p>
@@ -949,7 +1217,7 @@
           <a:p>
             <a:r>
               <a:rPr lang="en-US" dirty="0"/>
-              <a:t>ここは資料を読み上げない。自分の言葉と、匿名事例で話す。</a:t>
+              <a:t>資料を載せただけの状態を実際に見せる。それらしい嘘が出た瞬間が、この回で最も価値のある3秒。出なければ何度か聞き方を変える。</a:t>
             </a:r>
             <a:endParaRPr lang="en-US" dirty="0"/>
           </a:p>
@@ -1037,7 +1305,7 @@
           <a:p>
             <a:r>
               <a:rPr lang="en-US" dirty="0"/>
-              <a:t>その場でカレンダーに入れてもらう。口頭の約束で終わらせない。</a:t>
+              <a:t>3行はコピーさせず、必ず手で打たせる。打った内容は忘れない。ここが第8回のナレッジ検索、第10回の評価につながる伏線。</a:t>
             </a:r>
             <a:endParaRPr lang="en-US" dirty="0"/>
           </a:p>
@@ -1061,6 +1329,182 @@
             <a:fld id="{F7021451-1387-4CA6-816F-3879F97B5CBC}" type="slidenum">
               <a:rPr lang="en-US"/>
               <a:t>7</a:t>
+            </a:fld>
+            <a:endParaRPr lang="en-US"/>
+          </a:p>
+        </p:txBody>
+      </p:sp>
+    </p:spTree>
+    <p:extLst>
+      <p:ext uri="{BB962C8B-B14F-4D97-AF65-F5344CB8AC3E}">
+        <p14:creationId xmlns:p14="http://schemas.microsoft.com/office/powerpoint/2010/main" val="1024086991"/>
+      </p:ext>
+    </p:extLst>
+  </p:cSld>
+  <p:clrMapOvr>
+    <a:masterClrMapping/>
+  </p:clrMapOvr>
+</p:notes>
+</file>
+
+<file path=ppt/notesSlides/notesSlide8.xml><?xml version="1.0" encoding="utf-8"?>
+<p:notes xmlns:a="http://schemas.openxmlformats.org/drawingml/2006/main" xmlns:r="http://schemas.openxmlformats.org/officeDocument/2006/relationships" xmlns:p="http://schemas.openxmlformats.org/presentationml/2006/main">
+  <p:cSld>
+    <p:spTree>
+      <p:nvGrpSpPr>
+        <p:cNvPr id="1" name=""/>
+        <p:cNvGrpSpPr/>
+        <p:nvPr/>
+      </p:nvGrpSpPr>
+      <p:grpSpPr>
+        <a:xfrm>
+          <a:off x="0" y="0"/>
+          <a:ext cx="0" cy="0"/>
+          <a:chOff x="0" y="0"/>
+          <a:chExt cx="0" cy="0"/>
+        </a:xfrm>
+      </p:grpSpPr>
+      <p:sp>
+        <p:nvSpPr>
+          <p:cNvPr id="2" name="Slide Image Placeholder 1"/>
+          <p:cNvSpPr>
+            <a:spLocks noGrp="1" noRot="1" noChangeAspect="1"/>
+          </p:cNvSpPr>
+          <p:nvPr>
+            <p:ph type="sldImg"/>
+          </p:nvPr>
+        </p:nvSpPr>
+        <p:spPr/>
+      </p:sp>
+      <p:sp>
+        <p:nvSpPr>
+          <p:cNvPr id="3" name="Notes Placeholder 2"/>
+          <p:cNvSpPr>
+            <a:spLocks noGrp="1"/>
+          </p:cNvSpPr>
+          <p:nvPr>
+            <p:ph type="body" idx="1"/>
+          </p:nvPr>
+        </p:nvSpPr>
+        <p:spPr/>
+        <p:txBody>
+          <a:bodyPr/>
+          <a:lstStyle/>
+          <a:p>
+            <a:r>
+              <a:rPr lang="en-US" dirty="0"/>
+              <a:t>資料が整っていないのは当たり前。完璧を待つと永遠に始まらない。3本で動かす、を通す。</a:t>
+            </a:r>
+            <a:endParaRPr lang="en-US" dirty="0"/>
+          </a:p>
+        </p:txBody>
+      </p:sp>
+      <p:sp>
+        <p:nvSpPr>
+          <p:cNvPr id="4" name="Slide Number Placeholder 3"/>
+          <p:cNvSpPr>
+            <a:spLocks noGrp="1"/>
+          </p:cNvSpPr>
+          <p:nvPr>
+            <p:ph type="sldNum" sz="quarter" idx="10"/>
+          </p:nvPr>
+        </p:nvSpPr>
+        <p:spPr/>
+        <p:txBody>
+          <a:bodyPr/>
+          <a:lstStyle/>
+          <a:p>
+            <a:fld id="{F7021451-1387-4CA6-816F-3879F97B5CBC}" type="slidenum">
+              <a:rPr lang="en-US"/>
+              <a:t>8</a:t>
+            </a:fld>
+            <a:endParaRPr lang="en-US"/>
+          </a:p>
+        </p:txBody>
+      </p:sp>
+    </p:spTree>
+    <p:extLst>
+      <p:ext uri="{BB962C8B-B14F-4D97-AF65-F5344CB8AC3E}">
+        <p14:creationId xmlns:p14="http://schemas.microsoft.com/office/powerpoint/2010/main" val="1024086991"/>
+      </p:ext>
+    </p:extLst>
+  </p:cSld>
+  <p:clrMapOvr>
+    <a:masterClrMapping/>
+  </p:clrMapOvr>
+</p:notes>
+</file>
+
+<file path=ppt/notesSlides/notesSlide9.xml><?xml version="1.0" encoding="utf-8"?>
+<p:notes xmlns:a="http://schemas.openxmlformats.org/drawingml/2006/main" xmlns:r="http://schemas.openxmlformats.org/officeDocument/2006/relationships" xmlns:p="http://schemas.openxmlformats.org/presentationml/2006/main">
+  <p:cSld>
+    <p:spTree>
+      <p:nvGrpSpPr>
+        <p:cNvPr id="1" name=""/>
+        <p:cNvGrpSpPr/>
+        <p:nvPr/>
+      </p:nvGrpSpPr>
+      <p:grpSpPr>
+        <a:xfrm>
+          <a:off x="0" y="0"/>
+          <a:ext cx="0" cy="0"/>
+          <a:chOff x="0" y="0"/>
+          <a:chExt cx="0" cy="0"/>
+        </a:xfrm>
+      </p:grpSpPr>
+      <p:sp>
+        <p:nvSpPr>
+          <p:cNvPr id="2" name="Slide Image Placeholder 1"/>
+          <p:cNvSpPr>
+            <a:spLocks noGrp="1" noRot="1" noChangeAspect="1"/>
+          </p:cNvSpPr>
+          <p:nvPr>
+            <p:ph type="sldImg"/>
+          </p:nvPr>
+        </p:nvSpPr>
+        <p:spPr/>
+      </p:sp>
+      <p:sp>
+        <p:nvSpPr>
+          <p:cNvPr id="3" name="Notes Placeholder 2"/>
+          <p:cNvSpPr>
+            <a:spLocks noGrp="1"/>
+          </p:cNvSpPr>
+          <p:nvPr>
+            <p:ph type="body" idx="1"/>
+          </p:nvPr>
+        </p:nvSpPr>
+        <p:spPr/>
+        <p:txBody>
+          <a:bodyPr/>
+          <a:lstStyle/>
+          <a:p>
+            <a:r>
+              <a:rPr lang="en-US" dirty="0"/>
+              <a:t>3つ目（ルール）は時間が押しても必ずやる。テンプレを埋めるだけなので10分で済む。ルールがないまま社員に渡すと、第6回で必ず質問が出る。</a:t>
+            </a:r>
+            <a:endParaRPr lang="en-US" dirty="0"/>
+          </a:p>
+        </p:txBody>
+      </p:sp>
+      <p:sp>
+        <p:nvSpPr>
+          <p:cNvPr id="4" name="Slide Number Placeholder 3"/>
+          <p:cNvSpPr>
+            <a:spLocks noGrp="1"/>
+          </p:cNvSpPr>
+          <p:nvPr>
+            <p:ph type="sldNum" sz="quarter" idx="10"/>
+          </p:nvPr>
+        </p:nvSpPr>
+        <p:spPr/>
+        <p:txBody>
+          <a:bodyPr/>
+          <a:lstStyle/>
+          <a:p>
+            <a:fld id="{F7021451-1387-4CA6-816F-3879F97B5CBC}" type="slidenum">
+              <a:rPr lang="en-US"/>
+              <a:t>9</a:t>
             </a:fld>
             <a:endParaRPr lang="en-US"/>
           </a:p>
@@ -1666,9 +2110,1287 @@
                 <a:ea typeface="Yu Gothic" pitchFamily="34" charset="-122"/>
                 <a:cs typeface="Yu Gothic" pitchFamily="34" charset="-120"/>
               </a:rPr>
-              <a:t>自社の資料を読んで答えるAI 1つ／AI利用ルール（A4一枚）</a:t>
+              <a:t>自社資料を読んで答えるAI 1つ／AI利用ルール（A4一枚）</a:t>
             </a:r>
             <a:endParaRPr lang="en-US" sz="1600" dirty="0"/>
+          </a:p>
+        </p:txBody>
+      </p:sp>
+    </p:spTree>
+  </p:cSld>
+  <p:clrMapOvr>
+    <a:masterClrMapping/>
+  </p:clrMapOvr>
+</p:sld>
+</file>
+
+<file path=ppt/slides/slide10.xml><?xml version="1.0" encoding="utf-8"?>
+<p:sld xmlns:a="http://schemas.openxmlformats.org/drawingml/2006/main" xmlns:r="http://schemas.openxmlformats.org/officeDocument/2006/relationships" xmlns:p="http://schemas.openxmlformats.org/presentationml/2006/main">
+  <p:cSld name="Slide 10">
+    <p:bg>
+      <p:bgPr>
+        <a:solidFill>
+          <a:srgbClr val="F6F2EA"/>
+        </a:solidFill>
+      </p:bgPr>
+    </p:bg>
+    <p:spTree>
+      <p:nvGrpSpPr>
+        <p:cNvPr id="1" name=""/>
+        <p:cNvGrpSpPr/>
+        <p:nvPr/>
+      </p:nvGrpSpPr>
+      <p:grpSpPr>
+        <a:xfrm>
+          <a:off x="0" y="0"/>
+          <a:ext cx="0" cy="0"/>
+          <a:chOff x="0" y="0"/>
+          <a:chExt cx="0" cy="0"/>
+        </a:xfrm>
+      </p:grpSpPr>
+      <p:sp>
+        <p:nvSpPr>
+          <p:cNvPr id="2" name="Text 0"/>
+          <p:cNvSpPr txBox="1"/>
+          <p:nvPr/>
+        </p:nvSpPr>
+        <p:spPr>
+          <a:xfrm>
+            <a:off x="777240" y="566928"/>
+            <a:ext cx="10607040" cy="274320"/>
+          </a:xfrm>
+          <a:prstGeom prst="rect">
+            <a:avLst/>
+          </a:prstGeom>
+          <a:noFill/>
+          <a:ln/>
+        </p:spPr>
+        <p:txBody>
+          <a:bodyPr wrap="square" lIns="0" tIns="0" rIns="0" bIns="0" rtlCol="0" anchor="ctr"/>
+          <a:lstStyle/>
+          <a:p>
+            <a:pPr indent="0" marL="0">
+              <a:buNone/>
+            </a:pPr>
+            <a:r>
+              <a:rPr lang="en-US" sz="1100" b="1" spc="250" kern="0" dirty="0">
+                <a:solidFill>
+                  <a:srgbClr val="3B6B4A"/>
+                </a:solidFill>
+                <a:latin typeface="Yu Gothic" pitchFamily="34" charset="0"/>
+                <a:ea typeface="Yu Gothic" pitchFamily="34" charset="-122"/>
+                <a:cs typeface="Yu Gothic" pitchFamily="34" charset="-120"/>
+              </a:rPr>
+              <a:t>業務への組み込み</a:t>
+            </a:r>
+            <a:endParaRPr lang="en-US" sz="1100" dirty="0"/>
+          </a:p>
+        </p:txBody>
+      </p:sp>
+      <p:sp>
+        <p:nvSpPr>
+          <p:cNvPr id="3" name="Text 1"/>
+          <p:cNvSpPr txBox="1"/>
+          <p:nvPr/>
+        </p:nvSpPr>
+        <p:spPr>
+          <a:xfrm>
+            <a:off x="777240" y="896112"/>
+            <a:ext cx="10607040" cy="640080"/>
+          </a:xfrm>
+          <a:prstGeom prst="rect">
+            <a:avLst/>
+          </a:prstGeom>
+          <a:noFill/>
+          <a:ln/>
+        </p:spPr>
+        <p:txBody>
+          <a:bodyPr wrap="square" lIns="0" tIns="0" rIns="0" bIns="0" rtlCol="0" anchor="ctr"/>
+          <a:lstStyle/>
+          <a:p>
+            <a:pPr indent="0" marL="0">
+              <a:buNone/>
+            </a:pPr>
+            <a:r>
+              <a:rPr lang="en-US" sz="2600" b="1" dirty="0">
+                <a:solidFill>
+                  <a:srgbClr val="23201D"/>
+                </a:solidFill>
+                <a:latin typeface="Yu Gothic" pitchFamily="34" charset="0"/>
+                <a:ea typeface="Yu Gothic" pitchFamily="34" charset="-122"/>
+                <a:cs typeface="Yu Gothic" pitchFamily="34" charset="-120"/>
+              </a:rPr>
+              <a:t>帰る前に決めること</a:t>
+            </a:r>
+            <a:endParaRPr lang="en-US" sz="2600" dirty="0"/>
+          </a:p>
+        </p:txBody>
+      </p:sp>
+      <p:sp>
+        <p:nvSpPr>
+          <p:cNvPr id="4" name="Text 2"/>
+          <p:cNvSpPr txBox="1"/>
+          <p:nvPr/>
+        </p:nvSpPr>
+        <p:spPr>
+          <a:xfrm>
+            <a:off x="777240" y="1572768"/>
+            <a:ext cx="10607040" cy="320040"/>
+          </a:xfrm>
+          <a:prstGeom prst="rect">
+            <a:avLst/>
+          </a:prstGeom>
+          <a:noFill/>
+          <a:ln/>
+        </p:spPr>
+        <p:txBody>
+          <a:bodyPr wrap="square" lIns="0" tIns="0" rIns="0" bIns="0" rtlCol="0" anchor="ctr"/>
+          <a:lstStyle/>
+          <a:p>
+            <a:pPr indent="0" marL="0">
+              <a:buNone/>
+            </a:pPr>
+            <a:r>
+              <a:rPr lang="en-US" sz="1250" b="1" dirty="0">
+                <a:solidFill>
+                  <a:srgbClr val="3B6B4A"/>
+                </a:solidFill>
+                <a:latin typeface="Yu Gothic" pitchFamily="34" charset="0"/>
+                <a:ea typeface="Yu Gothic" pitchFamily="34" charset="-122"/>
+                <a:cs typeface="Yu Gothic" pitchFamily="34" charset="-120"/>
+              </a:rPr>
+              <a:t>ここを決めないと、持ち帰っても使われません。紙に書きます。</a:t>
+            </a:r>
+            <a:endParaRPr lang="en-US" sz="1250" dirty="0"/>
+          </a:p>
+        </p:txBody>
+      </p:sp>
+      <p:sp>
+        <p:nvSpPr>
+          <p:cNvPr id="5" name="Shape 3"/>
+          <p:cNvSpPr/>
+          <p:nvPr/>
+        </p:nvSpPr>
+        <p:spPr>
+          <a:xfrm>
+            <a:off x="777240" y="2103120"/>
+            <a:ext cx="10607040" cy="914400"/>
+          </a:xfrm>
+          <a:prstGeom prst="rect">
+            <a:avLst/>
+          </a:prstGeom>
+          <a:solidFill>
+            <a:srgbClr val="FFFFFF"/>
+          </a:solidFill>
+          <a:ln w="12700">
+            <a:solidFill>
+              <a:srgbClr val="EDE7DB"/>
+            </a:solidFill>
+            <a:prstDash val="solid"/>
+          </a:ln>
+        </p:spPr>
+      </p:sp>
+      <p:sp>
+        <p:nvSpPr>
+          <p:cNvPr id="6" name="Shape 4"/>
+          <p:cNvSpPr/>
+          <p:nvPr/>
+        </p:nvSpPr>
+        <p:spPr>
+          <a:xfrm>
+            <a:off x="777240" y="2103120"/>
+            <a:ext cx="54864" cy="914400"/>
+          </a:xfrm>
+          <a:prstGeom prst="rect">
+            <a:avLst/>
+          </a:prstGeom>
+          <a:solidFill>
+            <a:srgbClr val="3B6B4A"/>
+          </a:solidFill>
+          <a:ln w="12700">
+            <a:solidFill>
+              <a:srgbClr val="333333"/>
+            </a:solidFill>
+            <a:prstDash val="solid"/>
+          </a:ln>
+        </p:spPr>
+      </p:sp>
+      <p:sp>
+        <p:nvSpPr>
+          <p:cNvPr id="7" name="Text 5"/>
+          <p:cNvSpPr txBox="1"/>
+          <p:nvPr/>
+        </p:nvSpPr>
+        <p:spPr>
+          <a:xfrm>
+            <a:off x="1143000" y="2176272"/>
+            <a:ext cx="2757830" cy="768096"/>
+          </a:xfrm>
+          <a:prstGeom prst="rect">
+            <a:avLst/>
+          </a:prstGeom>
+          <a:noFill/>
+          <a:ln/>
+        </p:spPr>
+        <p:txBody>
+          <a:bodyPr wrap="square" lIns="0" tIns="0" rIns="0" bIns="0" rtlCol="0" anchor="ctr"/>
+          <a:lstStyle/>
+          <a:p>
+            <a:pPr indent="0" marL="0">
+              <a:buNone/>
+            </a:pPr>
+            <a:r>
+              <a:rPr lang="en-US" sz="1400" b="1" dirty="0">
+                <a:solidFill>
+                  <a:srgbClr val="3B6B4A"/>
+                </a:solidFill>
+                <a:latin typeface="Yu Gothic" pitchFamily="34" charset="0"/>
+                <a:ea typeface="Yu Gothic" pitchFamily="34" charset="-122"/>
+                <a:cs typeface="Yu Gothic" pitchFamily="34" charset="-120"/>
+              </a:rPr>
+              <a:t>誰に最初に触らせるか</a:t>
+            </a:r>
+            <a:endParaRPr lang="en-US" sz="1400" dirty="0"/>
+          </a:p>
+        </p:txBody>
+      </p:sp>
+      <p:sp>
+        <p:nvSpPr>
+          <p:cNvPr id="8" name="Text 6"/>
+          <p:cNvSpPr txBox="1"/>
+          <p:nvPr/>
+        </p:nvSpPr>
+        <p:spPr>
+          <a:xfrm>
+            <a:off x="4006901" y="2176272"/>
+            <a:ext cx="7011619" cy="768096"/>
+          </a:xfrm>
+          <a:prstGeom prst="rect">
+            <a:avLst/>
+          </a:prstGeom>
+          <a:noFill/>
+          <a:ln/>
+        </p:spPr>
+        <p:txBody>
+          <a:bodyPr wrap="square" lIns="0" tIns="0" rIns="0" bIns="0" rtlCol="0" anchor="ctr"/>
+          <a:lstStyle/>
+          <a:p>
+            <a:pPr indent="0" marL="0">
+              <a:lnSpc>
+                <a:spcPct val="130000"/>
+              </a:lnSpc>
+              <a:buNone/>
+            </a:pPr>
+            <a:r>
+              <a:rPr lang="en-US" sz="1250" dirty="0">
+                <a:solidFill>
+                  <a:srgbClr val="3F3933"/>
+                </a:solidFill>
+                <a:latin typeface="Yu Gothic" pitchFamily="34" charset="0"/>
+                <a:ea typeface="Yu Gothic" pitchFamily="34" charset="-122"/>
+                <a:cs typeface="Yu Gothic" pitchFamily="34" charset="-120"/>
+              </a:rPr>
+              <a:t>推進候補の1名。第3回で決めた方と同じで構いません</a:t>
+            </a:r>
+            <a:endParaRPr lang="en-US" sz="1250" dirty="0"/>
+          </a:p>
+        </p:txBody>
+      </p:sp>
+      <p:sp>
+        <p:nvSpPr>
+          <p:cNvPr id="9" name="Shape 7"/>
+          <p:cNvSpPr/>
+          <p:nvPr/>
+        </p:nvSpPr>
+        <p:spPr>
+          <a:xfrm>
+            <a:off x="777240" y="3154680"/>
+            <a:ext cx="10607040" cy="914400"/>
+          </a:xfrm>
+          <a:prstGeom prst="rect">
+            <a:avLst/>
+          </a:prstGeom>
+          <a:solidFill>
+            <a:srgbClr val="FFFFFF"/>
+          </a:solidFill>
+          <a:ln w="12700">
+            <a:solidFill>
+              <a:srgbClr val="EDE7DB"/>
+            </a:solidFill>
+            <a:prstDash val="solid"/>
+          </a:ln>
+        </p:spPr>
+      </p:sp>
+      <p:sp>
+        <p:nvSpPr>
+          <p:cNvPr id="10" name="Shape 8"/>
+          <p:cNvSpPr/>
+          <p:nvPr/>
+        </p:nvSpPr>
+        <p:spPr>
+          <a:xfrm>
+            <a:off x="777240" y="3154680"/>
+            <a:ext cx="54864" cy="914400"/>
+          </a:xfrm>
+          <a:prstGeom prst="rect">
+            <a:avLst/>
+          </a:prstGeom>
+          <a:solidFill>
+            <a:srgbClr val="3B6B4A"/>
+          </a:solidFill>
+          <a:ln w="12700">
+            <a:solidFill>
+              <a:srgbClr val="333333"/>
+            </a:solidFill>
+            <a:prstDash val="solid"/>
+          </a:ln>
+        </p:spPr>
+      </p:sp>
+      <p:sp>
+        <p:nvSpPr>
+          <p:cNvPr id="11" name="Text 9"/>
+          <p:cNvSpPr txBox="1"/>
+          <p:nvPr/>
+        </p:nvSpPr>
+        <p:spPr>
+          <a:xfrm>
+            <a:off x="1143000" y="3227832"/>
+            <a:ext cx="2757830" cy="768096"/>
+          </a:xfrm>
+          <a:prstGeom prst="rect">
+            <a:avLst/>
+          </a:prstGeom>
+          <a:noFill/>
+          <a:ln/>
+        </p:spPr>
+        <p:txBody>
+          <a:bodyPr wrap="square" lIns="0" tIns="0" rIns="0" bIns="0" rtlCol="0" anchor="ctr"/>
+          <a:lstStyle/>
+          <a:p>
+            <a:pPr indent="0" marL="0">
+              <a:buNone/>
+            </a:pPr>
+            <a:r>
+              <a:rPr lang="en-US" sz="1400" b="1" dirty="0">
+                <a:solidFill>
+                  <a:srgbClr val="3B6B4A"/>
+                </a:solidFill>
+                <a:latin typeface="Yu Gothic" pitchFamily="34" charset="0"/>
+                <a:ea typeface="Yu Gothic" pitchFamily="34" charset="-122"/>
+                <a:cs typeface="Yu Gothic" pitchFamily="34" charset="-120"/>
+              </a:rPr>
+              <a:t>どこに置くか</a:t>
+            </a:r>
+            <a:endParaRPr lang="en-US" sz="1400" dirty="0"/>
+          </a:p>
+        </p:txBody>
+      </p:sp>
+      <p:sp>
+        <p:nvSpPr>
+          <p:cNvPr id="12" name="Text 10"/>
+          <p:cNvSpPr txBox="1"/>
+          <p:nvPr/>
+        </p:nvSpPr>
+        <p:spPr>
+          <a:xfrm>
+            <a:off x="4006901" y="3227832"/>
+            <a:ext cx="7011619" cy="768096"/>
+          </a:xfrm>
+          <a:prstGeom prst="rect">
+            <a:avLst/>
+          </a:prstGeom>
+          <a:noFill/>
+          <a:ln/>
+        </p:spPr>
+        <p:txBody>
+          <a:bodyPr wrap="square" lIns="0" tIns="0" rIns="0" bIns="0" rtlCol="0" anchor="ctr"/>
+          <a:lstStyle/>
+          <a:p>
+            <a:pPr indent="0" marL="0">
+              <a:lnSpc>
+                <a:spcPct val="130000"/>
+              </a:lnSpc>
+              <a:buNone/>
+            </a:pPr>
+            <a:r>
+              <a:rPr lang="en-US" sz="1250" dirty="0">
+                <a:solidFill>
+                  <a:srgbClr val="3F3933"/>
+                </a:solidFill>
+                <a:latin typeface="Yu Gothic" pitchFamily="34" charset="0"/>
+                <a:ea typeface="Yu Gothic" pitchFamily="34" charset="-122"/>
+                <a:cs typeface="Yu Gothic" pitchFamily="34" charset="-120"/>
+              </a:rPr>
+              <a:t>社員が迷わず開ける場所。URLを共有フォルダに貼るところまで</a:t>
+            </a:r>
+            <a:endParaRPr lang="en-US" sz="1250" dirty="0"/>
+          </a:p>
+        </p:txBody>
+      </p:sp>
+      <p:sp>
+        <p:nvSpPr>
+          <p:cNvPr id="13" name="Shape 11"/>
+          <p:cNvSpPr/>
+          <p:nvPr/>
+        </p:nvSpPr>
+        <p:spPr>
+          <a:xfrm>
+            <a:off x="777240" y="4206240"/>
+            <a:ext cx="10607040" cy="914400"/>
+          </a:xfrm>
+          <a:prstGeom prst="rect">
+            <a:avLst/>
+          </a:prstGeom>
+          <a:solidFill>
+            <a:srgbClr val="FFFFFF"/>
+          </a:solidFill>
+          <a:ln w="12700">
+            <a:solidFill>
+              <a:srgbClr val="EDE7DB"/>
+            </a:solidFill>
+            <a:prstDash val="solid"/>
+          </a:ln>
+        </p:spPr>
+      </p:sp>
+      <p:sp>
+        <p:nvSpPr>
+          <p:cNvPr id="14" name="Shape 12"/>
+          <p:cNvSpPr/>
+          <p:nvPr/>
+        </p:nvSpPr>
+        <p:spPr>
+          <a:xfrm>
+            <a:off x="777240" y="4206240"/>
+            <a:ext cx="54864" cy="914400"/>
+          </a:xfrm>
+          <a:prstGeom prst="rect">
+            <a:avLst/>
+          </a:prstGeom>
+          <a:solidFill>
+            <a:srgbClr val="3B6B4A"/>
+          </a:solidFill>
+          <a:ln w="12700">
+            <a:solidFill>
+              <a:srgbClr val="333333"/>
+            </a:solidFill>
+            <a:prstDash val="solid"/>
+          </a:ln>
+        </p:spPr>
+      </p:sp>
+      <p:sp>
+        <p:nvSpPr>
+          <p:cNvPr id="15" name="Text 13"/>
+          <p:cNvSpPr txBox="1"/>
+          <p:nvPr/>
+        </p:nvSpPr>
+        <p:spPr>
+          <a:xfrm>
+            <a:off x="1143000" y="4279392"/>
+            <a:ext cx="2757830" cy="768096"/>
+          </a:xfrm>
+          <a:prstGeom prst="rect">
+            <a:avLst/>
+          </a:prstGeom>
+          <a:noFill/>
+          <a:ln/>
+        </p:spPr>
+        <p:txBody>
+          <a:bodyPr wrap="square" lIns="0" tIns="0" rIns="0" bIns="0" rtlCol="0" anchor="ctr"/>
+          <a:lstStyle/>
+          <a:p>
+            <a:pPr indent="0" marL="0">
+              <a:buNone/>
+            </a:pPr>
+            <a:r>
+              <a:rPr lang="en-US" sz="1400" b="1" dirty="0">
+                <a:solidFill>
+                  <a:srgbClr val="3B6B4A"/>
+                </a:solidFill>
+                <a:latin typeface="Yu Gothic" pitchFamily="34" charset="0"/>
+                <a:ea typeface="Yu Gothic" pitchFamily="34" charset="-122"/>
+                <a:cs typeface="Yu Gothic" pitchFamily="34" charset="-120"/>
+              </a:rPr>
+              <a:t>直すのは誰か</a:t>
+            </a:r>
+            <a:endParaRPr lang="en-US" sz="1400" dirty="0"/>
+          </a:p>
+        </p:txBody>
+      </p:sp>
+      <p:sp>
+        <p:nvSpPr>
+          <p:cNvPr id="16" name="Text 14"/>
+          <p:cNvSpPr txBox="1"/>
+          <p:nvPr/>
+        </p:nvSpPr>
+        <p:spPr>
+          <a:xfrm>
+            <a:off x="4006901" y="4279392"/>
+            <a:ext cx="7011619" cy="768096"/>
+          </a:xfrm>
+          <a:prstGeom prst="rect">
+            <a:avLst/>
+          </a:prstGeom>
+          <a:noFill/>
+          <a:ln/>
+        </p:spPr>
+        <p:txBody>
+          <a:bodyPr wrap="square" lIns="0" tIns="0" rIns="0" bIns="0" rtlCol="0" anchor="ctr"/>
+          <a:lstStyle/>
+          <a:p>
+            <a:pPr indent="0" marL="0">
+              <a:lnSpc>
+                <a:spcPct val="130000"/>
+              </a:lnSpc>
+              <a:buNone/>
+            </a:pPr>
+            <a:r>
+              <a:rPr lang="en-US" sz="1250" dirty="0">
+                <a:solidFill>
+                  <a:srgbClr val="3F3933"/>
+                </a:solidFill>
+                <a:latin typeface="Yu Gothic" pitchFamily="34" charset="0"/>
+                <a:ea typeface="Yu Gothic" pitchFamily="34" charset="-122"/>
+                <a:cs typeface="Yu Gothic" pitchFamily="34" charset="-120"/>
+              </a:rPr>
+              <a:t>当面は社長。第11回で「作る人」を決めます</a:t>
+            </a:r>
+            <a:endParaRPr lang="en-US" sz="1250" dirty="0"/>
+          </a:p>
+        </p:txBody>
+      </p:sp>
+      <p:sp>
+        <p:nvSpPr>
+          <p:cNvPr id="17" name="Text 15"/>
+          <p:cNvSpPr txBox="1"/>
+          <p:nvPr/>
+        </p:nvSpPr>
+        <p:spPr>
+          <a:xfrm>
+            <a:off x="777240" y="6382512"/>
+            <a:ext cx="7424928" cy="256032"/>
+          </a:xfrm>
+          <a:prstGeom prst="rect">
+            <a:avLst/>
+          </a:prstGeom>
+          <a:noFill/>
+          <a:ln/>
+        </p:spPr>
+        <p:txBody>
+          <a:bodyPr wrap="square" lIns="0" tIns="0" rIns="0" bIns="0" rtlCol="0" anchor="ctr"/>
+          <a:lstStyle/>
+          <a:p>
+            <a:pPr indent="0" marL="0">
+              <a:buNone/>
+            </a:pPr>
+            <a:r>
+              <a:rPr lang="en-US" sz="900" dirty="0">
+                <a:solidFill>
+                  <a:srgbClr val="8A8177"/>
+                </a:solidFill>
+                <a:latin typeface="Yu Gothic" pitchFamily="34" charset="0"/>
+                <a:ea typeface="Yu Gothic" pitchFamily="34" charset="-122"/>
+                <a:cs typeface="Yu Gothic" pitchFamily="34" charset="-120"/>
+              </a:rPr>
+              <a:t>第5回　自社専用AIをつくる</a:t>
+            </a:r>
+            <a:endParaRPr lang="en-US" sz="900" dirty="0"/>
+          </a:p>
+        </p:txBody>
+      </p:sp>
+      <p:sp>
+        <p:nvSpPr>
+          <p:cNvPr id="18" name="Text 16"/>
+          <p:cNvSpPr txBox="1"/>
+          <p:nvPr/>
+        </p:nvSpPr>
+        <p:spPr>
+          <a:xfrm>
+            <a:off x="8202168" y="6382512"/>
+            <a:ext cx="3182112" cy="256032"/>
+          </a:xfrm>
+          <a:prstGeom prst="rect">
+            <a:avLst/>
+          </a:prstGeom>
+          <a:noFill/>
+          <a:ln/>
+        </p:spPr>
+        <p:txBody>
+          <a:bodyPr wrap="square" lIns="0" tIns="0" rIns="0" bIns="0" rtlCol="0" anchor="ctr"/>
+          <a:lstStyle/>
+          <a:p>
+            <a:pPr algn="r" indent="0" marL="0">
+              <a:buNone/>
+            </a:pPr>
+            <a:r>
+              <a:rPr lang="en-US" sz="900" dirty="0">
+                <a:solidFill>
+                  <a:srgbClr val="8A8177"/>
+                </a:solidFill>
+                <a:latin typeface="Yu Gothic" pitchFamily="34" charset="0"/>
+                <a:ea typeface="Yu Gothic" pitchFamily="34" charset="-122"/>
+                <a:cs typeface="Yu Gothic" pitchFamily="34" charset="-120"/>
+              </a:rPr>
+              <a:t>組み込み</a:t>
+            </a:r>
+            <a:endParaRPr lang="en-US" sz="900" dirty="0"/>
+          </a:p>
+        </p:txBody>
+      </p:sp>
+    </p:spTree>
+  </p:cSld>
+  <p:clrMapOvr>
+    <a:masterClrMapping/>
+  </p:clrMapOvr>
+</p:sld>
+</file>
+
+<file path=ppt/slides/slide11.xml><?xml version="1.0" encoding="utf-8"?>
+<p:sld xmlns:a="http://schemas.openxmlformats.org/drawingml/2006/main" xmlns:r="http://schemas.openxmlformats.org/officeDocument/2006/relationships" xmlns:p="http://schemas.openxmlformats.org/presentationml/2006/main">
+  <p:cSld name="Slide 11">
+    <p:bg>
+      <p:bgPr>
+        <a:solidFill>
+          <a:srgbClr val="F6F2EA"/>
+        </a:solidFill>
+      </p:bgPr>
+    </p:bg>
+    <p:spTree>
+      <p:nvGrpSpPr>
+        <p:cNvPr id="1" name=""/>
+        <p:cNvGrpSpPr/>
+        <p:nvPr/>
+      </p:nvGrpSpPr>
+      <p:grpSpPr>
+        <a:xfrm>
+          <a:off x="0" y="0"/>
+          <a:ext cx="0" cy="0"/>
+          <a:chOff x="0" y="0"/>
+          <a:chExt cx="0" cy="0"/>
+        </a:xfrm>
+      </p:grpSpPr>
+      <p:sp>
+        <p:nvSpPr>
+          <p:cNvPr id="2" name="Text 0"/>
+          <p:cNvSpPr txBox="1"/>
+          <p:nvPr/>
+        </p:nvSpPr>
+        <p:spPr>
+          <a:xfrm>
+            <a:off x="777240" y="566928"/>
+            <a:ext cx="10607040" cy="274320"/>
+          </a:xfrm>
+          <a:prstGeom prst="rect">
+            <a:avLst/>
+          </a:prstGeom>
+          <a:noFill/>
+          <a:ln/>
+        </p:spPr>
+        <p:txBody>
+          <a:bodyPr wrap="square" lIns="0" tIns="0" rIns="0" bIns="0" rtlCol="0" anchor="ctr"/>
+          <a:lstStyle/>
+          <a:p>
+            <a:pPr indent="0" marL="0">
+              <a:buNone/>
+            </a:pPr>
+            <a:r>
+              <a:rPr lang="en-US" sz="1100" b="1" spc="250" kern="0" dirty="0">
+                <a:solidFill>
+                  <a:srgbClr val="B04A2F"/>
+                </a:solidFill>
+                <a:latin typeface="Yu Gothic" pitchFamily="34" charset="0"/>
+                <a:ea typeface="Yu Gothic" pitchFamily="34" charset="-122"/>
+                <a:cs typeface="Yu Gothic" pitchFamily="34" charset="-120"/>
+              </a:rPr>
+              <a:t>ここだけは</a:t>
+            </a:r>
+            <a:endParaRPr lang="en-US" sz="1100" dirty="0"/>
+          </a:p>
+        </p:txBody>
+      </p:sp>
+      <p:sp>
+        <p:nvSpPr>
+          <p:cNvPr id="3" name="Text 1"/>
+          <p:cNvSpPr txBox="1"/>
+          <p:nvPr/>
+        </p:nvSpPr>
+        <p:spPr>
+          <a:xfrm>
+            <a:off x="777240" y="1097280"/>
+            <a:ext cx="10607040" cy="640080"/>
+          </a:xfrm>
+          <a:prstGeom prst="rect">
+            <a:avLst/>
+          </a:prstGeom>
+          <a:noFill/>
+          <a:ln/>
+        </p:spPr>
+        <p:txBody>
+          <a:bodyPr wrap="square" lIns="0" tIns="0" rIns="0" bIns="0" rtlCol="0" anchor="ctr"/>
+          <a:lstStyle/>
+          <a:p>
+            <a:pPr indent="0" marL="0">
+              <a:buNone/>
+            </a:pPr>
+            <a:r>
+              <a:rPr lang="en-US" sz="2600" b="1" dirty="0">
+                <a:solidFill>
+                  <a:srgbClr val="23201D"/>
+                </a:solidFill>
+                <a:latin typeface="Yu Gothic" pitchFamily="34" charset="0"/>
+                <a:ea typeface="Yu Gothic" pitchFamily="34" charset="-122"/>
+                <a:cs typeface="Yu Gothic" pitchFamily="34" charset="-120"/>
+              </a:rPr>
+              <a:t>動かないまま持ち帰らせません</a:t>
+            </a:r>
+            <a:endParaRPr lang="en-US" sz="2600" dirty="0"/>
+          </a:p>
+        </p:txBody>
+      </p:sp>
+      <p:sp>
+        <p:nvSpPr>
+          <p:cNvPr id="4" name="Shape 2"/>
+          <p:cNvSpPr/>
+          <p:nvPr/>
+        </p:nvSpPr>
+        <p:spPr>
+          <a:xfrm>
+            <a:off x="777240" y="2148840"/>
+            <a:ext cx="64008" cy="2194560"/>
+          </a:xfrm>
+          <a:prstGeom prst="rect">
+            <a:avLst/>
+          </a:prstGeom>
+          <a:solidFill>
+            <a:srgbClr val="B04A2F"/>
+          </a:solidFill>
+          <a:ln w="12700">
+            <a:solidFill>
+              <a:srgbClr val="333333"/>
+            </a:solidFill>
+            <a:prstDash val="solid"/>
+          </a:ln>
+        </p:spPr>
+      </p:sp>
+      <p:sp>
+        <p:nvSpPr>
+          <p:cNvPr id="5" name="Text 3"/>
+          <p:cNvSpPr txBox="1"/>
+          <p:nvPr/>
+        </p:nvSpPr>
+        <p:spPr>
+          <a:xfrm>
+            <a:off x="1188720" y="2148840"/>
+            <a:ext cx="9966960" cy="2194560"/>
+          </a:xfrm>
+          <a:prstGeom prst="rect">
+            <a:avLst/>
+          </a:prstGeom>
+          <a:noFill/>
+          <a:ln/>
+        </p:spPr>
+        <p:txBody>
+          <a:bodyPr wrap="square" lIns="0" tIns="0" rIns="0" bIns="0" rtlCol="0" anchor="ctr"/>
+          <a:lstStyle/>
+          <a:p>
+            <a:pPr indent="0" marL="0">
+              <a:lnSpc>
+                <a:spcPct val="160000"/>
+              </a:lnSpc>
+              <a:buNone/>
+            </a:pPr>
+            <a:r>
+              <a:rPr lang="en-US" sz="1650" dirty="0">
+                <a:solidFill>
+                  <a:srgbClr val="3F3933"/>
+                </a:solidFill>
+                <a:latin typeface="Yu Gothic" pitchFamily="34" charset="0"/>
+                <a:ea typeface="Yu Gothic" pitchFamily="34" charset="-122"/>
+                <a:cs typeface="Yu Gothic" pitchFamily="34" charset="-120"/>
+              </a:rPr>
+              <a:t>時間が足りなければ、次回の冒頭に持ち越してでも、実データで動くところまでやりきります。「持ち帰って試します」は、ほぼ試されません。ここだけは絶対に妥協しないでください。</a:t>
+            </a:r>
+            <a:endParaRPr lang="en-US" sz="1650" dirty="0"/>
+          </a:p>
+        </p:txBody>
+      </p:sp>
+      <p:sp>
+        <p:nvSpPr>
+          <p:cNvPr id="6" name="Shape 4"/>
+          <p:cNvSpPr/>
+          <p:nvPr/>
+        </p:nvSpPr>
+        <p:spPr>
+          <a:xfrm>
+            <a:off x="777240" y="4709160"/>
+            <a:ext cx="10607040" cy="960120"/>
+          </a:xfrm>
+          <a:prstGeom prst="rect">
+            <a:avLst/>
+          </a:prstGeom>
+          <a:solidFill>
+            <a:srgbClr val="EDE7DB"/>
+          </a:solidFill>
+          <a:ln w="12700">
+            <a:solidFill>
+              <a:srgbClr val="333333"/>
+            </a:solidFill>
+            <a:prstDash val="solid"/>
+          </a:ln>
+        </p:spPr>
+      </p:sp>
+      <p:sp>
+        <p:nvSpPr>
+          <p:cNvPr id="7" name="Text 5"/>
+          <p:cNvSpPr txBox="1"/>
+          <p:nvPr/>
+        </p:nvSpPr>
+        <p:spPr>
+          <a:xfrm>
+            <a:off x="1051560" y="4800600"/>
+            <a:ext cx="1463040" cy="256032"/>
+          </a:xfrm>
+          <a:prstGeom prst="rect">
+            <a:avLst/>
+          </a:prstGeom>
+          <a:noFill/>
+          <a:ln/>
+        </p:spPr>
+        <p:txBody>
+          <a:bodyPr wrap="square" lIns="0" tIns="0" rIns="0" bIns="0" rtlCol="0" anchor="ctr"/>
+          <a:lstStyle/>
+          <a:p>
+            <a:pPr indent="0" marL="0">
+              <a:buNone/>
+            </a:pPr>
+            <a:r>
+              <a:rPr lang="en-US" sz="900" b="1" spc="150" kern="0" dirty="0">
+                <a:solidFill>
+                  <a:srgbClr val="B04A2F"/>
+                </a:solidFill>
+                <a:latin typeface="Yu Gothic" pitchFamily="34" charset="0"/>
+                <a:ea typeface="Yu Gothic" pitchFamily="34" charset="-122"/>
+                <a:cs typeface="Yu Gothic" pitchFamily="34" charset="-120"/>
+              </a:rPr>
+              <a:t>他社では</a:t>
+            </a:r>
+            <a:endParaRPr lang="en-US" sz="900" dirty="0"/>
+          </a:p>
+        </p:txBody>
+      </p:sp>
+      <p:sp>
+        <p:nvSpPr>
+          <p:cNvPr id="8" name="Text 6"/>
+          <p:cNvSpPr txBox="1"/>
+          <p:nvPr/>
+        </p:nvSpPr>
+        <p:spPr>
+          <a:xfrm>
+            <a:off x="1051560" y="5029200"/>
+            <a:ext cx="10058400" cy="566928"/>
+          </a:xfrm>
+          <a:prstGeom prst="rect">
+            <a:avLst/>
+          </a:prstGeom>
+          <a:noFill/>
+          <a:ln/>
+        </p:spPr>
+        <p:txBody>
+          <a:bodyPr wrap="square" lIns="0" tIns="0" rIns="0" bIns="0" rtlCol="0" anchor="ctr"/>
+          <a:lstStyle/>
+          <a:p>
+            <a:pPr indent="0" marL="0">
+              <a:lnSpc>
+                <a:spcPct val="130000"/>
+              </a:lnSpc>
+              <a:buNone/>
+            </a:pPr>
+            <a:r>
+              <a:rPr lang="en-US" sz="1250" dirty="0">
+                <a:solidFill>
+                  <a:srgbClr val="3F3933"/>
+                </a:solidFill>
+                <a:latin typeface="Yu Gothic" pitchFamily="34" charset="0"/>
+                <a:ea typeface="Yu Gothic" pitchFamily="34" charset="-122"/>
+                <a:cs typeface="Yu Gothic" pitchFamily="34" charset="-120"/>
+              </a:rPr>
+              <a:t>就業規則を載せた社内問い合わせAIを作った会社では、総務への質問が減ったこと以上に、「規則に書いていないこと」が可視化されたのが収穫でした。結果として規則の改訂につながりました。</a:t>
+            </a:r>
+            <a:endParaRPr lang="en-US" sz="1250" dirty="0"/>
+          </a:p>
+        </p:txBody>
+      </p:sp>
+      <p:sp>
+        <p:nvSpPr>
+          <p:cNvPr id="9" name="Text 7"/>
+          <p:cNvSpPr txBox="1"/>
+          <p:nvPr/>
+        </p:nvSpPr>
+        <p:spPr>
+          <a:xfrm>
+            <a:off x="777240" y="6382512"/>
+            <a:ext cx="7424928" cy="256032"/>
+          </a:xfrm>
+          <a:prstGeom prst="rect">
+            <a:avLst/>
+          </a:prstGeom>
+          <a:noFill/>
+          <a:ln/>
+        </p:spPr>
+        <p:txBody>
+          <a:bodyPr wrap="square" lIns="0" tIns="0" rIns="0" bIns="0" rtlCol="0" anchor="ctr"/>
+          <a:lstStyle/>
+          <a:p>
+            <a:pPr indent="0" marL="0">
+              <a:buNone/>
+            </a:pPr>
+            <a:r>
+              <a:rPr lang="en-US" sz="900" dirty="0">
+                <a:solidFill>
+                  <a:srgbClr val="8A8177"/>
+                </a:solidFill>
+                <a:latin typeface="Yu Gothic" pitchFamily="34" charset="0"/>
+                <a:ea typeface="Yu Gothic" pitchFamily="34" charset="-122"/>
+                <a:cs typeface="Yu Gothic" pitchFamily="34" charset="-120"/>
+              </a:rPr>
+              <a:t>第5回　自社専用AIをつくる</a:t>
+            </a:r>
+            <a:endParaRPr lang="en-US" sz="900" dirty="0"/>
+          </a:p>
+        </p:txBody>
+      </p:sp>
+      <p:sp>
+        <p:nvSpPr>
+          <p:cNvPr id="10" name="Text 8"/>
+          <p:cNvSpPr txBox="1"/>
+          <p:nvPr/>
+        </p:nvSpPr>
+        <p:spPr>
+          <a:xfrm>
+            <a:off x="8202168" y="6382512"/>
+            <a:ext cx="3182112" cy="256032"/>
+          </a:xfrm>
+          <a:prstGeom prst="rect">
+            <a:avLst/>
+          </a:prstGeom>
+          <a:noFill/>
+          <a:ln/>
+        </p:spPr>
+        <p:txBody>
+          <a:bodyPr wrap="square" lIns="0" tIns="0" rIns="0" bIns="0" rtlCol="0" anchor="ctr"/>
+          <a:lstStyle/>
+          <a:p>
+            <a:pPr algn="r" indent="0" marL="0">
+              <a:buNone/>
+            </a:pPr>
+            <a:r>
+              <a:rPr lang="en-US" sz="900" dirty="0">
+                <a:solidFill>
+                  <a:srgbClr val="8A8177"/>
+                </a:solidFill>
+                <a:latin typeface="Yu Gothic" pitchFamily="34" charset="0"/>
+                <a:ea typeface="Yu Gothic" pitchFamily="34" charset="-122"/>
+                <a:cs typeface="Yu Gothic" pitchFamily="34" charset="-120"/>
+              </a:rPr>
+              <a:t>ここだけは</a:t>
+            </a:r>
+            <a:endParaRPr lang="en-US" sz="900" dirty="0"/>
+          </a:p>
+        </p:txBody>
+      </p:sp>
+    </p:spTree>
+  </p:cSld>
+  <p:clrMapOvr>
+    <a:masterClrMapping/>
+  </p:clrMapOvr>
+</p:sld>
+</file>
+
+<file path=ppt/slides/slide12.xml><?xml version="1.0" encoding="utf-8"?>
+<p:sld xmlns:a="http://schemas.openxmlformats.org/drawingml/2006/main" xmlns:r="http://schemas.openxmlformats.org/officeDocument/2006/relationships" xmlns:p="http://schemas.openxmlformats.org/presentationml/2006/main">
+  <p:cSld name="Slide 12">
+    <p:bg>
+      <p:bgPr>
+        <a:solidFill>
+          <a:srgbClr val="23201D"/>
+        </a:solidFill>
+      </p:bgPr>
+    </p:bg>
+    <p:spTree>
+      <p:nvGrpSpPr>
+        <p:cNvPr id="1" name=""/>
+        <p:cNvGrpSpPr/>
+        <p:nvPr/>
+      </p:nvGrpSpPr>
+      <p:grpSpPr>
+        <a:xfrm>
+          <a:off x="0" y="0"/>
+          <a:ext cx="0" cy="0"/>
+          <a:chOff x="0" y="0"/>
+          <a:chExt cx="0" cy="0"/>
+        </a:xfrm>
+      </p:grpSpPr>
+      <p:sp>
+        <p:nvSpPr>
+          <p:cNvPr id="2" name="Text 0"/>
+          <p:cNvSpPr txBox="1"/>
+          <p:nvPr/>
+        </p:nvSpPr>
+        <p:spPr>
+          <a:xfrm>
+            <a:off x="777240" y="1280160"/>
+            <a:ext cx="10607040" cy="365760"/>
+          </a:xfrm>
+          <a:prstGeom prst="rect">
+            <a:avLst/>
+          </a:prstGeom>
+          <a:noFill/>
+          <a:ln/>
+        </p:spPr>
+        <p:txBody>
+          <a:bodyPr wrap="square" lIns="0" tIns="0" rIns="0" bIns="0" rtlCol="0" anchor="ctr"/>
+          <a:lstStyle/>
+          <a:p>
+            <a:pPr indent="0" marL="0">
+              <a:buNone/>
+            </a:pPr>
+            <a:r>
+              <a:rPr lang="en-US" sz="1200" b="1" spc="300" kern="0" dirty="0">
+                <a:solidFill>
+                  <a:srgbClr val="B04A2F"/>
+                </a:solidFill>
+                <a:latin typeface="Yu Gothic" pitchFamily="34" charset="0"/>
+                <a:ea typeface="Yu Gothic" pitchFamily="34" charset="-122"/>
+                <a:cs typeface="Yu Gothic" pitchFamily="34" charset="-120"/>
+              </a:rPr>
+              <a:t>今日の宿題</a:t>
+            </a:r>
+            <a:endParaRPr lang="en-US" sz="1200" dirty="0"/>
+          </a:p>
+        </p:txBody>
+      </p:sp>
+      <p:sp>
+        <p:nvSpPr>
+          <p:cNvPr id="3" name="Text 1"/>
+          <p:cNvSpPr txBox="1"/>
+          <p:nvPr/>
+        </p:nvSpPr>
+        <p:spPr>
+          <a:xfrm>
+            <a:off x="777240" y="1691640"/>
+            <a:ext cx="10607040" cy="640080"/>
+          </a:xfrm>
+          <a:prstGeom prst="rect">
+            <a:avLst/>
+          </a:prstGeom>
+          <a:noFill/>
+          <a:ln/>
+        </p:spPr>
+        <p:txBody>
+          <a:bodyPr wrap="square" lIns="0" tIns="0" rIns="0" bIns="0" rtlCol="0" anchor="ctr"/>
+          <a:lstStyle/>
+          <a:p>
+            <a:pPr indent="0" marL="0">
+              <a:buNone/>
+            </a:pPr>
+            <a:r>
+              <a:rPr lang="en-US" sz="3200" b="1" dirty="0">
+                <a:solidFill>
+                  <a:srgbClr val="FFFFFF"/>
+                </a:solidFill>
+                <a:latin typeface="Yu Gothic" pitchFamily="34" charset="0"/>
+                <a:ea typeface="Yu Gothic" pitchFamily="34" charset="-122"/>
+                <a:cs typeface="Yu Gothic" pitchFamily="34" charset="-120"/>
+              </a:rPr>
+              <a:t>ひとつだけ</a:t>
+            </a:r>
+            <a:endParaRPr lang="en-US" sz="3200" dirty="0"/>
+          </a:p>
+        </p:txBody>
+      </p:sp>
+      <p:sp>
+        <p:nvSpPr>
+          <p:cNvPr id="4" name="Shape 2"/>
+          <p:cNvSpPr/>
+          <p:nvPr/>
+        </p:nvSpPr>
+        <p:spPr>
+          <a:xfrm>
+            <a:off x="777240" y="2651760"/>
+            <a:ext cx="10607040" cy="1371600"/>
+          </a:xfrm>
+          <a:prstGeom prst="rect">
+            <a:avLst/>
+          </a:prstGeom>
+          <a:solidFill>
+            <a:srgbClr val="2E2A26"/>
+          </a:solidFill>
+          <a:ln w="12700">
+            <a:solidFill>
+              <a:srgbClr val="B04A2F"/>
+            </a:solidFill>
+            <a:prstDash val="solid"/>
+          </a:ln>
+        </p:spPr>
+      </p:sp>
+      <p:sp>
+        <p:nvSpPr>
+          <p:cNvPr id="5" name="Text 3"/>
+          <p:cNvSpPr txBox="1"/>
+          <p:nvPr/>
+        </p:nvSpPr>
+        <p:spPr>
+          <a:xfrm>
+            <a:off x="1234440" y="2743200"/>
+            <a:ext cx="9692640" cy="1188720"/>
+          </a:xfrm>
+          <a:prstGeom prst="rect">
+            <a:avLst/>
+          </a:prstGeom>
+          <a:noFill/>
+          <a:ln/>
+        </p:spPr>
+        <p:txBody>
+          <a:bodyPr wrap="square" lIns="0" tIns="0" rIns="0" bIns="0" rtlCol="0" anchor="ctr"/>
+          <a:lstStyle/>
+          <a:p>
+            <a:pPr indent="0" marL="0">
+              <a:lnSpc>
+                <a:spcPct val="140000"/>
+              </a:lnSpc>
+              <a:buNone/>
+            </a:pPr>
+            <a:r>
+              <a:rPr lang="en-US" sz="1900" b="1" dirty="0">
+                <a:solidFill>
+                  <a:srgbClr val="FFFFFF"/>
+                </a:solidFill>
+                <a:latin typeface="Yu Gothic" pitchFamily="34" charset="0"/>
+                <a:ea typeface="Yu Gothic" pitchFamily="34" charset="-122"/>
+                <a:cs typeface="Yu Gothic" pitchFamily="34" charset="-120"/>
+              </a:rPr>
+              <a:t>作った専用AIを、推進候補の社員1名に触ってもらい、感想を1つ聞いてくる。</a:t>
+            </a:r>
+            <a:endParaRPr lang="en-US" sz="1900" dirty="0"/>
+          </a:p>
+        </p:txBody>
+      </p:sp>
+      <p:sp>
+        <p:nvSpPr>
+          <p:cNvPr id="6" name="Text 4"/>
+          <p:cNvSpPr txBox="1"/>
+          <p:nvPr/>
+        </p:nvSpPr>
+        <p:spPr>
+          <a:xfrm>
+            <a:off x="777240" y="4297680"/>
+            <a:ext cx="10607040" cy="274320"/>
+          </a:xfrm>
+          <a:prstGeom prst="rect">
+            <a:avLst/>
+          </a:prstGeom>
+          <a:noFill/>
+          <a:ln/>
+        </p:spPr>
+        <p:txBody>
+          <a:bodyPr wrap="square" lIns="0" tIns="0" rIns="0" bIns="0" rtlCol="0" anchor="ctr"/>
+          <a:lstStyle/>
+          <a:p>
+            <a:pPr indent="0" marL="0">
+              <a:buNone/>
+            </a:pPr>
+            <a:r>
+              <a:rPr lang="en-US" sz="1000" b="1" spc="200" kern="0" dirty="0">
+                <a:solidFill>
+                  <a:srgbClr val="B04A2F"/>
+                </a:solidFill>
+                <a:latin typeface="Yu Gothic" pitchFamily="34" charset="0"/>
+                <a:ea typeface="Yu Gothic" pitchFamily="34" charset="-122"/>
+                <a:cs typeface="Yu Gothic" pitchFamily="34" charset="-120"/>
+              </a:rPr>
+              <a:t>なぜこの宿題か</a:t>
+            </a:r>
+            <a:endParaRPr lang="en-US" sz="1000" dirty="0"/>
+          </a:p>
+        </p:txBody>
+      </p:sp>
+      <p:sp>
+        <p:nvSpPr>
+          <p:cNvPr id="7" name="Text 5"/>
+          <p:cNvSpPr txBox="1"/>
+          <p:nvPr/>
+        </p:nvSpPr>
+        <p:spPr>
+          <a:xfrm>
+            <a:off x="777240" y="4572000"/>
+            <a:ext cx="9546336" cy="914400"/>
+          </a:xfrm>
+          <a:prstGeom prst="rect">
+            <a:avLst/>
+          </a:prstGeom>
+          <a:noFill/>
+          <a:ln/>
+        </p:spPr>
+        <p:txBody>
+          <a:bodyPr wrap="square" lIns="0" tIns="0" rIns="0" bIns="0" rtlCol="0" anchor="ctr"/>
+          <a:lstStyle/>
+          <a:p>
+            <a:pPr indent="0" marL="0">
+              <a:lnSpc>
+                <a:spcPct val="145000"/>
+              </a:lnSpc>
+              <a:buNone/>
+            </a:pPr>
+            <a:r>
+              <a:rPr lang="en-US" sz="1350" dirty="0">
+                <a:solidFill>
+                  <a:srgbClr val="CFC6B8"/>
+                </a:solidFill>
+                <a:latin typeface="Yu Gothic" pitchFamily="34" charset="0"/>
+                <a:ea typeface="Yu Gothic" pitchFamily="34" charset="-122"/>
+                <a:cs typeface="Yu Gothic" pitchFamily="34" charset="-120"/>
+              </a:rPr>
+              <a:t>第6回のお披露目で「すでに社内の誰かが使っている」と言えるかどうかで、社員の受け取り方がまるで変わります。1名で構いません。触ってもらってください。</a:t>
+            </a:r>
+            <a:endParaRPr lang="en-US" sz="1350" dirty="0"/>
+          </a:p>
+        </p:txBody>
+      </p:sp>
+      <p:sp>
+        <p:nvSpPr>
+          <p:cNvPr id="8" name="Text 6"/>
+          <p:cNvSpPr txBox="1"/>
+          <p:nvPr/>
+        </p:nvSpPr>
+        <p:spPr>
+          <a:xfrm>
+            <a:off x="777240" y="6382512"/>
+            <a:ext cx="10607040" cy="256032"/>
+          </a:xfrm>
+          <a:prstGeom prst="rect">
+            <a:avLst/>
+          </a:prstGeom>
+          <a:noFill/>
+          <a:ln/>
+        </p:spPr>
+        <p:txBody>
+          <a:bodyPr wrap="square" lIns="0" tIns="0" rIns="0" bIns="0" rtlCol="0" anchor="ctr"/>
+          <a:lstStyle/>
+          <a:p>
+            <a:pPr indent="0" marL="0">
+              <a:buNone/>
+            </a:pPr>
+            <a:r>
+              <a:rPr lang="en-US" sz="900" dirty="0">
+                <a:solidFill>
+                  <a:srgbClr val="6E6558"/>
+                </a:solidFill>
+                <a:latin typeface="Yu Gothic" pitchFamily="34" charset="0"/>
+                <a:ea typeface="Yu Gothic" pitchFamily="34" charset="-122"/>
+                <a:cs typeface="Yu Gothic" pitchFamily="34" charset="-120"/>
+              </a:rPr>
+              <a:t>第5回　自社専用AIをつくる</a:t>
+            </a:r>
+            <a:endParaRPr lang="en-US" sz="900" dirty="0"/>
           </a:p>
         </p:txBody>
       </p:sp>
@@ -1712,7 +3434,7 @@
         </p:nvSpPr>
         <p:spPr>
           <a:xfrm>
-            <a:off x="777240" y="777240"/>
+            <a:off x="777240" y="566928"/>
             <a:ext cx="10607040" cy="274320"/>
           </a:xfrm>
           <a:prstGeom prst="rect">
@@ -1737,7 +3459,7 @@
                 <a:ea typeface="Yu Gothic" pitchFamily="34" charset="-122"/>
                 <a:cs typeface="Yu Gothic" pitchFamily="34" charset="-120"/>
               </a:rPr>
-              <a:t>今日のゴール</a:t>
+              <a:t>今日の出発点</a:t>
             </a:r>
             <a:endParaRPr lang="en-US" sz="1100" dirty="0"/>
           </a:p>
@@ -1751,27 +3473,24 @@
         </p:nvSpPr>
         <p:spPr>
           <a:xfrm>
-            <a:off x="777240" y="1280160"/>
-            <a:ext cx="9758477" cy="1828800"/>
-          </a:xfrm>
-          <a:prstGeom prst="rect">
-            <a:avLst/>
-          </a:prstGeom>
-          <a:noFill/>
-          <a:ln/>
-        </p:spPr>
-        <p:txBody>
-          <a:bodyPr wrap="square" lIns="0" tIns="0" rIns="0" bIns="0" rtlCol="0" anchor="ctr"/>
-          <a:lstStyle/>
-          <a:p>
-            <a:pPr indent="0" marL="0">
-              <a:lnSpc>
-                <a:spcPct val="145000"/>
-              </a:lnSpc>
-              <a:buNone/>
-            </a:pPr>
-            <a:r>
-              <a:rPr lang="en-US" sz="2800" b="1" dirty="0">
+            <a:off x="777240" y="896112"/>
+            <a:ext cx="10607040" cy="640080"/>
+          </a:xfrm>
+          <a:prstGeom prst="rect">
+            <a:avLst/>
+          </a:prstGeom>
+          <a:noFill/>
+          <a:ln/>
+        </p:spPr>
+        <p:txBody>
+          <a:bodyPr wrap="square" lIns="0" tIns="0" rIns="0" bIns="0" rtlCol="0" anchor="ctr"/>
+          <a:lstStyle/>
+          <a:p>
+            <a:pPr indent="0" marL="0">
+              <a:buNone/>
+            </a:pPr>
+            <a:r>
+              <a:rPr lang="en-US" sz="2600" b="1" dirty="0">
                 <a:solidFill>
                   <a:srgbClr val="23201D"/>
                 </a:solidFill>
@@ -1779,9 +3498,9 @@
                 <a:ea typeface="Yu Gothic" pitchFamily="34" charset="-122"/>
                 <a:cs typeface="Yu Gothic" pitchFamily="34" charset="-120"/>
               </a:rPr>
-              <a:t>自社資料を読む専用AIを1つ動かし、社員の方が触れる状態にします。</a:t>
-            </a:r>
-            <a:endParaRPr lang="en-US" sz="2800" dirty="0"/>
+              <a:t>ここまでの成果物は、まだバラバラに置かれています。</a:t>
+            </a:r>
+            <a:endParaRPr lang="en-US" sz="2600" dirty="0"/>
           </a:p>
         </p:txBody>
       </p:sp>
@@ -1793,14 +3512,323 @@
         </p:nvSpPr>
         <p:spPr>
           <a:xfrm>
-            <a:off x="777240" y="3429000"/>
-            <a:ext cx="10607040" cy="18288"/>
+            <a:off x="777240" y="1783080"/>
+            <a:ext cx="10607040" cy="713232"/>
           </a:xfrm>
           <a:prstGeom prst="rect">
             <a:avLst/>
           </a:prstGeom>
           <a:solidFill>
-            <a:srgbClr val="EDE7DB"/>
+            <a:srgbClr val="FFFFFF"/>
+          </a:solidFill>
+          <a:ln w="12700">
+            <a:solidFill>
+              <a:srgbClr val="EDE7DB"/>
+            </a:solidFill>
+            <a:prstDash val="solid"/>
+          </a:ln>
+        </p:spPr>
+      </p:sp>
+      <p:sp>
+        <p:nvSpPr>
+          <p:cNvPr id="5" name="Text 3"/>
+          <p:cNvSpPr txBox="1"/>
+          <p:nvPr/>
+        </p:nvSpPr>
+        <p:spPr>
+          <a:xfrm>
+            <a:off x="1051560" y="1783080"/>
+            <a:ext cx="365760" cy="713232"/>
+          </a:xfrm>
+          <a:prstGeom prst="rect">
+            <a:avLst/>
+          </a:prstGeom>
+          <a:noFill/>
+          <a:ln/>
+        </p:spPr>
+        <p:txBody>
+          <a:bodyPr wrap="square" lIns="0" tIns="0" rIns="0" bIns="0" rtlCol="0" anchor="ctr"/>
+          <a:lstStyle/>
+          <a:p>
+            <a:pPr indent="0" marL="0">
+              <a:buNone/>
+            </a:pPr>
+            <a:r>
+              <a:rPr lang="en-US" sz="1400" dirty="0">
+                <a:solidFill>
+                  <a:srgbClr val="8A8177"/>
+                </a:solidFill>
+                <a:latin typeface="Yu Gothic" pitchFamily="34" charset="0"/>
+                <a:ea typeface="Yu Gothic" pitchFamily="34" charset="-122"/>
+                <a:cs typeface="Yu Gothic" pitchFamily="34" charset="-120"/>
+              </a:rPr>
+              <a:t>―</a:t>
+            </a:r>
+            <a:endParaRPr lang="en-US" sz="1400" dirty="0"/>
+          </a:p>
+        </p:txBody>
+      </p:sp>
+      <p:sp>
+        <p:nvSpPr>
+          <p:cNvPr id="6" name="Text 4"/>
+          <p:cNvSpPr txBox="1"/>
+          <p:nvPr/>
+        </p:nvSpPr>
+        <p:spPr>
+          <a:xfrm>
+            <a:off x="1508760" y="1783080"/>
+            <a:ext cx="9601200" cy="713232"/>
+          </a:xfrm>
+          <a:prstGeom prst="rect">
+            <a:avLst/>
+          </a:prstGeom>
+          <a:noFill/>
+          <a:ln/>
+        </p:spPr>
+        <p:txBody>
+          <a:bodyPr wrap="square" lIns="0" tIns="0" rIns="0" bIns="0" rtlCol="0" anchor="ctr"/>
+          <a:lstStyle/>
+          <a:p>
+            <a:pPr indent="0" marL="0">
+              <a:buNone/>
+            </a:pPr>
+            <a:r>
+              <a:rPr lang="en-US" sz="1500" dirty="0">
+                <a:solidFill>
+                  <a:srgbClr val="23201D"/>
+                </a:solidFill>
+                <a:latin typeface="Yu Gothic" pitchFamily="34" charset="0"/>
+                <a:ea typeface="Yu Gothic" pitchFamily="34" charset="-122"/>
+                <a:cs typeface="Yu Gothic" pitchFamily="34" charset="-120"/>
+              </a:rPr>
+              <a:t>指示文が15本、テンプレートが3種、分析の型が1つ</a:t>
+            </a:r>
+            <a:endParaRPr lang="en-US" sz="1500" dirty="0"/>
+          </a:p>
+        </p:txBody>
+      </p:sp>
+      <p:sp>
+        <p:nvSpPr>
+          <p:cNvPr id="7" name="Shape 5"/>
+          <p:cNvSpPr/>
+          <p:nvPr/>
+        </p:nvSpPr>
+        <p:spPr>
+          <a:xfrm>
+            <a:off x="777240" y="2624328"/>
+            <a:ext cx="10607040" cy="713232"/>
+          </a:xfrm>
+          <a:prstGeom prst="rect">
+            <a:avLst/>
+          </a:prstGeom>
+          <a:solidFill>
+            <a:srgbClr val="FFFFFF"/>
+          </a:solidFill>
+          <a:ln w="12700">
+            <a:solidFill>
+              <a:srgbClr val="EDE7DB"/>
+            </a:solidFill>
+            <a:prstDash val="solid"/>
+          </a:ln>
+        </p:spPr>
+      </p:sp>
+      <p:sp>
+        <p:nvSpPr>
+          <p:cNvPr id="8" name="Text 6"/>
+          <p:cNvSpPr txBox="1"/>
+          <p:nvPr/>
+        </p:nvSpPr>
+        <p:spPr>
+          <a:xfrm>
+            <a:off x="1051560" y="2624328"/>
+            <a:ext cx="365760" cy="713232"/>
+          </a:xfrm>
+          <a:prstGeom prst="rect">
+            <a:avLst/>
+          </a:prstGeom>
+          <a:noFill/>
+          <a:ln/>
+        </p:spPr>
+        <p:txBody>
+          <a:bodyPr wrap="square" lIns="0" tIns="0" rIns="0" bIns="0" rtlCol="0" anchor="ctr"/>
+          <a:lstStyle/>
+          <a:p>
+            <a:pPr indent="0" marL="0">
+              <a:buNone/>
+            </a:pPr>
+            <a:r>
+              <a:rPr lang="en-US" sz="1400" dirty="0">
+                <a:solidFill>
+                  <a:srgbClr val="8A8177"/>
+                </a:solidFill>
+                <a:latin typeface="Yu Gothic" pitchFamily="34" charset="0"/>
+                <a:ea typeface="Yu Gothic" pitchFamily="34" charset="-122"/>
+                <a:cs typeface="Yu Gothic" pitchFamily="34" charset="-120"/>
+              </a:rPr>
+              <a:t>―</a:t>
+            </a:r>
+            <a:endParaRPr lang="en-US" sz="1400" dirty="0"/>
+          </a:p>
+        </p:txBody>
+      </p:sp>
+      <p:sp>
+        <p:nvSpPr>
+          <p:cNvPr id="9" name="Text 7"/>
+          <p:cNvSpPr txBox="1"/>
+          <p:nvPr/>
+        </p:nvSpPr>
+        <p:spPr>
+          <a:xfrm>
+            <a:off x="1508760" y="2624328"/>
+            <a:ext cx="9601200" cy="713232"/>
+          </a:xfrm>
+          <a:prstGeom prst="rect">
+            <a:avLst/>
+          </a:prstGeom>
+          <a:noFill/>
+          <a:ln/>
+        </p:spPr>
+        <p:txBody>
+          <a:bodyPr wrap="square" lIns="0" tIns="0" rIns="0" bIns="0" rtlCol="0" anchor="ctr"/>
+          <a:lstStyle/>
+          <a:p>
+            <a:pPr indent="0" marL="0">
+              <a:buNone/>
+            </a:pPr>
+            <a:r>
+              <a:rPr lang="en-US" sz="1500" dirty="0">
+                <a:solidFill>
+                  <a:srgbClr val="23201D"/>
+                </a:solidFill>
+                <a:latin typeface="Yu Gothic" pitchFamily="34" charset="0"/>
+                <a:ea typeface="Yu Gothic" pitchFamily="34" charset="-122"/>
+                <a:cs typeface="Yu Gothic" pitchFamily="34" charset="-120"/>
+              </a:rPr>
+              <a:t>どれも、どこに何があるかを知っている人しか使えない</a:t>
+            </a:r>
+            <a:endParaRPr lang="en-US" sz="1500" dirty="0"/>
+          </a:p>
+        </p:txBody>
+      </p:sp>
+      <p:sp>
+        <p:nvSpPr>
+          <p:cNvPr id="10" name="Shape 8"/>
+          <p:cNvSpPr/>
+          <p:nvPr/>
+        </p:nvSpPr>
+        <p:spPr>
+          <a:xfrm>
+            <a:off x="777240" y="3465576"/>
+            <a:ext cx="10607040" cy="713232"/>
+          </a:xfrm>
+          <a:prstGeom prst="rect">
+            <a:avLst/>
+          </a:prstGeom>
+          <a:solidFill>
+            <a:srgbClr val="FFFFFF"/>
+          </a:solidFill>
+          <a:ln w="12700">
+            <a:solidFill>
+              <a:srgbClr val="EDE7DB"/>
+            </a:solidFill>
+            <a:prstDash val="solid"/>
+          </a:ln>
+        </p:spPr>
+      </p:sp>
+      <p:sp>
+        <p:nvSpPr>
+          <p:cNvPr id="11" name="Text 9"/>
+          <p:cNvSpPr txBox="1"/>
+          <p:nvPr/>
+        </p:nvSpPr>
+        <p:spPr>
+          <a:xfrm>
+            <a:off x="1051560" y="3465576"/>
+            <a:ext cx="365760" cy="713232"/>
+          </a:xfrm>
+          <a:prstGeom prst="rect">
+            <a:avLst/>
+          </a:prstGeom>
+          <a:noFill/>
+          <a:ln/>
+        </p:spPr>
+        <p:txBody>
+          <a:bodyPr wrap="square" lIns="0" tIns="0" rIns="0" bIns="0" rtlCol="0" anchor="ctr"/>
+          <a:lstStyle/>
+          <a:p>
+            <a:pPr indent="0" marL="0">
+              <a:buNone/>
+            </a:pPr>
+            <a:r>
+              <a:rPr lang="en-US" sz="1400" dirty="0">
+                <a:solidFill>
+                  <a:srgbClr val="8A8177"/>
+                </a:solidFill>
+                <a:latin typeface="Yu Gothic" pitchFamily="34" charset="0"/>
+                <a:ea typeface="Yu Gothic" pitchFamily="34" charset="-122"/>
+                <a:cs typeface="Yu Gothic" pitchFamily="34" charset="-120"/>
+              </a:rPr>
+              <a:t>―</a:t>
+            </a:r>
+            <a:endParaRPr lang="en-US" sz="1400" dirty="0"/>
+          </a:p>
+        </p:txBody>
+      </p:sp>
+      <p:sp>
+        <p:nvSpPr>
+          <p:cNvPr id="12" name="Text 10"/>
+          <p:cNvSpPr txBox="1"/>
+          <p:nvPr/>
+        </p:nvSpPr>
+        <p:spPr>
+          <a:xfrm>
+            <a:off x="1508760" y="3465576"/>
+            <a:ext cx="9601200" cy="713232"/>
+          </a:xfrm>
+          <a:prstGeom prst="rect">
+            <a:avLst/>
+          </a:prstGeom>
+          <a:noFill/>
+          <a:ln/>
+        </p:spPr>
+        <p:txBody>
+          <a:bodyPr wrap="square" lIns="0" tIns="0" rIns="0" bIns="0" rtlCol="0" anchor="ctr"/>
+          <a:lstStyle/>
+          <a:p>
+            <a:pPr indent="0" marL="0">
+              <a:buNone/>
+            </a:pPr>
+            <a:r>
+              <a:rPr lang="en-US" sz="1500" dirty="0">
+                <a:solidFill>
+                  <a:srgbClr val="23201D"/>
+                </a:solidFill>
+                <a:latin typeface="Yu Gothic" pitchFamily="34" charset="0"/>
+                <a:ea typeface="Yu Gothic" pitchFamily="34" charset="-122"/>
+                <a:cs typeface="Yu Gothic" pitchFamily="34" charset="-120"/>
+              </a:rPr>
+              <a:t>社内の資産にするには、入口を1つにする必要があります</a:t>
+            </a:r>
+            <a:endParaRPr lang="en-US" sz="1500" dirty="0"/>
+          </a:p>
+        </p:txBody>
+      </p:sp>
+      <p:sp>
+        <p:nvSpPr>
+          <p:cNvPr id="13" name="Shape 11"/>
+          <p:cNvSpPr/>
+          <p:nvPr/>
+        </p:nvSpPr>
+        <p:spPr>
+          <a:xfrm>
+            <a:off x="777240" y="4526280"/>
+            <a:ext cx="10607040" cy="914400"/>
+          </a:xfrm>
+          <a:prstGeom prst="rect">
+            <a:avLst/>
+          </a:prstGeom>
+          <a:solidFill>
+            <a:srgbClr val="B04A2F"/>
           </a:solidFill>
           <a:ln w="12700">
             <a:solidFill>
@@ -1812,14 +3840,14 @@
       </p:sp>
       <p:sp>
         <p:nvSpPr>
-          <p:cNvPr id="5" name="Text 3"/>
-          <p:cNvSpPr txBox="1"/>
-          <p:nvPr/>
-        </p:nvSpPr>
-        <p:spPr>
-          <a:xfrm>
-            <a:off x="777240" y="3657600"/>
-            <a:ext cx="9015984" cy="822960"/>
+          <p:cNvPr id="14" name="Text 12"/>
+          <p:cNvSpPr txBox="1"/>
+          <p:nvPr/>
+        </p:nvSpPr>
+        <p:spPr>
+          <a:xfrm>
+            <a:off x="1143000" y="4526280"/>
+            <a:ext cx="9875520" cy="914400"/>
           </a:xfrm>
           <a:prstGeom prst="rect">
             <a:avLst/>
@@ -1833,84 +3861,59 @@
           <a:p>
             <a:pPr indent="0" marL="0">
               <a:lnSpc>
-                <a:spcPct val="140000"/>
+                <a:spcPct val="130000"/>
               </a:lnSpc>
               <a:buNone/>
             </a:pPr>
             <a:r>
-              <a:rPr lang="en-US" sz="1500" dirty="0">
-                <a:solidFill>
-                  <a:srgbClr val="5A534A"/>
-                </a:solidFill>
-                <a:latin typeface="Yu Gothic" pitchFamily="34" charset="0"/>
-                <a:ea typeface="Yu Gothic" pitchFamily="34" charset="-122"/>
-                <a:cs typeface="Yu Gothic" pitchFamily="34" charset="-120"/>
-              </a:rPr>
-              <a:t>ここまでの成果物を、1つのツールに束ねます。</a:t>
-            </a:r>
-            <a:endParaRPr lang="en-US" sz="1500" dirty="0"/>
-          </a:p>
-        </p:txBody>
-      </p:sp>
-      <p:sp>
-        <p:nvSpPr>
-          <p:cNvPr id="6" name="Shape 4"/>
-          <p:cNvSpPr/>
-          <p:nvPr/>
-        </p:nvSpPr>
-        <p:spPr>
-          <a:xfrm>
-            <a:off x="777240" y="4846320"/>
-            <a:ext cx="10607040" cy="777240"/>
-          </a:xfrm>
-          <a:prstGeom prst="rect">
-            <a:avLst/>
-          </a:prstGeom>
-          <a:solidFill>
-            <a:srgbClr val="EDE7DB"/>
-          </a:solidFill>
-          <a:ln w="12700">
-            <a:solidFill>
-              <a:srgbClr val="333333"/>
-            </a:solidFill>
-            <a:prstDash val="solid"/>
-          </a:ln>
-        </p:spPr>
-      </p:sp>
-      <p:sp>
-        <p:nvSpPr>
-          <p:cNvPr id="7" name="Text 5"/>
-          <p:cNvSpPr txBox="1"/>
-          <p:nvPr/>
-        </p:nvSpPr>
-        <p:spPr>
-          <a:xfrm>
-            <a:off x="960120" y="4956048"/>
-            <a:ext cx="1956816" cy="237744"/>
-          </a:xfrm>
-          <a:prstGeom prst="rect">
-            <a:avLst/>
-          </a:prstGeom>
-          <a:noFill/>
-          <a:ln/>
-        </p:spPr>
-        <p:txBody>
-          <a:bodyPr wrap="square" lIns="0" tIns="0" rIns="0" bIns="0" rtlCol="0" anchor="ctr"/>
-          <a:lstStyle/>
-          <a:p>
-            <a:pPr indent="0" marL="0">
-              <a:buNone/>
-            </a:pPr>
-            <a:r>
-              <a:rPr lang="en-US" sz="900" b="1" dirty="0">
-                <a:solidFill>
-                  <a:srgbClr val="B04A2F"/>
-                </a:solidFill>
-                <a:latin typeface="Yu Gothic" pitchFamily="34" charset="0"/>
-                <a:ea typeface="Yu Gothic" pitchFamily="34" charset="-122"/>
-                <a:cs typeface="Yu Gothic" pitchFamily="34" charset="-120"/>
-              </a:rPr>
-              <a:t>0-15分</a:t>
+              <a:rPr lang="en-US" sz="1800" b="1" dirty="0">
+                <a:solidFill>
+                  <a:srgbClr val="FFFFFF"/>
+                </a:solidFill>
+                <a:latin typeface="Yu Gothic" pitchFamily="34" charset="0"/>
+                <a:ea typeface="Yu Gothic" pitchFamily="34" charset="-122"/>
+                <a:cs typeface="Yu Gothic" pitchFamily="34" charset="-120"/>
+              </a:rPr>
+              <a:t>今日、それを1つのツールに束ねます。社員が触れる形にします。</a:t>
+            </a:r>
+            <a:endParaRPr lang="en-US" sz="1800" dirty="0"/>
+          </a:p>
+        </p:txBody>
+      </p:sp>
+      <p:sp>
+        <p:nvSpPr>
+          <p:cNvPr id="15" name="Text 13"/>
+          <p:cNvSpPr txBox="1"/>
+          <p:nvPr/>
+        </p:nvSpPr>
+        <p:spPr>
+          <a:xfrm>
+            <a:off x="777240" y="6382512"/>
+            <a:ext cx="7424928" cy="256032"/>
+          </a:xfrm>
+          <a:prstGeom prst="rect">
+            <a:avLst/>
+          </a:prstGeom>
+          <a:noFill/>
+          <a:ln/>
+        </p:spPr>
+        <p:txBody>
+          <a:bodyPr wrap="square" lIns="0" tIns="0" rIns="0" bIns="0" rtlCol="0" anchor="ctr"/>
+          <a:lstStyle/>
+          <a:p>
+            <a:pPr indent="0" marL="0">
+              <a:buNone/>
+            </a:pPr>
+            <a:r>
+              <a:rPr lang="en-US" sz="900" dirty="0">
+                <a:solidFill>
+                  <a:srgbClr val="8A8177"/>
+                </a:solidFill>
+                <a:latin typeface="Yu Gothic" pitchFamily="34" charset="0"/>
+                <a:ea typeface="Yu Gothic" pitchFamily="34" charset="-122"/>
+                <a:cs typeface="Yu Gothic" pitchFamily="34" charset="-120"/>
+              </a:rPr>
+              <a:t>第5回　自社専用AIをつくる</a:t>
             </a:r>
             <a:endParaRPr lang="en-US" sz="900" dirty="0"/>
           </a:p>
@@ -1918,377 +3921,26 @@
       </p:sp>
       <p:sp>
         <p:nvSpPr>
-          <p:cNvPr id="8" name="Text 6"/>
-          <p:cNvSpPr txBox="1"/>
-          <p:nvPr/>
-        </p:nvSpPr>
-        <p:spPr>
-          <a:xfrm>
-            <a:off x="960120" y="5193792"/>
-            <a:ext cx="1956816" cy="365760"/>
-          </a:xfrm>
-          <a:prstGeom prst="rect">
-            <a:avLst/>
-          </a:prstGeom>
-          <a:noFill/>
-          <a:ln/>
-        </p:spPr>
-        <p:txBody>
-          <a:bodyPr wrap="square" lIns="0" tIns="0" rIns="0" bIns="0" rtlCol="0" anchor="ctr"/>
-          <a:lstStyle/>
-          <a:p>
-            <a:pPr indent="0" marL="0">
-              <a:buNone/>
-            </a:pPr>
-            <a:r>
-              <a:rPr lang="en-US" sz="1100" dirty="0">
-                <a:solidFill>
-                  <a:srgbClr val="23201D"/>
-                </a:solidFill>
-                <a:latin typeface="Yu Gothic" pitchFamily="34" charset="0"/>
-                <a:ea typeface="Yu Gothic" pitchFamily="34" charset="-122"/>
-                <a:cs typeface="Yu Gothic" pitchFamily="34" charset="-120"/>
-              </a:rPr>
-              <a:t>前回の宿題を実物で</a:t>
-            </a:r>
-            <a:endParaRPr lang="en-US" sz="1100" dirty="0"/>
-          </a:p>
-        </p:txBody>
-      </p:sp>
-      <p:sp>
-        <p:nvSpPr>
-          <p:cNvPr id="9" name="Text 7"/>
-          <p:cNvSpPr txBox="1"/>
-          <p:nvPr/>
-        </p:nvSpPr>
-        <p:spPr>
-          <a:xfrm>
-            <a:off x="3008376" y="4956048"/>
-            <a:ext cx="1956816" cy="237744"/>
-          </a:xfrm>
-          <a:prstGeom prst="rect">
-            <a:avLst/>
-          </a:prstGeom>
-          <a:noFill/>
-          <a:ln/>
-        </p:spPr>
-        <p:txBody>
-          <a:bodyPr wrap="square" lIns="0" tIns="0" rIns="0" bIns="0" rtlCol="0" anchor="ctr"/>
-          <a:lstStyle/>
-          <a:p>
-            <a:pPr indent="0" marL="0">
-              <a:buNone/>
-            </a:pPr>
-            <a:r>
-              <a:rPr lang="en-US" sz="900" b="1" dirty="0">
-                <a:solidFill>
-                  <a:srgbClr val="B04A2F"/>
-                </a:solidFill>
-                <a:latin typeface="Yu Gothic" pitchFamily="34" charset="0"/>
-                <a:ea typeface="Yu Gothic" pitchFamily="34" charset="-122"/>
-                <a:cs typeface="Yu Gothic" pitchFamily="34" charset="-120"/>
-              </a:rPr>
-              <a:t>15-35分</a:t>
-            </a:r>
-            <a:endParaRPr lang="en-US" sz="900" dirty="0"/>
-          </a:p>
-        </p:txBody>
-      </p:sp>
-      <p:sp>
-        <p:nvSpPr>
-          <p:cNvPr id="10" name="Text 8"/>
-          <p:cNvSpPr txBox="1"/>
-          <p:nvPr/>
-        </p:nvSpPr>
-        <p:spPr>
-          <a:xfrm>
-            <a:off x="3008376" y="5193792"/>
-            <a:ext cx="1956816" cy="365760"/>
-          </a:xfrm>
-          <a:prstGeom prst="rect">
-            <a:avLst/>
-          </a:prstGeom>
-          <a:noFill/>
-          <a:ln/>
-        </p:spPr>
-        <p:txBody>
-          <a:bodyPr wrap="square" lIns="0" tIns="0" rIns="0" bIns="0" rtlCol="0" anchor="ctr"/>
-          <a:lstStyle/>
-          <a:p>
-            <a:pPr indent="0" marL="0">
-              <a:buNone/>
-            </a:pPr>
-            <a:r>
-              <a:rPr lang="en-US" sz="1100" dirty="0">
-                <a:solidFill>
-                  <a:srgbClr val="23201D"/>
-                </a:solidFill>
-                <a:latin typeface="Yu Gothic" pitchFamily="34" charset="0"/>
-                <a:ea typeface="Yu Gothic" pitchFamily="34" charset="-122"/>
-                <a:cs typeface="Yu Gothic" pitchFamily="34" charset="-120"/>
-              </a:rPr>
-              <a:t>テーマとデモ</a:t>
-            </a:r>
-            <a:endParaRPr lang="en-US" sz="1100" dirty="0"/>
-          </a:p>
-        </p:txBody>
-      </p:sp>
-      <p:sp>
-        <p:nvSpPr>
-          <p:cNvPr id="11" name="Text 9"/>
-          <p:cNvSpPr txBox="1"/>
-          <p:nvPr/>
-        </p:nvSpPr>
-        <p:spPr>
-          <a:xfrm>
-            <a:off x="5056632" y="4956048"/>
-            <a:ext cx="1956816" cy="237744"/>
-          </a:xfrm>
-          <a:prstGeom prst="rect">
-            <a:avLst/>
-          </a:prstGeom>
-          <a:noFill/>
-          <a:ln/>
-        </p:spPr>
-        <p:txBody>
-          <a:bodyPr wrap="square" lIns="0" tIns="0" rIns="0" bIns="0" rtlCol="0" anchor="ctr"/>
-          <a:lstStyle/>
-          <a:p>
-            <a:pPr indent="0" marL="0">
-              <a:buNone/>
-            </a:pPr>
-            <a:r>
-              <a:rPr lang="en-US" sz="900" b="1" dirty="0">
-                <a:solidFill>
-                  <a:srgbClr val="B04A2F"/>
-                </a:solidFill>
-                <a:latin typeface="Yu Gothic" pitchFamily="34" charset="0"/>
-                <a:ea typeface="Yu Gothic" pitchFamily="34" charset="-122"/>
-                <a:cs typeface="Yu Gothic" pitchFamily="34" charset="-120"/>
-              </a:rPr>
-              <a:t>35-90分</a:t>
-            </a:r>
-            <a:endParaRPr lang="en-US" sz="900" dirty="0"/>
-          </a:p>
-        </p:txBody>
-      </p:sp>
-      <p:sp>
-        <p:nvSpPr>
-          <p:cNvPr id="12" name="Text 10"/>
-          <p:cNvSpPr txBox="1"/>
-          <p:nvPr/>
-        </p:nvSpPr>
-        <p:spPr>
-          <a:xfrm>
-            <a:off x="5056632" y="5193792"/>
-            <a:ext cx="1956816" cy="365760"/>
-          </a:xfrm>
-          <a:prstGeom prst="rect">
-            <a:avLst/>
-          </a:prstGeom>
-          <a:noFill/>
-          <a:ln/>
-        </p:spPr>
-        <p:txBody>
-          <a:bodyPr wrap="square" lIns="0" tIns="0" rIns="0" bIns="0" rtlCol="0" anchor="ctr"/>
-          <a:lstStyle/>
-          <a:p>
-            <a:pPr indent="0" marL="0">
-              <a:buNone/>
-            </a:pPr>
-            <a:r>
-              <a:rPr lang="en-US" sz="1100" dirty="0">
-                <a:solidFill>
-                  <a:srgbClr val="23201D"/>
-                </a:solidFill>
-                <a:latin typeface="Yu Gothic" pitchFamily="34" charset="0"/>
-                <a:ea typeface="Yu Gothic" pitchFamily="34" charset="-122"/>
-                <a:cs typeface="Yu Gothic" pitchFamily="34" charset="-120"/>
-              </a:rPr>
-              <a:t>一緒に手を動かす</a:t>
-            </a:r>
-            <a:endParaRPr lang="en-US" sz="1100" dirty="0"/>
-          </a:p>
-        </p:txBody>
-      </p:sp>
-      <p:sp>
-        <p:nvSpPr>
-          <p:cNvPr id="13" name="Text 11"/>
-          <p:cNvSpPr txBox="1"/>
-          <p:nvPr/>
-        </p:nvSpPr>
-        <p:spPr>
-          <a:xfrm>
-            <a:off x="7104888" y="4956048"/>
-            <a:ext cx="1956816" cy="237744"/>
-          </a:xfrm>
-          <a:prstGeom prst="rect">
-            <a:avLst/>
-          </a:prstGeom>
-          <a:noFill/>
-          <a:ln/>
-        </p:spPr>
-        <p:txBody>
-          <a:bodyPr wrap="square" lIns="0" tIns="0" rIns="0" bIns="0" rtlCol="0" anchor="ctr"/>
-          <a:lstStyle/>
-          <a:p>
-            <a:pPr indent="0" marL="0">
-              <a:buNone/>
-            </a:pPr>
-            <a:r>
-              <a:rPr lang="en-US" sz="900" b="1" dirty="0">
-                <a:solidFill>
-                  <a:srgbClr val="B04A2F"/>
-                </a:solidFill>
-                <a:latin typeface="Yu Gothic" pitchFamily="34" charset="0"/>
-                <a:ea typeface="Yu Gothic" pitchFamily="34" charset="-122"/>
-                <a:cs typeface="Yu Gothic" pitchFamily="34" charset="-120"/>
-              </a:rPr>
-              <a:t>90-105分</a:t>
-            </a:r>
-            <a:endParaRPr lang="en-US" sz="900" dirty="0"/>
-          </a:p>
-        </p:txBody>
-      </p:sp>
-      <p:sp>
-        <p:nvSpPr>
-          <p:cNvPr id="14" name="Text 12"/>
-          <p:cNvSpPr txBox="1"/>
-          <p:nvPr/>
-        </p:nvSpPr>
-        <p:spPr>
-          <a:xfrm>
-            <a:off x="7104888" y="5193792"/>
-            <a:ext cx="1956816" cy="365760"/>
-          </a:xfrm>
-          <a:prstGeom prst="rect">
-            <a:avLst/>
-          </a:prstGeom>
-          <a:noFill/>
-          <a:ln/>
-        </p:spPr>
-        <p:txBody>
-          <a:bodyPr wrap="square" lIns="0" tIns="0" rIns="0" bIns="0" rtlCol="0" anchor="ctr"/>
-          <a:lstStyle/>
-          <a:p>
-            <a:pPr indent="0" marL="0">
-              <a:buNone/>
-            </a:pPr>
-            <a:r>
-              <a:rPr lang="en-US" sz="1100" dirty="0">
-                <a:solidFill>
-                  <a:srgbClr val="23201D"/>
-                </a:solidFill>
-                <a:latin typeface="Yu Gothic" pitchFamily="34" charset="0"/>
-                <a:ea typeface="Yu Gothic" pitchFamily="34" charset="-122"/>
-                <a:cs typeface="Yu Gothic" pitchFamily="34" charset="-120"/>
-              </a:rPr>
-              <a:t>業務への組み込み</a:t>
-            </a:r>
-            <a:endParaRPr lang="en-US" sz="1100" dirty="0"/>
-          </a:p>
-        </p:txBody>
-      </p:sp>
-      <p:sp>
-        <p:nvSpPr>
-          <p:cNvPr id="15" name="Text 13"/>
-          <p:cNvSpPr txBox="1"/>
-          <p:nvPr/>
-        </p:nvSpPr>
-        <p:spPr>
-          <a:xfrm>
-            <a:off x="9153144" y="4956048"/>
-            <a:ext cx="1956816" cy="237744"/>
-          </a:xfrm>
-          <a:prstGeom prst="rect">
-            <a:avLst/>
-          </a:prstGeom>
-          <a:noFill/>
-          <a:ln/>
-        </p:spPr>
-        <p:txBody>
-          <a:bodyPr wrap="square" lIns="0" tIns="0" rIns="0" bIns="0" rtlCol="0" anchor="ctr"/>
-          <a:lstStyle/>
-          <a:p>
-            <a:pPr indent="0" marL="0">
-              <a:buNone/>
-            </a:pPr>
-            <a:r>
-              <a:rPr lang="en-US" sz="900" b="1" dirty="0">
-                <a:solidFill>
-                  <a:srgbClr val="B04A2F"/>
-                </a:solidFill>
-                <a:latin typeface="Yu Gothic" pitchFamily="34" charset="0"/>
-                <a:ea typeface="Yu Gothic" pitchFamily="34" charset="-122"/>
-                <a:cs typeface="Yu Gothic" pitchFamily="34" charset="-120"/>
-              </a:rPr>
-              <a:t>105-120分</a:t>
-            </a:r>
-            <a:endParaRPr lang="en-US" sz="900" dirty="0"/>
-          </a:p>
-        </p:txBody>
-      </p:sp>
-      <p:sp>
-        <p:nvSpPr>
           <p:cNvPr id="16" name="Text 14"/>
           <p:cNvSpPr txBox="1"/>
           <p:nvPr/>
         </p:nvSpPr>
         <p:spPr>
           <a:xfrm>
-            <a:off x="9153144" y="5193792"/>
-            <a:ext cx="1956816" cy="365760"/>
-          </a:xfrm>
-          <a:prstGeom prst="rect">
-            <a:avLst/>
-          </a:prstGeom>
-          <a:noFill/>
-          <a:ln/>
-        </p:spPr>
-        <p:txBody>
-          <a:bodyPr wrap="square" lIns="0" tIns="0" rIns="0" bIns="0" rtlCol="0" anchor="ctr"/>
-          <a:lstStyle/>
-          <a:p>
-            <a:pPr indent="0" marL="0">
-              <a:buNone/>
-            </a:pPr>
-            <a:r>
-              <a:rPr lang="en-US" sz="1100" dirty="0">
-                <a:solidFill>
-                  <a:srgbClr val="23201D"/>
-                </a:solidFill>
-                <a:latin typeface="Yu Gothic" pitchFamily="34" charset="0"/>
-                <a:ea typeface="Yu Gothic" pitchFamily="34" charset="-122"/>
-                <a:cs typeface="Yu Gothic" pitchFamily="34" charset="-120"/>
-              </a:rPr>
-              <a:t>宿題・記録</a:t>
-            </a:r>
-            <a:endParaRPr lang="en-US" sz="1100" dirty="0"/>
-          </a:p>
-        </p:txBody>
-      </p:sp>
-      <p:sp>
-        <p:nvSpPr>
-          <p:cNvPr id="17" name="Text 15"/>
-          <p:cNvSpPr txBox="1"/>
-          <p:nvPr/>
-        </p:nvSpPr>
-        <p:spPr>
-          <a:xfrm>
-            <a:off x="777240" y="6355080"/>
-            <a:ext cx="7424928" cy="274320"/>
-          </a:xfrm>
-          <a:prstGeom prst="rect">
-            <a:avLst/>
-          </a:prstGeom>
-          <a:noFill/>
-          <a:ln/>
-        </p:spPr>
-        <p:txBody>
-          <a:bodyPr wrap="square" lIns="0" tIns="0" rIns="0" bIns="0" rtlCol="0" anchor="ctr"/>
-          <a:lstStyle/>
-          <a:p>
-            <a:pPr indent="0" marL="0">
+            <a:off x="8202168" y="6382512"/>
+            <a:ext cx="3182112" cy="256032"/>
+          </a:xfrm>
+          <a:prstGeom prst="rect">
+            <a:avLst/>
+          </a:prstGeom>
+          <a:noFill/>
+          <a:ln/>
+        </p:spPr>
+        <p:txBody>
+          <a:bodyPr wrap="square" lIns="0" tIns="0" rIns="0" bIns="0" rtlCol="0" anchor="ctr"/>
+          <a:lstStyle/>
+          <a:p>
+            <a:pPr algn="r" indent="0" marL="0">
               <a:buNone/>
             </a:pPr>
             <a:r>
@@ -2300,46 +3952,7 @@
                 <a:ea typeface="Yu Gothic" pitchFamily="34" charset="-122"/>
                 <a:cs typeface="Yu Gothic" pitchFamily="34" charset="-120"/>
               </a:rPr>
-              <a:t>第5回　自社専用AIをつくる</a:t>
-            </a:r>
-            <a:endParaRPr lang="en-US" sz="900" dirty="0"/>
-          </a:p>
-        </p:txBody>
-      </p:sp>
-      <p:sp>
-        <p:nvSpPr>
-          <p:cNvPr id="18" name="Text 16"/>
-          <p:cNvSpPr txBox="1"/>
-          <p:nvPr/>
-        </p:nvSpPr>
-        <p:spPr>
-          <a:xfrm>
-            <a:off x="8202168" y="6355080"/>
-            <a:ext cx="3182112" cy="274320"/>
-          </a:xfrm>
-          <a:prstGeom prst="rect">
-            <a:avLst/>
-          </a:prstGeom>
-          <a:noFill/>
-          <a:ln/>
-        </p:spPr>
-        <p:txBody>
-          <a:bodyPr wrap="square" lIns="0" tIns="0" rIns="0" bIns="0" rtlCol="0" anchor="ctr"/>
-          <a:lstStyle/>
-          <a:p>
-            <a:pPr algn="r" indent="0" marL="0">
-              <a:buNone/>
-            </a:pPr>
-            <a:r>
-              <a:rPr lang="en-US" sz="900" dirty="0">
-                <a:solidFill>
-                  <a:srgbClr val="8A8177"/>
-                </a:solidFill>
-                <a:latin typeface="Yu Gothic" pitchFamily="34" charset="0"/>
-                <a:ea typeface="Yu Gothic" pitchFamily="34" charset="-122"/>
-                <a:cs typeface="Yu Gothic" pitchFamily="34" charset="-120"/>
-              </a:rPr>
-              <a:t>今日のゴール</a:t>
+              <a:t>出発点</a:t>
             </a:r>
             <a:endParaRPr lang="en-US" sz="900" dirty="0"/>
           </a:p>
@@ -2385,7 +3998,7 @@
         </p:nvSpPr>
         <p:spPr>
           <a:xfrm>
-            <a:off x="777240" y="640080"/>
+            <a:off x="777240" y="566928"/>
             <a:ext cx="10607040" cy="274320"/>
           </a:xfrm>
           <a:prstGeom prst="rect">
@@ -2410,7 +4023,7 @@
                 <a:ea typeface="Yu Gothic" pitchFamily="34" charset="-122"/>
                 <a:cs typeface="Yu Gothic" pitchFamily="34" charset="-120"/>
               </a:rPr>
-              <a:t>考え方</a:t>
+              <a:t>今日のゴール</a:t>
             </a:r>
             <a:endParaRPr lang="en-US" sz="1100" dirty="0"/>
           </a:p>
@@ -2424,24 +4037,27 @@
         </p:nvSpPr>
         <p:spPr>
           <a:xfrm>
-            <a:off x="777240" y="960120"/>
-            <a:ext cx="10607040" cy="640080"/>
-          </a:xfrm>
-          <a:prstGeom prst="rect">
-            <a:avLst/>
-          </a:prstGeom>
-          <a:noFill/>
-          <a:ln/>
-        </p:spPr>
-        <p:txBody>
-          <a:bodyPr wrap="square" lIns="0" tIns="0" rIns="0" bIns="0" rtlCol="0" anchor="ctr"/>
-          <a:lstStyle/>
-          <a:p>
-            <a:pPr indent="0" marL="0">
-              <a:buNone/>
-            </a:pPr>
-            <a:r>
-              <a:rPr lang="en-US" sz="2700" b="1" dirty="0">
+            <a:off x="777240" y="1143000"/>
+            <a:ext cx="9864547" cy="1645920"/>
+          </a:xfrm>
+          <a:prstGeom prst="rect">
+            <a:avLst/>
+          </a:prstGeom>
+          <a:noFill/>
+          <a:ln/>
+        </p:spPr>
+        <p:txBody>
+          <a:bodyPr wrap="square" lIns="0" tIns="0" rIns="0" bIns="0" rtlCol="0" anchor="ctr"/>
+          <a:lstStyle/>
+          <a:p>
+            <a:pPr indent="0" marL="0">
+              <a:lnSpc>
+                <a:spcPct val="145000"/>
+              </a:lnSpc>
+              <a:buNone/>
+            </a:pPr>
+            <a:r>
+              <a:rPr lang="en-US" sz="2600" b="1" dirty="0">
                 <a:solidFill>
                   <a:srgbClr val="23201D"/>
                 </a:solidFill>
@@ -2449,9 +4065,9 @@
                 <a:ea typeface="Yu Gothic" pitchFamily="34" charset="-122"/>
                 <a:cs typeface="Yu Gothic" pitchFamily="34" charset="-120"/>
               </a:rPr>
-              <a:t>何を作るか — 棚卸しの上位から選びます</a:t>
-            </a:r>
-            <a:endParaRPr lang="en-US" sz="2700" dirty="0"/>
+              <a:t>自社資料を読む専用AIを1つ動かし、社員の方が触れる状態にします。あわせて最低限のルールを決めます。</a:t>
+            </a:r>
+            <a:endParaRPr lang="en-US" sz="2600" dirty="0"/>
           </a:p>
         </p:txBody>
       </p:sp>
@@ -2463,18 +4079,18 @@
         </p:nvSpPr>
         <p:spPr>
           <a:xfrm>
-            <a:off x="777240" y="1783080"/>
-            <a:ext cx="10607040" cy="1167384"/>
+            <a:off x="777240" y="3063240"/>
+            <a:ext cx="10607040" cy="18288"/>
           </a:xfrm>
           <a:prstGeom prst="rect">
             <a:avLst/>
           </a:prstGeom>
           <a:solidFill>
-            <a:srgbClr val="FFFFFF"/>
+            <a:srgbClr val="EDE7DB"/>
           </a:solidFill>
           <a:ln w="12700">
             <a:solidFill>
-              <a:srgbClr val="EDE7DB"/>
+              <a:srgbClr val="333333"/>
             </a:solidFill>
             <a:prstDash val="solid"/>
           </a:ln>
@@ -2482,24 +4098,66 @@
       </p:sp>
       <p:sp>
         <p:nvSpPr>
-          <p:cNvPr id="5" name="Shape 3"/>
+          <p:cNvPr id="5" name="Text 3"/>
+          <p:cNvSpPr txBox="1"/>
+          <p:nvPr/>
+        </p:nvSpPr>
+        <p:spPr>
+          <a:xfrm>
+            <a:off x="777240" y="3291840"/>
+            <a:ext cx="9334195" cy="1005840"/>
+          </a:xfrm>
+          <a:prstGeom prst="rect">
+            <a:avLst/>
+          </a:prstGeom>
+          <a:noFill/>
+          <a:ln/>
+        </p:spPr>
+        <p:txBody>
+          <a:bodyPr wrap="square" lIns="0" tIns="0" rIns="0" bIns="0" rtlCol="0" anchor="ctr"/>
+          <a:lstStyle/>
+          <a:p>
+            <a:pPr indent="0" marL="0">
+              <a:lnSpc>
+                <a:spcPct val="140000"/>
+              </a:lnSpc>
+              <a:buNone/>
+            </a:pPr>
+            <a:r>
+              <a:rPr lang="en-US" sz="1450" dirty="0">
+                <a:solidFill>
+                  <a:srgbClr val="5A534A"/>
+                </a:solidFill>
+                <a:latin typeface="Yu Gothic" pitchFamily="34" charset="0"/>
+                <a:ea typeface="Yu Gothic" pitchFamily="34" charset="-122"/>
+                <a:cs typeface="Yu Gothic" pitchFamily="34" charset="-120"/>
+              </a:rPr>
+              <a:t>動かないまま持ち帰らせません。実データで動くところまで、今日やりきります。</a:t>
+            </a:r>
+            <a:endParaRPr lang="en-US" sz="1450" dirty="0"/>
+          </a:p>
+        </p:txBody>
+      </p:sp>
+      <p:sp>
+        <p:nvSpPr>
+          <p:cNvPr id="6" name="Shape 4"/>
           <p:cNvSpPr/>
           <p:nvPr/>
         </p:nvSpPr>
         <p:spPr>
           <a:xfrm>
-            <a:off x="1033272" y="2174748"/>
-            <a:ext cx="384048" cy="384048"/>
-          </a:xfrm>
-          <a:prstGeom prst="ellipse">
+            <a:off x="777240" y="4754880"/>
+            <a:ext cx="10607040" cy="822960"/>
+          </a:xfrm>
+          <a:prstGeom prst="rect">
             <a:avLst/>
           </a:prstGeom>
           <a:solidFill>
-            <a:srgbClr val="B04A2F"/>
+            <a:srgbClr val="EDE7DB"/>
           </a:solidFill>
           <a:ln w="12700">
             <a:solidFill>
-              <a:srgbClr val="B04A2F"/>
+              <a:srgbClr val="333333"/>
             </a:solidFill>
             <a:prstDash val="solid"/>
           </a:ln>
@@ -2507,69 +4165,69 @@
       </p:sp>
       <p:sp>
         <p:nvSpPr>
-          <p:cNvPr id="6" name="Text 4"/>
-          <p:cNvSpPr txBox="1"/>
-          <p:nvPr/>
-        </p:nvSpPr>
-        <p:spPr>
-          <a:xfrm>
-            <a:off x="1033272" y="2174748"/>
-            <a:ext cx="384048" cy="384048"/>
-          </a:xfrm>
-          <a:prstGeom prst="rect">
-            <a:avLst/>
-          </a:prstGeom>
-          <a:noFill/>
-          <a:ln/>
-        </p:spPr>
-        <p:txBody>
-          <a:bodyPr wrap="square" lIns="0" tIns="0" rIns="0" bIns="0" rtlCol="0" anchor="ctr"/>
-          <a:lstStyle/>
-          <a:p>
-            <a:pPr algn="ctr" indent="0" marL="0">
-              <a:buNone/>
-            </a:pPr>
-            <a:r>
-              <a:rPr lang="en-US" sz="1400" b="1" dirty="0">
-                <a:solidFill>
-                  <a:srgbClr val="FFFFFF"/>
-                </a:solidFill>
-                <a:latin typeface="Yu Gothic" pitchFamily="34" charset="0"/>
-                <a:ea typeface="Yu Gothic" pitchFamily="34" charset="-122"/>
-                <a:cs typeface="Yu Gothic" pitchFamily="34" charset="-120"/>
-              </a:rPr>
-              <a:t>1</a:t>
-            </a:r>
-            <a:endParaRPr lang="en-US" sz="1400" dirty="0"/>
-          </a:p>
-        </p:txBody>
-      </p:sp>
-      <p:sp>
-        <p:nvSpPr>
           <p:cNvPr id="7" name="Text 5"/>
           <p:cNvSpPr txBox="1"/>
           <p:nvPr/>
         </p:nvSpPr>
         <p:spPr>
           <a:xfrm>
-            <a:off x="1645920" y="1874520"/>
-            <a:ext cx="3394253" cy="984504"/>
-          </a:xfrm>
-          <a:prstGeom prst="rect">
-            <a:avLst/>
-          </a:prstGeom>
-          <a:noFill/>
-          <a:ln/>
-        </p:spPr>
-        <p:txBody>
-          <a:bodyPr wrap="square" lIns="0" tIns="0" rIns="0" bIns="0" rtlCol="0" anchor="ctr"/>
-          <a:lstStyle/>
-          <a:p>
-            <a:pPr indent="0" marL="0">
-              <a:buNone/>
-            </a:pPr>
-            <a:r>
-              <a:rPr lang="en-US" sz="1500" b="1" dirty="0">
+            <a:off x="960120" y="4873752"/>
+            <a:ext cx="1956816" cy="237744"/>
+          </a:xfrm>
+          <a:prstGeom prst="rect">
+            <a:avLst/>
+          </a:prstGeom>
+          <a:noFill/>
+          <a:ln/>
+        </p:spPr>
+        <p:txBody>
+          <a:bodyPr wrap="square" lIns="0" tIns="0" rIns="0" bIns="0" rtlCol="0" anchor="ctr"/>
+          <a:lstStyle/>
+          <a:p>
+            <a:pPr indent="0" marL="0">
+              <a:buNone/>
+            </a:pPr>
+            <a:r>
+              <a:rPr lang="en-US" sz="900" b="1" dirty="0">
+                <a:solidFill>
+                  <a:srgbClr val="B04A2F"/>
+                </a:solidFill>
+                <a:latin typeface="Yu Gothic" pitchFamily="34" charset="0"/>
+                <a:ea typeface="Yu Gothic" pitchFamily="34" charset="-122"/>
+                <a:cs typeface="Yu Gothic" pitchFamily="34" charset="-120"/>
+              </a:rPr>
+              <a:t>0-15分</a:t>
+            </a:r>
+            <a:endParaRPr lang="en-US" sz="900" dirty="0"/>
+          </a:p>
+        </p:txBody>
+      </p:sp>
+      <p:sp>
+        <p:nvSpPr>
+          <p:cNvPr id="8" name="Text 6"/>
+          <p:cNvSpPr txBox="1"/>
+          <p:nvPr/>
+        </p:nvSpPr>
+        <p:spPr>
+          <a:xfrm>
+            <a:off x="960120" y="5111496"/>
+            <a:ext cx="1956816" cy="384048"/>
+          </a:xfrm>
+          <a:prstGeom prst="rect">
+            <a:avLst/>
+          </a:prstGeom>
+          <a:noFill/>
+          <a:ln/>
+        </p:spPr>
+        <p:txBody>
+          <a:bodyPr wrap="square" lIns="0" tIns="0" rIns="0" bIns="0" rtlCol="0" anchor="ctr"/>
+          <a:lstStyle/>
+          <a:p>
+            <a:pPr indent="0" marL="0">
+              <a:buNone/>
+            </a:pPr>
+            <a:r>
+              <a:rPr lang="en-US" sz="1100" dirty="0">
                 <a:solidFill>
                   <a:srgbClr val="23201D"/>
                 </a:solidFill>
@@ -2577,103 +4235,89 @@
                 <a:ea typeface="Yu Gothic" pitchFamily="34" charset="-122"/>
                 <a:cs typeface="Yu Gothic" pitchFamily="34" charset="-120"/>
               </a:rPr>
-              <a:t>見積・提案の下書き役</a:t>
-            </a:r>
-            <a:endParaRPr lang="en-US" sz="1500" dirty="0"/>
-          </a:p>
-        </p:txBody>
-      </p:sp>
-      <p:sp>
-        <p:nvSpPr>
-          <p:cNvPr id="8" name="Text 6"/>
-          <p:cNvSpPr txBox="1"/>
-          <p:nvPr/>
-        </p:nvSpPr>
-        <p:spPr>
-          <a:xfrm>
-            <a:off x="5146243" y="1874520"/>
-            <a:ext cx="5963717" cy="984504"/>
-          </a:xfrm>
-          <a:prstGeom prst="rect">
-            <a:avLst/>
-          </a:prstGeom>
-          <a:noFill/>
-          <a:ln/>
-        </p:spPr>
-        <p:txBody>
-          <a:bodyPr wrap="square" lIns="0" tIns="0" rIns="0" bIns="0" rtlCol="0" anchor="ctr"/>
-          <a:lstStyle/>
-          <a:p>
-            <a:pPr indent="0" marL="0">
-              <a:lnSpc>
-                <a:spcPct val="130000"/>
-              </a:lnSpc>
-              <a:buNone/>
-            </a:pPr>
-            <a:r>
-              <a:rPr lang="en-US" sz="1250" dirty="0">
-                <a:solidFill>
-                  <a:srgbClr val="5A534A"/>
-                </a:solidFill>
-                <a:latin typeface="Yu Gothic" pitchFamily="34" charset="0"/>
-                <a:ea typeface="Yu Gothic" pitchFamily="34" charset="-122"/>
-                <a:cs typeface="Yu Gothic" pitchFamily="34" charset="-120"/>
-              </a:rPr>
-              <a:t>過去の見積書と価格表を載せます</a:t>
-            </a:r>
-            <a:endParaRPr lang="en-US" sz="1250" dirty="0"/>
-          </a:p>
-        </p:txBody>
-      </p:sp>
-      <p:sp>
-        <p:nvSpPr>
-          <p:cNvPr id="9" name="Shape 7"/>
-          <p:cNvSpPr/>
-          <p:nvPr/>
-        </p:nvSpPr>
-        <p:spPr>
-          <a:xfrm>
-            <a:off x="777240" y="3096768"/>
-            <a:ext cx="10607040" cy="1167384"/>
-          </a:xfrm>
-          <a:prstGeom prst="rect">
-            <a:avLst/>
-          </a:prstGeom>
-          <a:solidFill>
-            <a:srgbClr val="FFFFFF"/>
-          </a:solidFill>
-          <a:ln w="12700">
-            <a:solidFill>
-              <a:srgbClr val="EDE7DB"/>
-            </a:solidFill>
-            <a:prstDash val="solid"/>
-          </a:ln>
-        </p:spPr>
-      </p:sp>
-      <p:sp>
-        <p:nvSpPr>
-          <p:cNvPr id="10" name="Shape 8"/>
-          <p:cNvSpPr/>
-          <p:nvPr/>
-        </p:nvSpPr>
-        <p:spPr>
-          <a:xfrm>
-            <a:off x="1033272" y="3488436"/>
-            <a:ext cx="384048" cy="384048"/>
-          </a:xfrm>
-          <a:prstGeom prst="ellipse">
-            <a:avLst/>
-          </a:prstGeom>
-          <a:solidFill>
-            <a:srgbClr val="B04A2F"/>
-          </a:solidFill>
-          <a:ln w="12700">
-            <a:solidFill>
-              <a:srgbClr val="B04A2F"/>
-            </a:solidFill>
-            <a:prstDash val="solid"/>
-          </a:ln>
-        </p:spPr>
+              <a:t>前回の宿題を実物で</a:t>
+            </a:r>
+            <a:endParaRPr lang="en-US" sz="1100" dirty="0"/>
+          </a:p>
+        </p:txBody>
+      </p:sp>
+      <p:sp>
+        <p:nvSpPr>
+          <p:cNvPr id="9" name="Text 7"/>
+          <p:cNvSpPr txBox="1"/>
+          <p:nvPr/>
+        </p:nvSpPr>
+        <p:spPr>
+          <a:xfrm>
+            <a:off x="3008376" y="4873752"/>
+            <a:ext cx="1956816" cy="237744"/>
+          </a:xfrm>
+          <a:prstGeom prst="rect">
+            <a:avLst/>
+          </a:prstGeom>
+          <a:noFill/>
+          <a:ln/>
+        </p:spPr>
+        <p:txBody>
+          <a:bodyPr wrap="square" lIns="0" tIns="0" rIns="0" bIns="0" rtlCol="0" anchor="ctr"/>
+          <a:lstStyle/>
+          <a:p>
+            <a:pPr indent="0" marL="0">
+              <a:buNone/>
+            </a:pPr>
+            <a:r>
+              <a:rPr lang="en-US" sz="900" b="1" dirty="0">
+                <a:solidFill>
+                  <a:srgbClr val="B04A2F"/>
+                </a:solidFill>
+                <a:latin typeface="Yu Gothic" pitchFamily="34" charset="0"/>
+                <a:ea typeface="Yu Gothic" pitchFamily="34" charset="-122"/>
+                <a:cs typeface="Yu Gothic" pitchFamily="34" charset="-120"/>
+              </a:rPr>
+              <a:t>15-35分</a:t>
+            </a:r>
+            <a:endParaRPr lang="en-US" sz="900" dirty="0"/>
+          </a:p>
+        </p:txBody>
+      </p:sp>
+      <p:sp>
+        <p:nvSpPr>
+          <p:cNvPr id="10" name="Text 8"/>
+          <p:cNvSpPr txBox="1"/>
+          <p:nvPr/>
+        </p:nvSpPr>
+        <p:spPr>
+          <a:xfrm>
+            <a:off x="3008376" y="5111496"/>
+            <a:ext cx="1956816" cy="384048"/>
+          </a:xfrm>
+          <a:prstGeom prst="rect">
+            <a:avLst/>
+          </a:prstGeom>
+          <a:noFill/>
+          <a:ln/>
+        </p:spPr>
+        <p:txBody>
+          <a:bodyPr wrap="square" lIns="0" tIns="0" rIns="0" bIns="0" rtlCol="0" anchor="ctr"/>
+          <a:lstStyle/>
+          <a:p>
+            <a:pPr indent="0" marL="0">
+              <a:buNone/>
+            </a:pPr>
+            <a:r>
+              <a:rPr lang="en-US" sz="1100" dirty="0">
+                <a:solidFill>
+                  <a:srgbClr val="23201D"/>
+                </a:solidFill>
+                <a:latin typeface="Yu Gothic" pitchFamily="34" charset="0"/>
+                <a:ea typeface="Yu Gothic" pitchFamily="34" charset="-122"/>
+                <a:cs typeface="Yu Gothic" pitchFamily="34" charset="-120"/>
+              </a:rPr>
+              <a:t>テーマとデモ</a:t>
+            </a:r>
+            <a:endParaRPr lang="en-US" sz="1100" dirty="0"/>
+          </a:p>
+        </p:txBody>
       </p:sp>
       <p:sp>
         <p:nvSpPr>
@@ -2683,34 +4327,34 @@
         </p:nvSpPr>
         <p:spPr>
           <a:xfrm>
-            <a:off x="1033272" y="3488436"/>
-            <a:ext cx="384048" cy="384048"/>
-          </a:xfrm>
-          <a:prstGeom prst="rect">
-            <a:avLst/>
-          </a:prstGeom>
-          <a:noFill/>
-          <a:ln/>
-        </p:spPr>
-        <p:txBody>
-          <a:bodyPr wrap="square" lIns="0" tIns="0" rIns="0" bIns="0" rtlCol="0" anchor="ctr"/>
-          <a:lstStyle/>
-          <a:p>
-            <a:pPr algn="ctr" indent="0" marL="0">
-              <a:buNone/>
-            </a:pPr>
-            <a:r>
-              <a:rPr lang="en-US" sz="1400" b="1" dirty="0">
-                <a:solidFill>
-                  <a:srgbClr val="FFFFFF"/>
-                </a:solidFill>
-                <a:latin typeface="Yu Gothic" pitchFamily="34" charset="0"/>
-                <a:ea typeface="Yu Gothic" pitchFamily="34" charset="-122"/>
-                <a:cs typeface="Yu Gothic" pitchFamily="34" charset="-120"/>
-              </a:rPr>
-              <a:t>2</a:t>
-            </a:r>
-            <a:endParaRPr lang="en-US" sz="1400" dirty="0"/>
+            <a:off x="5056632" y="4873752"/>
+            <a:ext cx="1956816" cy="237744"/>
+          </a:xfrm>
+          <a:prstGeom prst="rect">
+            <a:avLst/>
+          </a:prstGeom>
+          <a:noFill/>
+          <a:ln/>
+        </p:spPr>
+        <p:txBody>
+          <a:bodyPr wrap="square" lIns="0" tIns="0" rIns="0" bIns="0" rtlCol="0" anchor="ctr"/>
+          <a:lstStyle/>
+          <a:p>
+            <a:pPr indent="0" marL="0">
+              <a:buNone/>
+            </a:pPr>
+            <a:r>
+              <a:rPr lang="en-US" sz="900" b="1" dirty="0">
+                <a:solidFill>
+                  <a:srgbClr val="B04A2F"/>
+                </a:solidFill>
+                <a:latin typeface="Yu Gothic" pitchFamily="34" charset="0"/>
+                <a:ea typeface="Yu Gothic" pitchFamily="34" charset="-122"/>
+                <a:cs typeface="Yu Gothic" pitchFamily="34" charset="-120"/>
+              </a:rPr>
+              <a:t>35-90分</a:t>
+            </a:r>
+            <a:endParaRPr lang="en-US" sz="900" dirty="0"/>
           </a:p>
         </p:txBody>
       </p:sp>
@@ -2722,24 +4366,24 @@
         </p:nvSpPr>
         <p:spPr>
           <a:xfrm>
-            <a:off x="1645920" y="3188208"/>
-            <a:ext cx="3394253" cy="984504"/>
-          </a:xfrm>
-          <a:prstGeom prst="rect">
-            <a:avLst/>
-          </a:prstGeom>
-          <a:noFill/>
-          <a:ln/>
-        </p:spPr>
-        <p:txBody>
-          <a:bodyPr wrap="square" lIns="0" tIns="0" rIns="0" bIns="0" rtlCol="0" anchor="ctr"/>
-          <a:lstStyle/>
-          <a:p>
-            <a:pPr indent="0" marL="0">
-              <a:buNone/>
-            </a:pPr>
-            <a:r>
-              <a:rPr lang="en-US" sz="1500" b="1" dirty="0">
+            <a:off x="5056632" y="5111496"/>
+            <a:ext cx="1956816" cy="384048"/>
+          </a:xfrm>
+          <a:prstGeom prst="rect">
+            <a:avLst/>
+          </a:prstGeom>
+          <a:noFill/>
+          <a:ln/>
+        </p:spPr>
+        <p:txBody>
+          <a:bodyPr wrap="square" lIns="0" tIns="0" rIns="0" bIns="0" rtlCol="0" anchor="ctr"/>
+          <a:lstStyle/>
+          <a:p>
+            <a:pPr indent="0" marL="0">
+              <a:buNone/>
+            </a:pPr>
+            <a:r>
+              <a:rPr lang="en-US" sz="1100" dirty="0">
                 <a:solidFill>
                   <a:srgbClr val="23201D"/>
                 </a:solidFill>
@@ -2747,9 +4391,9 @@
                 <a:ea typeface="Yu Gothic" pitchFamily="34" charset="-122"/>
                 <a:cs typeface="Yu Gothic" pitchFamily="34" charset="-120"/>
               </a:rPr>
-              <a:t>社内問い合わせ対応役</a:t>
-            </a:r>
-            <a:endParaRPr lang="en-US" sz="1500" dirty="0"/>
+              <a:t>一緒に手を動かす</a:t>
+            </a:r>
+            <a:endParaRPr lang="en-US" sz="1100" dirty="0"/>
           </a:p>
         </p:txBody>
       </p:sp>
@@ -2761,89 +4405,114 @@
         </p:nvSpPr>
         <p:spPr>
           <a:xfrm>
-            <a:off x="5146243" y="3188208"/>
-            <a:ext cx="5963717" cy="984504"/>
-          </a:xfrm>
-          <a:prstGeom prst="rect">
-            <a:avLst/>
-          </a:prstGeom>
-          <a:noFill/>
-          <a:ln/>
-        </p:spPr>
-        <p:txBody>
-          <a:bodyPr wrap="square" lIns="0" tIns="0" rIns="0" bIns="0" rtlCol="0" anchor="ctr"/>
-          <a:lstStyle/>
-          <a:p>
-            <a:pPr indent="0" marL="0">
-              <a:lnSpc>
-                <a:spcPct val="130000"/>
-              </a:lnSpc>
-              <a:buNone/>
-            </a:pPr>
-            <a:r>
-              <a:rPr lang="en-US" sz="1250" dirty="0">
-                <a:solidFill>
-                  <a:srgbClr val="5A534A"/>
-                </a:solidFill>
-                <a:latin typeface="Yu Gothic" pitchFamily="34" charset="0"/>
-                <a:ea typeface="Yu Gothic" pitchFamily="34" charset="-122"/>
-                <a:cs typeface="Yu Gothic" pitchFamily="34" charset="-120"/>
-              </a:rPr>
-              <a:t>就業規則・社内マニュアルを載せます</a:t>
-            </a:r>
-            <a:endParaRPr lang="en-US" sz="1250" dirty="0"/>
-          </a:p>
-        </p:txBody>
-      </p:sp>
-      <p:sp>
-        <p:nvSpPr>
-          <p:cNvPr id="14" name="Shape 12"/>
-          <p:cNvSpPr/>
-          <p:nvPr/>
-        </p:nvSpPr>
-        <p:spPr>
-          <a:xfrm>
-            <a:off x="777240" y="4410456"/>
-            <a:ext cx="10607040" cy="1167384"/>
-          </a:xfrm>
-          <a:prstGeom prst="rect">
-            <a:avLst/>
-          </a:prstGeom>
-          <a:solidFill>
-            <a:srgbClr val="FFFFFF"/>
-          </a:solidFill>
-          <a:ln w="12700">
-            <a:solidFill>
-              <a:srgbClr val="EDE7DB"/>
-            </a:solidFill>
-            <a:prstDash val="solid"/>
-          </a:ln>
-        </p:spPr>
-      </p:sp>
-      <p:sp>
-        <p:nvSpPr>
-          <p:cNvPr id="15" name="Shape 13"/>
-          <p:cNvSpPr/>
-          <p:nvPr/>
-        </p:nvSpPr>
-        <p:spPr>
-          <a:xfrm>
-            <a:off x="1033272" y="4802124"/>
-            <a:ext cx="384048" cy="384048"/>
-          </a:xfrm>
-          <a:prstGeom prst="ellipse">
-            <a:avLst/>
-          </a:prstGeom>
-          <a:solidFill>
-            <a:srgbClr val="B04A2F"/>
-          </a:solidFill>
-          <a:ln w="12700">
-            <a:solidFill>
-              <a:srgbClr val="B04A2F"/>
-            </a:solidFill>
-            <a:prstDash val="solid"/>
-          </a:ln>
-        </p:spPr>
+            <a:off x="7104888" y="4873752"/>
+            <a:ext cx="1956816" cy="237744"/>
+          </a:xfrm>
+          <a:prstGeom prst="rect">
+            <a:avLst/>
+          </a:prstGeom>
+          <a:noFill/>
+          <a:ln/>
+        </p:spPr>
+        <p:txBody>
+          <a:bodyPr wrap="square" lIns="0" tIns="0" rIns="0" bIns="0" rtlCol="0" anchor="ctr"/>
+          <a:lstStyle/>
+          <a:p>
+            <a:pPr indent="0" marL="0">
+              <a:buNone/>
+            </a:pPr>
+            <a:r>
+              <a:rPr lang="en-US" sz="900" b="1" dirty="0">
+                <a:solidFill>
+                  <a:srgbClr val="B04A2F"/>
+                </a:solidFill>
+                <a:latin typeface="Yu Gothic" pitchFamily="34" charset="0"/>
+                <a:ea typeface="Yu Gothic" pitchFamily="34" charset="-122"/>
+                <a:cs typeface="Yu Gothic" pitchFamily="34" charset="-120"/>
+              </a:rPr>
+              <a:t>90-105分</a:t>
+            </a:r>
+            <a:endParaRPr lang="en-US" sz="900" dirty="0"/>
+          </a:p>
+        </p:txBody>
+      </p:sp>
+      <p:sp>
+        <p:nvSpPr>
+          <p:cNvPr id="14" name="Text 12"/>
+          <p:cNvSpPr txBox="1"/>
+          <p:nvPr/>
+        </p:nvSpPr>
+        <p:spPr>
+          <a:xfrm>
+            <a:off x="7104888" y="5111496"/>
+            <a:ext cx="1956816" cy="384048"/>
+          </a:xfrm>
+          <a:prstGeom prst="rect">
+            <a:avLst/>
+          </a:prstGeom>
+          <a:noFill/>
+          <a:ln/>
+        </p:spPr>
+        <p:txBody>
+          <a:bodyPr wrap="square" lIns="0" tIns="0" rIns="0" bIns="0" rtlCol="0" anchor="ctr"/>
+          <a:lstStyle/>
+          <a:p>
+            <a:pPr indent="0" marL="0">
+              <a:buNone/>
+            </a:pPr>
+            <a:r>
+              <a:rPr lang="en-US" sz="1100" dirty="0">
+                <a:solidFill>
+                  <a:srgbClr val="23201D"/>
+                </a:solidFill>
+                <a:latin typeface="Yu Gothic" pitchFamily="34" charset="0"/>
+                <a:ea typeface="Yu Gothic" pitchFamily="34" charset="-122"/>
+                <a:cs typeface="Yu Gothic" pitchFamily="34" charset="-120"/>
+              </a:rPr>
+              <a:t>業務への組み込み</a:t>
+            </a:r>
+            <a:endParaRPr lang="en-US" sz="1100" dirty="0"/>
+          </a:p>
+        </p:txBody>
+      </p:sp>
+      <p:sp>
+        <p:nvSpPr>
+          <p:cNvPr id="15" name="Text 13"/>
+          <p:cNvSpPr txBox="1"/>
+          <p:nvPr/>
+        </p:nvSpPr>
+        <p:spPr>
+          <a:xfrm>
+            <a:off x="9153144" y="4873752"/>
+            <a:ext cx="1956816" cy="237744"/>
+          </a:xfrm>
+          <a:prstGeom prst="rect">
+            <a:avLst/>
+          </a:prstGeom>
+          <a:noFill/>
+          <a:ln/>
+        </p:spPr>
+        <p:txBody>
+          <a:bodyPr wrap="square" lIns="0" tIns="0" rIns="0" bIns="0" rtlCol="0" anchor="ctr"/>
+          <a:lstStyle/>
+          <a:p>
+            <a:pPr indent="0" marL="0">
+              <a:buNone/>
+            </a:pPr>
+            <a:r>
+              <a:rPr lang="en-US" sz="900" b="1" dirty="0">
+                <a:solidFill>
+                  <a:srgbClr val="B04A2F"/>
+                </a:solidFill>
+                <a:latin typeface="Yu Gothic" pitchFamily="34" charset="0"/>
+                <a:ea typeface="Yu Gothic" pitchFamily="34" charset="-122"/>
+                <a:cs typeface="Yu Gothic" pitchFamily="34" charset="-120"/>
+              </a:rPr>
+              <a:t>105-120分</a:t>
+            </a:r>
+            <a:endParaRPr lang="en-US" sz="900" dirty="0"/>
+          </a:p>
+        </p:txBody>
       </p:sp>
       <p:sp>
         <p:nvSpPr>
@@ -2853,34 +4522,34 @@
         </p:nvSpPr>
         <p:spPr>
           <a:xfrm>
-            <a:off x="1033272" y="4802124"/>
-            <a:ext cx="384048" cy="384048"/>
-          </a:xfrm>
-          <a:prstGeom prst="rect">
-            <a:avLst/>
-          </a:prstGeom>
-          <a:noFill/>
-          <a:ln/>
-        </p:spPr>
-        <p:txBody>
-          <a:bodyPr wrap="square" lIns="0" tIns="0" rIns="0" bIns="0" rtlCol="0" anchor="ctr"/>
-          <a:lstStyle/>
-          <a:p>
-            <a:pPr algn="ctr" indent="0" marL="0">
-              <a:buNone/>
-            </a:pPr>
-            <a:r>
-              <a:rPr lang="en-US" sz="1400" b="1" dirty="0">
-                <a:solidFill>
-                  <a:srgbClr val="FFFFFF"/>
-                </a:solidFill>
-                <a:latin typeface="Yu Gothic" pitchFamily="34" charset="0"/>
-                <a:ea typeface="Yu Gothic" pitchFamily="34" charset="-122"/>
-                <a:cs typeface="Yu Gothic" pitchFamily="34" charset="-120"/>
-              </a:rPr>
-              <a:t>3</a:t>
-            </a:r>
-            <a:endParaRPr lang="en-US" sz="1400" dirty="0"/>
+            <a:off x="9153144" y="5111496"/>
+            <a:ext cx="1956816" cy="384048"/>
+          </a:xfrm>
+          <a:prstGeom prst="rect">
+            <a:avLst/>
+          </a:prstGeom>
+          <a:noFill/>
+          <a:ln/>
+        </p:spPr>
+        <p:txBody>
+          <a:bodyPr wrap="square" lIns="0" tIns="0" rIns="0" bIns="0" rtlCol="0" anchor="ctr"/>
+          <a:lstStyle/>
+          <a:p>
+            <a:pPr indent="0" marL="0">
+              <a:buNone/>
+            </a:pPr>
+            <a:r>
+              <a:rPr lang="en-US" sz="1100" dirty="0">
+                <a:solidFill>
+                  <a:srgbClr val="23201D"/>
+                </a:solidFill>
+                <a:latin typeface="Yu Gothic" pitchFamily="34" charset="0"/>
+                <a:ea typeface="Yu Gothic" pitchFamily="34" charset="-122"/>
+                <a:cs typeface="Yu Gothic" pitchFamily="34" charset="-120"/>
+              </a:rPr>
+              <a:t>宿題・記録</a:t>
+            </a:r>
+            <a:endParaRPr lang="en-US" sz="1100" dirty="0"/>
           </a:p>
         </p:txBody>
       </p:sp>
@@ -2892,34 +4561,34 @@
         </p:nvSpPr>
         <p:spPr>
           <a:xfrm>
-            <a:off x="1645920" y="4501896"/>
-            <a:ext cx="3394253" cy="984504"/>
-          </a:xfrm>
-          <a:prstGeom prst="rect">
-            <a:avLst/>
-          </a:prstGeom>
-          <a:noFill/>
-          <a:ln/>
-        </p:spPr>
-        <p:txBody>
-          <a:bodyPr wrap="square" lIns="0" tIns="0" rIns="0" bIns="0" rtlCol="0" anchor="ctr"/>
-          <a:lstStyle/>
-          <a:p>
-            <a:pPr indent="0" marL="0">
-              <a:buNone/>
-            </a:pPr>
-            <a:r>
-              <a:rPr lang="en-US" sz="1500" b="1" dirty="0">
-                <a:solidFill>
-                  <a:srgbClr val="23201D"/>
-                </a:solidFill>
-                <a:latin typeface="Yu Gothic" pitchFamily="34" charset="0"/>
-                <a:ea typeface="Yu Gothic" pitchFamily="34" charset="-122"/>
-                <a:cs typeface="Yu Gothic" pitchFamily="34" charset="-120"/>
-              </a:rPr>
-              <a:t>顧客対応の一次回答役</a:t>
-            </a:r>
-            <a:endParaRPr lang="en-US" sz="1500" dirty="0"/>
+            <a:off x="777240" y="6382512"/>
+            <a:ext cx="7424928" cy="256032"/>
+          </a:xfrm>
+          <a:prstGeom prst="rect">
+            <a:avLst/>
+          </a:prstGeom>
+          <a:noFill/>
+          <a:ln/>
+        </p:spPr>
+        <p:txBody>
+          <a:bodyPr wrap="square" lIns="0" tIns="0" rIns="0" bIns="0" rtlCol="0" anchor="ctr"/>
+          <a:lstStyle/>
+          <a:p>
+            <a:pPr indent="0" marL="0">
+              <a:buNone/>
+            </a:pPr>
+            <a:r>
+              <a:rPr lang="en-US" sz="900" dirty="0">
+                <a:solidFill>
+                  <a:srgbClr val="8A8177"/>
+                </a:solidFill>
+                <a:latin typeface="Yu Gothic" pitchFamily="34" charset="0"/>
+                <a:ea typeface="Yu Gothic" pitchFamily="34" charset="-122"/>
+                <a:cs typeface="Yu Gothic" pitchFamily="34" charset="-120"/>
+              </a:rPr>
+              <a:t>第5回　自社専用AIをつくる</a:t>
+            </a:r>
+            <a:endParaRPr lang="en-US" sz="900" dirty="0"/>
           </a:p>
         </p:txBody>
       </p:sp>
@@ -2931,101 +4600,20 @@
         </p:nvSpPr>
         <p:spPr>
           <a:xfrm>
-            <a:off x="5146243" y="4501896"/>
-            <a:ext cx="5963717" cy="984504"/>
-          </a:xfrm>
-          <a:prstGeom prst="rect">
-            <a:avLst/>
-          </a:prstGeom>
-          <a:noFill/>
-          <a:ln/>
-        </p:spPr>
-        <p:txBody>
-          <a:bodyPr wrap="square" lIns="0" tIns="0" rIns="0" bIns="0" rtlCol="0" anchor="ctr"/>
-          <a:lstStyle/>
-          <a:p>
-            <a:pPr indent="0" marL="0">
-              <a:lnSpc>
-                <a:spcPct val="130000"/>
-              </a:lnSpc>
-              <a:buNone/>
-            </a:pPr>
-            <a:r>
-              <a:rPr lang="en-US" sz="1250" dirty="0">
-                <a:solidFill>
-                  <a:srgbClr val="5A534A"/>
-                </a:solidFill>
-                <a:latin typeface="Yu Gothic" pitchFamily="34" charset="0"/>
-                <a:ea typeface="Yu Gothic" pitchFamily="34" charset="-122"/>
-                <a:cs typeface="Yu Gothic" pitchFamily="34" charset="-120"/>
-              </a:rPr>
-              <a:t>FAQ・過去のやり取りを載せます</a:t>
-            </a:r>
-            <a:endParaRPr lang="en-US" sz="1250" dirty="0"/>
-          </a:p>
-        </p:txBody>
-      </p:sp>
-      <p:sp>
-        <p:nvSpPr>
-          <p:cNvPr id="19" name="Text 17"/>
-          <p:cNvSpPr txBox="1"/>
-          <p:nvPr/>
-        </p:nvSpPr>
-        <p:spPr>
-          <a:xfrm>
-            <a:off x="777240" y="5715000"/>
-            <a:ext cx="10607040" cy="457200"/>
-          </a:xfrm>
-          <a:prstGeom prst="rect">
-            <a:avLst/>
-          </a:prstGeom>
-          <a:noFill/>
-          <a:ln/>
-        </p:spPr>
-        <p:txBody>
-          <a:bodyPr wrap="square" lIns="0" tIns="0" rIns="0" bIns="0" rtlCol="0" anchor="ctr"/>
-          <a:lstStyle/>
-          <a:p>
-            <a:pPr indent="0" marL="0">
-              <a:buNone/>
-            </a:pPr>
-            <a:r>
-              <a:rPr lang="en-US" sz="1200" b="1" dirty="0">
-                <a:solidFill>
-                  <a:srgbClr val="B04A2F"/>
-                </a:solidFill>
-                <a:latin typeface="Yu Gothic" pitchFamily="34" charset="0"/>
-                <a:ea typeface="Yu Gothic" pitchFamily="34" charset="-122"/>
-                <a:cs typeface="Yu Gothic" pitchFamily="34" charset="-120"/>
-              </a:rPr>
-              <a:t>選ぶのはご自身です。こちらでは決めません。</a:t>
-            </a:r>
-            <a:endParaRPr lang="en-US" sz="1200" dirty="0"/>
-          </a:p>
-        </p:txBody>
-      </p:sp>
-      <p:sp>
-        <p:nvSpPr>
-          <p:cNvPr id="20" name="Text 18"/>
-          <p:cNvSpPr txBox="1"/>
-          <p:nvPr/>
-        </p:nvSpPr>
-        <p:spPr>
-          <a:xfrm>
-            <a:off x="777240" y="6355080"/>
-            <a:ext cx="7424928" cy="274320"/>
-          </a:xfrm>
-          <a:prstGeom prst="rect">
-            <a:avLst/>
-          </a:prstGeom>
-          <a:noFill/>
-          <a:ln/>
-        </p:spPr>
-        <p:txBody>
-          <a:bodyPr wrap="square" lIns="0" tIns="0" rIns="0" bIns="0" rtlCol="0" anchor="ctr"/>
-          <a:lstStyle/>
-          <a:p>
-            <a:pPr indent="0" marL="0">
+            <a:off x="8202168" y="6382512"/>
+            <a:ext cx="3182112" cy="256032"/>
+          </a:xfrm>
+          <a:prstGeom prst="rect">
+            <a:avLst/>
+          </a:prstGeom>
+          <a:noFill/>
+          <a:ln/>
+        </p:spPr>
+        <p:txBody>
+          <a:bodyPr wrap="square" lIns="0" tIns="0" rIns="0" bIns="0" rtlCol="0" anchor="ctr"/>
+          <a:lstStyle/>
+          <a:p>
+            <a:pPr algn="r" indent="0" marL="0">
               <a:buNone/>
             </a:pPr>
             <a:r>
@@ -3037,46 +4625,7 @@
                 <a:ea typeface="Yu Gothic" pitchFamily="34" charset="-122"/>
                 <a:cs typeface="Yu Gothic" pitchFamily="34" charset="-120"/>
               </a:rPr>
-              <a:t>第5回　自社専用AIをつくる</a:t>
-            </a:r>
-            <a:endParaRPr lang="en-US" sz="900" dirty="0"/>
-          </a:p>
-        </p:txBody>
-      </p:sp>
-      <p:sp>
-        <p:nvSpPr>
-          <p:cNvPr id="21" name="Text 19"/>
-          <p:cNvSpPr txBox="1"/>
-          <p:nvPr/>
-        </p:nvSpPr>
-        <p:spPr>
-          <a:xfrm>
-            <a:off x="8202168" y="6355080"/>
-            <a:ext cx="3182112" cy="274320"/>
-          </a:xfrm>
-          <a:prstGeom prst="rect">
-            <a:avLst/>
-          </a:prstGeom>
-          <a:noFill/>
-          <a:ln/>
-        </p:spPr>
-        <p:txBody>
-          <a:bodyPr wrap="square" lIns="0" tIns="0" rIns="0" bIns="0" rtlCol="0" anchor="ctr"/>
-          <a:lstStyle/>
-          <a:p>
-            <a:pPr algn="r" indent="0" marL="0">
-              <a:buNone/>
-            </a:pPr>
-            <a:r>
-              <a:rPr lang="en-US" sz="900" dirty="0">
-                <a:solidFill>
-                  <a:srgbClr val="8A8177"/>
-                </a:solidFill>
-                <a:latin typeface="Yu Gothic" pitchFamily="34" charset="0"/>
-                <a:ea typeface="Yu Gothic" pitchFamily="34" charset="-122"/>
-                <a:cs typeface="Yu Gothic" pitchFamily="34" charset="-120"/>
-              </a:rPr>
-              <a:t>考え方</a:t>
+              <a:t>ゴール</a:t>
             </a:r>
             <a:endParaRPr lang="en-US" sz="900" dirty="0"/>
           </a:p>
@@ -3122,7 +4671,7 @@
         </p:nvSpPr>
         <p:spPr>
           <a:xfrm>
-            <a:off x="777240" y="640080"/>
+            <a:off x="777240" y="566928"/>
             <a:ext cx="10607040" cy="274320"/>
           </a:xfrm>
           <a:prstGeom prst="rect">
@@ -3147,7 +4696,7 @@
                 <a:ea typeface="Yu Gothic" pitchFamily="34" charset="-122"/>
                 <a:cs typeface="Yu Gothic" pitchFamily="34" charset="-120"/>
               </a:rPr>
-              <a:t>実演</a:t>
+              <a:t>考え方</a:t>
             </a:r>
             <a:endParaRPr lang="en-US" sz="1100" dirty="0"/>
           </a:p>
@@ -3161,7 +4710,7 @@
         </p:nvSpPr>
         <p:spPr>
           <a:xfrm>
-            <a:off x="777240" y="960120"/>
+            <a:off x="777240" y="896112"/>
             <a:ext cx="10607040" cy="640080"/>
           </a:xfrm>
           <a:prstGeom prst="rect">
@@ -3178,7 +4727,7 @@
               <a:buNone/>
             </a:pPr>
             <a:r>
-              <a:rPr lang="en-US" sz="2700" b="1" dirty="0">
+              <a:rPr lang="en-US" sz="2600" b="1" dirty="0">
                 <a:solidFill>
                   <a:srgbClr val="23201D"/>
                 </a:solidFill>
@@ -3186,9 +4735,9 @@
                 <a:ea typeface="Yu Gothic" pitchFamily="34" charset="-122"/>
                 <a:cs typeface="Yu Gothic" pitchFamily="34" charset="-120"/>
               </a:rPr>
-              <a:t>実務で使えるかを決める3行</a:t>
-            </a:r>
-            <a:endParaRPr lang="en-US" sz="2700" dirty="0"/>
+              <a:t>何を作るか — 棚卸しの上位から選びます</a:t>
+            </a:r>
+            <a:endParaRPr lang="en-US" sz="2600" dirty="0"/>
           </a:p>
         </p:txBody>
       </p:sp>
@@ -3200,18 +4749,18 @@
         </p:nvSpPr>
         <p:spPr>
           <a:xfrm>
-            <a:off x="777240" y="1828800"/>
-            <a:ext cx="4983480" cy="3566160"/>
+            <a:off x="777240" y="1700784"/>
+            <a:ext cx="10607040" cy="1188720"/>
           </a:xfrm>
           <a:prstGeom prst="rect">
             <a:avLst/>
           </a:prstGeom>
           <a:solidFill>
-            <a:srgbClr val="EDE7DB"/>
+            <a:srgbClr val="FFFFFF"/>
           </a:solidFill>
-          <a:ln w="15875">
+          <a:ln w="12700">
             <a:solidFill>
-              <a:srgbClr val="8A8177"/>
+              <a:srgbClr val="EDE7DB"/>
             </a:solidFill>
             <a:prstDash val="solid"/>
           </a:ln>
@@ -3225,413 +4774,8 @@
         </p:nvSpPr>
         <p:spPr>
           <a:xfrm>
-            <a:off x="777240" y="1828800"/>
-            <a:ext cx="4983480" cy="566928"/>
-          </a:xfrm>
-          <a:prstGeom prst="rect">
-            <a:avLst/>
-          </a:prstGeom>
-          <a:solidFill>
-            <a:srgbClr val="8A8177"/>
-          </a:solidFill>
-          <a:ln w="12700">
-            <a:solidFill>
-              <a:srgbClr val="333333"/>
-            </a:solidFill>
-            <a:prstDash val="solid"/>
-          </a:ln>
-        </p:spPr>
-      </p:sp>
-      <p:sp>
-        <p:nvSpPr>
-          <p:cNvPr id="6" name="Text 4"/>
-          <p:cNvSpPr txBox="1"/>
-          <p:nvPr/>
-        </p:nvSpPr>
-        <p:spPr>
-          <a:xfrm>
-            <a:off x="1005840" y="1883664"/>
-            <a:ext cx="4526280" cy="457200"/>
-          </a:xfrm>
-          <a:prstGeom prst="rect">
-            <a:avLst/>
-          </a:prstGeom>
-          <a:noFill/>
-          <a:ln/>
-        </p:spPr>
-        <p:txBody>
-          <a:bodyPr wrap="square" lIns="0" tIns="0" rIns="0" bIns="0" rtlCol="0" anchor="ctr"/>
-          <a:lstStyle/>
-          <a:p>
-            <a:pPr indent="0" marL="0">
-              <a:buNone/>
-            </a:pPr>
-            <a:r>
-              <a:rPr lang="en-US" sz="1400" b="1" dirty="0">
-                <a:solidFill>
-                  <a:srgbClr val="FFFFFF"/>
-                </a:solidFill>
-                <a:latin typeface="Yu Gothic" pitchFamily="34" charset="0"/>
-                <a:ea typeface="Yu Gothic" pitchFamily="34" charset="-122"/>
-                <a:cs typeface="Yu Gothic" pitchFamily="34" charset="-120"/>
-              </a:rPr>
-              <a:t>これが無いと</a:t>
-            </a:r>
-            <a:endParaRPr lang="en-US" sz="1400" dirty="0"/>
-          </a:p>
-        </p:txBody>
-      </p:sp>
-      <p:sp>
-        <p:nvSpPr>
-          <p:cNvPr id="7" name="Text 5"/>
-          <p:cNvSpPr txBox="1"/>
-          <p:nvPr/>
-        </p:nvSpPr>
-        <p:spPr>
-          <a:xfrm>
-            <a:off x="1097280" y="2606040"/>
-            <a:ext cx="4343400" cy="548640"/>
-          </a:xfrm>
-          <a:prstGeom prst="rect">
-            <a:avLst/>
-          </a:prstGeom>
-          <a:noFill/>
-          <a:ln/>
-        </p:spPr>
-        <p:txBody>
-          <a:bodyPr wrap="square" lIns="0" tIns="0" rIns="0" bIns="0" rtlCol="0" anchor="ctr"/>
-          <a:lstStyle/>
-          <a:p>
-            <a:pPr indent="0" marL="0">
-              <a:lnSpc>
-                <a:spcPct val="125000"/>
-              </a:lnSpc>
-              <a:buNone/>
-            </a:pPr>
-            <a:r>
-              <a:rPr lang="en-US" sz="1300" dirty="0">
-                <a:solidFill>
-                  <a:srgbClr val="23201D"/>
-                </a:solidFill>
-                <a:latin typeface="Yu Gothic" pitchFamily="34" charset="0"/>
-                <a:ea typeface="Yu Gothic" pitchFamily="34" charset="-122"/>
-                <a:cs typeface="Yu Gothic" pitchFamily="34" charset="-120"/>
-              </a:rPr>
-              <a:t>資料に書いていないことを、それらしく答える</a:t>
-            </a:r>
-            <a:endParaRPr lang="en-US" sz="1300" dirty="0"/>
-          </a:p>
-        </p:txBody>
-      </p:sp>
-      <p:sp>
-        <p:nvSpPr>
-          <p:cNvPr id="8" name="Text 6"/>
-          <p:cNvSpPr txBox="1"/>
-          <p:nvPr/>
-        </p:nvSpPr>
-        <p:spPr>
-          <a:xfrm>
-            <a:off x="1097280" y="3172968"/>
-            <a:ext cx="4343400" cy="548640"/>
-          </a:xfrm>
-          <a:prstGeom prst="rect">
-            <a:avLst/>
-          </a:prstGeom>
-          <a:noFill/>
-          <a:ln/>
-        </p:spPr>
-        <p:txBody>
-          <a:bodyPr wrap="square" lIns="0" tIns="0" rIns="0" bIns="0" rtlCol="0" anchor="ctr"/>
-          <a:lstStyle/>
-          <a:p>
-            <a:pPr indent="0" marL="0">
-              <a:lnSpc>
-                <a:spcPct val="125000"/>
-              </a:lnSpc>
-              <a:buNone/>
-            </a:pPr>
-            <a:r>
-              <a:rPr lang="en-US" sz="1300" dirty="0">
-                <a:solidFill>
-                  <a:srgbClr val="23201D"/>
-                </a:solidFill>
-                <a:latin typeface="Yu Gothic" pitchFamily="34" charset="0"/>
-                <a:ea typeface="Yu Gothic" pitchFamily="34" charset="-122"/>
-                <a:cs typeface="Yu Gothic" pitchFamily="34" charset="-120"/>
-              </a:rPr>
-              <a:t>間違いに気づけない</a:t>
-            </a:r>
-            <a:endParaRPr lang="en-US" sz="1300" dirty="0"/>
-          </a:p>
-        </p:txBody>
-      </p:sp>
-      <p:sp>
-        <p:nvSpPr>
-          <p:cNvPr id="9" name="Text 7"/>
-          <p:cNvSpPr txBox="1"/>
-          <p:nvPr/>
-        </p:nvSpPr>
-        <p:spPr>
-          <a:xfrm>
-            <a:off x="1097280" y="3739896"/>
-            <a:ext cx="4343400" cy="548640"/>
-          </a:xfrm>
-          <a:prstGeom prst="rect">
-            <a:avLst/>
-          </a:prstGeom>
-          <a:noFill/>
-          <a:ln/>
-        </p:spPr>
-        <p:txBody>
-          <a:bodyPr wrap="square" lIns="0" tIns="0" rIns="0" bIns="0" rtlCol="0" anchor="ctr"/>
-          <a:lstStyle/>
-          <a:p>
-            <a:pPr indent="0" marL="0">
-              <a:lnSpc>
-                <a:spcPct val="125000"/>
-              </a:lnSpc>
-              <a:buNone/>
-            </a:pPr>
-            <a:r>
-              <a:rPr lang="en-US" sz="1300" dirty="0">
-                <a:solidFill>
-                  <a:srgbClr val="23201D"/>
-                </a:solidFill>
-                <a:latin typeface="Yu Gothic" pitchFamily="34" charset="0"/>
-                <a:ea typeface="Yu Gothic" pitchFamily="34" charset="-122"/>
-                <a:cs typeface="Yu Gothic" pitchFamily="34" charset="-120"/>
-              </a:rPr>
-              <a:t>一度事故ると、社内で二度と使われない</a:t>
-            </a:r>
-            <a:endParaRPr lang="en-US" sz="1300" dirty="0"/>
-          </a:p>
-        </p:txBody>
-      </p:sp>
-      <p:sp>
-        <p:nvSpPr>
-          <p:cNvPr id="10" name="Shape 8"/>
-          <p:cNvSpPr/>
-          <p:nvPr/>
-        </p:nvSpPr>
-        <p:spPr>
-          <a:xfrm>
-            <a:off x="6400800" y="1828800"/>
-            <a:ext cx="4983480" cy="3566160"/>
-          </a:xfrm>
-          <a:prstGeom prst="rect">
-            <a:avLst/>
-          </a:prstGeom>
-          <a:solidFill>
-            <a:srgbClr val="FFFFFF"/>
-          </a:solidFill>
-          <a:ln w="15875">
-            <a:solidFill>
-              <a:srgbClr val="3B6B4A"/>
-            </a:solidFill>
-            <a:prstDash val="solid"/>
-          </a:ln>
-        </p:spPr>
-      </p:sp>
-      <p:sp>
-        <p:nvSpPr>
-          <p:cNvPr id="11" name="Shape 9"/>
-          <p:cNvSpPr/>
-          <p:nvPr/>
-        </p:nvSpPr>
-        <p:spPr>
-          <a:xfrm>
-            <a:off x="6400800" y="1828800"/>
-            <a:ext cx="4983480" cy="566928"/>
-          </a:xfrm>
-          <a:prstGeom prst="rect">
-            <a:avLst/>
-          </a:prstGeom>
-          <a:solidFill>
-            <a:srgbClr val="3B6B4A"/>
-          </a:solidFill>
-          <a:ln w="12700">
-            <a:solidFill>
-              <a:srgbClr val="333333"/>
-            </a:solidFill>
-            <a:prstDash val="solid"/>
-          </a:ln>
-        </p:spPr>
-      </p:sp>
-      <p:sp>
-        <p:nvSpPr>
-          <p:cNvPr id="12" name="Text 10"/>
-          <p:cNvSpPr txBox="1"/>
-          <p:nvPr/>
-        </p:nvSpPr>
-        <p:spPr>
-          <a:xfrm>
-            <a:off x="6629400" y="1883664"/>
-            <a:ext cx="4526280" cy="457200"/>
-          </a:xfrm>
-          <a:prstGeom prst="rect">
-            <a:avLst/>
-          </a:prstGeom>
-          <a:noFill/>
-          <a:ln/>
-        </p:spPr>
-        <p:txBody>
-          <a:bodyPr wrap="square" lIns="0" tIns="0" rIns="0" bIns="0" rtlCol="0" anchor="ctr"/>
-          <a:lstStyle/>
-          <a:p>
-            <a:pPr indent="0" marL="0">
-              <a:buNone/>
-            </a:pPr>
-            <a:r>
-              <a:rPr lang="en-US" sz="1400" b="1" dirty="0">
-                <a:solidFill>
-                  <a:srgbClr val="FFFFFF"/>
-                </a:solidFill>
-                <a:latin typeface="Yu Gothic" pitchFamily="34" charset="0"/>
-                <a:ea typeface="Yu Gothic" pitchFamily="34" charset="-122"/>
-                <a:cs typeface="Yu Gothic" pitchFamily="34" charset="-120"/>
-              </a:rPr>
-              <a:t>指示文に必ず入れる3行</a:t>
-            </a:r>
-            <a:endParaRPr lang="en-US" sz="1400" dirty="0"/>
-          </a:p>
-        </p:txBody>
-      </p:sp>
-      <p:sp>
-        <p:nvSpPr>
-          <p:cNvPr id="13" name="Text 11"/>
-          <p:cNvSpPr txBox="1"/>
-          <p:nvPr/>
-        </p:nvSpPr>
-        <p:spPr>
-          <a:xfrm>
-            <a:off x="6720840" y="2606040"/>
-            <a:ext cx="4343400" cy="548640"/>
-          </a:xfrm>
-          <a:prstGeom prst="rect">
-            <a:avLst/>
-          </a:prstGeom>
-          <a:noFill/>
-          <a:ln/>
-        </p:spPr>
-        <p:txBody>
-          <a:bodyPr wrap="square" lIns="0" tIns="0" rIns="0" bIns="0" rtlCol="0" anchor="ctr"/>
-          <a:lstStyle/>
-          <a:p>
-            <a:pPr indent="0" marL="0">
-              <a:lnSpc>
-                <a:spcPct val="125000"/>
-              </a:lnSpc>
-              <a:buNone/>
-            </a:pPr>
-            <a:r>
-              <a:rPr lang="en-US" sz="1300" dirty="0">
-                <a:solidFill>
-                  <a:srgbClr val="23201D"/>
-                </a:solidFill>
-                <a:latin typeface="Yu Gothic" pitchFamily="34" charset="0"/>
-                <a:ea typeface="Yu Gothic" pitchFamily="34" charset="-122"/>
-                <a:cs typeface="Yu Gothic" pitchFamily="34" charset="-120"/>
-              </a:rPr>
-              <a:t>資料に書かれている内容だけから答える</a:t>
-            </a:r>
-            <a:endParaRPr lang="en-US" sz="1300" dirty="0"/>
-          </a:p>
-        </p:txBody>
-      </p:sp>
-      <p:sp>
-        <p:nvSpPr>
-          <p:cNvPr id="14" name="Text 12"/>
-          <p:cNvSpPr txBox="1"/>
-          <p:nvPr/>
-        </p:nvSpPr>
-        <p:spPr>
-          <a:xfrm>
-            <a:off x="6720840" y="3172968"/>
-            <a:ext cx="4343400" cy="548640"/>
-          </a:xfrm>
-          <a:prstGeom prst="rect">
-            <a:avLst/>
-          </a:prstGeom>
-          <a:noFill/>
-          <a:ln/>
-        </p:spPr>
-        <p:txBody>
-          <a:bodyPr wrap="square" lIns="0" tIns="0" rIns="0" bIns="0" rtlCol="0" anchor="ctr"/>
-          <a:lstStyle/>
-          <a:p>
-            <a:pPr indent="0" marL="0">
-              <a:lnSpc>
-                <a:spcPct val="125000"/>
-              </a:lnSpc>
-              <a:buNone/>
-            </a:pPr>
-            <a:r>
-              <a:rPr lang="en-US" sz="1300" dirty="0">
-                <a:solidFill>
-                  <a:srgbClr val="23201D"/>
-                </a:solidFill>
-                <a:latin typeface="Yu Gothic" pitchFamily="34" charset="0"/>
-                <a:ea typeface="Yu Gothic" pitchFamily="34" charset="-122"/>
-                <a:cs typeface="Yu Gothic" pitchFamily="34" charset="-120"/>
-              </a:rPr>
-              <a:t>記載がなければ「記載がありません」と答える</a:t>
-            </a:r>
-            <a:endParaRPr lang="en-US" sz="1300" dirty="0"/>
-          </a:p>
-        </p:txBody>
-      </p:sp>
-      <p:sp>
-        <p:nvSpPr>
-          <p:cNvPr id="15" name="Text 13"/>
-          <p:cNvSpPr txBox="1"/>
-          <p:nvPr/>
-        </p:nvSpPr>
-        <p:spPr>
-          <a:xfrm>
-            <a:off x="6720840" y="3739896"/>
-            <a:ext cx="4343400" cy="548640"/>
-          </a:xfrm>
-          <a:prstGeom prst="rect">
-            <a:avLst/>
-          </a:prstGeom>
-          <a:noFill/>
-          <a:ln/>
-        </p:spPr>
-        <p:txBody>
-          <a:bodyPr wrap="square" lIns="0" tIns="0" rIns="0" bIns="0" rtlCol="0" anchor="ctr"/>
-          <a:lstStyle/>
-          <a:p>
-            <a:pPr indent="0" marL="0">
-              <a:lnSpc>
-                <a:spcPct val="125000"/>
-              </a:lnSpc>
-              <a:buNone/>
-            </a:pPr>
-            <a:r>
-              <a:rPr lang="en-US" sz="1300" dirty="0">
-                <a:solidFill>
-                  <a:srgbClr val="23201D"/>
-                </a:solidFill>
-                <a:latin typeface="Yu Gothic" pitchFamily="34" charset="0"/>
-                <a:ea typeface="Yu Gothic" pitchFamily="34" charset="-122"/>
-                <a:cs typeface="Yu Gothic" pitchFamily="34" charset="-120"/>
-              </a:rPr>
-              <a:t>根拠になった資料名を末尾に書く</a:t>
-            </a:r>
-            <a:endParaRPr lang="en-US" sz="1300" dirty="0"/>
-          </a:p>
-        </p:txBody>
-      </p:sp>
-      <p:sp>
-        <p:nvSpPr>
-          <p:cNvPr id="16" name="Shape 14"/>
-          <p:cNvSpPr/>
-          <p:nvPr/>
-        </p:nvSpPr>
-        <p:spPr>
-          <a:xfrm>
-            <a:off x="5815584" y="3337560"/>
-            <a:ext cx="512064" cy="512064"/>
+            <a:off x="1014984" y="2112264"/>
+            <a:ext cx="365760" cy="365760"/>
           </a:xfrm>
           <a:prstGeom prst="ellipse">
             <a:avLst/>
@@ -3649,40 +4793,419 @@
       </p:sp>
       <p:sp>
         <p:nvSpPr>
+          <p:cNvPr id="6" name="Text 4"/>
+          <p:cNvSpPr txBox="1"/>
+          <p:nvPr/>
+        </p:nvSpPr>
+        <p:spPr>
+          <a:xfrm>
+            <a:off x="1014984" y="2112264"/>
+            <a:ext cx="365760" cy="365760"/>
+          </a:xfrm>
+          <a:prstGeom prst="rect">
+            <a:avLst/>
+          </a:prstGeom>
+          <a:noFill/>
+          <a:ln/>
+        </p:spPr>
+        <p:txBody>
+          <a:bodyPr wrap="square" lIns="0" tIns="0" rIns="0" bIns="0" rtlCol="0" anchor="ctr"/>
+          <a:lstStyle/>
+          <a:p>
+            <a:pPr algn="ctr" indent="0" marL="0">
+              <a:buNone/>
+            </a:pPr>
+            <a:r>
+              <a:rPr lang="en-US" sz="1300" b="1" dirty="0">
+                <a:solidFill>
+                  <a:srgbClr val="FFFFFF"/>
+                </a:solidFill>
+                <a:latin typeface="Yu Gothic" pitchFamily="34" charset="0"/>
+                <a:ea typeface="Yu Gothic" pitchFamily="34" charset="-122"/>
+                <a:cs typeface="Yu Gothic" pitchFamily="34" charset="-120"/>
+              </a:rPr>
+              <a:t>1</a:t>
+            </a:r>
+            <a:endParaRPr lang="en-US" sz="1300" dirty="0"/>
+          </a:p>
+        </p:txBody>
+      </p:sp>
+      <p:sp>
+        <p:nvSpPr>
+          <p:cNvPr id="7" name="Text 5"/>
+          <p:cNvSpPr txBox="1"/>
+          <p:nvPr/>
+        </p:nvSpPr>
+        <p:spPr>
+          <a:xfrm>
+            <a:off x="1600200" y="1773936"/>
+            <a:ext cx="3182112" cy="1042416"/>
+          </a:xfrm>
+          <a:prstGeom prst="rect">
+            <a:avLst/>
+          </a:prstGeom>
+          <a:noFill/>
+          <a:ln/>
+        </p:spPr>
+        <p:txBody>
+          <a:bodyPr wrap="square" lIns="0" tIns="0" rIns="0" bIns="0" rtlCol="0" anchor="ctr"/>
+          <a:lstStyle/>
+          <a:p>
+            <a:pPr indent="0" marL="0">
+              <a:buNone/>
+            </a:pPr>
+            <a:r>
+              <a:rPr lang="en-US" sz="1450" b="1" dirty="0">
+                <a:solidFill>
+                  <a:srgbClr val="23201D"/>
+                </a:solidFill>
+                <a:latin typeface="Yu Gothic" pitchFamily="34" charset="0"/>
+                <a:ea typeface="Yu Gothic" pitchFamily="34" charset="-122"/>
+                <a:cs typeface="Yu Gothic" pitchFamily="34" charset="-120"/>
+              </a:rPr>
+              <a:t>見積・提案の下書き役</a:t>
+            </a:r>
+            <a:endParaRPr lang="en-US" sz="1450" dirty="0"/>
+          </a:p>
+        </p:txBody>
+      </p:sp>
+      <p:sp>
+        <p:nvSpPr>
+          <p:cNvPr id="8" name="Text 6"/>
+          <p:cNvSpPr txBox="1"/>
+          <p:nvPr/>
+        </p:nvSpPr>
+        <p:spPr>
+          <a:xfrm>
+            <a:off x="4888382" y="1773936"/>
+            <a:ext cx="6267298" cy="1042416"/>
+          </a:xfrm>
+          <a:prstGeom prst="rect">
+            <a:avLst/>
+          </a:prstGeom>
+          <a:noFill/>
+          <a:ln/>
+        </p:spPr>
+        <p:txBody>
+          <a:bodyPr wrap="square" lIns="0" tIns="0" rIns="0" bIns="0" rtlCol="0" anchor="ctr"/>
+          <a:lstStyle/>
+          <a:p>
+            <a:pPr indent="0" marL="0">
+              <a:lnSpc>
+                <a:spcPct val="130000"/>
+              </a:lnSpc>
+              <a:buNone/>
+            </a:pPr>
+            <a:r>
+              <a:rPr lang="en-US" sz="1200" dirty="0">
+                <a:solidFill>
+                  <a:srgbClr val="5A534A"/>
+                </a:solidFill>
+                <a:latin typeface="Yu Gothic" pitchFamily="34" charset="0"/>
+                <a:ea typeface="Yu Gothic" pitchFamily="34" charset="-122"/>
+                <a:cs typeface="Yu Gothic" pitchFamily="34" charset="-120"/>
+              </a:rPr>
+              <a:t>過去の見積書と価格表を載せます。営業が最も欲しがります</a:t>
+            </a:r>
+            <a:endParaRPr lang="en-US" sz="1200" dirty="0"/>
+          </a:p>
+        </p:txBody>
+      </p:sp>
+      <p:sp>
+        <p:nvSpPr>
+          <p:cNvPr id="9" name="Shape 7"/>
+          <p:cNvSpPr/>
+          <p:nvPr/>
+        </p:nvSpPr>
+        <p:spPr>
+          <a:xfrm>
+            <a:off x="777240" y="3017520"/>
+            <a:ext cx="10607040" cy="1188720"/>
+          </a:xfrm>
+          <a:prstGeom prst="rect">
+            <a:avLst/>
+          </a:prstGeom>
+          <a:solidFill>
+            <a:srgbClr val="FFFFFF"/>
+          </a:solidFill>
+          <a:ln w="12700">
+            <a:solidFill>
+              <a:srgbClr val="EDE7DB"/>
+            </a:solidFill>
+            <a:prstDash val="solid"/>
+          </a:ln>
+        </p:spPr>
+      </p:sp>
+      <p:sp>
+        <p:nvSpPr>
+          <p:cNvPr id="10" name="Shape 8"/>
+          <p:cNvSpPr/>
+          <p:nvPr/>
+        </p:nvSpPr>
+        <p:spPr>
+          <a:xfrm>
+            <a:off x="1014984" y="3429000"/>
+            <a:ext cx="365760" cy="365760"/>
+          </a:xfrm>
+          <a:prstGeom prst="ellipse">
+            <a:avLst/>
+          </a:prstGeom>
+          <a:solidFill>
+            <a:srgbClr val="B04A2F"/>
+          </a:solidFill>
+          <a:ln w="12700">
+            <a:solidFill>
+              <a:srgbClr val="333333"/>
+            </a:solidFill>
+            <a:prstDash val="solid"/>
+          </a:ln>
+        </p:spPr>
+      </p:sp>
+      <p:sp>
+        <p:nvSpPr>
+          <p:cNvPr id="11" name="Text 9"/>
+          <p:cNvSpPr txBox="1"/>
+          <p:nvPr/>
+        </p:nvSpPr>
+        <p:spPr>
+          <a:xfrm>
+            <a:off x="1014984" y="3429000"/>
+            <a:ext cx="365760" cy="365760"/>
+          </a:xfrm>
+          <a:prstGeom prst="rect">
+            <a:avLst/>
+          </a:prstGeom>
+          <a:noFill/>
+          <a:ln/>
+        </p:spPr>
+        <p:txBody>
+          <a:bodyPr wrap="square" lIns="0" tIns="0" rIns="0" bIns="0" rtlCol="0" anchor="ctr"/>
+          <a:lstStyle/>
+          <a:p>
+            <a:pPr algn="ctr" indent="0" marL="0">
+              <a:buNone/>
+            </a:pPr>
+            <a:r>
+              <a:rPr lang="en-US" sz="1300" b="1" dirty="0">
+                <a:solidFill>
+                  <a:srgbClr val="FFFFFF"/>
+                </a:solidFill>
+                <a:latin typeface="Yu Gothic" pitchFamily="34" charset="0"/>
+                <a:ea typeface="Yu Gothic" pitchFamily="34" charset="-122"/>
+                <a:cs typeface="Yu Gothic" pitchFamily="34" charset="-120"/>
+              </a:rPr>
+              <a:t>2</a:t>
+            </a:r>
+            <a:endParaRPr lang="en-US" sz="1300" dirty="0"/>
+          </a:p>
+        </p:txBody>
+      </p:sp>
+      <p:sp>
+        <p:nvSpPr>
+          <p:cNvPr id="12" name="Text 10"/>
+          <p:cNvSpPr txBox="1"/>
+          <p:nvPr/>
+        </p:nvSpPr>
+        <p:spPr>
+          <a:xfrm>
+            <a:off x="1600200" y="3090672"/>
+            <a:ext cx="3182112" cy="1042416"/>
+          </a:xfrm>
+          <a:prstGeom prst="rect">
+            <a:avLst/>
+          </a:prstGeom>
+          <a:noFill/>
+          <a:ln/>
+        </p:spPr>
+        <p:txBody>
+          <a:bodyPr wrap="square" lIns="0" tIns="0" rIns="0" bIns="0" rtlCol="0" anchor="ctr"/>
+          <a:lstStyle/>
+          <a:p>
+            <a:pPr indent="0" marL="0">
+              <a:buNone/>
+            </a:pPr>
+            <a:r>
+              <a:rPr lang="en-US" sz="1450" b="1" dirty="0">
+                <a:solidFill>
+                  <a:srgbClr val="23201D"/>
+                </a:solidFill>
+                <a:latin typeface="Yu Gothic" pitchFamily="34" charset="0"/>
+                <a:ea typeface="Yu Gothic" pitchFamily="34" charset="-122"/>
+                <a:cs typeface="Yu Gothic" pitchFamily="34" charset="-120"/>
+              </a:rPr>
+              <a:t>社内問い合わせ対応役</a:t>
+            </a:r>
+            <a:endParaRPr lang="en-US" sz="1450" dirty="0"/>
+          </a:p>
+        </p:txBody>
+      </p:sp>
+      <p:sp>
+        <p:nvSpPr>
+          <p:cNvPr id="13" name="Text 11"/>
+          <p:cNvSpPr txBox="1"/>
+          <p:nvPr/>
+        </p:nvSpPr>
+        <p:spPr>
+          <a:xfrm>
+            <a:off x="4888382" y="3090672"/>
+            <a:ext cx="6267298" cy="1042416"/>
+          </a:xfrm>
+          <a:prstGeom prst="rect">
+            <a:avLst/>
+          </a:prstGeom>
+          <a:noFill/>
+          <a:ln/>
+        </p:spPr>
+        <p:txBody>
+          <a:bodyPr wrap="square" lIns="0" tIns="0" rIns="0" bIns="0" rtlCol="0" anchor="ctr"/>
+          <a:lstStyle/>
+          <a:p>
+            <a:pPr indent="0" marL="0">
+              <a:lnSpc>
+                <a:spcPct val="130000"/>
+              </a:lnSpc>
+              <a:buNone/>
+            </a:pPr>
+            <a:r>
+              <a:rPr lang="en-US" sz="1200" dirty="0">
+                <a:solidFill>
+                  <a:srgbClr val="5A534A"/>
+                </a:solidFill>
+                <a:latin typeface="Yu Gothic" pitchFamily="34" charset="0"/>
+                <a:ea typeface="Yu Gothic" pitchFamily="34" charset="-122"/>
+                <a:cs typeface="Yu Gothic" pitchFamily="34" charset="-120"/>
+              </a:rPr>
+              <a:t>就業規則・社内マニュアルを載せます。資料が揃っていて成功しやすい</a:t>
+            </a:r>
+            <a:endParaRPr lang="en-US" sz="1200" dirty="0"/>
+          </a:p>
+        </p:txBody>
+      </p:sp>
+      <p:sp>
+        <p:nvSpPr>
+          <p:cNvPr id="14" name="Shape 12"/>
+          <p:cNvSpPr/>
+          <p:nvPr/>
+        </p:nvSpPr>
+        <p:spPr>
+          <a:xfrm>
+            <a:off x="777240" y="4334256"/>
+            <a:ext cx="10607040" cy="1188720"/>
+          </a:xfrm>
+          <a:prstGeom prst="rect">
+            <a:avLst/>
+          </a:prstGeom>
+          <a:solidFill>
+            <a:srgbClr val="FFFFFF"/>
+          </a:solidFill>
+          <a:ln w="12700">
+            <a:solidFill>
+              <a:srgbClr val="EDE7DB"/>
+            </a:solidFill>
+            <a:prstDash val="solid"/>
+          </a:ln>
+        </p:spPr>
+      </p:sp>
+      <p:sp>
+        <p:nvSpPr>
+          <p:cNvPr id="15" name="Shape 13"/>
+          <p:cNvSpPr/>
+          <p:nvPr/>
+        </p:nvSpPr>
+        <p:spPr>
+          <a:xfrm>
+            <a:off x="1014984" y="4745736"/>
+            <a:ext cx="365760" cy="365760"/>
+          </a:xfrm>
+          <a:prstGeom prst="ellipse">
+            <a:avLst/>
+          </a:prstGeom>
+          <a:solidFill>
+            <a:srgbClr val="B04A2F"/>
+          </a:solidFill>
+          <a:ln w="12700">
+            <a:solidFill>
+              <a:srgbClr val="333333"/>
+            </a:solidFill>
+            <a:prstDash val="solid"/>
+          </a:ln>
+        </p:spPr>
+      </p:sp>
+      <p:sp>
+        <p:nvSpPr>
+          <p:cNvPr id="16" name="Text 14"/>
+          <p:cNvSpPr txBox="1"/>
+          <p:nvPr/>
+        </p:nvSpPr>
+        <p:spPr>
+          <a:xfrm>
+            <a:off x="1014984" y="4745736"/>
+            <a:ext cx="365760" cy="365760"/>
+          </a:xfrm>
+          <a:prstGeom prst="rect">
+            <a:avLst/>
+          </a:prstGeom>
+          <a:noFill/>
+          <a:ln/>
+        </p:spPr>
+        <p:txBody>
+          <a:bodyPr wrap="square" lIns="0" tIns="0" rIns="0" bIns="0" rtlCol="0" anchor="ctr"/>
+          <a:lstStyle/>
+          <a:p>
+            <a:pPr algn="ctr" indent="0" marL="0">
+              <a:buNone/>
+            </a:pPr>
+            <a:r>
+              <a:rPr lang="en-US" sz="1300" b="1" dirty="0">
+                <a:solidFill>
+                  <a:srgbClr val="FFFFFF"/>
+                </a:solidFill>
+                <a:latin typeface="Yu Gothic" pitchFamily="34" charset="0"/>
+                <a:ea typeface="Yu Gothic" pitchFamily="34" charset="-122"/>
+                <a:cs typeface="Yu Gothic" pitchFamily="34" charset="-120"/>
+              </a:rPr>
+              <a:t>3</a:t>
+            </a:r>
+            <a:endParaRPr lang="en-US" sz="1300" dirty="0"/>
+          </a:p>
+        </p:txBody>
+      </p:sp>
+      <p:sp>
+        <p:nvSpPr>
           <p:cNvPr id="17" name="Text 15"/>
           <p:cNvSpPr txBox="1"/>
           <p:nvPr/>
         </p:nvSpPr>
         <p:spPr>
           <a:xfrm>
-            <a:off x="5815584" y="3337560"/>
-            <a:ext cx="512064" cy="512064"/>
-          </a:xfrm>
-          <a:prstGeom prst="rect">
-            <a:avLst/>
-          </a:prstGeom>
-          <a:noFill/>
-          <a:ln/>
-        </p:spPr>
-        <p:txBody>
-          <a:bodyPr wrap="square" lIns="0" tIns="0" rIns="0" bIns="0" rtlCol="0" anchor="ctr"/>
-          <a:lstStyle/>
-          <a:p>
-            <a:pPr algn="ctr" indent="0" marL="0">
-              <a:buNone/>
-            </a:pPr>
-            <a:r>
-              <a:rPr lang="en-US" sz="1800" b="1" dirty="0">
-                <a:solidFill>
-                  <a:srgbClr val="FFFFFF"/>
-                </a:solidFill>
-                <a:latin typeface="Yu Gothic" pitchFamily="34" charset="0"/>
-                <a:ea typeface="Yu Gothic" pitchFamily="34" charset="-122"/>
-                <a:cs typeface="Yu Gothic" pitchFamily="34" charset="-120"/>
-              </a:rPr>
-              <a:t>→</a:t>
-            </a:r>
-            <a:endParaRPr lang="en-US" sz="1800" dirty="0"/>
+            <a:off x="1600200" y="4407408"/>
+            <a:ext cx="3182112" cy="1042416"/>
+          </a:xfrm>
+          <a:prstGeom prst="rect">
+            <a:avLst/>
+          </a:prstGeom>
+          <a:noFill/>
+          <a:ln/>
+        </p:spPr>
+        <p:txBody>
+          <a:bodyPr wrap="square" lIns="0" tIns="0" rIns="0" bIns="0" rtlCol="0" anchor="ctr"/>
+          <a:lstStyle/>
+          <a:p>
+            <a:pPr indent="0" marL="0">
+              <a:buNone/>
+            </a:pPr>
+            <a:r>
+              <a:rPr lang="en-US" sz="1450" b="1" dirty="0">
+                <a:solidFill>
+                  <a:srgbClr val="23201D"/>
+                </a:solidFill>
+                <a:latin typeface="Yu Gothic" pitchFamily="34" charset="0"/>
+                <a:ea typeface="Yu Gothic" pitchFamily="34" charset="-122"/>
+                <a:cs typeface="Yu Gothic" pitchFamily="34" charset="-120"/>
+              </a:rPr>
+              <a:t>顧客対応の一次回答役</a:t>
+            </a:r>
+            <a:endParaRPr lang="en-US" sz="1450" dirty="0"/>
           </a:p>
         </p:txBody>
       </p:sp>
@@ -3694,8 +5217,89 @@
         </p:nvSpPr>
         <p:spPr>
           <a:xfrm>
-            <a:off x="777240" y="6355080"/>
-            <a:ext cx="7424928" cy="274320"/>
+            <a:off x="4888382" y="4407408"/>
+            <a:ext cx="6267298" cy="1042416"/>
+          </a:xfrm>
+          <a:prstGeom prst="rect">
+            <a:avLst/>
+          </a:prstGeom>
+          <a:noFill/>
+          <a:ln/>
+        </p:spPr>
+        <p:txBody>
+          <a:bodyPr wrap="square" lIns="0" tIns="0" rIns="0" bIns="0" rtlCol="0" anchor="ctr"/>
+          <a:lstStyle/>
+          <a:p>
+            <a:pPr indent="0" marL="0">
+              <a:lnSpc>
+                <a:spcPct val="130000"/>
+              </a:lnSpc>
+              <a:buNone/>
+            </a:pPr>
+            <a:r>
+              <a:rPr lang="en-US" sz="1200" dirty="0">
+                <a:solidFill>
+                  <a:srgbClr val="5A534A"/>
+                </a:solidFill>
+                <a:latin typeface="Yu Gothic" pitchFamily="34" charset="0"/>
+                <a:ea typeface="Yu Gothic" pitchFamily="34" charset="-122"/>
+                <a:cs typeface="Yu Gothic" pitchFamily="34" charset="-120"/>
+              </a:rPr>
+              <a:t>FAQ・過去のやり取りを載せます。件数が多いほど効きます</a:t>
+            </a:r>
+            <a:endParaRPr lang="en-US" sz="1200" dirty="0"/>
+          </a:p>
+        </p:txBody>
+      </p:sp>
+      <p:sp>
+        <p:nvSpPr>
+          <p:cNvPr id="19" name="Text 17"/>
+          <p:cNvSpPr txBox="1"/>
+          <p:nvPr/>
+        </p:nvSpPr>
+        <p:spPr>
+          <a:xfrm>
+            <a:off x="777240" y="5669280"/>
+            <a:ext cx="10607040" cy="411480"/>
+          </a:xfrm>
+          <a:prstGeom prst="rect">
+            <a:avLst/>
+          </a:prstGeom>
+          <a:noFill/>
+          <a:ln/>
+        </p:spPr>
+        <p:txBody>
+          <a:bodyPr wrap="square" lIns="0" tIns="0" rIns="0" bIns="0" rtlCol="0" anchor="ctr"/>
+          <a:lstStyle/>
+          <a:p>
+            <a:pPr indent="0" marL="0">
+              <a:buNone/>
+            </a:pPr>
+            <a:r>
+              <a:rPr lang="en-US" sz="1200" b="1" dirty="0">
+                <a:solidFill>
+                  <a:srgbClr val="B04A2F"/>
+                </a:solidFill>
+                <a:latin typeface="Yu Gothic" pitchFamily="34" charset="0"/>
+                <a:ea typeface="Yu Gothic" pitchFamily="34" charset="-122"/>
+                <a:cs typeface="Yu Gothic" pitchFamily="34" charset="-120"/>
+              </a:rPr>
+              <a:t>選ぶのはご自身です。講師は決めません。ここで他人に決められると、以後ずっと他人事の道具になります。</a:t>
+            </a:r>
+            <a:endParaRPr lang="en-US" sz="1200" dirty="0"/>
+          </a:p>
+        </p:txBody>
+      </p:sp>
+      <p:sp>
+        <p:nvSpPr>
+          <p:cNvPr id="20" name="Text 18"/>
+          <p:cNvSpPr txBox="1"/>
+          <p:nvPr/>
+        </p:nvSpPr>
+        <p:spPr>
+          <a:xfrm>
+            <a:off x="777240" y="6382512"/>
+            <a:ext cx="7424928" cy="256032"/>
           </a:xfrm>
           <a:prstGeom prst="rect">
             <a:avLst/>
@@ -3727,14 +5331,14 @@
       </p:sp>
       <p:sp>
         <p:nvSpPr>
-          <p:cNvPr id="19" name="Text 17"/>
-          <p:cNvSpPr txBox="1"/>
-          <p:nvPr/>
-        </p:nvSpPr>
-        <p:spPr>
-          <a:xfrm>
-            <a:off x="8202168" y="6355080"/>
-            <a:ext cx="3182112" cy="274320"/>
+          <p:cNvPr id="21" name="Text 19"/>
+          <p:cNvSpPr txBox="1"/>
+          <p:nvPr/>
+        </p:nvSpPr>
+        <p:spPr>
+          <a:xfrm>
+            <a:off x="8202168" y="6382512"/>
+            <a:ext cx="3182112" cy="256032"/>
           </a:xfrm>
           <a:prstGeom prst="rect">
             <a:avLst/>
@@ -3758,7 +5362,7 @@
                 <a:ea typeface="Yu Gothic" pitchFamily="34" charset="-122"/>
                 <a:cs typeface="Yu Gothic" pitchFamily="34" charset="-120"/>
               </a:rPr>
-              <a:t>実演</a:t>
+              <a:t>考え方</a:t>
             </a:r>
             <a:endParaRPr lang="en-US" sz="900" dirty="0"/>
           </a:p>
@@ -3804,7 +5408,7 @@
         </p:nvSpPr>
         <p:spPr>
           <a:xfrm>
-            <a:off x="777240" y="640080"/>
+            <a:off x="777240" y="566928"/>
             <a:ext cx="10607040" cy="274320"/>
           </a:xfrm>
           <a:prstGeom prst="rect">
@@ -3829,7 +5433,7 @@
                 <a:ea typeface="Yu Gothic" pitchFamily="34" charset="-122"/>
                 <a:cs typeface="Yu Gothic" pitchFamily="34" charset="-120"/>
               </a:rPr>
-              <a:t>演習</a:t>
+              <a:t>あてはめ</a:t>
             </a:r>
             <a:endParaRPr lang="en-US" sz="1100" dirty="0"/>
           </a:p>
@@ -3843,7 +5447,7 @@
         </p:nvSpPr>
         <p:spPr>
           <a:xfrm>
-            <a:off x="777240" y="960120"/>
+            <a:off x="777240" y="896112"/>
             <a:ext cx="10607040" cy="640080"/>
           </a:xfrm>
           <a:prstGeom prst="rect">
@@ -3860,7 +5464,7 @@
               <a:buNone/>
             </a:pPr>
             <a:r>
-              <a:rPr lang="en-US" sz="2700" b="1" dirty="0">
+              <a:rPr lang="en-US" sz="2600" b="1" dirty="0">
                 <a:solidFill>
                   <a:srgbClr val="23201D"/>
                 </a:solidFill>
@@ -3868,61 +5472,22 @@
                 <a:ea typeface="Yu Gothic" pitchFamily="34" charset="-122"/>
                 <a:cs typeface="Yu Gothic" pitchFamily="34" charset="-120"/>
               </a:rPr>
-              <a:t>今日、一緒にやること</a:t>
-            </a:r>
-            <a:endParaRPr lang="en-US" sz="2700" dirty="0"/>
-          </a:p>
-        </p:txBody>
-      </p:sp>
-      <p:sp>
-        <p:nvSpPr>
-          <p:cNvPr id="4" name="Text 2"/>
-          <p:cNvSpPr txBox="1"/>
-          <p:nvPr/>
-        </p:nvSpPr>
-        <p:spPr>
-          <a:xfrm>
-            <a:off x="777240" y="1627632"/>
-            <a:ext cx="10607040" cy="320040"/>
-          </a:xfrm>
-          <a:prstGeom prst="rect">
-            <a:avLst/>
-          </a:prstGeom>
-          <a:noFill/>
-          <a:ln/>
-        </p:spPr>
-        <p:txBody>
-          <a:bodyPr wrap="square" lIns="0" tIns="0" rIns="0" bIns="0" rtlCol="0" anchor="ctr"/>
-          <a:lstStyle/>
-          <a:p>
-            <a:pPr indent="0" marL="0">
-              <a:buNone/>
-            </a:pPr>
-            <a:r>
-              <a:rPr lang="en-US" sz="1250" b="1" dirty="0">
-                <a:solidFill>
-                  <a:srgbClr val="2F4F6B"/>
-                </a:solidFill>
-                <a:latin typeface="Yu Gothic" pitchFamily="34" charset="0"/>
-                <a:ea typeface="Yu Gothic" pitchFamily="34" charset="-122"/>
-                <a:cs typeface="Yu Gothic" pitchFamily="34" charset="-120"/>
-              </a:rPr>
-              <a:t>55分。操作するのはご自身です。</a:t>
-            </a:r>
-            <a:endParaRPr lang="en-US" sz="1250" dirty="0"/>
-          </a:p>
-        </p:txBody>
-      </p:sp>
-      <p:sp>
-        <p:nvSpPr>
-          <p:cNvPr id="5" name="Shape 3"/>
+              <a:t>仕様書は、この6行で足ります</a:t>
+            </a:r>
+            <a:endParaRPr lang="en-US" sz="2600" dirty="0"/>
+          </a:p>
+        </p:txBody>
+      </p:sp>
+      <p:sp>
+        <p:nvSpPr>
+          <p:cNvPr id="4" name="Shape 2"/>
           <p:cNvSpPr/>
           <p:nvPr/>
         </p:nvSpPr>
         <p:spPr>
           <a:xfrm>
-            <a:off x="777240" y="2240280"/>
-            <a:ext cx="3383280" cy="2697480"/>
+            <a:off x="777240" y="1691640"/>
+            <a:ext cx="10607040" cy="3931920"/>
           </a:xfrm>
           <a:prstGeom prst="rect">
             <a:avLst/>
@@ -3930,9 +5495,9 @@
           <a:solidFill>
             <a:srgbClr val="FFFFFF"/>
           </a:solidFill>
-          <a:ln w="12700">
+          <a:ln w="15875">
             <a:solidFill>
-              <a:srgbClr val="EDE7DB"/>
+              <a:srgbClr val="2F4F6B"/>
             </a:solidFill>
             <a:prstDash val="solid"/>
           </a:ln>
@@ -3940,16 +5505,16 @@
       </p:sp>
       <p:sp>
         <p:nvSpPr>
-          <p:cNvPr id="6" name="Shape 4"/>
+          <p:cNvPr id="5" name="Shape 3"/>
           <p:cNvSpPr/>
           <p:nvPr/>
         </p:nvSpPr>
         <p:spPr>
           <a:xfrm>
-            <a:off x="1051560" y="2487168"/>
-            <a:ext cx="438912" cy="438912"/>
-          </a:xfrm>
-          <a:prstGeom prst="ellipse">
+            <a:off x="777240" y="1691640"/>
+            <a:ext cx="10607040" cy="457200"/>
+          </a:xfrm>
+          <a:prstGeom prst="rect">
             <a:avLst/>
           </a:prstGeom>
           <a:solidFill>
@@ -3957,7 +5522,7 @@
           </a:solidFill>
           <a:ln w="12700">
             <a:solidFill>
-              <a:srgbClr val="2F4F6B"/>
+              <a:srgbClr val="333333"/>
             </a:solidFill>
             <a:prstDash val="solid"/>
           </a:ln>
@@ -3965,40 +5530,82 @@
       </p:sp>
       <p:sp>
         <p:nvSpPr>
+          <p:cNvPr id="6" name="Text 4"/>
+          <p:cNvSpPr txBox="1"/>
+          <p:nvPr/>
+        </p:nvSpPr>
+        <p:spPr>
+          <a:xfrm>
+            <a:off x="1051560" y="1709928"/>
+            <a:ext cx="10058400" cy="420624"/>
+          </a:xfrm>
+          <a:prstGeom prst="rect">
+            <a:avLst/>
+          </a:prstGeom>
+          <a:noFill/>
+          <a:ln/>
+        </p:spPr>
+        <p:txBody>
+          <a:bodyPr wrap="square" lIns="0" tIns="0" rIns="0" bIns="0" rtlCol="0" anchor="ctr"/>
+          <a:lstStyle/>
+          <a:p>
+            <a:pPr indent="0" marL="0">
+              <a:buNone/>
+            </a:pPr>
+            <a:r>
+              <a:rPr lang="en-US" sz="1200" b="1" dirty="0">
+                <a:solidFill>
+                  <a:srgbClr val="FFFFFF"/>
+                </a:solidFill>
+                <a:latin typeface="Yu Gothic" pitchFamily="34" charset="0"/>
+                <a:ea typeface="Yu Gothic" pitchFamily="34" charset="-122"/>
+                <a:cs typeface="Yu Gothic" pitchFamily="34" charset="-120"/>
+              </a:rPr>
+              <a:t>見積根拠アシスタント（記入例：金属加工業・従業員18名）</a:t>
+            </a:r>
+            <a:endParaRPr lang="en-US" sz="1200" dirty="0"/>
+          </a:p>
+        </p:txBody>
+      </p:sp>
+      <p:sp>
+        <p:nvSpPr>
           <p:cNvPr id="7" name="Text 5"/>
           <p:cNvSpPr txBox="1"/>
           <p:nvPr/>
         </p:nvSpPr>
         <p:spPr>
           <a:xfrm>
-            <a:off x="1051560" y="2487168"/>
-            <a:ext cx="438912" cy="438912"/>
-          </a:xfrm>
-          <a:prstGeom prst="rect">
-            <a:avLst/>
-          </a:prstGeom>
-          <a:noFill/>
-          <a:ln/>
-        </p:spPr>
-        <p:txBody>
-          <a:bodyPr wrap="square" lIns="0" tIns="0" rIns="0" bIns="0" rtlCol="0" anchor="ctr"/>
-          <a:lstStyle/>
-          <a:p>
-            <a:pPr algn="ctr" indent="0" marL="0">
-              <a:buNone/>
-            </a:pPr>
-            <a:r>
-              <a:rPr lang="en-US" sz="1400" b="1" dirty="0">
-                <a:solidFill>
-                  <a:srgbClr val="FFFFFF"/>
-                </a:solidFill>
-                <a:latin typeface="Yu Gothic" pitchFamily="34" charset="0"/>
-                <a:ea typeface="Yu Gothic" pitchFamily="34" charset="-122"/>
-                <a:cs typeface="Yu Gothic" pitchFamily="34" charset="-120"/>
-              </a:rPr>
-              <a:t>1</a:t>
-            </a:r>
-            <a:endParaRPr lang="en-US" sz="1400" dirty="0"/>
+            <a:off x="1097280" y="2331720"/>
+            <a:ext cx="2057400" cy="530352"/>
+          </a:xfrm>
+          <a:prstGeom prst="rect">
+            <a:avLst/>
+          </a:prstGeom>
+          <a:noFill/>
+          <a:ln/>
+        </p:spPr>
+        <p:txBody>
+          <a:bodyPr wrap="square" lIns="0" tIns="0" rIns="0" bIns="0" rtlCol="0" anchor="ctr"/>
+          <a:lstStyle/>
+          <a:p>
+            <a:pPr indent="0" marL="0">
+              <a:lnSpc>
+                <a:spcPct val="110000"/>
+              </a:lnSpc>
+              <a:buNone/>
+            </a:pPr>
+            <a:r>
+              <a:rPr lang="en-US" sz="1100" b="1" dirty="0">
+                <a:solidFill>
+                  <a:srgbClr val="2F4F6B"/>
+                </a:solidFill>
+                <a:latin typeface="Yu Gothic" pitchFamily="34" charset="0"/>
+                <a:ea typeface="Yu Gothic" pitchFamily="34" charset="-122"/>
+                <a:cs typeface="Yu Gothic" pitchFamily="34" charset="-120"/>
+              </a:rPr>
+              <a:t>名称</a:t>
+            </a:r>
+            <a:endParaRPr lang="en-US" sz="1100" dirty="0"/>
           </a:p>
         </p:txBody>
       </p:sp>
@@ -4010,8 +5617,8 @@
         </p:nvSpPr>
         <p:spPr>
           <a:xfrm>
-            <a:off x="1051560" y="3035808"/>
-            <a:ext cx="2834640" cy="777240"/>
+            <a:off x="3291840" y="2331720"/>
+            <a:ext cx="7772400" cy="530352"/>
           </a:xfrm>
           <a:prstGeom prst="rect">
             <a:avLst/>
@@ -4025,22 +5632,22 @@
           <a:p>
             <a:pPr indent="0" marL="0">
               <a:lnSpc>
-                <a:spcPct val="125000"/>
+                <a:spcPct val="115000"/>
               </a:lnSpc>
               <a:buNone/>
             </a:pPr>
             <a:r>
-              <a:rPr lang="en-US" sz="1500" b="1" dirty="0">
+              <a:rPr lang="en-US" sz="1150" dirty="0">
                 <a:solidFill>
                   <a:srgbClr val="23201D"/>
                 </a:solidFill>
-                <a:latin typeface="Yu Gothic" pitchFamily="34" charset="0"/>
-                <a:ea typeface="Yu Gothic" pitchFamily="34" charset="-122"/>
-                <a:cs typeface="Yu Gothic" pitchFamily="34" charset="-120"/>
-              </a:rPr>
-              <a:t>専用AIを1つ作る</a:t>
-            </a:r>
-            <a:endParaRPr lang="en-US" sz="1500" dirty="0"/>
+                <a:latin typeface="Consolas" pitchFamily="34" charset="0"/>
+                <a:ea typeface="Consolas" pitchFamily="34" charset="-122"/>
+                <a:cs typeface="Consolas" pitchFamily="34" charset="-120"/>
+              </a:rPr>
+              <a:t>見積根拠アシスタント</a:t>
+            </a:r>
+            <a:endParaRPr lang="en-US" sz="1150" dirty="0"/>
           </a:p>
         </p:txBody>
       </p:sp>
@@ -4052,8 +5659,8 @@
         </p:nvSpPr>
         <p:spPr>
           <a:xfrm>
-            <a:off x="1051560" y="3822192"/>
-            <a:ext cx="2834640" cy="960120"/>
+            <a:off x="1097280" y="2862072"/>
+            <a:ext cx="2057400" cy="530352"/>
           </a:xfrm>
           <a:prstGeom prst="rect">
             <a:avLst/>
@@ -4067,12 +5674,432 @@
           <a:p>
             <a:pPr indent="0" marL="0">
               <a:lnSpc>
-                <a:spcPct val="130000"/>
+                <a:spcPct val="110000"/>
               </a:lnSpc>
               <a:buNone/>
             </a:pPr>
             <a:r>
-              <a:rPr lang="en-US" sz="1200" dirty="0">
+              <a:rPr lang="en-US" sz="1100" b="1" dirty="0">
+                <a:solidFill>
+                  <a:srgbClr val="2F4F6B"/>
+                </a:solidFill>
+                <a:latin typeface="Yu Gothic" pitchFamily="34" charset="0"/>
+                <a:ea typeface="Yu Gothic" pitchFamily="34" charset="-122"/>
+                <a:cs typeface="Yu Gothic" pitchFamily="34" charset="-120"/>
+              </a:rPr>
+              <a:t>役割</a:t>
+            </a:r>
+            <a:endParaRPr lang="en-US" sz="1100" dirty="0"/>
+          </a:p>
+        </p:txBody>
+      </p:sp>
+      <p:sp>
+        <p:nvSpPr>
+          <p:cNvPr id="10" name="Text 8"/>
+          <p:cNvSpPr txBox="1"/>
+          <p:nvPr/>
+        </p:nvSpPr>
+        <p:spPr>
+          <a:xfrm>
+            <a:off x="3291840" y="2862072"/>
+            <a:ext cx="7772400" cy="530352"/>
+          </a:xfrm>
+          <a:prstGeom prst="rect">
+            <a:avLst/>
+          </a:prstGeom>
+          <a:noFill/>
+          <a:ln/>
+        </p:spPr>
+        <p:txBody>
+          <a:bodyPr wrap="square" lIns="0" tIns="0" rIns="0" bIns="0" rtlCol="0" anchor="ctr"/>
+          <a:lstStyle/>
+          <a:p>
+            <a:pPr indent="0" marL="0">
+              <a:lnSpc>
+                <a:spcPct val="115000"/>
+              </a:lnSpc>
+              <a:buNone/>
+            </a:pPr>
+            <a:r>
+              <a:rPr lang="en-US" sz="1150" dirty="0">
+                <a:solidFill>
+                  <a:srgbClr val="23201D"/>
+                </a:solidFill>
+                <a:latin typeface="Consolas" pitchFamily="34" charset="0"/>
+                <a:ea typeface="Consolas" pitchFamily="34" charset="-122"/>
+                <a:cs typeface="Consolas" pitchFamily="34" charset="-120"/>
+              </a:rPr>
+              <a:t>過去の見積実績から、概算金額と根拠になった類似案件を提示する</a:t>
+            </a:r>
+            <a:endParaRPr lang="en-US" sz="1150" dirty="0"/>
+          </a:p>
+        </p:txBody>
+      </p:sp>
+      <p:sp>
+        <p:nvSpPr>
+          <p:cNvPr id="11" name="Text 9"/>
+          <p:cNvSpPr txBox="1"/>
+          <p:nvPr/>
+        </p:nvSpPr>
+        <p:spPr>
+          <a:xfrm>
+            <a:off x="1097280" y="3392424"/>
+            <a:ext cx="2057400" cy="530352"/>
+          </a:xfrm>
+          <a:prstGeom prst="rect">
+            <a:avLst/>
+          </a:prstGeom>
+          <a:noFill/>
+          <a:ln/>
+        </p:spPr>
+        <p:txBody>
+          <a:bodyPr wrap="square" lIns="0" tIns="0" rIns="0" bIns="0" rtlCol="0" anchor="ctr"/>
+          <a:lstStyle/>
+          <a:p>
+            <a:pPr indent="0" marL="0">
+              <a:lnSpc>
+                <a:spcPct val="110000"/>
+              </a:lnSpc>
+              <a:buNone/>
+            </a:pPr>
+            <a:r>
+              <a:rPr lang="en-US" sz="1100" b="1" dirty="0">
+                <a:solidFill>
+                  <a:srgbClr val="2F4F6B"/>
+                </a:solidFill>
+                <a:latin typeface="Yu Gothic" pitchFamily="34" charset="0"/>
+                <a:ea typeface="Yu Gothic" pitchFamily="34" charset="-122"/>
+                <a:cs typeface="Yu Gothic" pitchFamily="34" charset="-120"/>
+              </a:rPr>
+              <a:t>参照する資料</a:t>
+            </a:r>
+            <a:endParaRPr lang="en-US" sz="1100" dirty="0"/>
+          </a:p>
+        </p:txBody>
+      </p:sp>
+      <p:sp>
+        <p:nvSpPr>
+          <p:cNvPr id="12" name="Text 10"/>
+          <p:cNvSpPr txBox="1"/>
+          <p:nvPr/>
+        </p:nvSpPr>
+        <p:spPr>
+          <a:xfrm>
+            <a:off x="3291840" y="3392424"/>
+            <a:ext cx="7772400" cy="530352"/>
+          </a:xfrm>
+          <a:prstGeom prst="rect">
+            <a:avLst/>
+          </a:prstGeom>
+          <a:noFill/>
+          <a:ln/>
+        </p:spPr>
+        <p:txBody>
+          <a:bodyPr wrap="square" lIns="0" tIns="0" rIns="0" bIns="0" rtlCol="0" anchor="ctr"/>
+          <a:lstStyle/>
+          <a:p>
+            <a:pPr indent="0" marL="0">
+              <a:lnSpc>
+                <a:spcPct val="115000"/>
+              </a:lnSpc>
+              <a:buNone/>
+            </a:pPr>
+            <a:r>
+              <a:rPr lang="en-US" sz="1150" dirty="0">
+                <a:solidFill>
+                  <a:srgbClr val="23201D"/>
+                </a:solidFill>
+                <a:latin typeface="Consolas" pitchFamily="34" charset="0"/>
+                <a:ea typeface="Consolas" pitchFamily="34" charset="-122"/>
+                <a:cs typeface="Consolas" pitchFamily="34" charset="-120"/>
+              </a:rPr>
+              <a:t>過去3年の見積書142件（顧客名は記号化）／材料単価表／標準工数表</a:t>
+            </a:r>
+            <a:endParaRPr lang="en-US" sz="1150" dirty="0"/>
+          </a:p>
+        </p:txBody>
+      </p:sp>
+      <p:sp>
+        <p:nvSpPr>
+          <p:cNvPr id="13" name="Text 11"/>
+          <p:cNvSpPr txBox="1"/>
+          <p:nvPr/>
+        </p:nvSpPr>
+        <p:spPr>
+          <a:xfrm>
+            <a:off x="1097280" y="3922776"/>
+            <a:ext cx="2057400" cy="530352"/>
+          </a:xfrm>
+          <a:prstGeom prst="rect">
+            <a:avLst/>
+          </a:prstGeom>
+          <a:noFill/>
+          <a:ln/>
+        </p:spPr>
+        <p:txBody>
+          <a:bodyPr wrap="square" lIns="0" tIns="0" rIns="0" bIns="0" rtlCol="0" anchor="ctr"/>
+          <a:lstStyle/>
+          <a:p>
+            <a:pPr indent="0" marL="0">
+              <a:lnSpc>
+                <a:spcPct val="110000"/>
+              </a:lnSpc>
+              <a:buNone/>
+            </a:pPr>
+            <a:r>
+              <a:rPr lang="en-US" sz="1100" b="1" dirty="0">
+                <a:solidFill>
+                  <a:srgbClr val="2F4F6B"/>
+                </a:solidFill>
+                <a:latin typeface="Yu Gothic" pitchFamily="34" charset="0"/>
+                <a:ea typeface="Yu Gothic" pitchFamily="34" charset="-122"/>
+                <a:cs typeface="Yu Gothic" pitchFamily="34" charset="-120"/>
+              </a:rPr>
+              <a:t>守ること</a:t>
+            </a:r>
+            <a:endParaRPr lang="en-US" sz="1100" dirty="0"/>
+          </a:p>
+        </p:txBody>
+      </p:sp>
+      <p:sp>
+        <p:nvSpPr>
+          <p:cNvPr id="14" name="Text 12"/>
+          <p:cNvSpPr txBox="1"/>
+          <p:nvPr/>
+        </p:nvSpPr>
+        <p:spPr>
+          <a:xfrm>
+            <a:off x="3291840" y="3922776"/>
+            <a:ext cx="7772400" cy="530352"/>
+          </a:xfrm>
+          <a:prstGeom prst="rect">
+            <a:avLst/>
+          </a:prstGeom>
+          <a:noFill/>
+          <a:ln/>
+        </p:spPr>
+        <p:txBody>
+          <a:bodyPr wrap="square" lIns="0" tIns="0" rIns="0" bIns="0" rtlCol="0" anchor="ctr"/>
+          <a:lstStyle/>
+          <a:p>
+            <a:pPr indent="0" marL="0">
+              <a:lnSpc>
+                <a:spcPct val="115000"/>
+              </a:lnSpc>
+              <a:buNone/>
+            </a:pPr>
+            <a:r>
+              <a:rPr lang="en-US" sz="1150" dirty="0">
+                <a:solidFill>
+                  <a:srgbClr val="23201D"/>
+                </a:solidFill>
+                <a:latin typeface="Consolas" pitchFamily="34" charset="0"/>
+                <a:ea typeface="Consolas" pitchFamily="34" charset="-122"/>
+                <a:cs typeface="Consolas" pitchFamily="34" charset="-120"/>
+              </a:rPr>
+              <a:t>記載がなければ推測しない／金額は社長が確認してから提出／単価は最新版で検算</a:t>
+            </a:r>
+            <a:endParaRPr lang="en-US" sz="1150" dirty="0"/>
+          </a:p>
+        </p:txBody>
+      </p:sp>
+      <p:sp>
+        <p:nvSpPr>
+          <p:cNvPr id="15" name="Text 13"/>
+          <p:cNvSpPr txBox="1"/>
+          <p:nvPr/>
+        </p:nvSpPr>
+        <p:spPr>
+          <a:xfrm>
+            <a:off x="1097280" y="4453128"/>
+            <a:ext cx="2057400" cy="530352"/>
+          </a:xfrm>
+          <a:prstGeom prst="rect">
+            <a:avLst/>
+          </a:prstGeom>
+          <a:noFill/>
+          <a:ln/>
+        </p:spPr>
+        <p:txBody>
+          <a:bodyPr wrap="square" lIns="0" tIns="0" rIns="0" bIns="0" rtlCol="0" anchor="ctr"/>
+          <a:lstStyle/>
+          <a:p>
+            <a:pPr indent="0" marL="0">
+              <a:lnSpc>
+                <a:spcPct val="110000"/>
+              </a:lnSpc>
+              <a:buNone/>
+            </a:pPr>
+            <a:r>
+              <a:rPr lang="en-US" sz="1100" b="1" dirty="0">
+                <a:solidFill>
+                  <a:srgbClr val="2F4F6B"/>
+                </a:solidFill>
+                <a:latin typeface="Yu Gothic" pitchFamily="34" charset="0"/>
+                <a:ea typeface="Yu Gothic" pitchFamily="34" charset="-122"/>
+                <a:cs typeface="Yu Gothic" pitchFamily="34" charset="-120"/>
+              </a:rPr>
+              <a:t>出力形式</a:t>
+            </a:r>
+            <a:endParaRPr lang="en-US" sz="1100" dirty="0"/>
+          </a:p>
+        </p:txBody>
+      </p:sp>
+      <p:sp>
+        <p:nvSpPr>
+          <p:cNvPr id="16" name="Text 14"/>
+          <p:cNvSpPr txBox="1"/>
+          <p:nvPr/>
+        </p:nvSpPr>
+        <p:spPr>
+          <a:xfrm>
+            <a:off x="3291840" y="4453128"/>
+            <a:ext cx="7772400" cy="530352"/>
+          </a:xfrm>
+          <a:prstGeom prst="rect">
+            <a:avLst/>
+          </a:prstGeom>
+          <a:noFill/>
+          <a:ln/>
+        </p:spPr>
+        <p:txBody>
+          <a:bodyPr wrap="square" lIns="0" tIns="0" rIns="0" bIns="0" rtlCol="0" anchor="ctr"/>
+          <a:lstStyle/>
+          <a:p>
+            <a:pPr indent="0" marL="0">
+              <a:lnSpc>
+                <a:spcPct val="115000"/>
+              </a:lnSpc>
+              <a:buNone/>
+            </a:pPr>
+            <a:r>
+              <a:rPr lang="en-US" sz="1150" dirty="0">
+                <a:solidFill>
+                  <a:srgbClr val="23201D"/>
+                </a:solidFill>
+                <a:latin typeface="Consolas" pitchFamily="34" charset="0"/>
+                <a:ea typeface="Consolas" pitchFamily="34" charset="-122"/>
+                <a:cs typeface="Consolas" pitchFamily="34" charset="-120"/>
+              </a:rPr>
+              <a:t>①概算金額（幅で）②内訳 ③根拠になった過去案件3件と相違点</a:t>
+            </a:r>
+            <a:endParaRPr lang="en-US" sz="1150" dirty="0"/>
+          </a:p>
+        </p:txBody>
+      </p:sp>
+      <p:sp>
+        <p:nvSpPr>
+          <p:cNvPr id="17" name="Text 15"/>
+          <p:cNvSpPr txBox="1"/>
+          <p:nvPr/>
+        </p:nvSpPr>
+        <p:spPr>
+          <a:xfrm>
+            <a:off x="1097280" y="4983480"/>
+            <a:ext cx="2057400" cy="530352"/>
+          </a:xfrm>
+          <a:prstGeom prst="rect">
+            <a:avLst/>
+          </a:prstGeom>
+          <a:noFill/>
+          <a:ln/>
+        </p:spPr>
+        <p:txBody>
+          <a:bodyPr wrap="square" lIns="0" tIns="0" rIns="0" bIns="0" rtlCol="0" anchor="ctr"/>
+          <a:lstStyle/>
+          <a:p>
+            <a:pPr indent="0" marL="0">
+              <a:lnSpc>
+                <a:spcPct val="110000"/>
+              </a:lnSpc>
+              <a:buNone/>
+            </a:pPr>
+            <a:r>
+              <a:rPr lang="en-US" sz="1100" b="1" dirty="0">
+                <a:solidFill>
+                  <a:srgbClr val="2F4F6B"/>
+                </a:solidFill>
+                <a:latin typeface="Yu Gothic" pitchFamily="34" charset="0"/>
+                <a:ea typeface="Yu Gothic" pitchFamily="34" charset="-122"/>
+                <a:cs typeface="Yu Gothic" pitchFamily="34" charset="-120"/>
+              </a:rPr>
+              <a:t>使う人</a:t>
+            </a:r>
+            <a:endParaRPr lang="en-US" sz="1100" dirty="0"/>
+          </a:p>
+        </p:txBody>
+      </p:sp>
+      <p:sp>
+        <p:nvSpPr>
+          <p:cNvPr id="18" name="Text 16"/>
+          <p:cNvSpPr txBox="1"/>
+          <p:nvPr/>
+        </p:nvSpPr>
+        <p:spPr>
+          <a:xfrm>
+            <a:off x="3291840" y="4983480"/>
+            <a:ext cx="7772400" cy="530352"/>
+          </a:xfrm>
+          <a:prstGeom prst="rect">
+            <a:avLst/>
+          </a:prstGeom>
+          <a:noFill/>
+          <a:ln/>
+        </p:spPr>
+        <p:txBody>
+          <a:bodyPr wrap="square" lIns="0" tIns="0" rIns="0" bIns="0" rtlCol="0" anchor="ctr"/>
+          <a:lstStyle/>
+          <a:p>
+            <a:pPr indent="0" marL="0">
+              <a:lnSpc>
+                <a:spcPct val="115000"/>
+              </a:lnSpc>
+              <a:buNone/>
+            </a:pPr>
+            <a:r>
+              <a:rPr lang="en-US" sz="1150" dirty="0">
+                <a:solidFill>
+                  <a:srgbClr val="23201D"/>
+                </a:solidFill>
+                <a:latin typeface="Consolas" pitchFamily="34" charset="0"/>
+                <a:ea typeface="Consolas" pitchFamily="34" charset="-122"/>
+                <a:cs typeface="Consolas" pitchFamily="34" charset="-120"/>
+              </a:rPr>
+              <a:t>社長・営業2名（第6回時点で事務1名にも展開）</a:t>
+            </a:r>
+            <a:endParaRPr lang="en-US" sz="1150" dirty="0"/>
+          </a:p>
+        </p:txBody>
+      </p:sp>
+      <p:sp>
+        <p:nvSpPr>
+          <p:cNvPr id="19" name="Text 17"/>
+          <p:cNvSpPr txBox="1"/>
+          <p:nvPr/>
+        </p:nvSpPr>
+        <p:spPr>
+          <a:xfrm>
+            <a:off x="777240" y="5769864"/>
+            <a:ext cx="10607040" cy="548640"/>
+          </a:xfrm>
+          <a:prstGeom prst="rect">
+            <a:avLst/>
+          </a:prstGeom>
+          <a:noFill/>
+          <a:ln/>
+        </p:spPr>
+        <p:txBody>
+          <a:bodyPr wrap="square" lIns="0" tIns="0" rIns="0" bIns="0" rtlCol="0" anchor="ctr"/>
+          <a:lstStyle/>
+          <a:p>
+            <a:pPr indent="0" marL="0">
+              <a:lnSpc>
+                <a:spcPct val="135000"/>
+              </a:lnSpc>
+              <a:buNone/>
+            </a:pPr>
+            <a:r>
+              <a:rPr lang="en-US" sz="1250" dirty="0">
                 <a:solidFill>
                   <a:srgbClr val="5A534A"/>
                 </a:solidFill>
@@ -4080,355 +6107,9 @@
                 <a:ea typeface="Yu Gothic" pitchFamily="34" charset="-122"/>
                 <a:cs typeface="Yu Gothic" pitchFamily="34" charset="-120"/>
               </a:rPr>
-              <a:t>載せる資料は3本で十分です。足りないものは第8回で回収します</a:t>
-            </a:r>
-            <a:endParaRPr lang="en-US" sz="1200" dirty="0"/>
-          </a:p>
-        </p:txBody>
-      </p:sp>
-      <p:sp>
-        <p:nvSpPr>
-          <p:cNvPr id="10" name="Shape 8"/>
-          <p:cNvSpPr/>
-          <p:nvPr/>
-        </p:nvSpPr>
-        <p:spPr>
-          <a:xfrm>
-            <a:off x="4389120" y="2240280"/>
-            <a:ext cx="3383280" cy="2697480"/>
-          </a:xfrm>
-          <a:prstGeom prst="rect">
-            <a:avLst/>
-          </a:prstGeom>
-          <a:solidFill>
-            <a:srgbClr val="FFFFFF"/>
-          </a:solidFill>
-          <a:ln w="12700">
-            <a:solidFill>
-              <a:srgbClr val="EDE7DB"/>
-            </a:solidFill>
-            <a:prstDash val="solid"/>
-          </a:ln>
-        </p:spPr>
-      </p:sp>
-      <p:sp>
-        <p:nvSpPr>
-          <p:cNvPr id="11" name="Shape 9"/>
-          <p:cNvSpPr/>
-          <p:nvPr/>
-        </p:nvSpPr>
-        <p:spPr>
-          <a:xfrm>
-            <a:off x="4663440" y="2487168"/>
-            <a:ext cx="438912" cy="438912"/>
-          </a:xfrm>
-          <a:prstGeom prst="ellipse">
-            <a:avLst/>
-          </a:prstGeom>
-          <a:solidFill>
-            <a:srgbClr val="2F4F6B"/>
-          </a:solidFill>
-          <a:ln w="12700">
-            <a:solidFill>
-              <a:srgbClr val="2F4F6B"/>
-            </a:solidFill>
-            <a:prstDash val="solid"/>
-          </a:ln>
-        </p:spPr>
-      </p:sp>
-      <p:sp>
-        <p:nvSpPr>
-          <p:cNvPr id="12" name="Text 10"/>
-          <p:cNvSpPr txBox="1"/>
-          <p:nvPr/>
-        </p:nvSpPr>
-        <p:spPr>
-          <a:xfrm>
-            <a:off x="4663440" y="2487168"/>
-            <a:ext cx="438912" cy="438912"/>
-          </a:xfrm>
-          <a:prstGeom prst="rect">
-            <a:avLst/>
-          </a:prstGeom>
-          <a:noFill/>
-          <a:ln/>
-        </p:spPr>
-        <p:txBody>
-          <a:bodyPr wrap="square" lIns="0" tIns="0" rIns="0" bIns="0" rtlCol="0" anchor="ctr"/>
-          <a:lstStyle/>
-          <a:p>
-            <a:pPr algn="ctr" indent="0" marL="0">
-              <a:buNone/>
-            </a:pPr>
-            <a:r>
-              <a:rPr lang="en-US" sz="1400" b="1" dirty="0">
-                <a:solidFill>
-                  <a:srgbClr val="FFFFFF"/>
-                </a:solidFill>
-                <a:latin typeface="Yu Gothic" pitchFamily="34" charset="0"/>
-                <a:ea typeface="Yu Gothic" pitchFamily="34" charset="-122"/>
-                <a:cs typeface="Yu Gothic" pitchFamily="34" charset="-120"/>
-              </a:rPr>
-              <a:t>2</a:t>
-            </a:r>
-            <a:endParaRPr lang="en-US" sz="1400" dirty="0"/>
-          </a:p>
-        </p:txBody>
-      </p:sp>
-      <p:sp>
-        <p:nvSpPr>
-          <p:cNvPr id="13" name="Text 11"/>
-          <p:cNvSpPr txBox="1"/>
-          <p:nvPr/>
-        </p:nvSpPr>
-        <p:spPr>
-          <a:xfrm>
-            <a:off x="4663440" y="3035808"/>
-            <a:ext cx="2834640" cy="777240"/>
-          </a:xfrm>
-          <a:prstGeom prst="rect">
-            <a:avLst/>
-          </a:prstGeom>
-          <a:noFill/>
-          <a:ln/>
-        </p:spPr>
-        <p:txBody>
-          <a:bodyPr wrap="square" lIns="0" tIns="0" rIns="0" bIns="0" rtlCol="0" anchor="ctr"/>
-          <a:lstStyle/>
-          <a:p>
-            <a:pPr indent="0" marL="0">
-              <a:lnSpc>
-                <a:spcPct val="125000"/>
-              </a:lnSpc>
-              <a:buNone/>
-            </a:pPr>
-            <a:r>
-              <a:rPr lang="en-US" sz="1500" b="1" dirty="0">
-                <a:solidFill>
-                  <a:srgbClr val="23201D"/>
-                </a:solidFill>
-                <a:latin typeface="Yu Gothic" pitchFamily="34" charset="0"/>
-                <a:ea typeface="Yu Gothic" pitchFamily="34" charset="-122"/>
-                <a:cs typeface="Yu Gothic" pitchFamily="34" charset="-120"/>
-              </a:rPr>
-              <a:t>実データで動かす</a:t>
-            </a:r>
-            <a:endParaRPr lang="en-US" sz="1500" dirty="0"/>
-          </a:p>
-        </p:txBody>
-      </p:sp>
-      <p:sp>
-        <p:nvSpPr>
-          <p:cNvPr id="14" name="Text 12"/>
-          <p:cNvSpPr txBox="1"/>
-          <p:nvPr/>
-        </p:nvSpPr>
-        <p:spPr>
-          <a:xfrm>
-            <a:off x="4663440" y="3822192"/>
-            <a:ext cx="2834640" cy="960120"/>
-          </a:xfrm>
-          <a:prstGeom prst="rect">
-            <a:avLst/>
-          </a:prstGeom>
-          <a:noFill/>
-          <a:ln/>
-        </p:spPr>
-        <p:txBody>
-          <a:bodyPr wrap="square" lIns="0" tIns="0" rIns="0" bIns="0" rtlCol="0" anchor="ctr"/>
-          <a:lstStyle/>
-          <a:p>
-            <a:pPr indent="0" marL="0">
-              <a:lnSpc>
-                <a:spcPct val="130000"/>
-              </a:lnSpc>
-              <a:buNone/>
-            </a:pPr>
-            <a:r>
-              <a:rPr lang="en-US" sz="1200" dirty="0">
-                <a:solidFill>
-                  <a:srgbClr val="5A534A"/>
-                </a:solidFill>
-                <a:latin typeface="Yu Gothic" pitchFamily="34" charset="0"/>
-                <a:ea typeface="Yu Gothic" pitchFamily="34" charset="-122"/>
-                <a:cs typeface="Yu Gothic" pitchFamily="34" charset="-120"/>
-              </a:rPr>
-              <a:t>動かないまま持ち帰らせません</a:t>
-            </a:r>
-            <a:endParaRPr lang="en-US" sz="1200" dirty="0"/>
-          </a:p>
-        </p:txBody>
-      </p:sp>
-      <p:sp>
-        <p:nvSpPr>
-          <p:cNvPr id="15" name="Shape 13"/>
-          <p:cNvSpPr/>
-          <p:nvPr/>
-        </p:nvSpPr>
-        <p:spPr>
-          <a:xfrm>
-            <a:off x="8001000" y="2240280"/>
-            <a:ext cx="3383280" cy="2697480"/>
-          </a:xfrm>
-          <a:prstGeom prst="rect">
-            <a:avLst/>
-          </a:prstGeom>
-          <a:solidFill>
-            <a:srgbClr val="FFFFFF"/>
-          </a:solidFill>
-          <a:ln w="12700">
-            <a:solidFill>
-              <a:srgbClr val="EDE7DB"/>
-            </a:solidFill>
-            <a:prstDash val="solid"/>
-          </a:ln>
-        </p:spPr>
-      </p:sp>
-      <p:sp>
-        <p:nvSpPr>
-          <p:cNvPr id="16" name="Shape 14"/>
-          <p:cNvSpPr/>
-          <p:nvPr/>
-        </p:nvSpPr>
-        <p:spPr>
-          <a:xfrm>
-            <a:off x="8275320" y="2487168"/>
-            <a:ext cx="438912" cy="438912"/>
-          </a:xfrm>
-          <a:prstGeom prst="ellipse">
-            <a:avLst/>
-          </a:prstGeom>
-          <a:solidFill>
-            <a:srgbClr val="2F4F6B"/>
-          </a:solidFill>
-          <a:ln w="12700">
-            <a:solidFill>
-              <a:srgbClr val="2F4F6B"/>
-            </a:solidFill>
-            <a:prstDash val="solid"/>
-          </a:ln>
-        </p:spPr>
-      </p:sp>
-      <p:sp>
-        <p:nvSpPr>
-          <p:cNvPr id="17" name="Text 15"/>
-          <p:cNvSpPr txBox="1"/>
-          <p:nvPr/>
-        </p:nvSpPr>
-        <p:spPr>
-          <a:xfrm>
-            <a:off x="8275320" y="2487168"/>
-            <a:ext cx="438912" cy="438912"/>
-          </a:xfrm>
-          <a:prstGeom prst="rect">
-            <a:avLst/>
-          </a:prstGeom>
-          <a:noFill/>
-          <a:ln/>
-        </p:spPr>
-        <p:txBody>
-          <a:bodyPr wrap="square" lIns="0" tIns="0" rIns="0" bIns="0" rtlCol="0" anchor="ctr"/>
-          <a:lstStyle/>
-          <a:p>
-            <a:pPr algn="ctr" indent="0" marL="0">
-              <a:buNone/>
-            </a:pPr>
-            <a:r>
-              <a:rPr lang="en-US" sz="1400" b="1" dirty="0">
-                <a:solidFill>
-                  <a:srgbClr val="FFFFFF"/>
-                </a:solidFill>
-                <a:latin typeface="Yu Gothic" pitchFamily="34" charset="0"/>
-                <a:ea typeface="Yu Gothic" pitchFamily="34" charset="-122"/>
-                <a:cs typeface="Yu Gothic" pitchFamily="34" charset="-120"/>
-              </a:rPr>
-              <a:t>3</a:t>
-            </a:r>
-            <a:endParaRPr lang="en-US" sz="1400" dirty="0"/>
-          </a:p>
-        </p:txBody>
-      </p:sp>
-      <p:sp>
-        <p:nvSpPr>
-          <p:cNvPr id="18" name="Text 16"/>
-          <p:cNvSpPr txBox="1"/>
-          <p:nvPr/>
-        </p:nvSpPr>
-        <p:spPr>
-          <a:xfrm>
-            <a:off x="8275320" y="3035808"/>
-            <a:ext cx="2834640" cy="777240"/>
-          </a:xfrm>
-          <a:prstGeom prst="rect">
-            <a:avLst/>
-          </a:prstGeom>
-          <a:noFill/>
-          <a:ln/>
-        </p:spPr>
-        <p:txBody>
-          <a:bodyPr wrap="square" lIns="0" tIns="0" rIns="0" bIns="0" rtlCol="0" anchor="ctr"/>
-          <a:lstStyle/>
-          <a:p>
-            <a:pPr indent="0" marL="0">
-              <a:lnSpc>
-                <a:spcPct val="125000"/>
-              </a:lnSpc>
-              <a:buNone/>
-            </a:pPr>
-            <a:r>
-              <a:rPr lang="en-US" sz="1500" b="1" dirty="0">
-                <a:solidFill>
-                  <a:srgbClr val="23201D"/>
-                </a:solidFill>
-                <a:latin typeface="Yu Gothic" pitchFamily="34" charset="0"/>
-                <a:ea typeface="Yu Gothic" pitchFamily="34" charset="-122"/>
-                <a:cs typeface="Yu Gothic" pitchFamily="34" charset="-120"/>
-              </a:rPr>
-              <a:t>利用ルールをA4一枚で書く</a:t>
-            </a:r>
-            <a:endParaRPr lang="en-US" sz="1500" dirty="0"/>
-          </a:p>
-        </p:txBody>
-      </p:sp>
-      <p:sp>
-        <p:nvSpPr>
-          <p:cNvPr id="19" name="Text 17"/>
-          <p:cNvSpPr txBox="1"/>
-          <p:nvPr/>
-        </p:nvSpPr>
-        <p:spPr>
-          <a:xfrm>
-            <a:off x="8275320" y="3822192"/>
-            <a:ext cx="2834640" cy="960120"/>
-          </a:xfrm>
-          <a:prstGeom prst="rect">
-            <a:avLst/>
-          </a:prstGeom>
-          <a:noFill/>
-          <a:ln/>
-        </p:spPr>
-        <p:txBody>
-          <a:bodyPr wrap="square" lIns="0" tIns="0" rIns="0" bIns="0" rtlCol="0" anchor="ctr"/>
-          <a:lstStyle/>
-          <a:p>
-            <a:pPr indent="0" marL="0">
-              <a:lnSpc>
-                <a:spcPct val="130000"/>
-              </a:lnSpc>
-              <a:buNone/>
-            </a:pPr>
-            <a:r>
-              <a:rPr lang="en-US" sz="1200" dirty="0">
-                <a:solidFill>
-                  <a:srgbClr val="5A534A"/>
-                </a:solidFill>
-                <a:latin typeface="Yu Gothic" pitchFamily="34" charset="0"/>
-                <a:ea typeface="Yu Gothic" pitchFamily="34" charset="-122"/>
-                <a:cs typeface="Yu Gothic" pitchFamily="34" charset="-120"/>
-              </a:rPr>
-              <a:t>5項目以上に増やしません。増やすと読まれません</a:t>
-            </a:r>
-            <a:endParaRPr lang="en-US" sz="1200" dirty="0"/>
+              <a:t>この6行が、そのまま仕様書になります。担当者が替わっても、これがあれば作り直せます。</a:t>
+            </a:r>
+            <a:endParaRPr lang="en-US" sz="1250" dirty="0"/>
           </a:p>
         </p:txBody>
       </p:sp>
@@ -4440,8 +6121,8 @@
         </p:nvSpPr>
         <p:spPr>
           <a:xfrm>
-            <a:off x="777240" y="6355080"/>
-            <a:ext cx="7424928" cy="274320"/>
+            <a:off x="777240" y="6382512"/>
+            <a:ext cx="7424928" cy="256032"/>
           </a:xfrm>
           <a:prstGeom prst="rect">
             <a:avLst/>
@@ -4479,8 +6160,8 @@
         </p:nvSpPr>
         <p:spPr>
           <a:xfrm>
-            <a:off x="8202168" y="6355080"/>
-            <a:ext cx="3182112" cy="274320"/>
+            <a:off x="8202168" y="6382512"/>
+            <a:ext cx="3182112" cy="256032"/>
           </a:xfrm>
           <a:prstGeom prst="rect">
             <a:avLst/>
@@ -4504,7 +6185,7 @@
                 <a:ea typeface="Yu Gothic" pitchFamily="34" charset="-122"/>
                 <a:cs typeface="Yu Gothic" pitchFamily="34" charset="-120"/>
               </a:rPr>
-              <a:t>演習</a:t>
+              <a:t>あてはめ</a:t>
             </a:r>
             <a:endParaRPr lang="en-US" sz="900" dirty="0"/>
           </a:p>
@@ -4550,7 +6231,7 @@
         </p:nvSpPr>
         <p:spPr>
           <a:xfrm>
-            <a:off x="777240" y="822960"/>
+            <a:off x="777240" y="566928"/>
             <a:ext cx="10607040" cy="274320"/>
           </a:xfrm>
           <a:prstGeom prst="rect">
@@ -4569,13 +6250,13 @@
             <a:r>
               <a:rPr lang="en-US" sz="1100" b="1" spc="250" kern="0" dirty="0">
                 <a:solidFill>
-                  <a:srgbClr val="B04A2F"/>
-                </a:solidFill>
-                <a:latin typeface="Yu Gothic" pitchFamily="34" charset="0"/>
-                <a:ea typeface="Yu Gothic" pitchFamily="34" charset="-122"/>
-                <a:cs typeface="Yu Gothic" pitchFamily="34" charset="-120"/>
-              </a:rPr>
-              <a:t>ここだけは</a:t>
+                  <a:srgbClr val="8A8177"/>
+                </a:solidFill>
+                <a:latin typeface="Yu Gothic" pitchFamily="34" charset="0"/>
+                <a:ea typeface="Yu Gothic" pitchFamily="34" charset="-122"/>
+                <a:cs typeface="Yu Gothic" pitchFamily="34" charset="-120"/>
+              </a:rPr>
+              <a:t>実演 ①</a:t>
             </a:r>
             <a:endParaRPr lang="en-US" sz="1100" dirty="0"/>
           </a:p>
@@ -4589,24 +6270,24 @@
         </p:nvSpPr>
         <p:spPr>
           <a:xfrm>
-            <a:off x="777240" y="1188720"/>
-            <a:ext cx="9546336" cy="822960"/>
-          </a:xfrm>
-          <a:prstGeom prst="rect">
-            <a:avLst/>
-          </a:prstGeom>
-          <a:noFill/>
-          <a:ln/>
-        </p:spPr>
-        <p:txBody>
-          <a:bodyPr wrap="square" lIns="0" tIns="0" rIns="0" bIns="0" rtlCol="0" anchor="ctr"/>
-          <a:lstStyle/>
-          <a:p>
-            <a:pPr indent="0" marL="0">
-              <a:buNone/>
-            </a:pPr>
-            <a:r>
-              <a:rPr lang="en-US" sz="3000" b="1" dirty="0">
+            <a:off x="777240" y="896112"/>
+            <a:ext cx="10607040" cy="640080"/>
+          </a:xfrm>
+          <a:prstGeom prst="rect">
+            <a:avLst/>
+          </a:prstGeom>
+          <a:noFill/>
+          <a:ln/>
+        </p:spPr>
+        <p:txBody>
+          <a:bodyPr wrap="square" lIns="0" tIns="0" rIns="0" bIns="0" rtlCol="0" anchor="ctr"/>
+          <a:lstStyle/>
+          <a:p>
+            <a:pPr indent="0" marL="0">
+              <a:buNone/>
+            </a:pPr>
+            <a:r>
+              <a:rPr lang="en-US" sz="2600" b="1" dirty="0">
                 <a:solidFill>
                   <a:srgbClr val="23201D"/>
                 </a:solidFill>
@@ -4614,9 +6295,9 @@
                 <a:ea typeface="Yu Gothic" pitchFamily="34" charset="-122"/>
                 <a:cs typeface="Yu Gothic" pitchFamily="34" charset="-120"/>
               </a:rPr>
-              <a:t>利用ルールは5項目まで</a:t>
-            </a:r>
-            <a:endParaRPr lang="en-US" sz="3000" dirty="0"/>
+              <a:t>資料を載せただけの状態</a:t>
+            </a:r>
+            <a:endParaRPr lang="en-US" sz="2600" dirty="0"/>
           </a:p>
         </p:txBody>
       </p:sp>
@@ -4628,14 +6309,352 @@
         </p:nvSpPr>
         <p:spPr>
           <a:xfrm>
-            <a:off x="777240" y="2331720"/>
-            <a:ext cx="64008" cy="2011680"/>
+            <a:off x="777240" y="1691640"/>
+            <a:ext cx="4879238" cy="1371600"/>
           </a:xfrm>
           <a:prstGeom prst="rect">
             <a:avLst/>
           </a:prstGeom>
           <a:solidFill>
-            <a:srgbClr val="B04A2F"/>
+            <a:srgbClr val="EDE7DB"/>
+          </a:solidFill>
+          <a:ln w="15875">
+            <a:solidFill>
+              <a:srgbClr val="8A8177"/>
+            </a:solidFill>
+            <a:prstDash val="solid"/>
+          </a:ln>
+        </p:spPr>
+      </p:sp>
+      <p:sp>
+        <p:nvSpPr>
+          <p:cNvPr id="5" name="Text 3"/>
+          <p:cNvSpPr txBox="1"/>
+          <p:nvPr/>
+        </p:nvSpPr>
+        <p:spPr>
+          <a:xfrm>
+            <a:off x="1005840" y="1783080"/>
+            <a:ext cx="1828800" cy="274320"/>
+          </a:xfrm>
+          <a:prstGeom prst="rect">
+            <a:avLst/>
+          </a:prstGeom>
+          <a:noFill/>
+          <a:ln/>
+        </p:spPr>
+        <p:txBody>
+          <a:bodyPr wrap="square" lIns="0" tIns="0" rIns="0" bIns="0" rtlCol="0" anchor="ctr"/>
+          <a:lstStyle/>
+          <a:p>
+            <a:pPr indent="0" marL="0">
+              <a:buNone/>
+            </a:pPr>
+            <a:r>
+              <a:rPr lang="en-US" sz="1000" b="1" spc="200" kern="0" dirty="0">
+                <a:solidFill>
+                  <a:srgbClr val="8A8177"/>
+                </a:solidFill>
+                <a:latin typeface="Yu Gothic" pitchFamily="34" charset="0"/>
+                <a:ea typeface="Yu Gothic" pitchFamily="34" charset="-122"/>
+                <a:cs typeface="Yu Gothic" pitchFamily="34" charset="-120"/>
+              </a:rPr>
+              <a:t>入力</a:t>
+            </a:r>
+            <a:endParaRPr lang="en-US" sz="1000" dirty="0"/>
+          </a:p>
+        </p:txBody>
+      </p:sp>
+      <p:sp>
+        <p:nvSpPr>
+          <p:cNvPr id="6" name="Text 4"/>
+          <p:cNvSpPr txBox="1"/>
+          <p:nvPr/>
+        </p:nvSpPr>
+        <p:spPr>
+          <a:xfrm>
+            <a:off x="1005840" y="2084832"/>
+            <a:ext cx="4422038" cy="868680"/>
+          </a:xfrm>
+          <a:prstGeom prst="rect">
+            <a:avLst/>
+          </a:prstGeom>
+          <a:noFill/>
+          <a:ln/>
+        </p:spPr>
+        <p:txBody>
+          <a:bodyPr wrap="square" lIns="0" tIns="0" rIns="0" bIns="0" rtlCol="0" anchor="ctr"/>
+          <a:lstStyle/>
+          <a:p>
+            <a:pPr indent="0" marL="0">
+              <a:lnSpc>
+                <a:spcPct val="125000"/>
+              </a:lnSpc>
+              <a:buNone/>
+            </a:pPr>
+            <a:r>
+              <a:rPr lang="en-US" sz="1200" dirty="0">
+                <a:solidFill>
+                  <a:srgbClr val="23201D"/>
+                </a:solidFill>
+                <a:latin typeface="Consolas" pitchFamily="34" charset="0"/>
+                <a:ea typeface="Consolas" pitchFamily="34" charset="-122"/>
+                <a:cs typeface="Consolas" pitchFamily="34" charset="-120"/>
+              </a:rPr>
+              <a:t>資料を10本載せて「この資料から答えて」</a:t>
+            </a:r>
+            <a:endParaRPr lang="en-US" sz="1200" dirty="0"/>
+          </a:p>
+        </p:txBody>
+      </p:sp>
+      <p:sp>
+        <p:nvSpPr>
+          <p:cNvPr id="7" name="Shape 5"/>
+          <p:cNvSpPr/>
+          <p:nvPr/>
+        </p:nvSpPr>
+        <p:spPr>
+          <a:xfrm>
+            <a:off x="6080760" y="1691640"/>
+            <a:ext cx="5303520" cy="3017520"/>
+          </a:xfrm>
+          <a:prstGeom prst="rect">
+            <a:avLst/>
+          </a:prstGeom>
+          <a:solidFill>
+            <a:srgbClr val="FFFFFF"/>
+          </a:solidFill>
+          <a:ln w="12700">
+            <a:solidFill>
+              <a:srgbClr val="EDE7DB"/>
+            </a:solidFill>
+            <a:prstDash val="solid"/>
+          </a:ln>
+        </p:spPr>
+      </p:sp>
+      <p:sp>
+        <p:nvSpPr>
+          <p:cNvPr id="8" name="Text 6"/>
+          <p:cNvSpPr txBox="1"/>
+          <p:nvPr/>
+        </p:nvSpPr>
+        <p:spPr>
+          <a:xfrm>
+            <a:off x="6309360" y="1783080"/>
+            <a:ext cx="2743200" cy="274320"/>
+          </a:xfrm>
+          <a:prstGeom prst="rect">
+            <a:avLst/>
+          </a:prstGeom>
+          <a:noFill/>
+          <a:ln/>
+        </p:spPr>
+        <p:txBody>
+          <a:bodyPr wrap="square" lIns="0" tIns="0" rIns="0" bIns="0" rtlCol="0" anchor="ctr"/>
+          <a:lstStyle/>
+          <a:p>
+            <a:pPr indent="0" marL="0">
+              <a:buNone/>
+            </a:pPr>
+            <a:r>
+              <a:rPr lang="en-US" sz="1000" b="1" spc="200" kern="0" dirty="0">
+                <a:solidFill>
+                  <a:srgbClr val="8A8177"/>
+                </a:solidFill>
+                <a:latin typeface="Yu Gothic" pitchFamily="34" charset="0"/>
+                <a:ea typeface="Yu Gothic" pitchFamily="34" charset="-122"/>
+                <a:cs typeface="Yu Gothic" pitchFamily="34" charset="-120"/>
+              </a:rPr>
+              <a:t>出てくるもの</a:t>
+            </a:r>
+            <a:endParaRPr lang="en-US" sz="1000" dirty="0"/>
+          </a:p>
+        </p:txBody>
+      </p:sp>
+      <p:sp>
+        <p:nvSpPr>
+          <p:cNvPr id="9" name="Text 7"/>
+          <p:cNvSpPr txBox="1"/>
+          <p:nvPr/>
+        </p:nvSpPr>
+        <p:spPr>
+          <a:xfrm>
+            <a:off x="6309360" y="2148840"/>
+            <a:ext cx="4846320" cy="566928"/>
+          </a:xfrm>
+          <a:prstGeom prst="rect">
+            <a:avLst/>
+          </a:prstGeom>
+          <a:noFill/>
+          <a:ln/>
+        </p:spPr>
+        <p:txBody>
+          <a:bodyPr wrap="square" lIns="0" tIns="0" rIns="0" bIns="0" rtlCol="0" anchor="ctr"/>
+          <a:lstStyle/>
+          <a:p>
+            <a:pPr indent="0" marL="0">
+              <a:lnSpc>
+                <a:spcPct val="125000"/>
+              </a:lnSpc>
+              <a:buNone/>
+            </a:pPr>
+            <a:r>
+              <a:rPr lang="en-US" sz="1250" dirty="0">
+                <a:solidFill>
+                  <a:srgbClr val="23201D"/>
+                </a:solidFill>
+                <a:latin typeface="Yu Gothic" pitchFamily="34" charset="0"/>
+                <a:ea typeface="Yu Gothic" pitchFamily="34" charset="-122"/>
+                <a:cs typeface="Yu Gothic" pitchFamily="34" charset="-120"/>
+              </a:rPr>
+              <a:t>・資料にないことも、それらしく答える</a:t>
+            </a:r>
+            <a:endParaRPr lang="en-US" sz="1250" dirty="0"/>
+          </a:p>
+        </p:txBody>
+      </p:sp>
+      <p:sp>
+        <p:nvSpPr>
+          <p:cNvPr id="10" name="Text 8"/>
+          <p:cNvSpPr txBox="1"/>
+          <p:nvPr/>
+        </p:nvSpPr>
+        <p:spPr>
+          <a:xfrm>
+            <a:off x="6309360" y="2752344"/>
+            <a:ext cx="4846320" cy="566928"/>
+          </a:xfrm>
+          <a:prstGeom prst="rect">
+            <a:avLst/>
+          </a:prstGeom>
+          <a:noFill/>
+          <a:ln/>
+        </p:spPr>
+        <p:txBody>
+          <a:bodyPr wrap="square" lIns="0" tIns="0" rIns="0" bIns="0" rtlCol="0" anchor="ctr"/>
+          <a:lstStyle/>
+          <a:p>
+            <a:pPr indent="0" marL="0">
+              <a:lnSpc>
+                <a:spcPct val="125000"/>
+              </a:lnSpc>
+              <a:buNone/>
+            </a:pPr>
+            <a:r>
+              <a:rPr lang="en-US" sz="1250" dirty="0">
+                <a:solidFill>
+                  <a:srgbClr val="23201D"/>
+                </a:solidFill>
+                <a:latin typeface="Yu Gothic" pitchFamily="34" charset="0"/>
+                <a:ea typeface="Yu Gothic" pitchFamily="34" charset="-122"/>
+                <a:cs typeface="Yu Gothic" pitchFamily="34" charset="-120"/>
+              </a:rPr>
+              <a:t>・どの資料を根拠にしたか分からない</a:t>
+            </a:r>
+            <a:endParaRPr lang="en-US" sz="1250" dirty="0"/>
+          </a:p>
+        </p:txBody>
+      </p:sp>
+      <p:sp>
+        <p:nvSpPr>
+          <p:cNvPr id="11" name="Text 9"/>
+          <p:cNvSpPr txBox="1"/>
+          <p:nvPr/>
+        </p:nvSpPr>
+        <p:spPr>
+          <a:xfrm>
+            <a:off x="6309360" y="3355848"/>
+            <a:ext cx="4846320" cy="566928"/>
+          </a:xfrm>
+          <a:prstGeom prst="rect">
+            <a:avLst/>
+          </a:prstGeom>
+          <a:noFill/>
+          <a:ln/>
+        </p:spPr>
+        <p:txBody>
+          <a:bodyPr wrap="square" lIns="0" tIns="0" rIns="0" bIns="0" rtlCol="0" anchor="ctr"/>
+          <a:lstStyle/>
+          <a:p>
+            <a:pPr indent="0" marL="0">
+              <a:lnSpc>
+                <a:spcPct val="125000"/>
+              </a:lnSpc>
+              <a:buNone/>
+            </a:pPr>
+            <a:r>
+              <a:rPr lang="en-US" sz="1250" dirty="0">
+                <a:solidFill>
+                  <a:srgbClr val="23201D"/>
+                </a:solidFill>
+                <a:latin typeface="Yu Gothic" pitchFamily="34" charset="0"/>
+                <a:ea typeface="Yu Gothic" pitchFamily="34" charset="-122"/>
+                <a:cs typeface="Yu Gothic" pitchFamily="34" charset="-120"/>
+              </a:rPr>
+              <a:t>・間違いに気づけない</a:t>
+            </a:r>
+            <a:endParaRPr lang="en-US" sz="1250" dirty="0"/>
+          </a:p>
+        </p:txBody>
+      </p:sp>
+      <p:sp>
+        <p:nvSpPr>
+          <p:cNvPr id="12" name="Text 10"/>
+          <p:cNvSpPr txBox="1"/>
+          <p:nvPr/>
+        </p:nvSpPr>
+        <p:spPr>
+          <a:xfrm>
+            <a:off x="6309360" y="3959352"/>
+            <a:ext cx="4846320" cy="566928"/>
+          </a:xfrm>
+          <a:prstGeom prst="rect">
+            <a:avLst/>
+          </a:prstGeom>
+          <a:noFill/>
+          <a:ln/>
+        </p:spPr>
+        <p:txBody>
+          <a:bodyPr wrap="square" lIns="0" tIns="0" rIns="0" bIns="0" rtlCol="0" anchor="ctr"/>
+          <a:lstStyle/>
+          <a:p>
+            <a:pPr indent="0" marL="0">
+              <a:lnSpc>
+                <a:spcPct val="125000"/>
+              </a:lnSpc>
+              <a:buNone/>
+            </a:pPr>
+            <a:r>
+              <a:rPr lang="en-US" sz="1250" dirty="0">
+                <a:solidFill>
+                  <a:srgbClr val="23201D"/>
+                </a:solidFill>
+                <a:latin typeface="Yu Gothic" pitchFamily="34" charset="0"/>
+                <a:ea typeface="Yu Gothic" pitchFamily="34" charset="-122"/>
+                <a:cs typeface="Yu Gothic" pitchFamily="34" charset="-120"/>
+              </a:rPr>
+              <a:t>・一度事故ると、社内で二度と使われない</a:t>
+            </a:r>
+            <a:endParaRPr lang="en-US" sz="1250" dirty="0"/>
+          </a:p>
+        </p:txBody>
+      </p:sp>
+      <p:sp>
+        <p:nvSpPr>
+          <p:cNvPr id="13" name="Shape 11"/>
+          <p:cNvSpPr/>
+          <p:nvPr/>
+        </p:nvSpPr>
+        <p:spPr>
+          <a:xfrm>
+            <a:off x="777240" y="3291840"/>
+            <a:ext cx="4879238" cy="1417320"/>
+          </a:xfrm>
+          <a:prstGeom prst="rect">
+            <a:avLst/>
+          </a:prstGeom>
+          <a:solidFill>
+            <a:srgbClr val="E4DFD5"/>
           </a:solidFill>
           <a:ln w="12700">
             <a:solidFill>
@@ -4647,14 +6666,14 @@
       </p:sp>
       <p:sp>
         <p:nvSpPr>
-          <p:cNvPr id="5" name="Text 3"/>
-          <p:cNvSpPr txBox="1"/>
-          <p:nvPr/>
-        </p:nvSpPr>
-        <p:spPr>
-          <a:xfrm>
-            <a:off x="1188720" y="2331720"/>
-            <a:ext cx="9966960" cy="2011680"/>
+          <p:cNvPr id="14" name="Text 12"/>
+          <p:cNvSpPr txBox="1"/>
+          <p:nvPr/>
+        </p:nvSpPr>
+        <p:spPr>
+          <a:xfrm>
+            <a:off x="1005840" y="3383280"/>
+            <a:ext cx="4422038" cy="1234440"/>
           </a:xfrm>
           <a:prstGeom prst="rect">
             <a:avLst/>
@@ -4668,12 +6687,12 @@
           <a:p>
             <a:pPr indent="0" marL="0">
               <a:lnSpc>
-                <a:spcPct val="160000"/>
+                <a:spcPct val="135000"/>
               </a:lnSpc>
               <a:buNone/>
             </a:pPr>
             <a:r>
-              <a:rPr lang="en-US" sz="1700" dirty="0">
+              <a:rPr lang="en-US" sz="1250" dirty="0">
                 <a:solidFill>
                   <a:srgbClr val="3F3933"/>
                 </a:solidFill>
@@ -4681,22 +6700,86 @@
                 <a:ea typeface="Yu Gothic" pitchFamily="34" charset="-122"/>
                 <a:cs typeface="Yu Gothic" pitchFamily="34" charset="-120"/>
               </a:rPr>
-              <a:t>使ってよいAI／入れてはいけない情報／出力の確認責任と外に出してよい業務／迷ったときの相談先／3か月ごとの見直し。これ以上は増やさないでください。</a:t>
-            </a:r>
-            <a:endParaRPr lang="en-US" sz="1700" dirty="0"/>
-          </a:p>
-        </p:txBody>
-      </p:sp>
-      <p:sp>
-        <p:nvSpPr>
-          <p:cNvPr id="6" name="Text 4"/>
-          <p:cNvSpPr txBox="1"/>
-          <p:nvPr/>
-        </p:nvSpPr>
-        <p:spPr>
-          <a:xfrm>
-            <a:off x="777240" y="6355080"/>
-            <a:ext cx="7424928" cy="274320"/>
+              <a:t>資料を載せれば正しく答える、というものではありません。答えない設定を、明示的に入れる必要があります。</a:t>
+            </a:r>
+            <a:endParaRPr lang="en-US" sz="1250" dirty="0"/>
+          </a:p>
+        </p:txBody>
+      </p:sp>
+      <p:sp>
+        <p:nvSpPr>
+          <p:cNvPr id="15" name="Shape 13"/>
+          <p:cNvSpPr/>
+          <p:nvPr/>
+        </p:nvSpPr>
+        <p:spPr>
+          <a:xfrm>
+            <a:off x="777240" y="4983480"/>
+            <a:ext cx="10607040" cy="685800"/>
+          </a:xfrm>
+          <a:prstGeom prst="rect">
+            <a:avLst/>
+          </a:prstGeom>
+          <a:solidFill>
+            <a:srgbClr val="8A8177"/>
+          </a:solidFill>
+          <a:ln w="12700">
+            <a:solidFill>
+              <a:srgbClr val="333333"/>
+            </a:solidFill>
+            <a:prstDash val="solid"/>
+          </a:ln>
+        </p:spPr>
+      </p:sp>
+      <p:sp>
+        <p:nvSpPr>
+          <p:cNvPr id="16" name="Text 14"/>
+          <p:cNvSpPr txBox="1"/>
+          <p:nvPr/>
+        </p:nvSpPr>
+        <p:spPr>
+          <a:xfrm>
+            <a:off x="1097280" y="4983480"/>
+            <a:ext cx="9966960" cy="685800"/>
+          </a:xfrm>
+          <a:prstGeom prst="rect">
+            <a:avLst/>
+          </a:prstGeom>
+          <a:noFill/>
+          <a:ln/>
+        </p:spPr>
+        <p:txBody>
+          <a:bodyPr wrap="square" lIns="0" tIns="0" rIns="0" bIns="0" rtlCol="0" anchor="ctr"/>
+          <a:lstStyle/>
+          <a:p>
+            <a:pPr indent="0" marL="0">
+              <a:buNone/>
+            </a:pPr>
+            <a:r>
+              <a:rPr lang="en-US" sz="1450" b="1" dirty="0">
+                <a:solidFill>
+                  <a:srgbClr val="FFFFFF"/>
+                </a:solidFill>
+                <a:latin typeface="Yu Gothic" pitchFamily="34" charset="0"/>
+                <a:ea typeface="Yu Gothic" pitchFamily="34" charset="-122"/>
+                <a:cs typeface="Yu Gothic" pitchFamily="34" charset="-120"/>
+              </a:rPr>
+              <a:t>「載せた」と「答えない設定にした」は別物です</a:t>
+            </a:r>
+            <a:endParaRPr lang="en-US" sz="1450" dirty="0"/>
+          </a:p>
+        </p:txBody>
+      </p:sp>
+      <p:sp>
+        <p:nvSpPr>
+          <p:cNvPr id="17" name="Text 15"/>
+          <p:cNvSpPr txBox="1"/>
+          <p:nvPr/>
+        </p:nvSpPr>
+        <p:spPr>
+          <a:xfrm>
+            <a:off x="777240" y="6382512"/>
+            <a:ext cx="7424928" cy="256032"/>
           </a:xfrm>
           <a:prstGeom prst="rect">
             <a:avLst/>
@@ -4728,14 +6811,14 @@
       </p:sp>
       <p:sp>
         <p:nvSpPr>
-          <p:cNvPr id="7" name="Text 5"/>
-          <p:cNvSpPr txBox="1"/>
-          <p:nvPr/>
-        </p:nvSpPr>
-        <p:spPr>
-          <a:xfrm>
-            <a:off x="8202168" y="6355080"/>
-            <a:ext cx="3182112" cy="274320"/>
+          <p:cNvPr id="18" name="Text 16"/>
+          <p:cNvSpPr txBox="1"/>
+          <p:nvPr/>
+        </p:nvSpPr>
+        <p:spPr>
+          <a:xfrm>
+            <a:off x="8202168" y="6382512"/>
+            <a:ext cx="3182112" cy="256032"/>
           </a:xfrm>
           <a:prstGeom prst="rect">
             <a:avLst/>
@@ -4759,7 +6842,7 @@
                 <a:ea typeface="Yu Gothic" pitchFamily="34" charset="-122"/>
                 <a:cs typeface="Yu Gothic" pitchFamily="34" charset="-120"/>
               </a:rPr>
-              <a:t>ここだけは</a:t>
+              <a:t>実演 ①</a:t>
             </a:r>
             <a:endParaRPr lang="en-US" sz="900" dirty="0"/>
           </a:p>
@@ -4779,7 +6862,7 @@
     <p:bg>
       <p:bgPr>
         <a:solidFill>
-          <a:srgbClr val="23201D"/>
+          <a:srgbClr val="F6F2EA"/>
         </a:solidFill>
       </p:bgPr>
     </p:bg>
@@ -4805,34 +6888,34 @@
         </p:nvSpPr>
         <p:spPr>
           <a:xfrm>
-            <a:off x="777240" y="1371600"/>
-            <a:ext cx="10607040" cy="365760"/>
-          </a:xfrm>
-          <a:prstGeom prst="rect">
-            <a:avLst/>
-          </a:prstGeom>
-          <a:noFill/>
-          <a:ln/>
-        </p:spPr>
-        <p:txBody>
-          <a:bodyPr wrap="square" lIns="0" tIns="0" rIns="0" bIns="0" rtlCol="0" anchor="ctr"/>
-          <a:lstStyle/>
-          <a:p>
-            <a:pPr indent="0" marL="0">
-              <a:buNone/>
-            </a:pPr>
-            <a:r>
-              <a:rPr lang="en-US" sz="1200" b="1" spc="300" kern="0" dirty="0">
-                <a:solidFill>
-                  <a:srgbClr val="B04A2F"/>
-                </a:solidFill>
-                <a:latin typeface="Yu Gothic" pitchFamily="34" charset="0"/>
-                <a:ea typeface="Yu Gothic" pitchFamily="34" charset="-122"/>
-                <a:cs typeface="Yu Gothic" pitchFamily="34" charset="-120"/>
-              </a:rPr>
-              <a:t>今日の宿題</a:t>
-            </a:r>
-            <a:endParaRPr lang="en-US" sz="1200" dirty="0"/>
+            <a:off x="777240" y="566928"/>
+            <a:ext cx="10607040" cy="274320"/>
+          </a:xfrm>
+          <a:prstGeom prst="rect">
+            <a:avLst/>
+          </a:prstGeom>
+          <a:noFill/>
+          <a:ln/>
+        </p:spPr>
+        <p:txBody>
+          <a:bodyPr wrap="square" lIns="0" tIns="0" rIns="0" bIns="0" rtlCol="0" anchor="ctr"/>
+          <a:lstStyle/>
+          <a:p>
+            <a:pPr indent="0" marL="0">
+              <a:buNone/>
+            </a:pPr>
+            <a:r>
+              <a:rPr lang="en-US" sz="1100" b="1" spc="250" kern="0" dirty="0">
+                <a:solidFill>
+                  <a:srgbClr val="3B6B4A"/>
+                </a:solidFill>
+                <a:latin typeface="Yu Gothic" pitchFamily="34" charset="0"/>
+                <a:ea typeface="Yu Gothic" pitchFamily="34" charset="-122"/>
+                <a:cs typeface="Yu Gothic" pitchFamily="34" charset="-120"/>
+              </a:rPr>
+              <a:t>実演 ②</a:t>
+            </a:r>
+            <a:endParaRPr lang="en-US" sz="1100" dirty="0"/>
           </a:p>
         </p:txBody>
       </p:sp>
@@ -4844,7 +6927,7 @@
         </p:nvSpPr>
         <p:spPr>
           <a:xfrm>
-            <a:off x="777240" y="1783080"/>
+            <a:off x="777240" y="896112"/>
             <a:ext cx="10607040" cy="640080"/>
           </a:xfrm>
           <a:prstGeom prst="rect">
@@ -4861,17 +6944,17 @@
               <a:buNone/>
             </a:pPr>
             <a:r>
-              <a:rPr lang="en-US" sz="3200" b="1" dirty="0">
-                <a:solidFill>
-                  <a:srgbClr val="FFFFFF"/>
-                </a:solidFill>
-                <a:latin typeface="Yu Gothic" pitchFamily="34" charset="0"/>
-                <a:ea typeface="Yu Gothic" pitchFamily="34" charset="-122"/>
-                <a:cs typeface="Yu Gothic" pitchFamily="34" charset="-120"/>
-              </a:rPr>
-              <a:t>ひとつだけ</a:t>
-            </a:r>
-            <a:endParaRPr lang="en-US" sz="3200" dirty="0"/>
+              <a:rPr lang="en-US" sz="2600" b="1" dirty="0">
+                <a:solidFill>
+                  <a:srgbClr val="23201D"/>
+                </a:solidFill>
+                <a:latin typeface="Yu Gothic" pitchFamily="34" charset="0"/>
+                <a:ea typeface="Yu Gothic" pitchFamily="34" charset="-122"/>
+                <a:cs typeface="Yu Gothic" pitchFamily="34" charset="-120"/>
+              </a:rPr>
+              <a:t>3行を足すだけで変わります</a:t>
+            </a:r>
+            <a:endParaRPr lang="en-US" sz="2600" dirty="0"/>
           </a:p>
         </p:txBody>
       </p:sp>
@@ -4883,18 +6966,124 @@
         </p:nvSpPr>
         <p:spPr>
           <a:xfrm>
-            <a:off x="777240" y="2743200"/>
-            <a:ext cx="10607040" cy="1463040"/>
+            <a:off x="777240" y="1691640"/>
+            <a:ext cx="4879238" cy="1371600"/>
           </a:xfrm>
           <a:prstGeom prst="rect">
             <a:avLst/>
           </a:prstGeom>
           <a:solidFill>
-            <a:srgbClr val="2E2A26"/>
+            <a:srgbClr val="FFFFFF"/>
+          </a:solidFill>
+          <a:ln w="15875">
+            <a:solidFill>
+              <a:srgbClr val="3B6B4A"/>
+            </a:solidFill>
+            <a:prstDash val="solid"/>
+          </a:ln>
+        </p:spPr>
+      </p:sp>
+      <p:sp>
+        <p:nvSpPr>
+          <p:cNvPr id="5" name="Text 3"/>
+          <p:cNvSpPr txBox="1"/>
+          <p:nvPr/>
+        </p:nvSpPr>
+        <p:spPr>
+          <a:xfrm>
+            <a:off x="1005840" y="1783080"/>
+            <a:ext cx="1828800" cy="274320"/>
+          </a:xfrm>
+          <a:prstGeom prst="rect">
+            <a:avLst/>
+          </a:prstGeom>
+          <a:noFill/>
+          <a:ln/>
+        </p:spPr>
+        <p:txBody>
+          <a:bodyPr wrap="square" lIns="0" tIns="0" rIns="0" bIns="0" rtlCol="0" anchor="ctr"/>
+          <a:lstStyle/>
+          <a:p>
+            <a:pPr indent="0" marL="0">
+              <a:buNone/>
+            </a:pPr>
+            <a:r>
+              <a:rPr lang="en-US" sz="1000" b="1" spc="200" kern="0" dirty="0">
+                <a:solidFill>
+                  <a:srgbClr val="3B6B4A"/>
+                </a:solidFill>
+                <a:latin typeface="Yu Gothic" pitchFamily="34" charset="0"/>
+                <a:ea typeface="Yu Gothic" pitchFamily="34" charset="-122"/>
+                <a:cs typeface="Yu Gothic" pitchFamily="34" charset="-120"/>
+              </a:rPr>
+              <a:t>入力</a:t>
+            </a:r>
+            <a:endParaRPr lang="en-US" sz="1000" dirty="0"/>
+          </a:p>
+        </p:txBody>
+      </p:sp>
+      <p:sp>
+        <p:nvSpPr>
+          <p:cNvPr id="6" name="Text 4"/>
+          <p:cNvSpPr txBox="1"/>
+          <p:nvPr/>
+        </p:nvSpPr>
+        <p:spPr>
+          <a:xfrm>
+            <a:off x="1005840" y="2084832"/>
+            <a:ext cx="4422038" cy="868680"/>
+          </a:xfrm>
+          <a:prstGeom prst="rect">
+            <a:avLst/>
+          </a:prstGeom>
+          <a:noFill/>
+          <a:ln/>
+        </p:spPr>
+        <p:txBody>
+          <a:bodyPr wrap="square" lIns="0" tIns="0" rIns="0" bIns="0" rtlCol="0" anchor="ctr"/>
+          <a:lstStyle/>
+          <a:p>
+            <a:pPr indent="0" marL="0">
+              <a:lnSpc>
+                <a:spcPct val="125000"/>
+              </a:lnSpc>
+              <a:buNone/>
+            </a:pPr>
+            <a:r>
+              <a:rPr lang="en-US" sz="1200" dirty="0">
+                <a:solidFill>
+                  <a:srgbClr val="23201D"/>
+                </a:solidFill>
+                <a:latin typeface="Consolas" pitchFamily="34" charset="0"/>
+                <a:ea typeface="Consolas" pitchFamily="34" charset="-122"/>
+                <a:cs typeface="Consolas" pitchFamily="34" charset="-120"/>
+              </a:rPr>
+              <a:t>①資料の内容だけから答える ②記載がなければ「記載がありません」 ③根拠の資料名を末尾に</a:t>
+            </a:r>
+            <a:endParaRPr lang="en-US" sz="1200" dirty="0"/>
+          </a:p>
+        </p:txBody>
+      </p:sp>
+      <p:sp>
+        <p:nvSpPr>
+          <p:cNvPr id="7" name="Shape 5"/>
+          <p:cNvSpPr/>
+          <p:nvPr/>
+        </p:nvSpPr>
+        <p:spPr>
+          <a:xfrm>
+            <a:off x="6080760" y="1691640"/>
+            <a:ext cx="5303520" cy="3017520"/>
+          </a:xfrm>
+          <a:prstGeom prst="rect">
+            <a:avLst/>
+          </a:prstGeom>
+          <a:solidFill>
+            <a:srgbClr val="FFFFFF"/>
           </a:solidFill>
           <a:ln w="12700">
             <a:solidFill>
-              <a:srgbClr val="B04A2F"/>
+              <a:srgbClr val="EDE7DB"/>
             </a:solidFill>
             <a:prstDash val="solid"/>
           </a:ln>
@@ -4902,14 +7091,604 @@
       </p:sp>
       <p:sp>
         <p:nvSpPr>
+          <p:cNvPr id="8" name="Text 6"/>
+          <p:cNvSpPr txBox="1"/>
+          <p:nvPr/>
+        </p:nvSpPr>
+        <p:spPr>
+          <a:xfrm>
+            <a:off x="6309360" y="1783080"/>
+            <a:ext cx="2743200" cy="274320"/>
+          </a:xfrm>
+          <a:prstGeom prst="rect">
+            <a:avLst/>
+          </a:prstGeom>
+          <a:noFill/>
+          <a:ln/>
+        </p:spPr>
+        <p:txBody>
+          <a:bodyPr wrap="square" lIns="0" tIns="0" rIns="0" bIns="0" rtlCol="0" anchor="ctr"/>
+          <a:lstStyle/>
+          <a:p>
+            <a:pPr indent="0" marL="0">
+              <a:buNone/>
+            </a:pPr>
+            <a:r>
+              <a:rPr lang="en-US" sz="1000" b="1" spc="200" kern="0" dirty="0">
+                <a:solidFill>
+                  <a:srgbClr val="8A8177"/>
+                </a:solidFill>
+                <a:latin typeface="Yu Gothic" pitchFamily="34" charset="0"/>
+                <a:ea typeface="Yu Gothic" pitchFamily="34" charset="-122"/>
+                <a:cs typeface="Yu Gothic" pitchFamily="34" charset="-120"/>
+              </a:rPr>
+              <a:t>出てくるもの</a:t>
+            </a:r>
+            <a:endParaRPr lang="en-US" sz="1000" dirty="0"/>
+          </a:p>
+        </p:txBody>
+      </p:sp>
+      <p:sp>
+        <p:nvSpPr>
+          <p:cNvPr id="9" name="Text 7"/>
+          <p:cNvSpPr txBox="1"/>
+          <p:nvPr/>
+        </p:nvSpPr>
+        <p:spPr>
+          <a:xfrm>
+            <a:off x="6309360" y="2148840"/>
+            <a:ext cx="4846320" cy="566928"/>
+          </a:xfrm>
+          <a:prstGeom prst="rect">
+            <a:avLst/>
+          </a:prstGeom>
+          <a:noFill/>
+          <a:ln/>
+        </p:spPr>
+        <p:txBody>
+          <a:bodyPr wrap="square" lIns="0" tIns="0" rIns="0" bIns="0" rtlCol="0" anchor="ctr"/>
+          <a:lstStyle/>
+          <a:p>
+            <a:pPr indent="0" marL="0">
+              <a:lnSpc>
+                <a:spcPct val="125000"/>
+              </a:lnSpc>
+              <a:buNone/>
+            </a:pPr>
+            <a:r>
+              <a:rPr lang="en-US" sz="1250" dirty="0">
+                <a:solidFill>
+                  <a:srgbClr val="23201D"/>
+                </a:solidFill>
+                <a:latin typeface="Yu Gothic" pitchFamily="34" charset="0"/>
+                <a:ea typeface="Yu Gothic" pitchFamily="34" charset="-122"/>
+                <a:cs typeface="Yu Gothic" pitchFamily="34" charset="-120"/>
+              </a:rPr>
+              <a:t>・知らないことは、知らないと答える</a:t>
+            </a:r>
+            <a:endParaRPr lang="en-US" sz="1250" dirty="0"/>
+          </a:p>
+        </p:txBody>
+      </p:sp>
+      <p:sp>
+        <p:nvSpPr>
+          <p:cNvPr id="10" name="Text 8"/>
+          <p:cNvSpPr txBox="1"/>
+          <p:nvPr/>
+        </p:nvSpPr>
+        <p:spPr>
+          <a:xfrm>
+            <a:off x="6309360" y="2752344"/>
+            <a:ext cx="4846320" cy="566928"/>
+          </a:xfrm>
+          <a:prstGeom prst="rect">
+            <a:avLst/>
+          </a:prstGeom>
+          <a:noFill/>
+          <a:ln/>
+        </p:spPr>
+        <p:txBody>
+          <a:bodyPr wrap="square" lIns="0" tIns="0" rIns="0" bIns="0" rtlCol="0" anchor="ctr"/>
+          <a:lstStyle/>
+          <a:p>
+            <a:pPr indent="0" marL="0">
+              <a:lnSpc>
+                <a:spcPct val="125000"/>
+              </a:lnSpc>
+              <a:buNone/>
+            </a:pPr>
+            <a:r>
+              <a:rPr lang="en-US" sz="1250" dirty="0">
+                <a:solidFill>
+                  <a:srgbClr val="23201D"/>
+                </a:solidFill>
+                <a:latin typeface="Yu Gothic" pitchFamily="34" charset="0"/>
+                <a:ea typeface="Yu Gothic" pitchFamily="34" charset="-122"/>
+                <a:cs typeface="Yu Gothic" pitchFamily="34" charset="-120"/>
+              </a:rPr>
+              <a:t>・根拠の資料名が必ず付く</a:t>
+            </a:r>
+            <a:endParaRPr lang="en-US" sz="1250" dirty="0"/>
+          </a:p>
+        </p:txBody>
+      </p:sp>
+      <p:sp>
+        <p:nvSpPr>
+          <p:cNvPr id="11" name="Text 9"/>
+          <p:cNvSpPr txBox="1"/>
+          <p:nvPr/>
+        </p:nvSpPr>
+        <p:spPr>
+          <a:xfrm>
+            <a:off x="6309360" y="3355848"/>
+            <a:ext cx="4846320" cy="566928"/>
+          </a:xfrm>
+          <a:prstGeom prst="rect">
+            <a:avLst/>
+          </a:prstGeom>
+          <a:noFill/>
+          <a:ln/>
+        </p:spPr>
+        <p:txBody>
+          <a:bodyPr wrap="square" lIns="0" tIns="0" rIns="0" bIns="0" rtlCol="0" anchor="ctr"/>
+          <a:lstStyle/>
+          <a:p>
+            <a:pPr indent="0" marL="0">
+              <a:lnSpc>
+                <a:spcPct val="125000"/>
+              </a:lnSpc>
+              <a:buNone/>
+            </a:pPr>
+            <a:r>
+              <a:rPr lang="en-US" sz="1250" dirty="0">
+                <a:solidFill>
+                  <a:srgbClr val="23201D"/>
+                </a:solidFill>
+                <a:latin typeface="Yu Gothic" pitchFamily="34" charset="0"/>
+                <a:ea typeface="Yu Gothic" pitchFamily="34" charset="-122"/>
+                <a:cs typeface="Yu Gothic" pitchFamily="34" charset="-120"/>
+              </a:rPr>
+              <a:t>・間違いに気づけるようになる</a:t>
+            </a:r>
+            <a:endParaRPr lang="en-US" sz="1250" dirty="0"/>
+          </a:p>
+        </p:txBody>
+      </p:sp>
+      <p:sp>
+        <p:nvSpPr>
+          <p:cNvPr id="12" name="Text 10"/>
+          <p:cNvSpPr txBox="1"/>
+          <p:nvPr/>
+        </p:nvSpPr>
+        <p:spPr>
+          <a:xfrm>
+            <a:off x="6309360" y="3959352"/>
+            <a:ext cx="4846320" cy="566928"/>
+          </a:xfrm>
+          <a:prstGeom prst="rect">
+            <a:avLst/>
+          </a:prstGeom>
+          <a:noFill/>
+          <a:ln/>
+        </p:spPr>
+        <p:txBody>
+          <a:bodyPr wrap="square" lIns="0" tIns="0" rIns="0" bIns="0" rtlCol="0" anchor="ctr"/>
+          <a:lstStyle/>
+          <a:p>
+            <a:pPr indent="0" marL="0">
+              <a:lnSpc>
+                <a:spcPct val="125000"/>
+              </a:lnSpc>
+              <a:buNone/>
+            </a:pPr>
+            <a:r>
+              <a:rPr lang="en-US" sz="1250" dirty="0">
+                <a:solidFill>
+                  <a:srgbClr val="23201D"/>
+                </a:solidFill>
+                <a:latin typeface="Yu Gothic" pitchFamily="34" charset="0"/>
+                <a:ea typeface="Yu Gothic" pitchFamily="34" charset="-122"/>
+                <a:cs typeface="Yu Gothic" pitchFamily="34" charset="-120"/>
+              </a:rPr>
+              <a:t>・社員が安心して使える</a:t>
+            </a:r>
+            <a:endParaRPr lang="en-US" sz="1250" dirty="0"/>
+          </a:p>
+        </p:txBody>
+      </p:sp>
+      <p:sp>
+        <p:nvSpPr>
+          <p:cNvPr id="13" name="Shape 11"/>
+          <p:cNvSpPr/>
+          <p:nvPr/>
+        </p:nvSpPr>
+        <p:spPr>
+          <a:xfrm>
+            <a:off x="777240" y="3291840"/>
+            <a:ext cx="4879238" cy="1417320"/>
+          </a:xfrm>
+          <a:prstGeom prst="rect">
+            <a:avLst/>
+          </a:prstGeom>
+          <a:solidFill>
+            <a:srgbClr val="E7F0E9"/>
+          </a:solidFill>
+          <a:ln w="12700">
+            <a:solidFill>
+              <a:srgbClr val="333333"/>
+            </a:solidFill>
+            <a:prstDash val="solid"/>
+          </a:ln>
+        </p:spPr>
+      </p:sp>
+      <p:sp>
+        <p:nvSpPr>
+          <p:cNvPr id="14" name="Text 12"/>
+          <p:cNvSpPr txBox="1"/>
+          <p:nvPr/>
+        </p:nvSpPr>
+        <p:spPr>
+          <a:xfrm>
+            <a:off x="1005840" y="3383280"/>
+            <a:ext cx="4422038" cy="1234440"/>
+          </a:xfrm>
+          <a:prstGeom prst="rect">
+            <a:avLst/>
+          </a:prstGeom>
+          <a:noFill/>
+          <a:ln/>
+        </p:spPr>
+        <p:txBody>
+          <a:bodyPr wrap="square" lIns="0" tIns="0" rIns="0" bIns="0" rtlCol="0" anchor="ctr"/>
+          <a:lstStyle/>
+          <a:p>
+            <a:pPr indent="0" marL="0">
+              <a:lnSpc>
+                <a:spcPct val="135000"/>
+              </a:lnSpc>
+              <a:buNone/>
+            </a:pPr>
+            <a:r>
+              <a:rPr lang="en-US" sz="1250" dirty="0">
+                <a:solidFill>
+                  <a:srgbClr val="3F3933"/>
+                </a:solidFill>
+                <a:latin typeface="Yu Gothic" pitchFamily="34" charset="0"/>
+                <a:ea typeface="Yu Gothic" pitchFamily="34" charset="-122"/>
+                <a:cs typeface="Yu Gothic" pitchFamily="34" charset="-120"/>
+              </a:rPr>
+              <a:t>この3行を、コピーせずご自身で打ってください。打った内容は忘れません。実務で使えるかどうかは、ここで決まります。</a:t>
+            </a:r>
+            <a:endParaRPr lang="en-US" sz="1250" dirty="0"/>
+          </a:p>
+        </p:txBody>
+      </p:sp>
+      <p:sp>
+        <p:nvSpPr>
+          <p:cNvPr id="15" name="Shape 13"/>
+          <p:cNvSpPr/>
+          <p:nvPr/>
+        </p:nvSpPr>
+        <p:spPr>
+          <a:xfrm>
+            <a:off x="777240" y="4983480"/>
+            <a:ext cx="10607040" cy="685800"/>
+          </a:xfrm>
+          <a:prstGeom prst="rect">
+            <a:avLst/>
+          </a:prstGeom>
+          <a:solidFill>
+            <a:srgbClr val="3B6B4A"/>
+          </a:solidFill>
+          <a:ln w="12700">
+            <a:solidFill>
+              <a:srgbClr val="333333"/>
+            </a:solidFill>
+            <a:prstDash val="solid"/>
+          </a:ln>
+        </p:spPr>
+      </p:sp>
+      <p:sp>
+        <p:nvSpPr>
+          <p:cNvPr id="16" name="Text 14"/>
+          <p:cNvSpPr txBox="1"/>
+          <p:nvPr/>
+        </p:nvSpPr>
+        <p:spPr>
+          <a:xfrm>
+            <a:off x="1097280" y="4983480"/>
+            <a:ext cx="9966960" cy="685800"/>
+          </a:xfrm>
+          <a:prstGeom prst="rect">
+            <a:avLst/>
+          </a:prstGeom>
+          <a:noFill/>
+          <a:ln/>
+        </p:spPr>
+        <p:txBody>
+          <a:bodyPr wrap="square" lIns="0" tIns="0" rIns="0" bIns="0" rtlCol="0" anchor="ctr"/>
+          <a:lstStyle/>
+          <a:p>
+            <a:pPr indent="0" marL="0">
+              <a:buNone/>
+            </a:pPr>
+            <a:r>
+              <a:rPr lang="en-US" sz="1450" b="1" dirty="0">
+                <a:solidFill>
+                  <a:srgbClr val="FFFFFF"/>
+                </a:solidFill>
+                <a:latin typeface="Yu Gothic" pitchFamily="34" charset="0"/>
+                <a:ea typeface="Yu Gothic" pitchFamily="34" charset="-122"/>
+                <a:cs typeface="Yu Gothic" pitchFamily="34" charset="-120"/>
+              </a:rPr>
+              <a:t>「わからない」と言えるAIだけが、実務で使えます</a:t>
+            </a:r>
+            <a:endParaRPr lang="en-US" sz="1450" dirty="0"/>
+          </a:p>
+        </p:txBody>
+      </p:sp>
+      <p:sp>
+        <p:nvSpPr>
+          <p:cNvPr id="17" name="Text 15"/>
+          <p:cNvSpPr txBox="1"/>
+          <p:nvPr/>
+        </p:nvSpPr>
+        <p:spPr>
+          <a:xfrm>
+            <a:off x="777240" y="6382512"/>
+            <a:ext cx="7424928" cy="256032"/>
+          </a:xfrm>
+          <a:prstGeom prst="rect">
+            <a:avLst/>
+          </a:prstGeom>
+          <a:noFill/>
+          <a:ln/>
+        </p:spPr>
+        <p:txBody>
+          <a:bodyPr wrap="square" lIns="0" tIns="0" rIns="0" bIns="0" rtlCol="0" anchor="ctr"/>
+          <a:lstStyle/>
+          <a:p>
+            <a:pPr indent="0" marL="0">
+              <a:buNone/>
+            </a:pPr>
+            <a:r>
+              <a:rPr lang="en-US" sz="900" dirty="0">
+                <a:solidFill>
+                  <a:srgbClr val="8A8177"/>
+                </a:solidFill>
+                <a:latin typeface="Yu Gothic" pitchFamily="34" charset="0"/>
+                <a:ea typeface="Yu Gothic" pitchFamily="34" charset="-122"/>
+                <a:cs typeface="Yu Gothic" pitchFamily="34" charset="-120"/>
+              </a:rPr>
+              <a:t>第5回　自社専用AIをつくる</a:t>
+            </a:r>
+            <a:endParaRPr lang="en-US" sz="900" dirty="0"/>
+          </a:p>
+        </p:txBody>
+      </p:sp>
+      <p:sp>
+        <p:nvSpPr>
+          <p:cNvPr id="18" name="Text 16"/>
+          <p:cNvSpPr txBox="1"/>
+          <p:nvPr/>
+        </p:nvSpPr>
+        <p:spPr>
+          <a:xfrm>
+            <a:off x="8202168" y="6382512"/>
+            <a:ext cx="3182112" cy="256032"/>
+          </a:xfrm>
+          <a:prstGeom prst="rect">
+            <a:avLst/>
+          </a:prstGeom>
+          <a:noFill/>
+          <a:ln/>
+        </p:spPr>
+        <p:txBody>
+          <a:bodyPr wrap="square" lIns="0" tIns="0" rIns="0" bIns="0" rtlCol="0" anchor="ctr"/>
+          <a:lstStyle/>
+          <a:p>
+            <a:pPr algn="r" indent="0" marL="0">
+              <a:buNone/>
+            </a:pPr>
+            <a:r>
+              <a:rPr lang="en-US" sz="900" dirty="0">
+                <a:solidFill>
+                  <a:srgbClr val="8A8177"/>
+                </a:solidFill>
+                <a:latin typeface="Yu Gothic" pitchFamily="34" charset="0"/>
+                <a:ea typeface="Yu Gothic" pitchFamily="34" charset="-122"/>
+                <a:cs typeface="Yu Gothic" pitchFamily="34" charset="-120"/>
+              </a:rPr>
+              <a:t>実演 ②</a:t>
+            </a:r>
+            <a:endParaRPr lang="en-US" sz="900" dirty="0"/>
+          </a:p>
+        </p:txBody>
+      </p:sp>
+    </p:spTree>
+  </p:cSld>
+  <p:clrMapOvr>
+    <a:masterClrMapping/>
+  </p:clrMapOvr>
+</p:sld>
+</file>
+
+<file path=ppt/slides/slide8.xml><?xml version="1.0" encoding="utf-8"?>
+<p:sld xmlns:a="http://schemas.openxmlformats.org/drawingml/2006/main" xmlns:r="http://schemas.openxmlformats.org/officeDocument/2006/relationships" xmlns:p="http://schemas.openxmlformats.org/presentationml/2006/main">
+  <p:cSld name="Slide 8">
+    <p:bg>
+      <p:bgPr>
+        <a:solidFill>
+          <a:srgbClr val="F6F2EA"/>
+        </a:solidFill>
+      </p:bgPr>
+    </p:bg>
+    <p:spTree>
+      <p:nvGrpSpPr>
+        <p:cNvPr id="1" name=""/>
+        <p:cNvGrpSpPr/>
+        <p:nvPr/>
+      </p:nvGrpSpPr>
+      <p:grpSpPr>
+        <a:xfrm>
+          <a:off x="0" y="0"/>
+          <a:ext cx="0" cy="0"/>
+          <a:chOff x="0" y="0"/>
+          <a:chExt cx="0" cy="0"/>
+        </a:xfrm>
+      </p:grpSpPr>
+      <p:sp>
+        <p:nvSpPr>
+          <p:cNvPr id="2" name="Text 0"/>
+          <p:cNvSpPr txBox="1"/>
+          <p:nvPr/>
+        </p:nvSpPr>
+        <p:spPr>
+          <a:xfrm>
+            <a:off x="777240" y="566928"/>
+            <a:ext cx="10607040" cy="274320"/>
+          </a:xfrm>
+          <a:prstGeom prst="rect">
+            <a:avLst/>
+          </a:prstGeom>
+          <a:noFill/>
+          <a:ln/>
+        </p:spPr>
+        <p:txBody>
+          <a:bodyPr wrap="square" lIns="0" tIns="0" rIns="0" bIns="0" rtlCol="0" anchor="ctr"/>
+          <a:lstStyle/>
+          <a:p>
+            <a:pPr indent="0" marL="0">
+              <a:buNone/>
+            </a:pPr>
+            <a:r>
+              <a:rPr lang="en-US" sz="1100" b="1" spc="250" kern="0" dirty="0">
+                <a:solidFill>
+                  <a:srgbClr val="B04A2F"/>
+                </a:solidFill>
+                <a:latin typeface="Yu Gothic" pitchFamily="34" charset="0"/>
+                <a:ea typeface="Yu Gothic" pitchFamily="34" charset="-122"/>
+                <a:cs typeface="Yu Gothic" pitchFamily="34" charset="-120"/>
+              </a:rPr>
+              <a:t>つまずきやすいところ</a:t>
+            </a:r>
+            <a:endParaRPr lang="en-US" sz="1100" dirty="0"/>
+          </a:p>
+        </p:txBody>
+      </p:sp>
+      <p:sp>
+        <p:nvSpPr>
+          <p:cNvPr id="3" name="Text 1"/>
+          <p:cNvSpPr txBox="1"/>
+          <p:nvPr/>
+        </p:nvSpPr>
+        <p:spPr>
+          <a:xfrm>
+            <a:off x="777240" y="896112"/>
+            <a:ext cx="10607040" cy="640080"/>
+          </a:xfrm>
+          <a:prstGeom prst="rect">
+            <a:avLst/>
+          </a:prstGeom>
+          <a:noFill/>
+          <a:ln/>
+        </p:spPr>
+        <p:txBody>
+          <a:bodyPr wrap="square" lIns="0" tIns="0" rIns="0" bIns="0" rtlCol="0" anchor="ctr"/>
+          <a:lstStyle/>
+          <a:p>
+            <a:pPr indent="0" marL="0">
+              <a:buNone/>
+            </a:pPr>
+            <a:r>
+              <a:rPr lang="en-US" sz="2600" b="1" dirty="0">
+                <a:solidFill>
+                  <a:srgbClr val="23201D"/>
+                </a:solidFill>
+                <a:latin typeface="Yu Gothic" pitchFamily="34" charset="0"/>
+                <a:ea typeface="Yu Gothic" pitchFamily="34" charset="-122"/>
+                <a:cs typeface="Yu Gothic" pitchFamily="34" charset="-120"/>
+              </a:rPr>
+              <a:t>この回で、よく起きること</a:t>
+            </a:r>
+            <a:endParaRPr lang="en-US" sz="2600" dirty="0"/>
+          </a:p>
+        </p:txBody>
+      </p:sp>
+      <p:sp>
+        <p:nvSpPr>
+          <p:cNvPr id="4" name="Shape 2"/>
+          <p:cNvSpPr/>
+          <p:nvPr/>
+        </p:nvSpPr>
+        <p:spPr>
+          <a:xfrm>
+            <a:off x="777240" y="1737360"/>
+            <a:ext cx="10607040" cy="1078992"/>
+          </a:xfrm>
+          <a:prstGeom prst="rect">
+            <a:avLst/>
+          </a:prstGeom>
+          <a:solidFill>
+            <a:srgbClr val="FFFFFF"/>
+          </a:solidFill>
+          <a:ln w="12700">
+            <a:solidFill>
+              <a:srgbClr val="EDE7DB"/>
+            </a:solidFill>
+            <a:prstDash val="solid"/>
+          </a:ln>
+        </p:spPr>
+      </p:sp>
+      <p:sp>
+        <p:nvSpPr>
           <p:cNvPr id="5" name="Text 3"/>
           <p:cNvSpPr txBox="1"/>
           <p:nvPr/>
         </p:nvSpPr>
         <p:spPr>
           <a:xfrm>
-            <a:off x="1234440" y="2880360"/>
-            <a:ext cx="9692640" cy="1188720"/>
+            <a:off x="1051560" y="1856232"/>
+            <a:ext cx="1463040" cy="256032"/>
+          </a:xfrm>
+          <a:prstGeom prst="rect">
+            <a:avLst/>
+          </a:prstGeom>
+          <a:noFill/>
+          <a:ln/>
+        </p:spPr>
+        <p:txBody>
+          <a:bodyPr wrap="square" lIns="0" tIns="0" rIns="0" bIns="0" rtlCol="0" anchor="ctr"/>
+          <a:lstStyle/>
+          <a:p>
+            <a:pPr indent="0" marL="0">
+              <a:buNone/>
+            </a:pPr>
+            <a:r>
+              <a:rPr lang="en-US" sz="900" b="1" spc="150" kern="0" dirty="0">
+                <a:solidFill>
+                  <a:srgbClr val="8A8177"/>
+                </a:solidFill>
+                <a:latin typeface="Yu Gothic" pitchFamily="34" charset="0"/>
+                <a:ea typeface="Yu Gothic" pitchFamily="34" charset="-122"/>
+                <a:cs typeface="Yu Gothic" pitchFamily="34" charset="-120"/>
+              </a:rPr>
+              <a:t>こうなったら</a:t>
+            </a:r>
+            <a:endParaRPr lang="en-US" sz="900" dirty="0"/>
+          </a:p>
+        </p:txBody>
+      </p:sp>
+      <p:sp>
+        <p:nvSpPr>
+          <p:cNvPr id="6" name="Text 4"/>
+          <p:cNvSpPr txBox="1"/>
+          <p:nvPr/>
+        </p:nvSpPr>
+        <p:spPr>
+          <a:xfrm>
+            <a:off x="1051560" y="2121408"/>
+            <a:ext cx="4454957" cy="566928"/>
           </a:xfrm>
           <a:prstGeom prst="rect">
             <a:avLst/>
@@ -4923,12 +7702,858 @@
           <a:p>
             <a:pPr indent="0" marL="0">
               <a:lnSpc>
-                <a:spcPct val="140000"/>
+                <a:spcPct val="120000"/>
               </a:lnSpc>
               <a:buNone/>
             </a:pPr>
             <a:r>
-              <a:rPr lang="en-US" sz="1900" b="1" dirty="0">
+              <a:rPr lang="en-US" sz="1350" b="1" dirty="0">
+                <a:solidFill>
+                  <a:srgbClr val="23201D"/>
+                </a:solidFill>
+                <a:latin typeface="Yu Gothic" pitchFamily="34" charset="0"/>
+                <a:ea typeface="Yu Gothic" pitchFamily="34" charset="-122"/>
+                <a:cs typeface="Yu Gothic" pitchFamily="34" charset="-120"/>
+              </a:rPr>
+              <a:t>載せる資料が整っていない</a:t>
+            </a:r>
+            <a:endParaRPr lang="en-US" sz="1350" dirty="0"/>
+          </a:p>
+        </p:txBody>
+      </p:sp>
+      <p:sp>
+        <p:nvSpPr>
+          <p:cNvPr id="7" name="Shape 5"/>
+          <p:cNvSpPr/>
+          <p:nvPr/>
+        </p:nvSpPr>
+        <p:spPr>
+          <a:xfrm>
+            <a:off x="5762549" y="1847088"/>
+            <a:ext cx="18288" cy="859536"/>
+          </a:xfrm>
+          <a:prstGeom prst="rect">
+            <a:avLst/>
+          </a:prstGeom>
+          <a:solidFill>
+            <a:srgbClr val="EDE7DB"/>
+          </a:solidFill>
+          <a:ln w="12700">
+            <a:solidFill>
+              <a:srgbClr val="333333"/>
+            </a:solidFill>
+            <a:prstDash val="solid"/>
+          </a:ln>
+        </p:spPr>
+      </p:sp>
+      <p:sp>
+        <p:nvSpPr>
+          <p:cNvPr id="8" name="Text 6"/>
+          <p:cNvSpPr txBox="1"/>
+          <p:nvPr/>
+        </p:nvSpPr>
+        <p:spPr>
+          <a:xfrm>
+            <a:off x="6080760" y="1856232"/>
+            <a:ext cx="1463040" cy="256032"/>
+          </a:xfrm>
+          <a:prstGeom prst="rect">
+            <a:avLst/>
+          </a:prstGeom>
+          <a:noFill/>
+          <a:ln/>
+        </p:spPr>
+        <p:txBody>
+          <a:bodyPr wrap="square" lIns="0" tIns="0" rIns="0" bIns="0" rtlCol="0" anchor="ctr"/>
+          <a:lstStyle/>
+          <a:p>
+            <a:pPr indent="0" marL="0">
+              <a:buNone/>
+            </a:pPr>
+            <a:r>
+              <a:rPr lang="en-US" sz="900" b="1" spc="150" kern="0" dirty="0">
+                <a:solidFill>
+                  <a:srgbClr val="B04A2F"/>
+                </a:solidFill>
+                <a:latin typeface="Yu Gothic" pitchFamily="34" charset="0"/>
+                <a:ea typeface="Yu Gothic" pitchFamily="34" charset="-122"/>
+                <a:cs typeface="Yu Gothic" pitchFamily="34" charset="-120"/>
+              </a:rPr>
+              <a:t>こうする</a:t>
+            </a:r>
+            <a:endParaRPr lang="en-US" sz="900" dirty="0"/>
+          </a:p>
+        </p:txBody>
+      </p:sp>
+      <p:sp>
+        <p:nvSpPr>
+          <p:cNvPr id="9" name="Text 7"/>
+          <p:cNvSpPr txBox="1"/>
+          <p:nvPr/>
+        </p:nvSpPr>
+        <p:spPr>
+          <a:xfrm>
+            <a:off x="6080760" y="2121408"/>
+            <a:ext cx="5091379" cy="566928"/>
+          </a:xfrm>
+          <a:prstGeom prst="rect">
+            <a:avLst/>
+          </a:prstGeom>
+          <a:noFill/>
+          <a:ln/>
+        </p:spPr>
+        <p:txBody>
+          <a:bodyPr wrap="square" lIns="0" tIns="0" rIns="0" bIns="0" rtlCol="0" anchor="ctr"/>
+          <a:lstStyle/>
+          <a:p>
+            <a:pPr indent="0" marL="0">
+              <a:lnSpc>
+                <a:spcPct val="125000"/>
+              </a:lnSpc>
+              <a:buNone/>
+            </a:pPr>
+            <a:r>
+              <a:rPr lang="en-US" sz="1250" dirty="0">
+                <a:solidFill>
+                  <a:srgbClr val="3F3933"/>
+                </a:solidFill>
+                <a:latin typeface="Yu Gothic" pitchFamily="34" charset="0"/>
+                <a:ea typeface="Yu Gothic" pitchFamily="34" charset="-122"/>
+                <a:cs typeface="Yu Gothic" pitchFamily="34" charset="-120"/>
+              </a:rPr>
+              <a:t>完璧を待ちません。3本で十分です。足りないものは不足資料リストに書き出し、第8回で回収します</a:t>
+            </a:r>
+            <a:endParaRPr lang="en-US" sz="1250" dirty="0"/>
+          </a:p>
+        </p:txBody>
+      </p:sp>
+      <p:sp>
+        <p:nvSpPr>
+          <p:cNvPr id="10" name="Shape 8"/>
+          <p:cNvSpPr/>
+          <p:nvPr/>
+        </p:nvSpPr>
+        <p:spPr>
+          <a:xfrm>
+            <a:off x="777240" y="2944368"/>
+            <a:ext cx="10607040" cy="1078992"/>
+          </a:xfrm>
+          <a:prstGeom prst="rect">
+            <a:avLst/>
+          </a:prstGeom>
+          <a:solidFill>
+            <a:srgbClr val="FFFFFF"/>
+          </a:solidFill>
+          <a:ln w="12700">
+            <a:solidFill>
+              <a:srgbClr val="EDE7DB"/>
+            </a:solidFill>
+            <a:prstDash val="solid"/>
+          </a:ln>
+        </p:spPr>
+      </p:sp>
+      <p:sp>
+        <p:nvSpPr>
+          <p:cNvPr id="11" name="Text 9"/>
+          <p:cNvSpPr txBox="1"/>
+          <p:nvPr/>
+        </p:nvSpPr>
+        <p:spPr>
+          <a:xfrm>
+            <a:off x="1051560" y="3063240"/>
+            <a:ext cx="1463040" cy="256032"/>
+          </a:xfrm>
+          <a:prstGeom prst="rect">
+            <a:avLst/>
+          </a:prstGeom>
+          <a:noFill/>
+          <a:ln/>
+        </p:spPr>
+        <p:txBody>
+          <a:bodyPr wrap="square" lIns="0" tIns="0" rIns="0" bIns="0" rtlCol="0" anchor="ctr"/>
+          <a:lstStyle/>
+          <a:p>
+            <a:pPr indent="0" marL="0">
+              <a:buNone/>
+            </a:pPr>
+            <a:r>
+              <a:rPr lang="en-US" sz="900" b="1" spc="150" kern="0" dirty="0">
+                <a:solidFill>
+                  <a:srgbClr val="8A8177"/>
+                </a:solidFill>
+                <a:latin typeface="Yu Gothic" pitchFamily="34" charset="0"/>
+                <a:ea typeface="Yu Gothic" pitchFamily="34" charset="-122"/>
+                <a:cs typeface="Yu Gothic" pitchFamily="34" charset="-120"/>
+              </a:rPr>
+              <a:t>こうなったら</a:t>
+            </a:r>
+            <a:endParaRPr lang="en-US" sz="900" dirty="0"/>
+          </a:p>
+        </p:txBody>
+      </p:sp>
+      <p:sp>
+        <p:nvSpPr>
+          <p:cNvPr id="12" name="Text 10"/>
+          <p:cNvSpPr txBox="1"/>
+          <p:nvPr/>
+        </p:nvSpPr>
+        <p:spPr>
+          <a:xfrm>
+            <a:off x="1051560" y="3328416"/>
+            <a:ext cx="4454957" cy="566928"/>
+          </a:xfrm>
+          <a:prstGeom prst="rect">
+            <a:avLst/>
+          </a:prstGeom>
+          <a:noFill/>
+          <a:ln/>
+        </p:spPr>
+        <p:txBody>
+          <a:bodyPr wrap="square" lIns="0" tIns="0" rIns="0" bIns="0" rtlCol="0" anchor="ctr"/>
+          <a:lstStyle/>
+          <a:p>
+            <a:pPr indent="0" marL="0">
+              <a:lnSpc>
+                <a:spcPct val="120000"/>
+              </a:lnSpc>
+              <a:buNone/>
+            </a:pPr>
+            <a:r>
+              <a:rPr lang="en-US" sz="1350" b="1" dirty="0">
+                <a:solidFill>
+                  <a:srgbClr val="23201D"/>
+                </a:solidFill>
+                <a:latin typeface="Yu Gothic" pitchFamily="34" charset="0"/>
+                <a:ea typeface="Yu Gothic" pitchFamily="34" charset="-122"/>
+                <a:cs typeface="Yu Gothic" pitchFamily="34" charset="-120"/>
+              </a:rPr>
+              <a:t>資料を無視して一般論を答える</a:t>
+            </a:r>
+            <a:endParaRPr lang="en-US" sz="1350" dirty="0"/>
+          </a:p>
+        </p:txBody>
+      </p:sp>
+      <p:sp>
+        <p:nvSpPr>
+          <p:cNvPr id="13" name="Shape 11"/>
+          <p:cNvSpPr/>
+          <p:nvPr/>
+        </p:nvSpPr>
+        <p:spPr>
+          <a:xfrm>
+            <a:off x="5762549" y="3054096"/>
+            <a:ext cx="18288" cy="859536"/>
+          </a:xfrm>
+          <a:prstGeom prst="rect">
+            <a:avLst/>
+          </a:prstGeom>
+          <a:solidFill>
+            <a:srgbClr val="EDE7DB"/>
+          </a:solidFill>
+          <a:ln w="12700">
+            <a:solidFill>
+              <a:srgbClr val="333333"/>
+            </a:solidFill>
+            <a:prstDash val="solid"/>
+          </a:ln>
+        </p:spPr>
+      </p:sp>
+      <p:sp>
+        <p:nvSpPr>
+          <p:cNvPr id="14" name="Text 12"/>
+          <p:cNvSpPr txBox="1"/>
+          <p:nvPr/>
+        </p:nvSpPr>
+        <p:spPr>
+          <a:xfrm>
+            <a:off x="6080760" y="3063240"/>
+            <a:ext cx="1463040" cy="256032"/>
+          </a:xfrm>
+          <a:prstGeom prst="rect">
+            <a:avLst/>
+          </a:prstGeom>
+          <a:noFill/>
+          <a:ln/>
+        </p:spPr>
+        <p:txBody>
+          <a:bodyPr wrap="square" lIns="0" tIns="0" rIns="0" bIns="0" rtlCol="0" anchor="ctr"/>
+          <a:lstStyle/>
+          <a:p>
+            <a:pPr indent="0" marL="0">
+              <a:buNone/>
+            </a:pPr>
+            <a:r>
+              <a:rPr lang="en-US" sz="900" b="1" spc="150" kern="0" dirty="0">
+                <a:solidFill>
+                  <a:srgbClr val="B04A2F"/>
+                </a:solidFill>
+                <a:latin typeface="Yu Gothic" pitchFamily="34" charset="0"/>
+                <a:ea typeface="Yu Gothic" pitchFamily="34" charset="-122"/>
+                <a:cs typeface="Yu Gothic" pitchFamily="34" charset="-120"/>
+              </a:rPr>
+              <a:t>こうする</a:t>
+            </a:r>
+            <a:endParaRPr lang="en-US" sz="900" dirty="0"/>
+          </a:p>
+        </p:txBody>
+      </p:sp>
+      <p:sp>
+        <p:nvSpPr>
+          <p:cNvPr id="15" name="Text 13"/>
+          <p:cNvSpPr txBox="1"/>
+          <p:nvPr/>
+        </p:nvSpPr>
+        <p:spPr>
+          <a:xfrm>
+            <a:off x="6080760" y="3328416"/>
+            <a:ext cx="5091379" cy="566928"/>
+          </a:xfrm>
+          <a:prstGeom prst="rect">
+            <a:avLst/>
+          </a:prstGeom>
+          <a:noFill/>
+          <a:ln/>
+        </p:spPr>
+        <p:txBody>
+          <a:bodyPr wrap="square" lIns="0" tIns="0" rIns="0" bIns="0" rtlCol="0" anchor="ctr"/>
+          <a:lstStyle/>
+          <a:p>
+            <a:pPr indent="0" marL="0">
+              <a:lnSpc>
+                <a:spcPct val="125000"/>
+              </a:lnSpc>
+              <a:buNone/>
+            </a:pPr>
+            <a:r>
+              <a:rPr lang="en-US" sz="1250" dirty="0">
+                <a:solidFill>
+                  <a:srgbClr val="3F3933"/>
+                </a:solidFill>
+                <a:latin typeface="Yu Gothic" pitchFamily="34" charset="0"/>
+                <a:ea typeface="Yu Gothic" pitchFamily="34" charset="-122"/>
+                <a:cs typeface="Yu Gothic" pitchFamily="34" charset="-120"/>
+              </a:rPr>
+              <a:t>①禁止事項を指示文の先頭へ ②PDFをテキストに ③資料を減らす。この3手で大半は直ります</a:t>
+            </a:r>
+            <a:endParaRPr lang="en-US" sz="1250" dirty="0"/>
+          </a:p>
+        </p:txBody>
+      </p:sp>
+      <p:sp>
+        <p:nvSpPr>
+          <p:cNvPr id="16" name="Shape 14"/>
+          <p:cNvSpPr/>
+          <p:nvPr/>
+        </p:nvSpPr>
+        <p:spPr>
+          <a:xfrm>
+            <a:off x="777240" y="4151376"/>
+            <a:ext cx="10607040" cy="1078992"/>
+          </a:xfrm>
+          <a:prstGeom prst="rect">
+            <a:avLst/>
+          </a:prstGeom>
+          <a:solidFill>
+            <a:srgbClr val="FFFFFF"/>
+          </a:solidFill>
+          <a:ln w="12700">
+            <a:solidFill>
+              <a:srgbClr val="EDE7DB"/>
+            </a:solidFill>
+            <a:prstDash val="solid"/>
+          </a:ln>
+        </p:spPr>
+      </p:sp>
+      <p:sp>
+        <p:nvSpPr>
+          <p:cNvPr id="17" name="Text 15"/>
+          <p:cNvSpPr txBox="1"/>
+          <p:nvPr/>
+        </p:nvSpPr>
+        <p:spPr>
+          <a:xfrm>
+            <a:off x="1051560" y="4270248"/>
+            <a:ext cx="1463040" cy="256032"/>
+          </a:xfrm>
+          <a:prstGeom prst="rect">
+            <a:avLst/>
+          </a:prstGeom>
+          <a:noFill/>
+          <a:ln/>
+        </p:spPr>
+        <p:txBody>
+          <a:bodyPr wrap="square" lIns="0" tIns="0" rIns="0" bIns="0" rtlCol="0" anchor="ctr"/>
+          <a:lstStyle/>
+          <a:p>
+            <a:pPr indent="0" marL="0">
+              <a:buNone/>
+            </a:pPr>
+            <a:r>
+              <a:rPr lang="en-US" sz="900" b="1" spc="150" kern="0" dirty="0">
+                <a:solidFill>
+                  <a:srgbClr val="8A8177"/>
+                </a:solidFill>
+                <a:latin typeface="Yu Gothic" pitchFamily="34" charset="0"/>
+                <a:ea typeface="Yu Gothic" pitchFamily="34" charset="-122"/>
+                <a:cs typeface="Yu Gothic" pitchFamily="34" charset="-120"/>
+              </a:rPr>
+              <a:t>こうなったら</a:t>
+            </a:r>
+            <a:endParaRPr lang="en-US" sz="900" dirty="0"/>
+          </a:p>
+        </p:txBody>
+      </p:sp>
+      <p:sp>
+        <p:nvSpPr>
+          <p:cNvPr id="18" name="Text 16"/>
+          <p:cNvSpPr txBox="1"/>
+          <p:nvPr/>
+        </p:nvSpPr>
+        <p:spPr>
+          <a:xfrm>
+            <a:off x="1051560" y="4535424"/>
+            <a:ext cx="4454957" cy="566928"/>
+          </a:xfrm>
+          <a:prstGeom prst="rect">
+            <a:avLst/>
+          </a:prstGeom>
+          <a:noFill/>
+          <a:ln/>
+        </p:spPr>
+        <p:txBody>
+          <a:bodyPr wrap="square" lIns="0" tIns="0" rIns="0" bIns="0" rtlCol="0" anchor="ctr"/>
+          <a:lstStyle/>
+          <a:p>
+            <a:pPr indent="0" marL="0">
+              <a:lnSpc>
+                <a:spcPct val="120000"/>
+              </a:lnSpc>
+              <a:buNone/>
+            </a:pPr>
+            <a:r>
+              <a:rPr lang="en-US" sz="1350" b="1" dirty="0">
+                <a:solidFill>
+                  <a:srgbClr val="23201D"/>
+                </a:solidFill>
+                <a:latin typeface="Yu Gothic" pitchFamily="34" charset="0"/>
+                <a:ea typeface="Yu Gothic" pitchFamily="34" charset="-122"/>
+                <a:cs typeface="Yu Gothic" pitchFamily="34" charset="-120"/>
+              </a:rPr>
+              <a:t>ルールが10項目に増える</a:t>
+            </a:r>
+            <a:endParaRPr lang="en-US" sz="1350" dirty="0"/>
+          </a:p>
+        </p:txBody>
+      </p:sp>
+      <p:sp>
+        <p:nvSpPr>
+          <p:cNvPr id="19" name="Shape 17"/>
+          <p:cNvSpPr/>
+          <p:nvPr/>
+        </p:nvSpPr>
+        <p:spPr>
+          <a:xfrm>
+            <a:off x="5762549" y="4261104"/>
+            <a:ext cx="18288" cy="859536"/>
+          </a:xfrm>
+          <a:prstGeom prst="rect">
+            <a:avLst/>
+          </a:prstGeom>
+          <a:solidFill>
+            <a:srgbClr val="EDE7DB"/>
+          </a:solidFill>
+          <a:ln w="12700">
+            <a:solidFill>
+              <a:srgbClr val="333333"/>
+            </a:solidFill>
+            <a:prstDash val="solid"/>
+          </a:ln>
+        </p:spPr>
+      </p:sp>
+      <p:sp>
+        <p:nvSpPr>
+          <p:cNvPr id="20" name="Text 18"/>
+          <p:cNvSpPr txBox="1"/>
+          <p:nvPr/>
+        </p:nvSpPr>
+        <p:spPr>
+          <a:xfrm>
+            <a:off x="6080760" y="4270248"/>
+            <a:ext cx="1463040" cy="256032"/>
+          </a:xfrm>
+          <a:prstGeom prst="rect">
+            <a:avLst/>
+          </a:prstGeom>
+          <a:noFill/>
+          <a:ln/>
+        </p:spPr>
+        <p:txBody>
+          <a:bodyPr wrap="square" lIns="0" tIns="0" rIns="0" bIns="0" rtlCol="0" anchor="ctr"/>
+          <a:lstStyle/>
+          <a:p>
+            <a:pPr indent="0" marL="0">
+              <a:buNone/>
+            </a:pPr>
+            <a:r>
+              <a:rPr lang="en-US" sz="900" b="1" spc="150" kern="0" dirty="0">
+                <a:solidFill>
+                  <a:srgbClr val="B04A2F"/>
+                </a:solidFill>
+                <a:latin typeface="Yu Gothic" pitchFamily="34" charset="0"/>
+                <a:ea typeface="Yu Gothic" pitchFamily="34" charset="-122"/>
+                <a:cs typeface="Yu Gothic" pitchFamily="34" charset="-120"/>
+              </a:rPr>
+              <a:t>こうする</a:t>
+            </a:r>
+            <a:endParaRPr lang="en-US" sz="900" dirty="0"/>
+          </a:p>
+        </p:txBody>
+      </p:sp>
+      <p:sp>
+        <p:nvSpPr>
+          <p:cNvPr id="21" name="Text 19"/>
+          <p:cNvSpPr txBox="1"/>
+          <p:nvPr/>
+        </p:nvSpPr>
+        <p:spPr>
+          <a:xfrm>
+            <a:off x="6080760" y="4535424"/>
+            <a:ext cx="5091379" cy="566928"/>
+          </a:xfrm>
+          <a:prstGeom prst="rect">
+            <a:avLst/>
+          </a:prstGeom>
+          <a:noFill/>
+          <a:ln/>
+        </p:spPr>
+        <p:txBody>
+          <a:bodyPr wrap="square" lIns="0" tIns="0" rIns="0" bIns="0" rtlCol="0" anchor="ctr"/>
+          <a:lstStyle/>
+          <a:p>
+            <a:pPr indent="0" marL="0">
+              <a:lnSpc>
+                <a:spcPct val="125000"/>
+              </a:lnSpc>
+              <a:buNone/>
+            </a:pPr>
+            <a:r>
+              <a:rPr lang="en-US" sz="1250" dirty="0">
+                <a:solidFill>
+                  <a:srgbClr val="3F3933"/>
+                </a:solidFill>
+                <a:latin typeface="Yu Gothic" pitchFamily="34" charset="0"/>
+                <a:ea typeface="Yu Gothic" pitchFamily="34" charset="-122"/>
+                <a:cs typeface="Yu Gothic" pitchFamily="34" charset="-120"/>
+              </a:rPr>
+              <a:t>5項目で止めます。増やすと読まれず、読まれないルールは無いのと同じです</a:t>
+            </a:r>
+            <a:endParaRPr lang="en-US" sz="1250" dirty="0"/>
+          </a:p>
+        </p:txBody>
+      </p:sp>
+      <p:sp>
+        <p:nvSpPr>
+          <p:cNvPr id="22" name="Text 20"/>
+          <p:cNvSpPr txBox="1"/>
+          <p:nvPr/>
+        </p:nvSpPr>
+        <p:spPr>
+          <a:xfrm>
+            <a:off x="777240" y="6382512"/>
+            <a:ext cx="7424928" cy="256032"/>
+          </a:xfrm>
+          <a:prstGeom prst="rect">
+            <a:avLst/>
+          </a:prstGeom>
+          <a:noFill/>
+          <a:ln/>
+        </p:spPr>
+        <p:txBody>
+          <a:bodyPr wrap="square" lIns="0" tIns="0" rIns="0" bIns="0" rtlCol="0" anchor="ctr"/>
+          <a:lstStyle/>
+          <a:p>
+            <a:pPr indent="0" marL="0">
+              <a:buNone/>
+            </a:pPr>
+            <a:r>
+              <a:rPr lang="en-US" sz="900" dirty="0">
+                <a:solidFill>
+                  <a:srgbClr val="8A8177"/>
+                </a:solidFill>
+                <a:latin typeface="Yu Gothic" pitchFamily="34" charset="0"/>
+                <a:ea typeface="Yu Gothic" pitchFamily="34" charset="-122"/>
+                <a:cs typeface="Yu Gothic" pitchFamily="34" charset="-120"/>
+              </a:rPr>
+              <a:t>第5回　自社専用AIをつくる</a:t>
+            </a:r>
+            <a:endParaRPr lang="en-US" sz="900" dirty="0"/>
+          </a:p>
+        </p:txBody>
+      </p:sp>
+      <p:sp>
+        <p:nvSpPr>
+          <p:cNvPr id="23" name="Text 21"/>
+          <p:cNvSpPr txBox="1"/>
+          <p:nvPr/>
+        </p:nvSpPr>
+        <p:spPr>
+          <a:xfrm>
+            <a:off x="8202168" y="6382512"/>
+            <a:ext cx="3182112" cy="256032"/>
+          </a:xfrm>
+          <a:prstGeom prst="rect">
+            <a:avLst/>
+          </a:prstGeom>
+          <a:noFill/>
+          <a:ln/>
+        </p:spPr>
+        <p:txBody>
+          <a:bodyPr wrap="square" lIns="0" tIns="0" rIns="0" bIns="0" rtlCol="0" anchor="ctr"/>
+          <a:lstStyle/>
+          <a:p>
+            <a:pPr algn="r" indent="0" marL="0">
+              <a:buNone/>
+            </a:pPr>
+            <a:r>
+              <a:rPr lang="en-US" sz="900" dirty="0">
+                <a:solidFill>
+                  <a:srgbClr val="8A8177"/>
+                </a:solidFill>
+                <a:latin typeface="Yu Gothic" pitchFamily="34" charset="0"/>
+                <a:ea typeface="Yu Gothic" pitchFamily="34" charset="-122"/>
+                <a:cs typeface="Yu Gothic" pitchFamily="34" charset="-120"/>
+              </a:rPr>
+              <a:t>つまずき</a:t>
+            </a:r>
+            <a:endParaRPr lang="en-US" sz="900" dirty="0"/>
+          </a:p>
+        </p:txBody>
+      </p:sp>
+    </p:spTree>
+  </p:cSld>
+  <p:clrMapOvr>
+    <a:masterClrMapping/>
+  </p:clrMapOvr>
+</p:sld>
+</file>
+
+<file path=ppt/slides/slide9.xml><?xml version="1.0" encoding="utf-8"?>
+<p:sld xmlns:a="http://schemas.openxmlformats.org/drawingml/2006/main" xmlns:r="http://schemas.openxmlformats.org/officeDocument/2006/relationships" xmlns:p="http://schemas.openxmlformats.org/presentationml/2006/main">
+  <p:cSld name="Slide 9">
+    <p:bg>
+      <p:bgPr>
+        <a:solidFill>
+          <a:srgbClr val="F6F2EA"/>
+        </a:solidFill>
+      </p:bgPr>
+    </p:bg>
+    <p:spTree>
+      <p:nvGrpSpPr>
+        <p:cNvPr id="1" name=""/>
+        <p:cNvGrpSpPr/>
+        <p:nvPr/>
+      </p:nvGrpSpPr>
+      <p:grpSpPr>
+        <a:xfrm>
+          <a:off x="0" y="0"/>
+          <a:ext cx="0" cy="0"/>
+          <a:chOff x="0" y="0"/>
+          <a:chExt cx="0" cy="0"/>
+        </a:xfrm>
+      </p:grpSpPr>
+      <p:sp>
+        <p:nvSpPr>
+          <p:cNvPr id="2" name="Text 0"/>
+          <p:cNvSpPr txBox="1"/>
+          <p:nvPr/>
+        </p:nvSpPr>
+        <p:spPr>
+          <a:xfrm>
+            <a:off x="777240" y="566928"/>
+            <a:ext cx="10607040" cy="274320"/>
+          </a:xfrm>
+          <a:prstGeom prst="rect">
+            <a:avLst/>
+          </a:prstGeom>
+          <a:noFill/>
+          <a:ln/>
+        </p:spPr>
+        <p:txBody>
+          <a:bodyPr wrap="square" lIns="0" tIns="0" rIns="0" bIns="0" rtlCol="0" anchor="ctr"/>
+          <a:lstStyle/>
+          <a:p>
+            <a:pPr indent="0" marL="0">
+              <a:buNone/>
+            </a:pPr>
+            <a:r>
+              <a:rPr lang="en-US" sz="1100" b="1" spc="250" kern="0" dirty="0">
+                <a:solidFill>
+                  <a:srgbClr val="2F4F6B"/>
+                </a:solidFill>
+                <a:latin typeface="Yu Gothic" pitchFamily="34" charset="0"/>
+                <a:ea typeface="Yu Gothic" pitchFamily="34" charset="-122"/>
+                <a:cs typeface="Yu Gothic" pitchFamily="34" charset="-120"/>
+              </a:rPr>
+              <a:t>演習</a:t>
+            </a:r>
+            <a:endParaRPr lang="en-US" sz="1100" dirty="0"/>
+          </a:p>
+        </p:txBody>
+      </p:sp>
+      <p:sp>
+        <p:nvSpPr>
+          <p:cNvPr id="3" name="Text 1"/>
+          <p:cNvSpPr txBox="1"/>
+          <p:nvPr/>
+        </p:nvSpPr>
+        <p:spPr>
+          <a:xfrm>
+            <a:off x="777240" y="896112"/>
+            <a:ext cx="10607040" cy="640080"/>
+          </a:xfrm>
+          <a:prstGeom prst="rect">
+            <a:avLst/>
+          </a:prstGeom>
+          <a:noFill/>
+          <a:ln/>
+        </p:spPr>
+        <p:txBody>
+          <a:bodyPr wrap="square" lIns="0" tIns="0" rIns="0" bIns="0" rtlCol="0" anchor="ctr"/>
+          <a:lstStyle/>
+          <a:p>
+            <a:pPr indent="0" marL="0">
+              <a:buNone/>
+            </a:pPr>
+            <a:r>
+              <a:rPr lang="en-US" sz="2600" b="1" dirty="0">
+                <a:solidFill>
+                  <a:srgbClr val="23201D"/>
+                </a:solidFill>
+                <a:latin typeface="Yu Gothic" pitchFamily="34" charset="0"/>
+                <a:ea typeface="Yu Gothic" pitchFamily="34" charset="-122"/>
+                <a:cs typeface="Yu Gothic" pitchFamily="34" charset="-120"/>
+              </a:rPr>
+              <a:t>今日、一緒にやること</a:t>
+            </a:r>
+            <a:endParaRPr lang="en-US" sz="2600" dirty="0"/>
+          </a:p>
+        </p:txBody>
+      </p:sp>
+      <p:sp>
+        <p:nvSpPr>
+          <p:cNvPr id="4" name="Text 2"/>
+          <p:cNvSpPr txBox="1"/>
+          <p:nvPr/>
+        </p:nvSpPr>
+        <p:spPr>
+          <a:xfrm>
+            <a:off x="777240" y="1572768"/>
+            <a:ext cx="10607040" cy="320040"/>
+          </a:xfrm>
+          <a:prstGeom prst="rect">
+            <a:avLst/>
+          </a:prstGeom>
+          <a:noFill/>
+          <a:ln/>
+        </p:spPr>
+        <p:txBody>
+          <a:bodyPr wrap="square" lIns="0" tIns="0" rIns="0" bIns="0" rtlCol="0" anchor="ctr"/>
+          <a:lstStyle/>
+          <a:p>
+            <a:pPr indent="0" marL="0">
+              <a:buNone/>
+            </a:pPr>
+            <a:r>
+              <a:rPr lang="en-US" sz="1250" b="1" dirty="0">
+                <a:solidFill>
+                  <a:srgbClr val="2F4F6B"/>
+                </a:solidFill>
+                <a:latin typeface="Yu Gothic" pitchFamily="34" charset="0"/>
+                <a:ea typeface="Yu Gothic" pitchFamily="34" charset="-122"/>
+                <a:cs typeface="Yu Gothic" pitchFamily="34" charset="-120"/>
+              </a:rPr>
+              <a:t>55分。操作するのはご自身です。</a:t>
+            </a:r>
+            <a:endParaRPr lang="en-US" sz="1250" dirty="0"/>
+          </a:p>
+        </p:txBody>
+      </p:sp>
+      <p:sp>
+        <p:nvSpPr>
+          <p:cNvPr id="5" name="Shape 3"/>
+          <p:cNvSpPr/>
+          <p:nvPr/>
+        </p:nvSpPr>
+        <p:spPr>
+          <a:xfrm>
+            <a:off x="777240" y="2148840"/>
+            <a:ext cx="3383280" cy="2880360"/>
+          </a:xfrm>
+          <a:prstGeom prst="rect">
+            <a:avLst/>
+          </a:prstGeom>
+          <a:solidFill>
+            <a:srgbClr val="FFFFFF"/>
+          </a:solidFill>
+          <a:ln w="12700">
+            <a:solidFill>
+              <a:srgbClr val="EDE7DB"/>
+            </a:solidFill>
+            <a:prstDash val="solid"/>
+          </a:ln>
+        </p:spPr>
+      </p:sp>
+      <p:sp>
+        <p:nvSpPr>
+          <p:cNvPr id="6" name="Shape 4"/>
+          <p:cNvSpPr/>
+          <p:nvPr/>
+        </p:nvSpPr>
+        <p:spPr>
+          <a:xfrm>
+            <a:off x="1051560" y="2395728"/>
+            <a:ext cx="438912" cy="438912"/>
+          </a:xfrm>
+          <a:prstGeom prst="ellipse">
+            <a:avLst/>
+          </a:prstGeom>
+          <a:solidFill>
+            <a:srgbClr val="2F4F6B"/>
+          </a:solidFill>
+          <a:ln w="12700">
+            <a:solidFill>
+              <a:srgbClr val="333333"/>
+            </a:solidFill>
+            <a:prstDash val="solid"/>
+          </a:ln>
+        </p:spPr>
+      </p:sp>
+      <p:sp>
+        <p:nvSpPr>
+          <p:cNvPr id="7" name="Text 5"/>
+          <p:cNvSpPr txBox="1"/>
+          <p:nvPr/>
+        </p:nvSpPr>
+        <p:spPr>
+          <a:xfrm>
+            <a:off x="1051560" y="2395728"/>
+            <a:ext cx="438912" cy="438912"/>
+          </a:xfrm>
+          <a:prstGeom prst="rect">
+            <a:avLst/>
+          </a:prstGeom>
+          <a:noFill/>
+          <a:ln/>
+        </p:spPr>
+        <p:txBody>
+          <a:bodyPr wrap="square" lIns="0" tIns="0" rIns="0" bIns="0" rtlCol="0" anchor="ctr"/>
+          <a:lstStyle/>
+          <a:p>
+            <a:pPr algn="ctr" indent="0" marL="0">
+              <a:buNone/>
+            </a:pPr>
+            <a:r>
+              <a:rPr lang="en-US" sz="1300" b="1" dirty="0">
                 <a:solidFill>
                   <a:srgbClr val="FFFFFF"/>
                 </a:solidFill>
@@ -4936,22 +8561,22 @@
                 <a:ea typeface="Yu Gothic" pitchFamily="34" charset="-122"/>
                 <a:cs typeface="Yu Gothic" pitchFamily="34" charset="-120"/>
               </a:rPr>
-              <a:t>作った専用AIを、推進候補の社員1名に触ってもらい、感想を1つ聞いてくる。</a:t>
-            </a:r>
-            <a:endParaRPr lang="en-US" sz="1900" dirty="0"/>
-          </a:p>
-        </p:txBody>
-      </p:sp>
-      <p:sp>
-        <p:nvSpPr>
-          <p:cNvPr id="6" name="Text 4"/>
-          <p:cNvSpPr txBox="1"/>
-          <p:nvPr/>
-        </p:nvSpPr>
-        <p:spPr>
-          <a:xfrm>
-            <a:off x="777240" y="4572000"/>
-            <a:ext cx="10607040" cy="822960"/>
+              <a:t>1</a:t>
+            </a:r>
+            <a:endParaRPr lang="en-US" sz="1300" dirty="0"/>
+          </a:p>
+        </p:txBody>
+      </p:sp>
+      <p:sp>
+        <p:nvSpPr>
+          <p:cNvPr id="8" name="Text 6"/>
+          <p:cNvSpPr txBox="1"/>
+          <p:nvPr/>
+        </p:nvSpPr>
+        <p:spPr>
+          <a:xfrm>
+            <a:off x="1051560" y="2944368"/>
+            <a:ext cx="2834640" cy="731520"/>
           </a:xfrm>
           <a:prstGeom prst="rect">
             <a:avLst/>
@@ -4965,40 +8590,324 @@
           <a:p>
             <a:pPr indent="0" marL="0">
               <a:lnSpc>
-                <a:spcPct val="145000"/>
+                <a:spcPct val="125000"/>
               </a:lnSpc>
               <a:buNone/>
             </a:pPr>
             <a:r>
-              <a:rPr lang="en-US" sz="1300" dirty="0">
-                <a:solidFill>
-                  <a:srgbClr val="B9B0A4"/>
-                </a:solidFill>
-                <a:latin typeface="Yu Gothic" pitchFamily="34" charset="0"/>
-                <a:ea typeface="Yu Gothic" pitchFamily="34" charset="-122"/>
-                <a:cs typeface="Yu Gothic" pitchFamily="34" charset="-120"/>
-              </a:rPr>
-              <a:t>15分で終わる大きさにしてあります。できなかった回があっても構いません。</a:t>
+              <a:rPr lang="en-US" sz="1450" b="1" dirty="0">
+                <a:solidFill>
+                  <a:srgbClr val="23201D"/>
+                </a:solidFill>
+                <a:latin typeface="Yu Gothic" pitchFamily="34" charset="0"/>
+                <a:ea typeface="Yu Gothic" pitchFamily="34" charset="-122"/>
+                <a:cs typeface="Yu Gothic" pitchFamily="34" charset="-120"/>
+              </a:rPr>
+              <a:t>専用AIを1つ作る</a:t>
+            </a:r>
+            <a:endParaRPr lang="en-US" sz="1450" dirty="0"/>
+          </a:p>
+        </p:txBody>
+      </p:sp>
+      <p:sp>
+        <p:nvSpPr>
+          <p:cNvPr id="9" name="Text 7"/>
+          <p:cNvSpPr txBox="1"/>
+          <p:nvPr/>
+        </p:nvSpPr>
+        <p:spPr>
+          <a:xfrm>
+            <a:off x="1051560" y="3703320"/>
+            <a:ext cx="2834640" cy="1188720"/>
+          </a:xfrm>
+          <a:prstGeom prst="rect">
+            <a:avLst/>
+          </a:prstGeom>
+          <a:noFill/>
+          <a:ln/>
+        </p:spPr>
+        <p:txBody>
+          <a:bodyPr wrap="square" lIns="0" tIns="0" rIns="0" bIns="0" rtlCol="0" anchor="ctr"/>
+          <a:lstStyle/>
+          <a:p>
+            <a:pPr indent="0" marL="0">
+              <a:lnSpc>
+                <a:spcPct val="130000"/>
+              </a:lnSpc>
+              <a:buNone/>
+            </a:pPr>
+            <a:r>
+              <a:rPr lang="en-US" sz="1150" dirty="0">
+                <a:solidFill>
+                  <a:srgbClr val="5A534A"/>
+                </a:solidFill>
+                <a:latin typeface="Yu Gothic" pitchFamily="34" charset="0"/>
+                <a:ea typeface="Yu Gothic" pitchFamily="34" charset="-122"/>
+                <a:cs typeface="Yu Gothic" pitchFamily="34" charset="-120"/>
+              </a:rPr>
+              <a:t>載せる資料は3本で十分。まず動かすことを優先します</a:t>
+            </a:r>
+            <a:endParaRPr lang="en-US" sz="1150" dirty="0"/>
+          </a:p>
+        </p:txBody>
+      </p:sp>
+      <p:sp>
+        <p:nvSpPr>
+          <p:cNvPr id="10" name="Shape 8"/>
+          <p:cNvSpPr/>
+          <p:nvPr/>
+        </p:nvSpPr>
+        <p:spPr>
+          <a:xfrm>
+            <a:off x="4389120" y="2148840"/>
+            <a:ext cx="3383280" cy="2880360"/>
+          </a:xfrm>
+          <a:prstGeom prst="rect">
+            <a:avLst/>
+          </a:prstGeom>
+          <a:solidFill>
+            <a:srgbClr val="FFFFFF"/>
+          </a:solidFill>
+          <a:ln w="12700">
+            <a:solidFill>
+              <a:srgbClr val="EDE7DB"/>
+            </a:solidFill>
+            <a:prstDash val="solid"/>
+          </a:ln>
+        </p:spPr>
+      </p:sp>
+      <p:sp>
+        <p:nvSpPr>
+          <p:cNvPr id="11" name="Shape 9"/>
+          <p:cNvSpPr/>
+          <p:nvPr/>
+        </p:nvSpPr>
+        <p:spPr>
+          <a:xfrm>
+            <a:off x="4663440" y="2395728"/>
+            <a:ext cx="438912" cy="438912"/>
+          </a:xfrm>
+          <a:prstGeom prst="ellipse">
+            <a:avLst/>
+          </a:prstGeom>
+          <a:solidFill>
+            <a:srgbClr val="2F4F6B"/>
+          </a:solidFill>
+          <a:ln w="12700">
+            <a:solidFill>
+              <a:srgbClr val="333333"/>
+            </a:solidFill>
+            <a:prstDash val="solid"/>
+          </a:ln>
+        </p:spPr>
+      </p:sp>
+      <p:sp>
+        <p:nvSpPr>
+          <p:cNvPr id="12" name="Text 10"/>
+          <p:cNvSpPr txBox="1"/>
+          <p:nvPr/>
+        </p:nvSpPr>
+        <p:spPr>
+          <a:xfrm>
+            <a:off x="4663440" y="2395728"/>
+            <a:ext cx="438912" cy="438912"/>
+          </a:xfrm>
+          <a:prstGeom prst="rect">
+            <a:avLst/>
+          </a:prstGeom>
+          <a:noFill/>
+          <a:ln/>
+        </p:spPr>
+        <p:txBody>
+          <a:bodyPr wrap="square" lIns="0" tIns="0" rIns="0" bIns="0" rtlCol="0" anchor="ctr"/>
+          <a:lstStyle/>
+          <a:p>
+            <a:pPr algn="ctr" indent="0" marL="0">
+              <a:buNone/>
+            </a:pPr>
+            <a:r>
+              <a:rPr lang="en-US" sz="1300" b="1" dirty="0">
+                <a:solidFill>
+                  <a:srgbClr val="FFFFFF"/>
+                </a:solidFill>
+                <a:latin typeface="Yu Gothic" pitchFamily="34" charset="0"/>
+                <a:ea typeface="Yu Gothic" pitchFamily="34" charset="-122"/>
+                <a:cs typeface="Yu Gothic" pitchFamily="34" charset="-120"/>
+              </a:rPr>
+              <a:t>2</a:t>
             </a:r>
             <a:endParaRPr lang="en-US" sz="1300" dirty="0"/>
           </a:p>
+        </p:txBody>
+      </p:sp>
+      <p:sp>
+        <p:nvSpPr>
+          <p:cNvPr id="13" name="Text 11"/>
+          <p:cNvSpPr txBox="1"/>
+          <p:nvPr/>
+        </p:nvSpPr>
+        <p:spPr>
+          <a:xfrm>
+            <a:off x="4663440" y="2944368"/>
+            <a:ext cx="2834640" cy="731520"/>
+          </a:xfrm>
+          <a:prstGeom prst="rect">
+            <a:avLst/>
+          </a:prstGeom>
+          <a:noFill/>
+          <a:ln/>
+        </p:spPr>
+        <p:txBody>
+          <a:bodyPr wrap="square" lIns="0" tIns="0" rIns="0" bIns="0" rtlCol="0" anchor="ctr"/>
+          <a:lstStyle/>
           <a:p>
             <a:pPr indent="0" marL="0">
               <a:lnSpc>
-                <a:spcPct val="145000"/>
+                <a:spcPct val="125000"/>
               </a:lnSpc>
               <a:buNone/>
             </a:pPr>
             <a:r>
-              <a:rPr lang="en-US" sz="1300" dirty="0">
-                <a:solidFill>
-                  <a:srgbClr val="B9B0A4"/>
-                </a:solidFill>
-                <a:latin typeface="Yu Gothic" pitchFamily="34" charset="0"/>
-                <a:ea typeface="Yu Gothic" pitchFamily="34" charset="-122"/>
-                <a:cs typeface="Yu Gothic" pitchFamily="34" charset="-120"/>
-              </a:rPr>
-              <a:t>2回続いたら、宿題の出し方を見直します。</a:t>
+              <a:rPr lang="en-US" sz="1450" b="1" dirty="0">
+                <a:solidFill>
+                  <a:srgbClr val="23201D"/>
+                </a:solidFill>
+                <a:latin typeface="Yu Gothic" pitchFamily="34" charset="0"/>
+                <a:ea typeface="Yu Gothic" pitchFamily="34" charset="-122"/>
+                <a:cs typeface="Yu Gothic" pitchFamily="34" charset="-120"/>
+              </a:rPr>
+              <a:t>実データで動かす</a:t>
+            </a:r>
+            <a:endParaRPr lang="en-US" sz="1450" dirty="0"/>
+          </a:p>
+        </p:txBody>
+      </p:sp>
+      <p:sp>
+        <p:nvSpPr>
+          <p:cNvPr id="14" name="Text 12"/>
+          <p:cNvSpPr txBox="1"/>
+          <p:nvPr/>
+        </p:nvSpPr>
+        <p:spPr>
+          <a:xfrm>
+            <a:off x="4663440" y="3703320"/>
+            <a:ext cx="2834640" cy="1188720"/>
+          </a:xfrm>
+          <a:prstGeom prst="rect">
+            <a:avLst/>
+          </a:prstGeom>
+          <a:noFill/>
+          <a:ln/>
+        </p:spPr>
+        <p:txBody>
+          <a:bodyPr wrap="square" lIns="0" tIns="0" rIns="0" bIns="0" rtlCol="0" anchor="ctr"/>
+          <a:lstStyle/>
+          <a:p>
+            <a:pPr indent="0" marL="0">
+              <a:lnSpc>
+                <a:spcPct val="130000"/>
+              </a:lnSpc>
+              <a:buNone/>
+            </a:pPr>
+            <a:r>
+              <a:rPr lang="en-US" sz="1150" dirty="0">
+                <a:solidFill>
+                  <a:srgbClr val="5A534A"/>
+                </a:solidFill>
+                <a:latin typeface="Yu Gothic" pitchFamily="34" charset="0"/>
+                <a:ea typeface="Yu Gothic" pitchFamily="34" charset="-122"/>
+                <a:cs typeface="Yu Gothic" pitchFamily="34" charset="-120"/>
+              </a:rPr>
+              <a:t>実際の案件を投げて、出力を見ながら指示文を直します</a:t>
+            </a:r>
+            <a:endParaRPr lang="en-US" sz="1150" dirty="0"/>
+          </a:p>
+        </p:txBody>
+      </p:sp>
+      <p:sp>
+        <p:nvSpPr>
+          <p:cNvPr id="15" name="Shape 13"/>
+          <p:cNvSpPr/>
+          <p:nvPr/>
+        </p:nvSpPr>
+        <p:spPr>
+          <a:xfrm>
+            <a:off x="8001000" y="2148840"/>
+            <a:ext cx="3383280" cy="2880360"/>
+          </a:xfrm>
+          <a:prstGeom prst="rect">
+            <a:avLst/>
+          </a:prstGeom>
+          <a:solidFill>
+            <a:srgbClr val="FFFFFF"/>
+          </a:solidFill>
+          <a:ln w="12700">
+            <a:solidFill>
+              <a:srgbClr val="EDE7DB"/>
+            </a:solidFill>
+            <a:prstDash val="solid"/>
+          </a:ln>
+        </p:spPr>
+      </p:sp>
+      <p:sp>
+        <p:nvSpPr>
+          <p:cNvPr id="16" name="Shape 14"/>
+          <p:cNvSpPr/>
+          <p:nvPr/>
+        </p:nvSpPr>
+        <p:spPr>
+          <a:xfrm>
+            <a:off x="8275320" y="2395728"/>
+            <a:ext cx="438912" cy="438912"/>
+          </a:xfrm>
+          <a:prstGeom prst="ellipse">
+            <a:avLst/>
+          </a:prstGeom>
+          <a:solidFill>
+            <a:srgbClr val="2F4F6B"/>
+          </a:solidFill>
+          <a:ln w="12700">
+            <a:solidFill>
+              <a:srgbClr val="333333"/>
+            </a:solidFill>
+            <a:prstDash val="solid"/>
+          </a:ln>
+        </p:spPr>
+      </p:sp>
+      <p:sp>
+        <p:nvSpPr>
+          <p:cNvPr id="17" name="Text 15"/>
+          <p:cNvSpPr txBox="1"/>
+          <p:nvPr/>
+        </p:nvSpPr>
+        <p:spPr>
+          <a:xfrm>
+            <a:off x="8275320" y="2395728"/>
+            <a:ext cx="438912" cy="438912"/>
+          </a:xfrm>
+          <a:prstGeom prst="rect">
+            <a:avLst/>
+          </a:prstGeom>
+          <a:noFill/>
+          <a:ln/>
+        </p:spPr>
+        <p:txBody>
+          <a:bodyPr wrap="square" lIns="0" tIns="0" rIns="0" bIns="0" rtlCol="0" anchor="ctr"/>
+          <a:lstStyle/>
+          <a:p>
+            <a:pPr algn="ctr" indent="0" marL="0">
+              <a:buNone/>
+            </a:pPr>
+            <a:r>
+              <a:rPr lang="en-US" sz="1300" b="1" dirty="0">
+                <a:solidFill>
+                  <a:srgbClr val="FFFFFF"/>
+                </a:solidFill>
+                <a:latin typeface="Yu Gothic" pitchFamily="34" charset="0"/>
+                <a:ea typeface="Yu Gothic" pitchFamily="34" charset="-122"/>
+                <a:cs typeface="Yu Gothic" pitchFamily="34" charset="-120"/>
+              </a:rPr>
+              <a:t>3</a:t>
             </a:r>
             <a:endParaRPr lang="en-US" sz="1300" dirty="0"/>
           </a:p>
@@ -5006,14 +8915,98 @@
       </p:sp>
       <p:sp>
         <p:nvSpPr>
-          <p:cNvPr id="7" name="Text 5"/>
-          <p:cNvSpPr txBox="1"/>
-          <p:nvPr/>
-        </p:nvSpPr>
-        <p:spPr>
-          <a:xfrm>
-            <a:off x="777240" y="6355080"/>
-            <a:ext cx="10607040" cy="274320"/>
+          <p:cNvPr id="18" name="Text 16"/>
+          <p:cNvSpPr txBox="1"/>
+          <p:nvPr/>
+        </p:nvSpPr>
+        <p:spPr>
+          <a:xfrm>
+            <a:off x="8275320" y="2944368"/>
+            <a:ext cx="2834640" cy="731520"/>
+          </a:xfrm>
+          <a:prstGeom prst="rect">
+            <a:avLst/>
+          </a:prstGeom>
+          <a:noFill/>
+          <a:ln/>
+        </p:spPr>
+        <p:txBody>
+          <a:bodyPr wrap="square" lIns="0" tIns="0" rIns="0" bIns="0" rtlCol="0" anchor="ctr"/>
+          <a:lstStyle/>
+          <a:p>
+            <a:pPr indent="0" marL="0">
+              <a:lnSpc>
+                <a:spcPct val="125000"/>
+              </a:lnSpc>
+              <a:buNone/>
+            </a:pPr>
+            <a:r>
+              <a:rPr lang="en-US" sz="1450" b="1" dirty="0">
+                <a:solidFill>
+                  <a:srgbClr val="23201D"/>
+                </a:solidFill>
+                <a:latin typeface="Yu Gothic" pitchFamily="34" charset="0"/>
+                <a:ea typeface="Yu Gothic" pitchFamily="34" charset="-122"/>
+                <a:cs typeface="Yu Gothic" pitchFamily="34" charset="-120"/>
+              </a:rPr>
+              <a:t>利用ルールをA4一枚で書く</a:t>
+            </a:r>
+            <a:endParaRPr lang="en-US" sz="1450" dirty="0"/>
+          </a:p>
+        </p:txBody>
+      </p:sp>
+      <p:sp>
+        <p:nvSpPr>
+          <p:cNvPr id="19" name="Text 17"/>
+          <p:cNvSpPr txBox="1"/>
+          <p:nvPr/>
+        </p:nvSpPr>
+        <p:spPr>
+          <a:xfrm>
+            <a:off x="8275320" y="3703320"/>
+            <a:ext cx="2834640" cy="1188720"/>
+          </a:xfrm>
+          <a:prstGeom prst="rect">
+            <a:avLst/>
+          </a:prstGeom>
+          <a:noFill/>
+          <a:ln/>
+        </p:spPr>
+        <p:txBody>
+          <a:bodyPr wrap="square" lIns="0" tIns="0" rIns="0" bIns="0" rtlCol="0" anchor="ctr"/>
+          <a:lstStyle/>
+          <a:p>
+            <a:pPr indent="0" marL="0">
+              <a:lnSpc>
+                <a:spcPct val="130000"/>
+              </a:lnSpc>
+              <a:buNone/>
+            </a:pPr>
+            <a:r>
+              <a:rPr lang="en-US" sz="1150" dirty="0">
+                <a:solidFill>
+                  <a:srgbClr val="5A534A"/>
+                </a:solidFill>
+                <a:latin typeface="Yu Gothic" pitchFamily="34" charset="0"/>
+                <a:ea typeface="Yu Gothic" pitchFamily="34" charset="-122"/>
+                <a:cs typeface="Yu Gothic" pitchFamily="34" charset="-120"/>
+              </a:rPr>
+              <a:t>使ってよいAI／入れてはいけない情報／確認責任／相談先／見直し時期</a:t>
+            </a:r>
+            <a:endParaRPr lang="en-US" sz="1150" dirty="0"/>
+          </a:p>
+        </p:txBody>
+      </p:sp>
+      <p:sp>
+        <p:nvSpPr>
+          <p:cNvPr id="20" name="Text 18"/>
+          <p:cNvSpPr txBox="1"/>
+          <p:nvPr/>
+        </p:nvSpPr>
+        <p:spPr>
+          <a:xfrm>
+            <a:off x="777240" y="6382512"/>
+            <a:ext cx="7424928" cy="256032"/>
           </a:xfrm>
           <a:prstGeom prst="rect">
             <a:avLst/>
@@ -5031,13 +9024,52 @@
             <a:r>
               <a:rPr lang="en-US" sz="900" dirty="0">
                 <a:solidFill>
-                  <a:srgbClr val="6E6558"/>
+                  <a:srgbClr val="8A8177"/>
                 </a:solidFill>
                 <a:latin typeface="Yu Gothic" pitchFamily="34" charset="0"/>
                 <a:ea typeface="Yu Gothic" pitchFamily="34" charset="-122"/>
                 <a:cs typeface="Yu Gothic" pitchFamily="34" charset="-120"/>
               </a:rPr>
               <a:t>第5回　自社専用AIをつくる</a:t>
+            </a:r>
+            <a:endParaRPr lang="en-US" sz="900" dirty="0"/>
+          </a:p>
+        </p:txBody>
+      </p:sp>
+      <p:sp>
+        <p:nvSpPr>
+          <p:cNvPr id="21" name="Text 19"/>
+          <p:cNvSpPr txBox="1"/>
+          <p:nvPr/>
+        </p:nvSpPr>
+        <p:spPr>
+          <a:xfrm>
+            <a:off x="8202168" y="6382512"/>
+            <a:ext cx="3182112" cy="256032"/>
+          </a:xfrm>
+          <a:prstGeom prst="rect">
+            <a:avLst/>
+          </a:prstGeom>
+          <a:noFill/>
+          <a:ln/>
+        </p:spPr>
+        <p:txBody>
+          <a:bodyPr wrap="square" lIns="0" tIns="0" rIns="0" bIns="0" rtlCol="0" anchor="ctr"/>
+          <a:lstStyle/>
+          <a:p>
+            <a:pPr algn="r" indent="0" marL="0">
+              <a:buNone/>
+            </a:pPr>
+            <a:r>
+              <a:rPr lang="en-US" sz="900" dirty="0">
+                <a:solidFill>
+                  <a:srgbClr val="8A8177"/>
+                </a:solidFill>
+                <a:latin typeface="Yu Gothic" pitchFamily="34" charset="0"/>
+                <a:ea typeface="Yu Gothic" pitchFamily="34" charset="-122"/>
+                <a:cs typeface="Yu Gothic" pitchFamily="34" charset="-120"/>
+              </a:rPr>
+              <a:t>演習</a:t>
             </a:r>
             <a:endParaRPr lang="en-US" sz="900" dirty="0"/>
           </a:p>

--- a/slides/pptx/第05回_自社専用AIをつくる.pptx
+++ b/slides/pptx/第05回_自社専用AIをつくる.pptx
@@ -17,9 +17,12 @@
     <p:sldId id="265" r:id="rId11"/>
     <p:sldId id="266" r:id="rId12"/>
     <p:sldId id="267" r:id="rId13"/>
+    <p:sldId id="268" r:id="rId14"/>
+    <p:sldId id="269" r:id="rId15"/>
+    <p:sldId id="270" r:id="rId16"/>
   </p:sldIdLst>
   <p:notesMasterIdLst>
-    <p:notesMasterId r:id="rId14"/>
+    <p:notesMasterId r:id="rId17"/>
   </p:notesMasterIdLst>
   <p:sldSz cx="12192000" cy="6858000"/>
   <p:notesSz cx="6858000" cy="12192000"/>
@@ -601,7 +604,7 @@
           <a:p>
             <a:r>
               <a:rPr lang="en-US" dirty="0"/>
-              <a:t>置き場所は実際に開いて確認する。URLを共有フォルダに貼るところまでやると、翌週から使われる確率が上がる。</a:t>
+              <a:t>仕様書6行を『引き継ぎ書』と言い換えると、経営者には価値が伝わりやすい。事業承継の文脈に接続できる。</a:t>
             </a:r>
             <a:endParaRPr lang="en-US" dirty="0"/>
           </a:p>
@@ -689,7 +692,7 @@
           <a:p>
             <a:r>
               <a:rPr lang="en-US" dirty="0"/>
-              <a:t>時間が押したら、演習を削ってでもここを守る。持ち帰って試します、は試されない。この一点だけは譲らない。</a:t>
+              <a:t>3つ目（ルール）は時間が押しても必ずやる。テンプレを埋めるだけなので10分で済む。ルールがないまま社員に渡すと、第6回で必ず質問が出る。</a:t>
             </a:r>
             <a:endParaRPr lang="en-US" dirty="0"/>
           </a:p>
@@ -777,7 +780,7 @@
           <a:p>
             <a:r>
               <a:rPr lang="en-US" dirty="0"/>
-              <a:t>1名に触ってもらう、が次回の成否を分ける。誰に頼むかをその場で決め、頼み方の一言まで一緒に考える。</a:t>
+              <a:t>置き場所は実際に開いて確認する。URLを共有フォルダに貼るところまでやると、翌週から使われる確率が上がる。</a:t>
             </a:r>
             <a:endParaRPr lang="en-US" dirty="0"/>
           </a:p>
@@ -801,6 +804,270 @@
             <a:fld id="{F7021451-1387-4CA6-816F-3879F97B5CBC}" type="slidenum">
               <a:rPr lang="en-US"/>
               <a:t>12</a:t>
+            </a:fld>
+            <a:endParaRPr lang="en-US"/>
+          </a:p>
+        </p:txBody>
+      </p:sp>
+    </p:spTree>
+    <p:extLst>
+      <p:ext uri="{BB962C8B-B14F-4D97-AF65-F5344CB8AC3E}">
+        <p14:creationId xmlns:p14="http://schemas.microsoft.com/office/powerpoint/2010/main" val="1024086991"/>
+      </p:ext>
+    </p:extLst>
+  </p:cSld>
+  <p:clrMapOvr>
+    <a:masterClrMapping/>
+  </p:clrMapOvr>
+</p:notes>
+</file>
+
+<file path=ppt/notesSlides/notesSlide13.xml><?xml version="1.0" encoding="utf-8"?>
+<p:notes xmlns:a="http://schemas.openxmlformats.org/drawingml/2006/main" xmlns:r="http://schemas.openxmlformats.org/officeDocument/2006/relationships" xmlns:p="http://schemas.openxmlformats.org/presentationml/2006/main">
+  <p:cSld>
+    <p:spTree>
+      <p:nvGrpSpPr>
+        <p:cNvPr id="1" name=""/>
+        <p:cNvGrpSpPr/>
+        <p:nvPr/>
+      </p:nvGrpSpPr>
+      <p:grpSpPr>
+        <a:xfrm>
+          <a:off x="0" y="0"/>
+          <a:ext cx="0" cy="0"/>
+          <a:chOff x="0" y="0"/>
+          <a:chExt cx="0" cy="0"/>
+        </a:xfrm>
+      </p:grpSpPr>
+      <p:sp>
+        <p:nvSpPr>
+          <p:cNvPr id="2" name="Slide Image Placeholder 1"/>
+          <p:cNvSpPr>
+            <a:spLocks noGrp="1" noRot="1" noChangeAspect="1"/>
+          </p:cNvSpPr>
+          <p:nvPr>
+            <p:ph type="sldImg"/>
+          </p:nvPr>
+        </p:nvSpPr>
+        <p:spPr/>
+      </p:sp>
+      <p:sp>
+        <p:nvSpPr>
+          <p:cNvPr id="3" name="Notes Placeholder 2"/>
+          <p:cNvSpPr>
+            <a:spLocks noGrp="1"/>
+          </p:cNvSpPr>
+          <p:nvPr>
+            <p:ph type="body" idx="1"/>
+          </p:nvPr>
+        </p:nvSpPr>
+        <p:spPr/>
+        <p:txBody>
+          <a:bodyPr/>
+          <a:lstStyle/>
+          <a:p>
+            <a:r>
+              <a:rPr lang="en-US" dirty="0"/>
+              <a:t>時間が押したら、演習を削ってでもここを守る。持ち帰って試します、は試されない。この一点だけは譲らない。</a:t>
+            </a:r>
+            <a:endParaRPr lang="en-US" dirty="0"/>
+          </a:p>
+        </p:txBody>
+      </p:sp>
+      <p:sp>
+        <p:nvSpPr>
+          <p:cNvPr id="4" name="Slide Number Placeholder 3"/>
+          <p:cNvSpPr>
+            <a:spLocks noGrp="1"/>
+          </p:cNvSpPr>
+          <p:nvPr>
+            <p:ph type="sldNum" sz="quarter" idx="10"/>
+          </p:nvPr>
+        </p:nvSpPr>
+        <p:spPr/>
+        <p:txBody>
+          <a:bodyPr/>
+          <a:lstStyle/>
+          <a:p>
+            <a:fld id="{F7021451-1387-4CA6-816F-3879F97B5CBC}" type="slidenum">
+              <a:rPr lang="en-US"/>
+              <a:t>13</a:t>
+            </a:fld>
+            <a:endParaRPr lang="en-US"/>
+          </a:p>
+        </p:txBody>
+      </p:sp>
+    </p:spTree>
+    <p:extLst>
+      <p:ext uri="{BB962C8B-B14F-4D97-AF65-F5344CB8AC3E}">
+        <p14:creationId xmlns:p14="http://schemas.microsoft.com/office/powerpoint/2010/main" val="1024086991"/>
+      </p:ext>
+    </p:extLst>
+  </p:cSld>
+  <p:clrMapOvr>
+    <a:masterClrMapping/>
+  </p:clrMapOvr>
+</p:notes>
+</file>
+
+<file path=ppt/notesSlides/notesSlide14.xml><?xml version="1.0" encoding="utf-8"?>
+<p:notes xmlns:a="http://schemas.openxmlformats.org/drawingml/2006/main" xmlns:r="http://schemas.openxmlformats.org/officeDocument/2006/relationships" xmlns:p="http://schemas.openxmlformats.org/presentationml/2006/main">
+  <p:cSld>
+    <p:spTree>
+      <p:nvGrpSpPr>
+        <p:cNvPr id="1" name=""/>
+        <p:cNvGrpSpPr/>
+        <p:nvPr/>
+      </p:nvGrpSpPr>
+      <p:grpSpPr>
+        <a:xfrm>
+          <a:off x="0" y="0"/>
+          <a:ext cx="0" cy="0"/>
+          <a:chOff x="0" y="0"/>
+          <a:chExt cx="0" cy="0"/>
+        </a:xfrm>
+      </p:grpSpPr>
+      <p:sp>
+        <p:nvSpPr>
+          <p:cNvPr id="2" name="Slide Image Placeholder 1"/>
+          <p:cNvSpPr>
+            <a:spLocks noGrp="1" noRot="1" noChangeAspect="1"/>
+          </p:cNvSpPr>
+          <p:nvPr>
+            <p:ph type="sldImg"/>
+          </p:nvPr>
+        </p:nvSpPr>
+        <p:spPr/>
+      </p:sp>
+      <p:sp>
+        <p:nvSpPr>
+          <p:cNvPr id="3" name="Notes Placeholder 2"/>
+          <p:cNvSpPr>
+            <a:spLocks noGrp="1"/>
+          </p:cNvSpPr>
+          <p:nvPr>
+            <p:ph type="body" idx="1"/>
+          </p:nvPr>
+        </p:nvSpPr>
+        <p:spPr/>
+        <p:txBody>
+          <a:bodyPr/>
+          <a:lstStyle/>
+          <a:p>
+            <a:r>
+              <a:rPr lang="en-US" dirty="0"/>
+              <a:t>次回は特別な回。1週間前の壁打ち（別枠30分）の日程を、この場で決める。ここを飛ばすと当日が崩れる。</a:t>
+            </a:r>
+            <a:endParaRPr lang="en-US" dirty="0"/>
+          </a:p>
+        </p:txBody>
+      </p:sp>
+      <p:sp>
+        <p:nvSpPr>
+          <p:cNvPr id="4" name="Slide Number Placeholder 3"/>
+          <p:cNvSpPr>
+            <a:spLocks noGrp="1"/>
+          </p:cNvSpPr>
+          <p:nvPr>
+            <p:ph type="sldNum" sz="quarter" idx="10"/>
+          </p:nvPr>
+        </p:nvSpPr>
+        <p:spPr/>
+        <p:txBody>
+          <a:bodyPr/>
+          <a:lstStyle/>
+          <a:p>
+            <a:fld id="{F7021451-1387-4CA6-816F-3879F97B5CBC}" type="slidenum">
+              <a:rPr lang="en-US"/>
+              <a:t>14</a:t>
+            </a:fld>
+            <a:endParaRPr lang="en-US"/>
+          </a:p>
+        </p:txBody>
+      </p:sp>
+    </p:spTree>
+    <p:extLst>
+      <p:ext uri="{BB962C8B-B14F-4D97-AF65-F5344CB8AC3E}">
+        <p14:creationId xmlns:p14="http://schemas.microsoft.com/office/powerpoint/2010/main" val="1024086991"/>
+      </p:ext>
+    </p:extLst>
+  </p:cSld>
+  <p:clrMapOvr>
+    <a:masterClrMapping/>
+  </p:clrMapOvr>
+</p:notes>
+</file>
+
+<file path=ppt/notesSlides/notesSlide15.xml><?xml version="1.0" encoding="utf-8"?>
+<p:notes xmlns:a="http://schemas.openxmlformats.org/drawingml/2006/main" xmlns:r="http://schemas.openxmlformats.org/officeDocument/2006/relationships" xmlns:p="http://schemas.openxmlformats.org/presentationml/2006/main">
+  <p:cSld>
+    <p:spTree>
+      <p:nvGrpSpPr>
+        <p:cNvPr id="1" name=""/>
+        <p:cNvGrpSpPr/>
+        <p:nvPr/>
+      </p:nvGrpSpPr>
+      <p:grpSpPr>
+        <a:xfrm>
+          <a:off x="0" y="0"/>
+          <a:ext cx="0" cy="0"/>
+          <a:chOff x="0" y="0"/>
+          <a:chExt cx="0" cy="0"/>
+        </a:xfrm>
+      </p:grpSpPr>
+      <p:sp>
+        <p:nvSpPr>
+          <p:cNvPr id="2" name="Slide Image Placeholder 1"/>
+          <p:cNvSpPr>
+            <a:spLocks noGrp="1" noRot="1" noChangeAspect="1"/>
+          </p:cNvSpPr>
+          <p:nvPr>
+            <p:ph type="sldImg"/>
+          </p:nvPr>
+        </p:nvSpPr>
+        <p:spPr/>
+      </p:sp>
+      <p:sp>
+        <p:nvSpPr>
+          <p:cNvPr id="3" name="Notes Placeholder 2"/>
+          <p:cNvSpPr>
+            <a:spLocks noGrp="1"/>
+          </p:cNvSpPr>
+          <p:nvPr>
+            <p:ph type="body" idx="1"/>
+          </p:nvPr>
+        </p:nvSpPr>
+        <p:spPr/>
+        <p:txBody>
+          <a:bodyPr/>
+          <a:lstStyle/>
+          <a:p>
+            <a:r>
+              <a:rPr lang="en-US" dirty="0"/>
+              <a:t>1名に触ってもらう、が次回の成否を分ける。誰に頼むかをその場で決め、頼み方の一言まで一緒に考える。</a:t>
+            </a:r>
+            <a:endParaRPr lang="en-US" dirty="0"/>
+          </a:p>
+        </p:txBody>
+      </p:sp>
+      <p:sp>
+        <p:nvSpPr>
+          <p:cNvPr id="4" name="Slide Number Placeholder 3"/>
+          <p:cNvSpPr>
+            <a:spLocks noGrp="1"/>
+          </p:cNvSpPr>
+          <p:nvPr>
+            <p:ph type="sldNum" sz="quarter" idx="10"/>
+          </p:nvPr>
+        </p:nvSpPr>
+        <p:spPr/>
+        <p:txBody>
+          <a:bodyPr/>
+          <a:lstStyle/>
+          <a:p>
+            <a:fld id="{F7021451-1387-4CA6-816F-3879F97B5CBC}" type="slidenum">
+              <a:rPr lang="en-US"/>
+              <a:t>15</a:t>
             </a:fld>
             <a:endParaRPr lang="en-US"/>
           </a:p>
@@ -1481,7 +1748,7 @@
           <a:p>
             <a:r>
               <a:rPr lang="en-US" dirty="0"/>
-              <a:t>3つ目（ルール）は時間が押しても必ずやる。テンプレを埋めるだけなので10分で済む。ルールがないまま社員に渡すと、第6回で必ず質問が出る。</a:t>
+              <a:t>1つ目は誤解が多い。『多いほど良い』という直感を、ここで折っておかないと第8回で全社資料を入れたがる。</a:t>
             </a:r>
             <a:endParaRPr lang="en-US" dirty="0"/>
           </a:p>
@@ -2175,13 +2442,13 @@
             <a:r>
               <a:rPr lang="en-US" sz="1100" b="1" spc="250" kern="0" dirty="0">
                 <a:solidFill>
-                  <a:srgbClr val="3B6B4A"/>
-                </a:solidFill>
-                <a:latin typeface="Yu Gothic" pitchFamily="34" charset="0"/>
-                <a:ea typeface="Yu Gothic" pitchFamily="34" charset="-122"/>
-                <a:cs typeface="Yu Gothic" pitchFamily="34" charset="-120"/>
-              </a:rPr>
-              <a:t>業務への組み込み</a:t>
+                  <a:srgbClr val="8A8177"/>
+                </a:solidFill>
+                <a:latin typeface="Yu Gothic" pitchFamily="34" charset="0"/>
+                <a:ea typeface="Yu Gothic" pitchFamily="34" charset="-122"/>
+                <a:cs typeface="Yu Gothic" pitchFamily="34" charset="-120"/>
+              </a:rPr>
+              <a:t>用語</a:t>
             </a:r>
             <a:endParaRPr lang="en-US" sz="1100" dirty="0"/>
           </a:p>
@@ -2220,7 +2487,7 @@
                 <a:ea typeface="Yu Gothic" pitchFamily="34" charset="-122"/>
                 <a:cs typeface="Yu Gothic" pitchFamily="34" charset="-120"/>
               </a:rPr>
-              <a:t>帰る前に決めること</a:t>
+              <a:t>今日出てきた言葉</a:t>
             </a:r>
             <a:endParaRPr lang="en-US" sz="2600" dirty="0"/>
           </a:p>
@@ -2228,53 +2495,14 @@
       </p:sp>
       <p:sp>
         <p:nvSpPr>
-          <p:cNvPr id="4" name="Text 2"/>
-          <p:cNvSpPr txBox="1"/>
-          <p:nvPr/>
-        </p:nvSpPr>
-        <p:spPr>
-          <a:xfrm>
-            <a:off x="777240" y="1572768"/>
-            <a:ext cx="10607040" cy="320040"/>
-          </a:xfrm>
-          <a:prstGeom prst="rect">
-            <a:avLst/>
-          </a:prstGeom>
-          <a:noFill/>
-          <a:ln/>
-        </p:spPr>
-        <p:txBody>
-          <a:bodyPr wrap="square" lIns="0" tIns="0" rIns="0" bIns="0" rtlCol="0" anchor="ctr"/>
-          <a:lstStyle/>
-          <a:p>
-            <a:pPr indent="0" marL="0">
-              <a:buNone/>
-            </a:pPr>
-            <a:r>
-              <a:rPr lang="en-US" sz="1250" b="1" dirty="0">
-                <a:solidFill>
-                  <a:srgbClr val="3B6B4A"/>
-                </a:solidFill>
-                <a:latin typeface="Yu Gothic" pitchFamily="34" charset="0"/>
-                <a:ea typeface="Yu Gothic" pitchFamily="34" charset="-122"/>
-                <a:cs typeface="Yu Gothic" pitchFamily="34" charset="-120"/>
-              </a:rPr>
-              <a:t>ここを決めないと、持ち帰っても使われません。紙に書きます。</a:t>
-            </a:r>
-            <a:endParaRPr lang="en-US" sz="1250" dirty="0"/>
-          </a:p>
-        </p:txBody>
-      </p:sp>
-      <p:sp>
-        <p:nvSpPr>
-          <p:cNvPr id="5" name="Shape 3"/>
+          <p:cNvPr id="4" name="Shape 2"/>
           <p:cNvSpPr/>
           <p:nvPr/>
         </p:nvSpPr>
         <p:spPr>
           <a:xfrm>
-            <a:off x="777240" y="2103120"/>
-            <a:ext cx="10607040" cy="914400"/>
+            <a:off x="777240" y="1828800"/>
+            <a:ext cx="10607040" cy="1078992"/>
           </a:xfrm>
           <a:prstGeom prst="rect">
             <a:avLst/>
@@ -2292,20 +2520,59 @@
       </p:sp>
       <p:sp>
         <p:nvSpPr>
+          <p:cNvPr id="5" name="Text 3"/>
+          <p:cNvSpPr txBox="1"/>
+          <p:nvPr/>
+        </p:nvSpPr>
+        <p:spPr>
+          <a:xfrm>
+            <a:off x="1097280" y="1920240"/>
+            <a:ext cx="2969971" cy="896112"/>
+          </a:xfrm>
+          <a:prstGeom prst="rect">
+            <a:avLst/>
+          </a:prstGeom>
+          <a:noFill/>
+          <a:ln/>
+        </p:spPr>
+        <p:txBody>
+          <a:bodyPr wrap="square" lIns="0" tIns="0" rIns="0" bIns="0" rtlCol="0" anchor="ctr"/>
+          <a:lstStyle/>
+          <a:p>
+            <a:pPr indent="0" marL="0">
+              <a:buNone/>
+            </a:pPr>
+            <a:r>
+              <a:rPr lang="en-US" sz="1500" b="1" dirty="0">
+                <a:solidFill>
+                  <a:srgbClr val="23201D"/>
+                </a:solidFill>
+                <a:latin typeface="Yu Gothic" pitchFamily="34" charset="0"/>
+                <a:ea typeface="Yu Gothic" pitchFamily="34" charset="-122"/>
+                <a:cs typeface="Yu Gothic" pitchFamily="34" charset="-120"/>
+              </a:rPr>
+              <a:t>専用AI</a:t>
+            </a:r>
+            <a:endParaRPr lang="en-US" sz="1500" dirty="0"/>
+          </a:p>
+        </p:txBody>
+      </p:sp>
+      <p:sp>
+        <p:nvSpPr>
           <p:cNvPr id="6" name="Shape 4"/>
           <p:cNvSpPr/>
           <p:nvPr/>
         </p:nvSpPr>
         <p:spPr>
           <a:xfrm>
-            <a:off x="777240" y="2103120"/>
-            <a:ext cx="54864" cy="914400"/>
+            <a:off x="4065422" y="1956816"/>
+            <a:ext cx="18288" cy="822960"/>
           </a:xfrm>
           <a:prstGeom prst="rect">
             <a:avLst/>
           </a:prstGeom>
           <a:solidFill>
-            <a:srgbClr val="3B6B4A"/>
+            <a:srgbClr val="EDE7DB"/>
           </a:solidFill>
           <a:ln w="12700">
             <a:solidFill>
@@ -2323,47 +2590,8 @@
         </p:nvSpPr>
         <p:spPr>
           <a:xfrm>
-            <a:off x="1143000" y="2176272"/>
-            <a:ext cx="2757830" cy="768096"/>
-          </a:xfrm>
-          <a:prstGeom prst="rect">
-            <a:avLst/>
-          </a:prstGeom>
-          <a:noFill/>
-          <a:ln/>
-        </p:spPr>
-        <p:txBody>
-          <a:bodyPr wrap="square" lIns="0" tIns="0" rIns="0" bIns="0" rtlCol="0" anchor="ctr"/>
-          <a:lstStyle/>
-          <a:p>
-            <a:pPr indent="0" marL="0">
-              <a:buNone/>
-            </a:pPr>
-            <a:r>
-              <a:rPr lang="en-US" sz="1400" b="1" dirty="0">
-                <a:solidFill>
-                  <a:srgbClr val="3B6B4A"/>
-                </a:solidFill>
-                <a:latin typeface="Yu Gothic" pitchFamily="34" charset="0"/>
-                <a:ea typeface="Yu Gothic" pitchFamily="34" charset="-122"/>
-                <a:cs typeface="Yu Gothic" pitchFamily="34" charset="-120"/>
-              </a:rPr>
-              <a:t>誰に最初に触らせるか</a:t>
-            </a:r>
-            <a:endParaRPr lang="en-US" sz="1400" dirty="0"/>
-          </a:p>
-        </p:txBody>
-      </p:sp>
-      <p:sp>
-        <p:nvSpPr>
-          <p:cNvPr id="8" name="Text 6"/>
-          <p:cNvSpPr txBox="1"/>
-          <p:nvPr/>
-        </p:nvSpPr>
-        <p:spPr>
-          <a:xfrm>
-            <a:off x="4006901" y="2176272"/>
-            <a:ext cx="7011619" cy="768096"/>
+            <a:off x="4383634" y="1920240"/>
+            <a:ext cx="6682435" cy="896112"/>
           </a:xfrm>
           <a:prstGeom prst="rect">
             <a:avLst/>
@@ -2384,13 +2612,13 @@
             <a:r>
               <a:rPr lang="en-US" sz="1250" dirty="0">
                 <a:solidFill>
-                  <a:srgbClr val="3F3933"/>
-                </a:solidFill>
-                <a:latin typeface="Yu Gothic" pitchFamily="34" charset="0"/>
-                <a:ea typeface="Yu Gothic" pitchFamily="34" charset="-122"/>
-                <a:cs typeface="Yu Gothic" pitchFamily="34" charset="-120"/>
-              </a:rPr>
-              <a:t>推進候補の1名。第3回で決めた方と同じで構いません</a:t>
+                  <a:srgbClr val="5A534A"/>
+                </a:solidFill>
+                <a:latin typeface="Yu Gothic" pitchFamily="34" charset="0"/>
+                <a:ea typeface="Yu Gothic" pitchFamily="34" charset="-122"/>
+                <a:cs typeface="Yu Gothic" pitchFamily="34" charset="-120"/>
+              </a:rPr>
+              <a:t>自社の資料と指示をあらかじめ仕込んだAI。社員に渡せます</a:t>
             </a:r>
             <a:endParaRPr lang="en-US" sz="1250" dirty="0"/>
           </a:p>
@@ -2398,14 +2626,14 @@
       </p:sp>
       <p:sp>
         <p:nvSpPr>
-          <p:cNvPr id="9" name="Shape 7"/>
+          <p:cNvPr id="8" name="Shape 6"/>
           <p:cNvSpPr/>
           <p:nvPr/>
         </p:nvSpPr>
         <p:spPr>
           <a:xfrm>
-            <a:off x="777240" y="3154680"/>
-            <a:ext cx="10607040" cy="914400"/>
+            <a:off x="777240" y="3063240"/>
+            <a:ext cx="10607040" cy="1078992"/>
           </a:xfrm>
           <a:prstGeom prst="rect">
             <a:avLst/>
@@ -2423,20 +2651,59 @@
       </p:sp>
       <p:sp>
         <p:nvSpPr>
+          <p:cNvPr id="9" name="Text 7"/>
+          <p:cNvSpPr txBox="1"/>
+          <p:nvPr/>
+        </p:nvSpPr>
+        <p:spPr>
+          <a:xfrm>
+            <a:off x="1097280" y="3154680"/>
+            <a:ext cx="2969971" cy="896112"/>
+          </a:xfrm>
+          <a:prstGeom prst="rect">
+            <a:avLst/>
+          </a:prstGeom>
+          <a:noFill/>
+          <a:ln/>
+        </p:spPr>
+        <p:txBody>
+          <a:bodyPr wrap="square" lIns="0" tIns="0" rIns="0" bIns="0" rtlCol="0" anchor="ctr"/>
+          <a:lstStyle/>
+          <a:p>
+            <a:pPr indent="0" marL="0">
+              <a:buNone/>
+            </a:pPr>
+            <a:r>
+              <a:rPr lang="en-US" sz="1500" b="1" dirty="0">
+                <a:solidFill>
+                  <a:srgbClr val="23201D"/>
+                </a:solidFill>
+                <a:latin typeface="Yu Gothic" pitchFamily="34" charset="0"/>
+                <a:ea typeface="Yu Gothic" pitchFamily="34" charset="-122"/>
+                <a:cs typeface="Yu Gothic" pitchFamily="34" charset="-120"/>
+              </a:rPr>
+              <a:t>仕様書</a:t>
+            </a:r>
+            <a:endParaRPr lang="en-US" sz="1500" dirty="0"/>
+          </a:p>
+        </p:txBody>
+      </p:sp>
+      <p:sp>
+        <p:nvSpPr>
           <p:cNvPr id="10" name="Shape 8"/>
           <p:cNvSpPr/>
           <p:nvPr/>
         </p:nvSpPr>
         <p:spPr>
           <a:xfrm>
-            <a:off x="777240" y="3154680"/>
-            <a:ext cx="54864" cy="914400"/>
+            <a:off x="4065422" y="3191256"/>
+            <a:ext cx="18288" cy="822960"/>
           </a:xfrm>
           <a:prstGeom prst="rect">
             <a:avLst/>
           </a:prstGeom>
           <a:solidFill>
-            <a:srgbClr val="3B6B4A"/>
+            <a:srgbClr val="EDE7DB"/>
           </a:solidFill>
           <a:ln w="12700">
             <a:solidFill>
@@ -2454,47 +2721,8 @@
         </p:nvSpPr>
         <p:spPr>
           <a:xfrm>
-            <a:off x="1143000" y="3227832"/>
-            <a:ext cx="2757830" cy="768096"/>
-          </a:xfrm>
-          <a:prstGeom prst="rect">
-            <a:avLst/>
-          </a:prstGeom>
-          <a:noFill/>
-          <a:ln/>
-        </p:spPr>
-        <p:txBody>
-          <a:bodyPr wrap="square" lIns="0" tIns="0" rIns="0" bIns="0" rtlCol="0" anchor="ctr"/>
-          <a:lstStyle/>
-          <a:p>
-            <a:pPr indent="0" marL="0">
-              <a:buNone/>
-            </a:pPr>
-            <a:r>
-              <a:rPr lang="en-US" sz="1400" b="1" dirty="0">
-                <a:solidFill>
-                  <a:srgbClr val="3B6B4A"/>
-                </a:solidFill>
-                <a:latin typeface="Yu Gothic" pitchFamily="34" charset="0"/>
-                <a:ea typeface="Yu Gothic" pitchFamily="34" charset="-122"/>
-                <a:cs typeface="Yu Gothic" pitchFamily="34" charset="-120"/>
-              </a:rPr>
-              <a:t>どこに置くか</a:t>
-            </a:r>
-            <a:endParaRPr lang="en-US" sz="1400" dirty="0"/>
-          </a:p>
-        </p:txBody>
-      </p:sp>
-      <p:sp>
-        <p:nvSpPr>
-          <p:cNvPr id="12" name="Text 10"/>
-          <p:cNvSpPr txBox="1"/>
-          <p:nvPr/>
-        </p:nvSpPr>
-        <p:spPr>
-          <a:xfrm>
-            <a:off x="4006901" y="3227832"/>
-            <a:ext cx="7011619" cy="768096"/>
+            <a:off x="4383634" y="3154680"/>
+            <a:ext cx="6682435" cy="896112"/>
           </a:xfrm>
           <a:prstGeom prst="rect">
             <a:avLst/>
@@ -2515,13 +2743,13 @@
             <a:r>
               <a:rPr lang="en-US" sz="1250" dirty="0">
                 <a:solidFill>
-                  <a:srgbClr val="3F3933"/>
-                </a:solidFill>
-                <a:latin typeface="Yu Gothic" pitchFamily="34" charset="0"/>
-                <a:ea typeface="Yu Gothic" pitchFamily="34" charset="-122"/>
-                <a:cs typeface="Yu Gothic" pitchFamily="34" charset="-120"/>
-              </a:rPr>
-              <a:t>社員が迷わず開ける場所。URLを共有フォルダに貼るところまで</a:t>
+                  <a:srgbClr val="5A534A"/>
+                </a:solidFill>
+                <a:latin typeface="Yu Gothic" pitchFamily="34" charset="0"/>
+                <a:ea typeface="Yu Gothic" pitchFamily="34" charset="-122"/>
+                <a:cs typeface="Yu Gothic" pitchFamily="34" charset="-120"/>
+              </a:rPr>
+              <a:t>名称・役割・参照資料・守ること・出力形式・使う人の6行。これが引き継ぎ書になります</a:t>
             </a:r>
             <a:endParaRPr lang="en-US" sz="1250" dirty="0"/>
           </a:p>
@@ -2529,14 +2757,14 @@
       </p:sp>
       <p:sp>
         <p:nvSpPr>
-          <p:cNvPr id="13" name="Shape 11"/>
+          <p:cNvPr id="12" name="Shape 10"/>
           <p:cNvSpPr/>
           <p:nvPr/>
         </p:nvSpPr>
         <p:spPr>
           <a:xfrm>
-            <a:off x="777240" y="4206240"/>
-            <a:ext cx="10607040" cy="914400"/>
+            <a:off x="777240" y="4297680"/>
+            <a:ext cx="10607040" cy="1078992"/>
           </a:xfrm>
           <a:prstGeom prst="rect">
             <a:avLst/>
@@ -2554,20 +2782,59 @@
       </p:sp>
       <p:sp>
         <p:nvSpPr>
+          <p:cNvPr id="13" name="Text 11"/>
+          <p:cNvSpPr txBox="1"/>
+          <p:nvPr/>
+        </p:nvSpPr>
+        <p:spPr>
+          <a:xfrm>
+            <a:off x="1097280" y="4389120"/>
+            <a:ext cx="2969971" cy="896112"/>
+          </a:xfrm>
+          <a:prstGeom prst="rect">
+            <a:avLst/>
+          </a:prstGeom>
+          <a:noFill/>
+          <a:ln/>
+        </p:spPr>
+        <p:txBody>
+          <a:bodyPr wrap="square" lIns="0" tIns="0" rIns="0" bIns="0" rtlCol="0" anchor="ctr"/>
+          <a:lstStyle/>
+          <a:p>
+            <a:pPr indent="0" marL="0">
+              <a:buNone/>
+            </a:pPr>
+            <a:r>
+              <a:rPr lang="en-US" sz="1500" b="1" dirty="0">
+                <a:solidFill>
+                  <a:srgbClr val="23201D"/>
+                </a:solidFill>
+                <a:latin typeface="Yu Gothic" pitchFamily="34" charset="0"/>
+                <a:ea typeface="Yu Gothic" pitchFamily="34" charset="-122"/>
+                <a:cs typeface="Yu Gothic" pitchFamily="34" charset="-120"/>
+              </a:rPr>
+              <a:t>利用ルール</a:t>
+            </a:r>
+            <a:endParaRPr lang="en-US" sz="1500" dirty="0"/>
+          </a:p>
+        </p:txBody>
+      </p:sp>
+      <p:sp>
+        <p:nvSpPr>
           <p:cNvPr id="14" name="Shape 12"/>
           <p:cNvSpPr/>
           <p:nvPr/>
         </p:nvSpPr>
         <p:spPr>
           <a:xfrm>
-            <a:off x="777240" y="4206240"/>
-            <a:ext cx="54864" cy="914400"/>
+            <a:off x="4065422" y="4425696"/>
+            <a:ext cx="18288" cy="822960"/>
           </a:xfrm>
           <a:prstGeom prst="rect">
             <a:avLst/>
           </a:prstGeom>
           <a:solidFill>
-            <a:srgbClr val="3B6B4A"/>
+            <a:srgbClr val="EDE7DB"/>
           </a:solidFill>
           <a:ln w="12700">
             <a:solidFill>
@@ -2585,47 +2852,8 @@
         </p:nvSpPr>
         <p:spPr>
           <a:xfrm>
-            <a:off x="1143000" y="4279392"/>
-            <a:ext cx="2757830" cy="768096"/>
-          </a:xfrm>
-          <a:prstGeom prst="rect">
-            <a:avLst/>
-          </a:prstGeom>
-          <a:noFill/>
-          <a:ln/>
-        </p:spPr>
-        <p:txBody>
-          <a:bodyPr wrap="square" lIns="0" tIns="0" rIns="0" bIns="0" rtlCol="0" anchor="ctr"/>
-          <a:lstStyle/>
-          <a:p>
-            <a:pPr indent="0" marL="0">
-              <a:buNone/>
-            </a:pPr>
-            <a:r>
-              <a:rPr lang="en-US" sz="1400" b="1" dirty="0">
-                <a:solidFill>
-                  <a:srgbClr val="3B6B4A"/>
-                </a:solidFill>
-                <a:latin typeface="Yu Gothic" pitchFamily="34" charset="0"/>
-                <a:ea typeface="Yu Gothic" pitchFamily="34" charset="-122"/>
-                <a:cs typeface="Yu Gothic" pitchFamily="34" charset="-120"/>
-              </a:rPr>
-              <a:t>直すのは誰か</a:t>
-            </a:r>
-            <a:endParaRPr lang="en-US" sz="1400" dirty="0"/>
-          </a:p>
-        </p:txBody>
-      </p:sp>
-      <p:sp>
-        <p:nvSpPr>
-          <p:cNvPr id="16" name="Text 14"/>
-          <p:cNvSpPr txBox="1"/>
-          <p:nvPr/>
-        </p:nvSpPr>
-        <p:spPr>
-          <a:xfrm>
-            <a:off x="4006901" y="4279392"/>
-            <a:ext cx="7011619" cy="768096"/>
+            <a:off x="4383634" y="4389120"/>
+            <a:ext cx="6682435" cy="896112"/>
           </a:xfrm>
           <a:prstGeom prst="rect">
             <a:avLst/>
@@ -2646,15 +2874,54 @@
             <a:r>
               <a:rPr lang="en-US" sz="1250" dirty="0">
                 <a:solidFill>
-                  <a:srgbClr val="3F3933"/>
-                </a:solidFill>
-                <a:latin typeface="Yu Gothic" pitchFamily="34" charset="0"/>
-                <a:ea typeface="Yu Gothic" pitchFamily="34" charset="-122"/>
-                <a:cs typeface="Yu Gothic" pitchFamily="34" charset="-120"/>
-              </a:rPr>
-              <a:t>当面は社長。第11回で「作る人」を決めます</a:t>
+                  <a:srgbClr val="5A534A"/>
+                </a:solidFill>
+                <a:latin typeface="Yu Gothic" pitchFamily="34" charset="0"/>
+                <a:ea typeface="Yu Gothic" pitchFamily="34" charset="-122"/>
+                <a:cs typeface="Yu Gothic" pitchFamily="34" charset="-120"/>
+              </a:rPr>
+              <a:t>A4一枚・5項目まで。増やすと読まれず、読まれないルールは無いのと同じです</a:t>
             </a:r>
             <a:endParaRPr lang="en-US" sz="1250" dirty="0"/>
+          </a:p>
+        </p:txBody>
+      </p:sp>
+      <p:sp>
+        <p:nvSpPr>
+          <p:cNvPr id="16" name="Text 14"/>
+          <p:cNvSpPr txBox="1"/>
+          <p:nvPr/>
+        </p:nvSpPr>
+        <p:spPr>
+          <a:xfrm>
+            <a:off x="777240" y="5623560"/>
+            <a:ext cx="10607040" cy="411480"/>
+          </a:xfrm>
+          <a:prstGeom prst="rect">
+            <a:avLst/>
+          </a:prstGeom>
+          <a:noFill/>
+          <a:ln/>
+        </p:spPr>
+        <p:txBody>
+          <a:bodyPr wrap="square" lIns="0" tIns="0" rIns="0" bIns="0" rtlCol="0" anchor="ctr"/>
+          <a:lstStyle/>
+          <a:p>
+            <a:pPr indent="0" marL="0">
+              <a:buNone/>
+            </a:pPr>
+            <a:r>
+              <a:rPr lang="en-US" sz="1150" dirty="0">
+                <a:solidFill>
+                  <a:srgbClr val="8A8177"/>
+                </a:solidFill>
+                <a:latin typeface="Yu Gothic" pitchFamily="34" charset="0"/>
+                <a:ea typeface="Yu Gothic" pitchFamily="34" charset="-122"/>
+                <a:cs typeface="Yu Gothic" pitchFamily="34" charset="-120"/>
+              </a:rPr>
+              <a:t>配布した用語辞典にも同じものが載っています。覚える必要はありません。</a:t>
+            </a:r>
+            <a:endParaRPr lang="en-US" sz="1150" dirty="0"/>
           </a:p>
         </p:txBody>
       </p:sp>
@@ -2730,7 +2997,7 @@
                 <a:ea typeface="Yu Gothic" pitchFamily="34" charset="-122"/>
                 <a:cs typeface="Yu Gothic" pitchFamily="34" charset="-120"/>
               </a:rPr>
-              <a:t>組み込み</a:t>
+              <a:t>用語</a:t>
             </a:r>
             <a:endParaRPr lang="en-US" sz="900" dirty="0"/>
           </a:p>
@@ -2795,13 +3062,13 @@
             <a:r>
               <a:rPr lang="en-US" sz="1100" b="1" spc="250" kern="0" dirty="0">
                 <a:solidFill>
-                  <a:srgbClr val="B04A2F"/>
-                </a:solidFill>
-                <a:latin typeface="Yu Gothic" pitchFamily="34" charset="0"/>
-                <a:ea typeface="Yu Gothic" pitchFamily="34" charset="-122"/>
-                <a:cs typeface="Yu Gothic" pitchFamily="34" charset="-120"/>
-              </a:rPr>
-              <a:t>ここだけは</a:t>
+                  <a:srgbClr val="2F4F6B"/>
+                </a:solidFill>
+                <a:latin typeface="Yu Gothic" pitchFamily="34" charset="0"/>
+                <a:ea typeface="Yu Gothic" pitchFamily="34" charset="-122"/>
+                <a:cs typeface="Yu Gothic" pitchFamily="34" charset="-120"/>
+              </a:rPr>
+              <a:t>演習</a:t>
             </a:r>
             <a:endParaRPr lang="en-US" sz="1100" dirty="0"/>
           </a:p>
@@ -2815,7 +3082,7 @@
         </p:nvSpPr>
         <p:spPr>
           <a:xfrm>
-            <a:off x="777240" y="1097280"/>
+            <a:off x="777240" y="896112"/>
             <a:ext cx="10607040" cy="640080"/>
           </a:xfrm>
           <a:prstGeom prst="rect">
@@ -2840,7 +3107,7 @@
                 <a:ea typeface="Yu Gothic" pitchFamily="34" charset="-122"/>
                 <a:cs typeface="Yu Gothic" pitchFamily="34" charset="-120"/>
               </a:rPr>
-              <a:t>動かないまま持ち帰らせません</a:t>
+              <a:t>今日、一緒にやること</a:t>
             </a:r>
             <a:endParaRPr lang="en-US" sz="2600" dirty="0"/>
           </a:p>
@@ -2848,20 +3115,84 @@
       </p:sp>
       <p:sp>
         <p:nvSpPr>
-          <p:cNvPr id="4" name="Shape 2"/>
+          <p:cNvPr id="4" name="Text 2"/>
+          <p:cNvSpPr txBox="1"/>
+          <p:nvPr/>
+        </p:nvSpPr>
+        <p:spPr>
+          <a:xfrm>
+            <a:off x="777240" y="1572768"/>
+            <a:ext cx="10607040" cy="320040"/>
+          </a:xfrm>
+          <a:prstGeom prst="rect">
+            <a:avLst/>
+          </a:prstGeom>
+          <a:noFill/>
+          <a:ln/>
+        </p:spPr>
+        <p:txBody>
+          <a:bodyPr wrap="square" lIns="0" tIns="0" rIns="0" bIns="0" rtlCol="0" anchor="ctr"/>
+          <a:lstStyle/>
+          <a:p>
+            <a:pPr indent="0" marL="0">
+              <a:buNone/>
+            </a:pPr>
+            <a:r>
+              <a:rPr lang="en-US" sz="1250" b="1" dirty="0">
+                <a:solidFill>
+                  <a:srgbClr val="2F4F6B"/>
+                </a:solidFill>
+                <a:latin typeface="Yu Gothic" pitchFamily="34" charset="0"/>
+                <a:ea typeface="Yu Gothic" pitchFamily="34" charset="-122"/>
+                <a:cs typeface="Yu Gothic" pitchFamily="34" charset="-120"/>
+              </a:rPr>
+              <a:t>55分。操作するのはご自身です。</a:t>
+            </a:r>
+            <a:endParaRPr lang="en-US" sz="1250" dirty="0"/>
+          </a:p>
+        </p:txBody>
+      </p:sp>
+      <p:sp>
+        <p:nvSpPr>
+          <p:cNvPr id="5" name="Shape 3"/>
           <p:cNvSpPr/>
           <p:nvPr/>
         </p:nvSpPr>
         <p:spPr>
           <a:xfrm>
             <a:off x="777240" y="2148840"/>
-            <a:ext cx="64008" cy="2194560"/>
+            <a:ext cx="3383280" cy="2880360"/>
           </a:xfrm>
           <a:prstGeom prst="rect">
             <a:avLst/>
           </a:prstGeom>
           <a:solidFill>
-            <a:srgbClr val="B04A2F"/>
+            <a:srgbClr val="FFFFFF"/>
+          </a:solidFill>
+          <a:ln w="12700">
+            <a:solidFill>
+              <a:srgbClr val="EDE7DB"/>
+            </a:solidFill>
+            <a:prstDash val="solid"/>
+          </a:ln>
+        </p:spPr>
+      </p:sp>
+      <p:sp>
+        <p:nvSpPr>
+          <p:cNvPr id="6" name="Shape 4"/>
+          <p:cNvSpPr/>
+          <p:nvPr/>
+        </p:nvSpPr>
+        <p:spPr>
+          <a:xfrm>
+            <a:off x="1051560" y="2395728"/>
+            <a:ext cx="438912" cy="438912"/>
+          </a:xfrm>
+          <a:prstGeom prst="ellipse">
+            <a:avLst/>
+          </a:prstGeom>
+          <a:solidFill>
+            <a:srgbClr val="2F4F6B"/>
           </a:solidFill>
           <a:ln w="12700">
             <a:solidFill>
@@ -2873,14 +3204,53 @@
       </p:sp>
       <p:sp>
         <p:nvSpPr>
-          <p:cNvPr id="5" name="Text 3"/>
-          <p:cNvSpPr txBox="1"/>
-          <p:nvPr/>
-        </p:nvSpPr>
-        <p:spPr>
-          <a:xfrm>
-            <a:off x="1188720" y="2148840"/>
-            <a:ext cx="9966960" cy="2194560"/>
+          <p:cNvPr id="7" name="Text 5"/>
+          <p:cNvSpPr txBox="1"/>
+          <p:nvPr/>
+        </p:nvSpPr>
+        <p:spPr>
+          <a:xfrm>
+            <a:off x="1051560" y="2395728"/>
+            <a:ext cx="438912" cy="438912"/>
+          </a:xfrm>
+          <a:prstGeom prst="rect">
+            <a:avLst/>
+          </a:prstGeom>
+          <a:noFill/>
+          <a:ln/>
+        </p:spPr>
+        <p:txBody>
+          <a:bodyPr wrap="square" lIns="0" tIns="0" rIns="0" bIns="0" rtlCol="0" anchor="ctr"/>
+          <a:lstStyle/>
+          <a:p>
+            <a:pPr algn="ctr" indent="0" marL="0">
+              <a:buNone/>
+            </a:pPr>
+            <a:r>
+              <a:rPr lang="en-US" sz="1300" b="1" dirty="0">
+                <a:solidFill>
+                  <a:srgbClr val="FFFFFF"/>
+                </a:solidFill>
+                <a:latin typeface="Yu Gothic" pitchFamily="34" charset="0"/>
+                <a:ea typeface="Yu Gothic" pitchFamily="34" charset="-122"/>
+                <a:cs typeface="Yu Gothic" pitchFamily="34" charset="-120"/>
+              </a:rPr>
+              <a:t>1</a:t>
+            </a:r>
+            <a:endParaRPr lang="en-US" sz="1300" dirty="0"/>
+          </a:p>
+        </p:txBody>
+      </p:sp>
+      <p:sp>
+        <p:nvSpPr>
+          <p:cNvPr id="8" name="Text 6"/>
+          <p:cNvSpPr txBox="1"/>
+          <p:nvPr/>
+        </p:nvSpPr>
+        <p:spPr>
+          <a:xfrm>
+            <a:off x="1051560" y="2944368"/>
+            <a:ext cx="2834640" cy="731520"/>
           </a:xfrm>
           <a:prstGeom prst="rect">
             <a:avLst/>
@@ -2894,41 +3264,108 @@
           <a:p>
             <a:pPr indent="0" marL="0">
               <a:lnSpc>
-                <a:spcPct val="160000"/>
+                <a:spcPct val="125000"/>
               </a:lnSpc>
               <a:buNone/>
             </a:pPr>
             <a:r>
-              <a:rPr lang="en-US" sz="1650" dirty="0">
-                <a:solidFill>
-                  <a:srgbClr val="3F3933"/>
-                </a:solidFill>
-                <a:latin typeface="Yu Gothic" pitchFamily="34" charset="0"/>
-                <a:ea typeface="Yu Gothic" pitchFamily="34" charset="-122"/>
-                <a:cs typeface="Yu Gothic" pitchFamily="34" charset="-120"/>
-              </a:rPr>
-              <a:t>時間が足りなければ、次回の冒頭に持ち越してでも、実データで動くところまでやりきります。「持ち帰って試します」は、ほぼ試されません。ここだけは絶対に妥協しないでください。</a:t>
-            </a:r>
-            <a:endParaRPr lang="en-US" sz="1650" dirty="0"/>
-          </a:p>
-        </p:txBody>
-      </p:sp>
-      <p:sp>
-        <p:nvSpPr>
-          <p:cNvPr id="6" name="Shape 4"/>
+              <a:rPr lang="en-US" sz="1450" b="1" dirty="0">
+                <a:solidFill>
+                  <a:srgbClr val="23201D"/>
+                </a:solidFill>
+                <a:latin typeface="Yu Gothic" pitchFamily="34" charset="0"/>
+                <a:ea typeface="Yu Gothic" pitchFamily="34" charset="-122"/>
+                <a:cs typeface="Yu Gothic" pitchFamily="34" charset="-120"/>
+              </a:rPr>
+              <a:t>専用AIを1つ作る</a:t>
+            </a:r>
+            <a:endParaRPr lang="en-US" sz="1450" dirty="0"/>
+          </a:p>
+        </p:txBody>
+      </p:sp>
+      <p:sp>
+        <p:nvSpPr>
+          <p:cNvPr id="9" name="Text 7"/>
+          <p:cNvSpPr txBox="1"/>
+          <p:nvPr/>
+        </p:nvSpPr>
+        <p:spPr>
+          <a:xfrm>
+            <a:off x="1051560" y="3703320"/>
+            <a:ext cx="2834640" cy="1188720"/>
+          </a:xfrm>
+          <a:prstGeom prst="rect">
+            <a:avLst/>
+          </a:prstGeom>
+          <a:noFill/>
+          <a:ln/>
+        </p:spPr>
+        <p:txBody>
+          <a:bodyPr wrap="square" lIns="0" tIns="0" rIns="0" bIns="0" rtlCol="0" anchor="ctr"/>
+          <a:lstStyle/>
+          <a:p>
+            <a:pPr indent="0" marL="0">
+              <a:lnSpc>
+                <a:spcPct val="130000"/>
+              </a:lnSpc>
+              <a:buNone/>
+            </a:pPr>
+            <a:r>
+              <a:rPr lang="en-US" sz="1150" dirty="0">
+                <a:solidFill>
+                  <a:srgbClr val="5A534A"/>
+                </a:solidFill>
+                <a:latin typeface="Yu Gothic" pitchFamily="34" charset="0"/>
+                <a:ea typeface="Yu Gothic" pitchFamily="34" charset="-122"/>
+                <a:cs typeface="Yu Gothic" pitchFamily="34" charset="-120"/>
+              </a:rPr>
+              <a:t>載せる資料は3本で十分。まず動かすことを優先します</a:t>
+            </a:r>
+            <a:endParaRPr lang="en-US" sz="1150" dirty="0"/>
+          </a:p>
+        </p:txBody>
+      </p:sp>
+      <p:sp>
+        <p:nvSpPr>
+          <p:cNvPr id="10" name="Shape 8"/>
           <p:cNvSpPr/>
           <p:nvPr/>
         </p:nvSpPr>
         <p:spPr>
           <a:xfrm>
-            <a:off x="777240" y="4709160"/>
-            <a:ext cx="10607040" cy="960120"/>
+            <a:off x="4389120" y="2148840"/>
+            <a:ext cx="3383280" cy="2880360"/>
           </a:xfrm>
           <a:prstGeom prst="rect">
             <a:avLst/>
           </a:prstGeom>
           <a:solidFill>
-            <a:srgbClr val="EDE7DB"/>
+            <a:srgbClr val="FFFFFF"/>
+          </a:solidFill>
+          <a:ln w="12700">
+            <a:solidFill>
+              <a:srgbClr val="EDE7DB"/>
+            </a:solidFill>
+            <a:prstDash val="solid"/>
+          </a:ln>
+        </p:spPr>
+      </p:sp>
+      <p:sp>
+        <p:nvSpPr>
+          <p:cNvPr id="11" name="Shape 9"/>
+          <p:cNvSpPr/>
+          <p:nvPr/>
+        </p:nvSpPr>
+        <p:spPr>
+          <a:xfrm>
+            <a:off x="4663440" y="2395728"/>
+            <a:ext cx="438912" cy="438912"/>
+          </a:xfrm>
+          <a:prstGeom prst="ellipse">
+            <a:avLst/>
+          </a:prstGeom>
+          <a:solidFill>
+            <a:srgbClr val="2F4F6B"/>
           </a:solidFill>
           <a:ln w="12700">
             <a:solidFill>
@@ -2940,53 +3377,95 @@
       </p:sp>
       <p:sp>
         <p:nvSpPr>
-          <p:cNvPr id="7" name="Text 5"/>
-          <p:cNvSpPr txBox="1"/>
-          <p:nvPr/>
-        </p:nvSpPr>
-        <p:spPr>
-          <a:xfrm>
-            <a:off x="1051560" y="4800600"/>
-            <a:ext cx="1463040" cy="256032"/>
-          </a:xfrm>
-          <a:prstGeom prst="rect">
-            <a:avLst/>
-          </a:prstGeom>
-          <a:noFill/>
-          <a:ln/>
-        </p:spPr>
-        <p:txBody>
-          <a:bodyPr wrap="square" lIns="0" tIns="0" rIns="0" bIns="0" rtlCol="0" anchor="ctr"/>
-          <a:lstStyle/>
-          <a:p>
-            <a:pPr indent="0" marL="0">
-              <a:buNone/>
-            </a:pPr>
-            <a:r>
-              <a:rPr lang="en-US" sz="900" b="1" spc="150" kern="0" dirty="0">
-                <a:solidFill>
-                  <a:srgbClr val="B04A2F"/>
-                </a:solidFill>
-                <a:latin typeface="Yu Gothic" pitchFamily="34" charset="0"/>
-                <a:ea typeface="Yu Gothic" pitchFamily="34" charset="-122"/>
-                <a:cs typeface="Yu Gothic" pitchFamily="34" charset="-120"/>
-              </a:rPr>
-              <a:t>他社では</a:t>
-            </a:r>
-            <a:endParaRPr lang="en-US" sz="900" dirty="0"/>
-          </a:p>
-        </p:txBody>
-      </p:sp>
-      <p:sp>
-        <p:nvSpPr>
-          <p:cNvPr id="8" name="Text 6"/>
-          <p:cNvSpPr txBox="1"/>
-          <p:nvPr/>
-        </p:nvSpPr>
-        <p:spPr>
-          <a:xfrm>
-            <a:off x="1051560" y="5029200"/>
-            <a:ext cx="10058400" cy="566928"/>
+          <p:cNvPr id="12" name="Text 10"/>
+          <p:cNvSpPr txBox="1"/>
+          <p:nvPr/>
+        </p:nvSpPr>
+        <p:spPr>
+          <a:xfrm>
+            <a:off x="4663440" y="2395728"/>
+            <a:ext cx="438912" cy="438912"/>
+          </a:xfrm>
+          <a:prstGeom prst="rect">
+            <a:avLst/>
+          </a:prstGeom>
+          <a:noFill/>
+          <a:ln/>
+        </p:spPr>
+        <p:txBody>
+          <a:bodyPr wrap="square" lIns="0" tIns="0" rIns="0" bIns="0" rtlCol="0" anchor="ctr"/>
+          <a:lstStyle/>
+          <a:p>
+            <a:pPr algn="ctr" indent="0" marL="0">
+              <a:buNone/>
+            </a:pPr>
+            <a:r>
+              <a:rPr lang="en-US" sz="1300" b="1" dirty="0">
+                <a:solidFill>
+                  <a:srgbClr val="FFFFFF"/>
+                </a:solidFill>
+                <a:latin typeface="Yu Gothic" pitchFamily="34" charset="0"/>
+                <a:ea typeface="Yu Gothic" pitchFamily="34" charset="-122"/>
+                <a:cs typeface="Yu Gothic" pitchFamily="34" charset="-120"/>
+              </a:rPr>
+              <a:t>2</a:t>
+            </a:r>
+            <a:endParaRPr lang="en-US" sz="1300" dirty="0"/>
+          </a:p>
+        </p:txBody>
+      </p:sp>
+      <p:sp>
+        <p:nvSpPr>
+          <p:cNvPr id="13" name="Text 11"/>
+          <p:cNvSpPr txBox="1"/>
+          <p:nvPr/>
+        </p:nvSpPr>
+        <p:spPr>
+          <a:xfrm>
+            <a:off x="4663440" y="2944368"/>
+            <a:ext cx="2834640" cy="731520"/>
+          </a:xfrm>
+          <a:prstGeom prst="rect">
+            <a:avLst/>
+          </a:prstGeom>
+          <a:noFill/>
+          <a:ln/>
+        </p:spPr>
+        <p:txBody>
+          <a:bodyPr wrap="square" lIns="0" tIns="0" rIns="0" bIns="0" rtlCol="0" anchor="ctr"/>
+          <a:lstStyle/>
+          <a:p>
+            <a:pPr indent="0" marL="0">
+              <a:lnSpc>
+                <a:spcPct val="125000"/>
+              </a:lnSpc>
+              <a:buNone/>
+            </a:pPr>
+            <a:r>
+              <a:rPr lang="en-US" sz="1450" b="1" dirty="0">
+                <a:solidFill>
+                  <a:srgbClr val="23201D"/>
+                </a:solidFill>
+                <a:latin typeface="Yu Gothic" pitchFamily="34" charset="0"/>
+                <a:ea typeface="Yu Gothic" pitchFamily="34" charset="-122"/>
+                <a:cs typeface="Yu Gothic" pitchFamily="34" charset="-120"/>
+              </a:rPr>
+              <a:t>実データで動かす</a:t>
+            </a:r>
+            <a:endParaRPr lang="en-US" sz="1450" dirty="0"/>
+          </a:p>
+        </p:txBody>
+      </p:sp>
+      <p:sp>
+        <p:nvSpPr>
+          <p:cNvPr id="14" name="Text 12"/>
+          <p:cNvSpPr txBox="1"/>
+          <p:nvPr/>
+        </p:nvSpPr>
+        <p:spPr>
+          <a:xfrm>
+            <a:off x="4663440" y="3703320"/>
+            <a:ext cx="2834640" cy="1188720"/>
           </a:xfrm>
           <a:prstGeom prst="rect">
             <a:avLst/>
@@ -3005,23 +3484,196 @@
               <a:buNone/>
             </a:pPr>
             <a:r>
-              <a:rPr lang="en-US" sz="1250" dirty="0">
-                <a:solidFill>
-                  <a:srgbClr val="3F3933"/>
-                </a:solidFill>
-                <a:latin typeface="Yu Gothic" pitchFamily="34" charset="0"/>
-                <a:ea typeface="Yu Gothic" pitchFamily="34" charset="-122"/>
-                <a:cs typeface="Yu Gothic" pitchFamily="34" charset="-120"/>
-              </a:rPr>
-              <a:t>就業規則を載せた社内問い合わせAIを作った会社では、総務への質問が減ったこと以上に、「規則に書いていないこと」が可視化されたのが収穫でした。結果として規則の改訂につながりました。</a:t>
-            </a:r>
-            <a:endParaRPr lang="en-US" sz="1250" dirty="0"/>
-          </a:p>
-        </p:txBody>
-      </p:sp>
-      <p:sp>
-        <p:nvSpPr>
-          <p:cNvPr id="9" name="Text 7"/>
+              <a:rPr lang="en-US" sz="1150" dirty="0">
+                <a:solidFill>
+                  <a:srgbClr val="5A534A"/>
+                </a:solidFill>
+                <a:latin typeface="Yu Gothic" pitchFamily="34" charset="0"/>
+                <a:ea typeface="Yu Gothic" pitchFamily="34" charset="-122"/>
+                <a:cs typeface="Yu Gothic" pitchFamily="34" charset="-120"/>
+              </a:rPr>
+              <a:t>実際の案件を投げて、出力を見ながら指示文を直します</a:t>
+            </a:r>
+            <a:endParaRPr lang="en-US" sz="1150" dirty="0"/>
+          </a:p>
+        </p:txBody>
+      </p:sp>
+      <p:sp>
+        <p:nvSpPr>
+          <p:cNvPr id="15" name="Shape 13"/>
+          <p:cNvSpPr/>
+          <p:nvPr/>
+        </p:nvSpPr>
+        <p:spPr>
+          <a:xfrm>
+            <a:off x="8001000" y="2148840"/>
+            <a:ext cx="3383280" cy="2880360"/>
+          </a:xfrm>
+          <a:prstGeom prst="rect">
+            <a:avLst/>
+          </a:prstGeom>
+          <a:solidFill>
+            <a:srgbClr val="FFFFFF"/>
+          </a:solidFill>
+          <a:ln w="12700">
+            <a:solidFill>
+              <a:srgbClr val="EDE7DB"/>
+            </a:solidFill>
+            <a:prstDash val="solid"/>
+          </a:ln>
+        </p:spPr>
+      </p:sp>
+      <p:sp>
+        <p:nvSpPr>
+          <p:cNvPr id="16" name="Shape 14"/>
+          <p:cNvSpPr/>
+          <p:nvPr/>
+        </p:nvSpPr>
+        <p:spPr>
+          <a:xfrm>
+            <a:off x="8275320" y="2395728"/>
+            <a:ext cx="438912" cy="438912"/>
+          </a:xfrm>
+          <a:prstGeom prst="ellipse">
+            <a:avLst/>
+          </a:prstGeom>
+          <a:solidFill>
+            <a:srgbClr val="2F4F6B"/>
+          </a:solidFill>
+          <a:ln w="12700">
+            <a:solidFill>
+              <a:srgbClr val="333333"/>
+            </a:solidFill>
+            <a:prstDash val="solid"/>
+          </a:ln>
+        </p:spPr>
+      </p:sp>
+      <p:sp>
+        <p:nvSpPr>
+          <p:cNvPr id="17" name="Text 15"/>
+          <p:cNvSpPr txBox="1"/>
+          <p:nvPr/>
+        </p:nvSpPr>
+        <p:spPr>
+          <a:xfrm>
+            <a:off x="8275320" y="2395728"/>
+            <a:ext cx="438912" cy="438912"/>
+          </a:xfrm>
+          <a:prstGeom prst="rect">
+            <a:avLst/>
+          </a:prstGeom>
+          <a:noFill/>
+          <a:ln/>
+        </p:spPr>
+        <p:txBody>
+          <a:bodyPr wrap="square" lIns="0" tIns="0" rIns="0" bIns="0" rtlCol="0" anchor="ctr"/>
+          <a:lstStyle/>
+          <a:p>
+            <a:pPr algn="ctr" indent="0" marL="0">
+              <a:buNone/>
+            </a:pPr>
+            <a:r>
+              <a:rPr lang="en-US" sz="1300" b="1" dirty="0">
+                <a:solidFill>
+                  <a:srgbClr val="FFFFFF"/>
+                </a:solidFill>
+                <a:latin typeface="Yu Gothic" pitchFamily="34" charset="0"/>
+                <a:ea typeface="Yu Gothic" pitchFamily="34" charset="-122"/>
+                <a:cs typeface="Yu Gothic" pitchFamily="34" charset="-120"/>
+              </a:rPr>
+              <a:t>3</a:t>
+            </a:r>
+            <a:endParaRPr lang="en-US" sz="1300" dirty="0"/>
+          </a:p>
+        </p:txBody>
+      </p:sp>
+      <p:sp>
+        <p:nvSpPr>
+          <p:cNvPr id="18" name="Text 16"/>
+          <p:cNvSpPr txBox="1"/>
+          <p:nvPr/>
+        </p:nvSpPr>
+        <p:spPr>
+          <a:xfrm>
+            <a:off x="8275320" y="2944368"/>
+            <a:ext cx="2834640" cy="731520"/>
+          </a:xfrm>
+          <a:prstGeom prst="rect">
+            <a:avLst/>
+          </a:prstGeom>
+          <a:noFill/>
+          <a:ln/>
+        </p:spPr>
+        <p:txBody>
+          <a:bodyPr wrap="square" lIns="0" tIns="0" rIns="0" bIns="0" rtlCol="0" anchor="ctr"/>
+          <a:lstStyle/>
+          <a:p>
+            <a:pPr indent="0" marL="0">
+              <a:lnSpc>
+                <a:spcPct val="125000"/>
+              </a:lnSpc>
+              <a:buNone/>
+            </a:pPr>
+            <a:r>
+              <a:rPr lang="en-US" sz="1450" b="1" dirty="0">
+                <a:solidFill>
+                  <a:srgbClr val="23201D"/>
+                </a:solidFill>
+                <a:latin typeface="Yu Gothic" pitchFamily="34" charset="0"/>
+                <a:ea typeface="Yu Gothic" pitchFamily="34" charset="-122"/>
+                <a:cs typeface="Yu Gothic" pitchFamily="34" charset="-120"/>
+              </a:rPr>
+              <a:t>利用ルールをA4一枚で書く</a:t>
+            </a:r>
+            <a:endParaRPr lang="en-US" sz="1450" dirty="0"/>
+          </a:p>
+        </p:txBody>
+      </p:sp>
+      <p:sp>
+        <p:nvSpPr>
+          <p:cNvPr id="19" name="Text 17"/>
+          <p:cNvSpPr txBox="1"/>
+          <p:nvPr/>
+        </p:nvSpPr>
+        <p:spPr>
+          <a:xfrm>
+            <a:off x="8275320" y="3703320"/>
+            <a:ext cx="2834640" cy="1188720"/>
+          </a:xfrm>
+          <a:prstGeom prst="rect">
+            <a:avLst/>
+          </a:prstGeom>
+          <a:noFill/>
+          <a:ln/>
+        </p:spPr>
+        <p:txBody>
+          <a:bodyPr wrap="square" lIns="0" tIns="0" rIns="0" bIns="0" rtlCol="0" anchor="ctr"/>
+          <a:lstStyle/>
+          <a:p>
+            <a:pPr indent="0" marL="0">
+              <a:lnSpc>
+                <a:spcPct val="130000"/>
+              </a:lnSpc>
+              <a:buNone/>
+            </a:pPr>
+            <a:r>
+              <a:rPr lang="en-US" sz="1150" dirty="0">
+                <a:solidFill>
+                  <a:srgbClr val="5A534A"/>
+                </a:solidFill>
+                <a:latin typeface="Yu Gothic" pitchFamily="34" charset="0"/>
+                <a:ea typeface="Yu Gothic" pitchFamily="34" charset="-122"/>
+                <a:cs typeface="Yu Gothic" pitchFamily="34" charset="-120"/>
+              </a:rPr>
+              <a:t>使ってよいAI／入れてはいけない情報／確認責任／相談先／見直し時期</a:t>
+            </a:r>
+            <a:endParaRPr lang="en-US" sz="1150" dirty="0"/>
+          </a:p>
+        </p:txBody>
+      </p:sp>
+      <p:sp>
+        <p:nvSpPr>
+          <p:cNvPr id="20" name="Text 18"/>
           <p:cNvSpPr txBox="1"/>
           <p:nvPr/>
         </p:nvSpPr>
@@ -3060,7 +3712,7 @@
       </p:sp>
       <p:sp>
         <p:nvSpPr>
-          <p:cNvPr id="10" name="Text 8"/>
+          <p:cNvPr id="21" name="Text 19"/>
           <p:cNvSpPr txBox="1"/>
           <p:nvPr/>
         </p:nvSpPr>
@@ -3091,7 +3743,7 @@
                 <a:ea typeface="Yu Gothic" pitchFamily="34" charset="-122"/>
                 <a:cs typeface="Yu Gothic" pitchFamily="34" charset="-120"/>
               </a:rPr>
-              <a:t>ここだけは</a:t>
+              <a:t>演習</a:t>
             </a:r>
             <a:endParaRPr lang="en-US" sz="900" dirty="0"/>
           </a:p>
@@ -3108,6 +3760,1532 @@
 <file path=ppt/slides/slide12.xml><?xml version="1.0" encoding="utf-8"?>
 <p:sld xmlns:a="http://schemas.openxmlformats.org/drawingml/2006/main" xmlns:r="http://schemas.openxmlformats.org/officeDocument/2006/relationships" xmlns:p="http://schemas.openxmlformats.org/presentationml/2006/main">
   <p:cSld name="Slide 12">
+    <p:bg>
+      <p:bgPr>
+        <a:solidFill>
+          <a:srgbClr val="F6F2EA"/>
+        </a:solidFill>
+      </p:bgPr>
+    </p:bg>
+    <p:spTree>
+      <p:nvGrpSpPr>
+        <p:cNvPr id="1" name=""/>
+        <p:cNvGrpSpPr/>
+        <p:nvPr/>
+      </p:nvGrpSpPr>
+      <p:grpSpPr>
+        <a:xfrm>
+          <a:off x="0" y="0"/>
+          <a:ext cx="0" cy="0"/>
+          <a:chOff x="0" y="0"/>
+          <a:chExt cx="0" cy="0"/>
+        </a:xfrm>
+      </p:grpSpPr>
+      <p:sp>
+        <p:nvSpPr>
+          <p:cNvPr id="2" name="Text 0"/>
+          <p:cNvSpPr txBox="1"/>
+          <p:nvPr/>
+        </p:nvSpPr>
+        <p:spPr>
+          <a:xfrm>
+            <a:off x="777240" y="566928"/>
+            <a:ext cx="10607040" cy="274320"/>
+          </a:xfrm>
+          <a:prstGeom prst="rect">
+            <a:avLst/>
+          </a:prstGeom>
+          <a:noFill/>
+          <a:ln/>
+        </p:spPr>
+        <p:txBody>
+          <a:bodyPr wrap="square" lIns="0" tIns="0" rIns="0" bIns="0" rtlCol="0" anchor="ctr"/>
+          <a:lstStyle/>
+          <a:p>
+            <a:pPr indent="0" marL="0">
+              <a:buNone/>
+            </a:pPr>
+            <a:r>
+              <a:rPr lang="en-US" sz="1100" b="1" spc="250" kern="0" dirty="0">
+                <a:solidFill>
+                  <a:srgbClr val="3B6B4A"/>
+                </a:solidFill>
+                <a:latin typeface="Yu Gothic" pitchFamily="34" charset="0"/>
+                <a:ea typeface="Yu Gothic" pitchFamily="34" charset="-122"/>
+                <a:cs typeface="Yu Gothic" pitchFamily="34" charset="-120"/>
+              </a:rPr>
+              <a:t>業務への組み込み</a:t>
+            </a:r>
+            <a:endParaRPr lang="en-US" sz="1100" dirty="0"/>
+          </a:p>
+        </p:txBody>
+      </p:sp>
+      <p:sp>
+        <p:nvSpPr>
+          <p:cNvPr id="3" name="Text 1"/>
+          <p:cNvSpPr txBox="1"/>
+          <p:nvPr/>
+        </p:nvSpPr>
+        <p:spPr>
+          <a:xfrm>
+            <a:off x="777240" y="896112"/>
+            <a:ext cx="10607040" cy="640080"/>
+          </a:xfrm>
+          <a:prstGeom prst="rect">
+            <a:avLst/>
+          </a:prstGeom>
+          <a:noFill/>
+          <a:ln/>
+        </p:spPr>
+        <p:txBody>
+          <a:bodyPr wrap="square" lIns="0" tIns="0" rIns="0" bIns="0" rtlCol="0" anchor="ctr"/>
+          <a:lstStyle/>
+          <a:p>
+            <a:pPr indent="0" marL="0">
+              <a:buNone/>
+            </a:pPr>
+            <a:r>
+              <a:rPr lang="en-US" sz="2600" b="1" dirty="0">
+                <a:solidFill>
+                  <a:srgbClr val="23201D"/>
+                </a:solidFill>
+                <a:latin typeface="Yu Gothic" pitchFamily="34" charset="0"/>
+                <a:ea typeface="Yu Gothic" pitchFamily="34" charset="-122"/>
+                <a:cs typeface="Yu Gothic" pitchFamily="34" charset="-120"/>
+              </a:rPr>
+              <a:t>帰る前に決めること</a:t>
+            </a:r>
+            <a:endParaRPr lang="en-US" sz="2600" dirty="0"/>
+          </a:p>
+        </p:txBody>
+      </p:sp>
+      <p:sp>
+        <p:nvSpPr>
+          <p:cNvPr id="4" name="Text 2"/>
+          <p:cNvSpPr txBox="1"/>
+          <p:nvPr/>
+        </p:nvSpPr>
+        <p:spPr>
+          <a:xfrm>
+            <a:off x="777240" y="1572768"/>
+            <a:ext cx="10607040" cy="320040"/>
+          </a:xfrm>
+          <a:prstGeom prst="rect">
+            <a:avLst/>
+          </a:prstGeom>
+          <a:noFill/>
+          <a:ln/>
+        </p:spPr>
+        <p:txBody>
+          <a:bodyPr wrap="square" lIns="0" tIns="0" rIns="0" bIns="0" rtlCol="0" anchor="ctr"/>
+          <a:lstStyle/>
+          <a:p>
+            <a:pPr indent="0" marL="0">
+              <a:buNone/>
+            </a:pPr>
+            <a:r>
+              <a:rPr lang="en-US" sz="1250" b="1" dirty="0">
+                <a:solidFill>
+                  <a:srgbClr val="3B6B4A"/>
+                </a:solidFill>
+                <a:latin typeface="Yu Gothic" pitchFamily="34" charset="0"/>
+                <a:ea typeface="Yu Gothic" pitchFamily="34" charset="-122"/>
+                <a:cs typeface="Yu Gothic" pitchFamily="34" charset="-120"/>
+              </a:rPr>
+              <a:t>ここを決めないと、持ち帰っても使われません。紙に書きます。</a:t>
+            </a:r>
+            <a:endParaRPr lang="en-US" sz="1250" dirty="0"/>
+          </a:p>
+        </p:txBody>
+      </p:sp>
+      <p:sp>
+        <p:nvSpPr>
+          <p:cNvPr id="5" name="Shape 3"/>
+          <p:cNvSpPr/>
+          <p:nvPr/>
+        </p:nvSpPr>
+        <p:spPr>
+          <a:xfrm>
+            <a:off x="777240" y="2103120"/>
+            <a:ext cx="10607040" cy="914400"/>
+          </a:xfrm>
+          <a:prstGeom prst="rect">
+            <a:avLst/>
+          </a:prstGeom>
+          <a:solidFill>
+            <a:srgbClr val="FFFFFF"/>
+          </a:solidFill>
+          <a:ln w="12700">
+            <a:solidFill>
+              <a:srgbClr val="EDE7DB"/>
+            </a:solidFill>
+            <a:prstDash val="solid"/>
+          </a:ln>
+        </p:spPr>
+      </p:sp>
+      <p:sp>
+        <p:nvSpPr>
+          <p:cNvPr id="6" name="Shape 4"/>
+          <p:cNvSpPr/>
+          <p:nvPr/>
+        </p:nvSpPr>
+        <p:spPr>
+          <a:xfrm>
+            <a:off x="777240" y="2103120"/>
+            <a:ext cx="54864" cy="914400"/>
+          </a:xfrm>
+          <a:prstGeom prst="rect">
+            <a:avLst/>
+          </a:prstGeom>
+          <a:solidFill>
+            <a:srgbClr val="3B6B4A"/>
+          </a:solidFill>
+          <a:ln w="12700">
+            <a:solidFill>
+              <a:srgbClr val="333333"/>
+            </a:solidFill>
+            <a:prstDash val="solid"/>
+          </a:ln>
+        </p:spPr>
+      </p:sp>
+      <p:sp>
+        <p:nvSpPr>
+          <p:cNvPr id="7" name="Text 5"/>
+          <p:cNvSpPr txBox="1"/>
+          <p:nvPr/>
+        </p:nvSpPr>
+        <p:spPr>
+          <a:xfrm>
+            <a:off x="1143000" y="2176272"/>
+            <a:ext cx="2757830" cy="768096"/>
+          </a:xfrm>
+          <a:prstGeom prst="rect">
+            <a:avLst/>
+          </a:prstGeom>
+          <a:noFill/>
+          <a:ln/>
+        </p:spPr>
+        <p:txBody>
+          <a:bodyPr wrap="square" lIns="0" tIns="0" rIns="0" bIns="0" rtlCol="0" anchor="ctr"/>
+          <a:lstStyle/>
+          <a:p>
+            <a:pPr indent="0" marL="0">
+              <a:buNone/>
+            </a:pPr>
+            <a:r>
+              <a:rPr lang="en-US" sz="1400" b="1" dirty="0">
+                <a:solidFill>
+                  <a:srgbClr val="3B6B4A"/>
+                </a:solidFill>
+                <a:latin typeface="Yu Gothic" pitchFamily="34" charset="0"/>
+                <a:ea typeface="Yu Gothic" pitchFamily="34" charset="-122"/>
+                <a:cs typeface="Yu Gothic" pitchFamily="34" charset="-120"/>
+              </a:rPr>
+              <a:t>誰に最初に触らせるか</a:t>
+            </a:r>
+            <a:endParaRPr lang="en-US" sz="1400" dirty="0"/>
+          </a:p>
+        </p:txBody>
+      </p:sp>
+      <p:sp>
+        <p:nvSpPr>
+          <p:cNvPr id="8" name="Text 6"/>
+          <p:cNvSpPr txBox="1"/>
+          <p:nvPr/>
+        </p:nvSpPr>
+        <p:spPr>
+          <a:xfrm>
+            <a:off x="4006901" y="2176272"/>
+            <a:ext cx="7011619" cy="768096"/>
+          </a:xfrm>
+          <a:prstGeom prst="rect">
+            <a:avLst/>
+          </a:prstGeom>
+          <a:noFill/>
+          <a:ln/>
+        </p:spPr>
+        <p:txBody>
+          <a:bodyPr wrap="square" lIns="0" tIns="0" rIns="0" bIns="0" rtlCol="0" anchor="ctr"/>
+          <a:lstStyle/>
+          <a:p>
+            <a:pPr indent="0" marL="0">
+              <a:lnSpc>
+                <a:spcPct val="130000"/>
+              </a:lnSpc>
+              <a:buNone/>
+            </a:pPr>
+            <a:r>
+              <a:rPr lang="en-US" sz="1250" dirty="0">
+                <a:solidFill>
+                  <a:srgbClr val="3F3933"/>
+                </a:solidFill>
+                <a:latin typeface="Yu Gothic" pitchFamily="34" charset="0"/>
+                <a:ea typeface="Yu Gothic" pitchFamily="34" charset="-122"/>
+                <a:cs typeface="Yu Gothic" pitchFamily="34" charset="-120"/>
+              </a:rPr>
+              <a:t>推進候補の1名。第3回で決めた方と同じで構いません</a:t>
+            </a:r>
+            <a:endParaRPr lang="en-US" sz="1250" dirty="0"/>
+          </a:p>
+        </p:txBody>
+      </p:sp>
+      <p:sp>
+        <p:nvSpPr>
+          <p:cNvPr id="9" name="Shape 7"/>
+          <p:cNvSpPr/>
+          <p:nvPr/>
+        </p:nvSpPr>
+        <p:spPr>
+          <a:xfrm>
+            <a:off x="777240" y="3154680"/>
+            <a:ext cx="10607040" cy="914400"/>
+          </a:xfrm>
+          <a:prstGeom prst="rect">
+            <a:avLst/>
+          </a:prstGeom>
+          <a:solidFill>
+            <a:srgbClr val="FFFFFF"/>
+          </a:solidFill>
+          <a:ln w="12700">
+            <a:solidFill>
+              <a:srgbClr val="EDE7DB"/>
+            </a:solidFill>
+            <a:prstDash val="solid"/>
+          </a:ln>
+        </p:spPr>
+      </p:sp>
+      <p:sp>
+        <p:nvSpPr>
+          <p:cNvPr id="10" name="Shape 8"/>
+          <p:cNvSpPr/>
+          <p:nvPr/>
+        </p:nvSpPr>
+        <p:spPr>
+          <a:xfrm>
+            <a:off x="777240" y="3154680"/>
+            <a:ext cx="54864" cy="914400"/>
+          </a:xfrm>
+          <a:prstGeom prst="rect">
+            <a:avLst/>
+          </a:prstGeom>
+          <a:solidFill>
+            <a:srgbClr val="3B6B4A"/>
+          </a:solidFill>
+          <a:ln w="12700">
+            <a:solidFill>
+              <a:srgbClr val="333333"/>
+            </a:solidFill>
+            <a:prstDash val="solid"/>
+          </a:ln>
+        </p:spPr>
+      </p:sp>
+      <p:sp>
+        <p:nvSpPr>
+          <p:cNvPr id="11" name="Text 9"/>
+          <p:cNvSpPr txBox="1"/>
+          <p:nvPr/>
+        </p:nvSpPr>
+        <p:spPr>
+          <a:xfrm>
+            <a:off x="1143000" y="3227832"/>
+            <a:ext cx="2757830" cy="768096"/>
+          </a:xfrm>
+          <a:prstGeom prst="rect">
+            <a:avLst/>
+          </a:prstGeom>
+          <a:noFill/>
+          <a:ln/>
+        </p:spPr>
+        <p:txBody>
+          <a:bodyPr wrap="square" lIns="0" tIns="0" rIns="0" bIns="0" rtlCol="0" anchor="ctr"/>
+          <a:lstStyle/>
+          <a:p>
+            <a:pPr indent="0" marL="0">
+              <a:buNone/>
+            </a:pPr>
+            <a:r>
+              <a:rPr lang="en-US" sz="1400" b="1" dirty="0">
+                <a:solidFill>
+                  <a:srgbClr val="3B6B4A"/>
+                </a:solidFill>
+                <a:latin typeface="Yu Gothic" pitchFamily="34" charset="0"/>
+                <a:ea typeface="Yu Gothic" pitchFamily="34" charset="-122"/>
+                <a:cs typeface="Yu Gothic" pitchFamily="34" charset="-120"/>
+              </a:rPr>
+              <a:t>どこに置くか</a:t>
+            </a:r>
+            <a:endParaRPr lang="en-US" sz="1400" dirty="0"/>
+          </a:p>
+        </p:txBody>
+      </p:sp>
+      <p:sp>
+        <p:nvSpPr>
+          <p:cNvPr id="12" name="Text 10"/>
+          <p:cNvSpPr txBox="1"/>
+          <p:nvPr/>
+        </p:nvSpPr>
+        <p:spPr>
+          <a:xfrm>
+            <a:off x="4006901" y="3227832"/>
+            <a:ext cx="7011619" cy="768096"/>
+          </a:xfrm>
+          <a:prstGeom prst="rect">
+            <a:avLst/>
+          </a:prstGeom>
+          <a:noFill/>
+          <a:ln/>
+        </p:spPr>
+        <p:txBody>
+          <a:bodyPr wrap="square" lIns="0" tIns="0" rIns="0" bIns="0" rtlCol="0" anchor="ctr"/>
+          <a:lstStyle/>
+          <a:p>
+            <a:pPr indent="0" marL="0">
+              <a:lnSpc>
+                <a:spcPct val="130000"/>
+              </a:lnSpc>
+              <a:buNone/>
+            </a:pPr>
+            <a:r>
+              <a:rPr lang="en-US" sz="1250" dirty="0">
+                <a:solidFill>
+                  <a:srgbClr val="3F3933"/>
+                </a:solidFill>
+                <a:latin typeface="Yu Gothic" pitchFamily="34" charset="0"/>
+                <a:ea typeface="Yu Gothic" pitchFamily="34" charset="-122"/>
+                <a:cs typeface="Yu Gothic" pitchFamily="34" charset="-120"/>
+              </a:rPr>
+              <a:t>社員が迷わず開ける場所。URLを共有フォルダに貼るところまで</a:t>
+            </a:r>
+            <a:endParaRPr lang="en-US" sz="1250" dirty="0"/>
+          </a:p>
+        </p:txBody>
+      </p:sp>
+      <p:sp>
+        <p:nvSpPr>
+          <p:cNvPr id="13" name="Shape 11"/>
+          <p:cNvSpPr/>
+          <p:nvPr/>
+        </p:nvSpPr>
+        <p:spPr>
+          <a:xfrm>
+            <a:off x="777240" y="4206240"/>
+            <a:ext cx="10607040" cy="914400"/>
+          </a:xfrm>
+          <a:prstGeom prst="rect">
+            <a:avLst/>
+          </a:prstGeom>
+          <a:solidFill>
+            <a:srgbClr val="FFFFFF"/>
+          </a:solidFill>
+          <a:ln w="12700">
+            <a:solidFill>
+              <a:srgbClr val="EDE7DB"/>
+            </a:solidFill>
+            <a:prstDash val="solid"/>
+          </a:ln>
+        </p:spPr>
+      </p:sp>
+      <p:sp>
+        <p:nvSpPr>
+          <p:cNvPr id="14" name="Shape 12"/>
+          <p:cNvSpPr/>
+          <p:nvPr/>
+        </p:nvSpPr>
+        <p:spPr>
+          <a:xfrm>
+            <a:off x="777240" y="4206240"/>
+            <a:ext cx="54864" cy="914400"/>
+          </a:xfrm>
+          <a:prstGeom prst="rect">
+            <a:avLst/>
+          </a:prstGeom>
+          <a:solidFill>
+            <a:srgbClr val="3B6B4A"/>
+          </a:solidFill>
+          <a:ln w="12700">
+            <a:solidFill>
+              <a:srgbClr val="333333"/>
+            </a:solidFill>
+            <a:prstDash val="solid"/>
+          </a:ln>
+        </p:spPr>
+      </p:sp>
+      <p:sp>
+        <p:nvSpPr>
+          <p:cNvPr id="15" name="Text 13"/>
+          <p:cNvSpPr txBox="1"/>
+          <p:nvPr/>
+        </p:nvSpPr>
+        <p:spPr>
+          <a:xfrm>
+            <a:off x="1143000" y="4279392"/>
+            <a:ext cx="2757830" cy="768096"/>
+          </a:xfrm>
+          <a:prstGeom prst="rect">
+            <a:avLst/>
+          </a:prstGeom>
+          <a:noFill/>
+          <a:ln/>
+        </p:spPr>
+        <p:txBody>
+          <a:bodyPr wrap="square" lIns="0" tIns="0" rIns="0" bIns="0" rtlCol="0" anchor="ctr"/>
+          <a:lstStyle/>
+          <a:p>
+            <a:pPr indent="0" marL="0">
+              <a:buNone/>
+            </a:pPr>
+            <a:r>
+              <a:rPr lang="en-US" sz="1400" b="1" dirty="0">
+                <a:solidFill>
+                  <a:srgbClr val="3B6B4A"/>
+                </a:solidFill>
+                <a:latin typeface="Yu Gothic" pitchFamily="34" charset="0"/>
+                <a:ea typeface="Yu Gothic" pitchFamily="34" charset="-122"/>
+                <a:cs typeface="Yu Gothic" pitchFamily="34" charset="-120"/>
+              </a:rPr>
+              <a:t>直すのは誰か</a:t>
+            </a:r>
+            <a:endParaRPr lang="en-US" sz="1400" dirty="0"/>
+          </a:p>
+        </p:txBody>
+      </p:sp>
+      <p:sp>
+        <p:nvSpPr>
+          <p:cNvPr id="16" name="Text 14"/>
+          <p:cNvSpPr txBox="1"/>
+          <p:nvPr/>
+        </p:nvSpPr>
+        <p:spPr>
+          <a:xfrm>
+            <a:off x="4006901" y="4279392"/>
+            <a:ext cx="7011619" cy="768096"/>
+          </a:xfrm>
+          <a:prstGeom prst="rect">
+            <a:avLst/>
+          </a:prstGeom>
+          <a:noFill/>
+          <a:ln/>
+        </p:spPr>
+        <p:txBody>
+          <a:bodyPr wrap="square" lIns="0" tIns="0" rIns="0" bIns="0" rtlCol="0" anchor="ctr"/>
+          <a:lstStyle/>
+          <a:p>
+            <a:pPr indent="0" marL="0">
+              <a:lnSpc>
+                <a:spcPct val="130000"/>
+              </a:lnSpc>
+              <a:buNone/>
+            </a:pPr>
+            <a:r>
+              <a:rPr lang="en-US" sz="1250" dirty="0">
+                <a:solidFill>
+                  <a:srgbClr val="3F3933"/>
+                </a:solidFill>
+                <a:latin typeface="Yu Gothic" pitchFamily="34" charset="0"/>
+                <a:ea typeface="Yu Gothic" pitchFamily="34" charset="-122"/>
+                <a:cs typeface="Yu Gothic" pitchFamily="34" charset="-120"/>
+              </a:rPr>
+              <a:t>当面は社長。第11回で「作る人」を決めます</a:t>
+            </a:r>
+            <a:endParaRPr lang="en-US" sz="1250" dirty="0"/>
+          </a:p>
+        </p:txBody>
+      </p:sp>
+      <p:sp>
+        <p:nvSpPr>
+          <p:cNvPr id="17" name="Text 15"/>
+          <p:cNvSpPr txBox="1"/>
+          <p:nvPr/>
+        </p:nvSpPr>
+        <p:spPr>
+          <a:xfrm>
+            <a:off x="777240" y="6382512"/>
+            <a:ext cx="7424928" cy="256032"/>
+          </a:xfrm>
+          <a:prstGeom prst="rect">
+            <a:avLst/>
+          </a:prstGeom>
+          <a:noFill/>
+          <a:ln/>
+        </p:spPr>
+        <p:txBody>
+          <a:bodyPr wrap="square" lIns="0" tIns="0" rIns="0" bIns="0" rtlCol="0" anchor="ctr"/>
+          <a:lstStyle/>
+          <a:p>
+            <a:pPr indent="0" marL="0">
+              <a:buNone/>
+            </a:pPr>
+            <a:r>
+              <a:rPr lang="en-US" sz="900" dirty="0">
+                <a:solidFill>
+                  <a:srgbClr val="8A8177"/>
+                </a:solidFill>
+                <a:latin typeface="Yu Gothic" pitchFamily="34" charset="0"/>
+                <a:ea typeface="Yu Gothic" pitchFamily="34" charset="-122"/>
+                <a:cs typeface="Yu Gothic" pitchFamily="34" charset="-120"/>
+              </a:rPr>
+              <a:t>第5回　自社専用AIをつくる</a:t>
+            </a:r>
+            <a:endParaRPr lang="en-US" sz="900" dirty="0"/>
+          </a:p>
+        </p:txBody>
+      </p:sp>
+      <p:sp>
+        <p:nvSpPr>
+          <p:cNvPr id="18" name="Text 16"/>
+          <p:cNvSpPr txBox="1"/>
+          <p:nvPr/>
+        </p:nvSpPr>
+        <p:spPr>
+          <a:xfrm>
+            <a:off x="8202168" y="6382512"/>
+            <a:ext cx="3182112" cy="256032"/>
+          </a:xfrm>
+          <a:prstGeom prst="rect">
+            <a:avLst/>
+          </a:prstGeom>
+          <a:noFill/>
+          <a:ln/>
+        </p:spPr>
+        <p:txBody>
+          <a:bodyPr wrap="square" lIns="0" tIns="0" rIns="0" bIns="0" rtlCol="0" anchor="ctr"/>
+          <a:lstStyle/>
+          <a:p>
+            <a:pPr algn="r" indent="0" marL="0">
+              <a:buNone/>
+            </a:pPr>
+            <a:r>
+              <a:rPr lang="en-US" sz="900" dirty="0">
+                <a:solidFill>
+                  <a:srgbClr val="8A8177"/>
+                </a:solidFill>
+                <a:latin typeface="Yu Gothic" pitchFamily="34" charset="0"/>
+                <a:ea typeface="Yu Gothic" pitchFamily="34" charset="-122"/>
+                <a:cs typeface="Yu Gothic" pitchFamily="34" charset="-120"/>
+              </a:rPr>
+              <a:t>組み込み</a:t>
+            </a:r>
+            <a:endParaRPr lang="en-US" sz="900" dirty="0"/>
+          </a:p>
+        </p:txBody>
+      </p:sp>
+    </p:spTree>
+  </p:cSld>
+  <p:clrMapOvr>
+    <a:masterClrMapping/>
+  </p:clrMapOvr>
+</p:sld>
+</file>
+
+<file path=ppt/slides/slide13.xml><?xml version="1.0" encoding="utf-8"?>
+<p:sld xmlns:a="http://schemas.openxmlformats.org/drawingml/2006/main" xmlns:r="http://schemas.openxmlformats.org/officeDocument/2006/relationships" xmlns:p="http://schemas.openxmlformats.org/presentationml/2006/main">
+  <p:cSld name="Slide 13">
+    <p:bg>
+      <p:bgPr>
+        <a:solidFill>
+          <a:srgbClr val="F6F2EA"/>
+        </a:solidFill>
+      </p:bgPr>
+    </p:bg>
+    <p:spTree>
+      <p:nvGrpSpPr>
+        <p:cNvPr id="1" name=""/>
+        <p:cNvGrpSpPr/>
+        <p:nvPr/>
+      </p:nvGrpSpPr>
+      <p:grpSpPr>
+        <a:xfrm>
+          <a:off x="0" y="0"/>
+          <a:ext cx="0" cy="0"/>
+          <a:chOff x="0" y="0"/>
+          <a:chExt cx="0" cy="0"/>
+        </a:xfrm>
+      </p:grpSpPr>
+      <p:sp>
+        <p:nvSpPr>
+          <p:cNvPr id="2" name="Text 0"/>
+          <p:cNvSpPr txBox="1"/>
+          <p:nvPr/>
+        </p:nvSpPr>
+        <p:spPr>
+          <a:xfrm>
+            <a:off x="777240" y="566928"/>
+            <a:ext cx="10607040" cy="274320"/>
+          </a:xfrm>
+          <a:prstGeom prst="rect">
+            <a:avLst/>
+          </a:prstGeom>
+          <a:noFill/>
+          <a:ln/>
+        </p:spPr>
+        <p:txBody>
+          <a:bodyPr wrap="square" lIns="0" tIns="0" rIns="0" bIns="0" rtlCol="0" anchor="ctr"/>
+          <a:lstStyle/>
+          <a:p>
+            <a:pPr indent="0" marL="0">
+              <a:buNone/>
+            </a:pPr>
+            <a:r>
+              <a:rPr lang="en-US" sz="1100" b="1" spc="250" kern="0" dirty="0">
+                <a:solidFill>
+                  <a:srgbClr val="B04A2F"/>
+                </a:solidFill>
+                <a:latin typeface="Yu Gothic" pitchFamily="34" charset="0"/>
+                <a:ea typeface="Yu Gothic" pitchFamily="34" charset="-122"/>
+                <a:cs typeface="Yu Gothic" pitchFamily="34" charset="-120"/>
+              </a:rPr>
+              <a:t>ここだけは</a:t>
+            </a:r>
+            <a:endParaRPr lang="en-US" sz="1100" dirty="0"/>
+          </a:p>
+        </p:txBody>
+      </p:sp>
+      <p:sp>
+        <p:nvSpPr>
+          <p:cNvPr id="3" name="Text 1"/>
+          <p:cNvSpPr txBox="1"/>
+          <p:nvPr/>
+        </p:nvSpPr>
+        <p:spPr>
+          <a:xfrm>
+            <a:off x="777240" y="1097280"/>
+            <a:ext cx="10607040" cy="640080"/>
+          </a:xfrm>
+          <a:prstGeom prst="rect">
+            <a:avLst/>
+          </a:prstGeom>
+          <a:noFill/>
+          <a:ln/>
+        </p:spPr>
+        <p:txBody>
+          <a:bodyPr wrap="square" lIns="0" tIns="0" rIns="0" bIns="0" rtlCol="0" anchor="ctr"/>
+          <a:lstStyle/>
+          <a:p>
+            <a:pPr indent="0" marL="0">
+              <a:buNone/>
+            </a:pPr>
+            <a:r>
+              <a:rPr lang="en-US" sz="2600" b="1" dirty="0">
+                <a:solidFill>
+                  <a:srgbClr val="23201D"/>
+                </a:solidFill>
+                <a:latin typeface="Yu Gothic" pitchFamily="34" charset="0"/>
+                <a:ea typeface="Yu Gothic" pitchFamily="34" charset="-122"/>
+                <a:cs typeface="Yu Gothic" pitchFamily="34" charset="-120"/>
+              </a:rPr>
+              <a:t>動かないまま持ち帰らせません</a:t>
+            </a:r>
+            <a:endParaRPr lang="en-US" sz="2600" dirty="0"/>
+          </a:p>
+        </p:txBody>
+      </p:sp>
+      <p:sp>
+        <p:nvSpPr>
+          <p:cNvPr id="4" name="Shape 2"/>
+          <p:cNvSpPr/>
+          <p:nvPr/>
+        </p:nvSpPr>
+        <p:spPr>
+          <a:xfrm>
+            <a:off x="777240" y="2148840"/>
+            <a:ext cx="64008" cy="2194560"/>
+          </a:xfrm>
+          <a:prstGeom prst="rect">
+            <a:avLst/>
+          </a:prstGeom>
+          <a:solidFill>
+            <a:srgbClr val="B04A2F"/>
+          </a:solidFill>
+          <a:ln w="12700">
+            <a:solidFill>
+              <a:srgbClr val="333333"/>
+            </a:solidFill>
+            <a:prstDash val="solid"/>
+          </a:ln>
+        </p:spPr>
+      </p:sp>
+      <p:sp>
+        <p:nvSpPr>
+          <p:cNvPr id="5" name="Text 3"/>
+          <p:cNvSpPr txBox="1"/>
+          <p:nvPr/>
+        </p:nvSpPr>
+        <p:spPr>
+          <a:xfrm>
+            <a:off x="1188720" y="2148840"/>
+            <a:ext cx="9966960" cy="2194560"/>
+          </a:xfrm>
+          <a:prstGeom prst="rect">
+            <a:avLst/>
+          </a:prstGeom>
+          <a:noFill/>
+          <a:ln/>
+        </p:spPr>
+        <p:txBody>
+          <a:bodyPr wrap="square" lIns="0" tIns="0" rIns="0" bIns="0" rtlCol="0" anchor="ctr"/>
+          <a:lstStyle/>
+          <a:p>
+            <a:pPr indent="0" marL="0">
+              <a:lnSpc>
+                <a:spcPct val="160000"/>
+              </a:lnSpc>
+              <a:buNone/>
+            </a:pPr>
+            <a:r>
+              <a:rPr lang="en-US" sz="1650" dirty="0">
+                <a:solidFill>
+                  <a:srgbClr val="3F3933"/>
+                </a:solidFill>
+                <a:latin typeface="Yu Gothic" pitchFamily="34" charset="0"/>
+                <a:ea typeface="Yu Gothic" pitchFamily="34" charset="-122"/>
+                <a:cs typeface="Yu Gothic" pitchFamily="34" charset="-120"/>
+              </a:rPr>
+              <a:t>時間が足りなければ、次回の冒頭に持ち越してでも、実データで動くところまでやりきります。「持ち帰って試します」は、ほぼ試されません。ここだけは絶対に妥協しないでください。</a:t>
+            </a:r>
+            <a:endParaRPr lang="en-US" sz="1650" dirty="0"/>
+          </a:p>
+        </p:txBody>
+      </p:sp>
+      <p:sp>
+        <p:nvSpPr>
+          <p:cNvPr id="6" name="Shape 4"/>
+          <p:cNvSpPr/>
+          <p:nvPr/>
+        </p:nvSpPr>
+        <p:spPr>
+          <a:xfrm>
+            <a:off x="777240" y="4709160"/>
+            <a:ext cx="10607040" cy="960120"/>
+          </a:xfrm>
+          <a:prstGeom prst="rect">
+            <a:avLst/>
+          </a:prstGeom>
+          <a:solidFill>
+            <a:srgbClr val="EDE7DB"/>
+          </a:solidFill>
+          <a:ln w="12700">
+            <a:solidFill>
+              <a:srgbClr val="333333"/>
+            </a:solidFill>
+            <a:prstDash val="solid"/>
+          </a:ln>
+        </p:spPr>
+      </p:sp>
+      <p:sp>
+        <p:nvSpPr>
+          <p:cNvPr id="7" name="Text 5"/>
+          <p:cNvSpPr txBox="1"/>
+          <p:nvPr/>
+        </p:nvSpPr>
+        <p:spPr>
+          <a:xfrm>
+            <a:off x="1051560" y="4800600"/>
+            <a:ext cx="1463040" cy="256032"/>
+          </a:xfrm>
+          <a:prstGeom prst="rect">
+            <a:avLst/>
+          </a:prstGeom>
+          <a:noFill/>
+          <a:ln/>
+        </p:spPr>
+        <p:txBody>
+          <a:bodyPr wrap="square" lIns="0" tIns="0" rIns="0" bIns="0" rtlCol="0" anchor="ctr"/>
+          <a:lstStyle/>
+          <a:p>
+            <a:pPr indent="0" marL="0">
+              <a:buNone/>
+            </a:pPr>
+            <a:r>
+              <a:rPr lang="en-US" sz="900" b="1" spc="150" kern="0" dirty="0">
+                <a:solidFill>
+                  <a:srgbClr val="B04A2F"/>
+                </a:solidFill>
+                <a:latin typeface="Yu Gothic" pitchFamily="34" charset="0"/>
+                <a:ea typeface="Yu Gothic" pitchFamily="34" charset="-122"/>
+                <a:cs typeface="Yu Gothic" pitchFamily="34" charset="-120"/>
+              </a:rPr>
+              <a:t>他社では</a:t>
+            </a:r>
+            <a:endParaRPr lang="en-US" sz="900" dirty="0"/>
+          </a:p>
+        </p:txBody>
+      </p:sp>
+      <p:sp>
+        <p:nvSpPr>
+          <p:cNvPr id="8" name="Text 6"/>
+          <p:cNvSpPr txBox="1"/>
+          <p:nvPr/>
+        </p:nvSpPr>
+        <p:spPr>
+          <a:xfrm>
+            <a:off x="1051560" y="5029200"/>
+            <a:ext cx="10058400" cy="566928"/>
+          </a:xfrm>
+          <a:prstGeom prst="rect">
+            <a:avLst/>
+          </a:prstGeom>
+          <a:noFill/>
+          <a:ln/>
+        </p:spPr>
+        <p:txBody>
+          <a:bodyPr wrap="square" lIns="0" tIns="0" rIns="0" bIns="0" rtlCol="0" anchor="ctr"/>
+          <a:lstStyle/>
+          <a:p>
+            <a:pPr indent="0" marL="0">
+              <a:lnSpc>
+                <a:spcPct val="130000"/>
+              </a:lnSpc>
+              <a:buNone/>
+            </a:pPr>
+            <a:r>
+              <a:rPr lang="en-US" sz="1250" dirty="0">
+                <a:solidFill>
+                  <a:srgbClr val="3F3933"/>
+                </a:solidFill>
+                <a:latin typeface="Yu Gothic" pitchFamily="34" charset="0"/>
+                <a:ea typeface="Yu Gothic" pitchFamily="34" charset="-122"/>
+                <a:cs typeface="Yu Gothic" pitchFamily="34" charset="-120"/>
+              </a:rPr>
+              <a:t>就業規則を載せた社内問い合わせAIを作った会社では、総務への質問が減ったこと以上に、「規則に書いていないこと」が可視化されたのが収穫でした。結果として規則の改訂につながりました。</a:t>
+            </a:r>
+            <a:endParaRPr lang="en-US" sz="1250" dirty="0"/>
+          </a:p>
+        </p:txBody>
+      </p:sp>
+      <p:sp>
+        <p:nvSpPr>
+          <p:cNvPr id="9" name="Text 7"/>
+          <p:cNvSpPr txBox="1"/>
+          <p:nvPr/>
+        </p:nvSpPr>
+        <p:spPr>
+          <a:xfrm>
+            <a:off x="777240" y="6382512"/>
+            <a:ext cx="7424928" cy="256032"/>
+          </a:xfrm>
+          <a:prstGeom prst="rect">
+            <a:avLst/>
+          </a:prstGeom>
+          <a:noFill/>
+          <a:ln/>
+        </p:spPr>
+        <p:txBody>
+          <a:bodyPr wrap="square" lIns="0" tIns="0" rIns="0" bIns="0" rtlCol="0" anchor="ctr"/>
+          <a:lstStyle/>
+          <a:p>
+            <a:pPr indent="0" marL="0">
+              <a:buNone/>
+            </a:pPr>
+            <a:r>
+              <a:rPr lang="en-US" sz="900" dirty="0">
+                <a:solidFill>
+                  <a:srgbClr val="8A8177"/>
+                </a:solidFill>
+                <a:latin typeface="Yu Gothic" pitchFamily="34" charset="0"/>
+                <a:ea typeface="Yu Gothic" pitchFamily="34" charset="-122"/>
+                <a:cs typeface="Yu Gothic" pitchFamily="34" charset="-120"/>
+              </a:rPr>
+              <a:t>第5回　自社専用AIをつくる</a:t>
+            </a:r>
+            <a:endParaRPr lang="en-US" sz="900" dirty="0"/>
+          </a:p>
+        </p:txBody>
+      </p:sp>
+      <p:sp>
+        <p:nvSpPr>
+          <p:cNvPr id="10" name="Text 8"/>
+          <p:cNvSpPr txBox="1"/>
+          <p:nvPr/>
+        </p:nvSpPr>
+        <p:spPr>
+          <a:xfrm>
+            <a:off x="8202168" y="6382512"/>
+            <a:ext cx="3182112" cy="256032"/>
+          </a:xfrm>
+          <a:prstGeom prst="rect">
+            <a:avLst/>
+          </a:prstGeom>
+          <a:noFill/>
+          <a:ln/>
+        </p:spPr>
+        <p:txBody>
+          <a:bodyPr wrap="square" lIns="0" tIns="0" rIns="0" bIns="0" rtlCol="0" anchor="ctr"/>
+          <a:lstStyle/>
+          <a:p>
+            <a:pPr algn="r" indent="0" marL="0">
+              <a:buNone/>
+            </a:pPr>
+            <a:r>
+              <a:rPr lang="en-US" sz="900" dirty="0">
+                <a:solidFill>
+                  <a:srgbClr val="8A8177"/>
+                </a:solidFill>
+                <a:latin typeface="Yu Gothic" pitchFamily="34" charset="0"/>
+                <a:ea typeface="Yu Gothic" pitchFamily="34" charset="-122"/>
+                <a:cs typeface="Yu Gothic" pitchFamily="34" charset="-120"/>
+              </a:rPr>
+              <a:t>ここだけは</a:t>
+            </a:r>
+            <a:endParaRPr lang="en-US" sz="900" dirty="0"/>
+          </a:p>
+        </p:txBody>
+      </p:sp>
+    </p:spTree>
+  </p:cSld>
+  <p:clrMapOvr>
+    <a:masterClrMapping/>
+  </p:clrMapOvr>
+</p:sld>
+</file>
+
+<file path=ppt/slides/slide14.xml><?xml version="1.0" encoding="utf-8"?>
+<p:sld xmlns:a="http://schemas.openxmlformats.org/drawingml/2006/main" xmlns:r="http://schemas.openxmlformats.org/officeDocument/2006/relationships" xmlns:p="http://schemas.openxmlformats.org/presentationml/2006/main">
+  <p:cSld name="Slide 14">
+    <p:bg>
+      <p:bgPr>
+        <a:solidFill>
+          <a:srgbClr val="F6F2EA"/>
+        </a:solidFill>
+      </p:bgPr>
+    </p:bg>
+    <p:spTree>
+      <p:nvGrpSpPr>
+        <p:cNvPr id="1" name=""/>
+        <p:cNvGrpSpPr/>
+        <p:nvPr/>
+      </p:nvGrpSpPr>
+      <p:grpSpPr>
+        <a:xfrm>
+          <a:off x="0" y="0"/>
+          <a:ext cx="0" cy="0"/>
+          <a:chOff x="0" y="0"/>
+          <a:chExt cx="0" cy="0"/>
+        </a:xfrm>
+      </p:grpSpPr>
+      <p:sp>
+        <p:nvSpPr>
+          <p:cNvPr id="2" name="Text 0"/>
+          <p:cNvSpPr txBox="1"/>
+          <p:nvPr/>
+        </p:nvSpPr>
+        <p:spPr>
+          <a:xfrm>
+            <a:off x="777240" y="566928"/>
+            <a:ext cx="10607040" cy="274320"/>
+          </a:xfrm>
+          <a:prstGeom prst="rect">
+            <a:avLst/>
+          </a:prstGeom>
+          <a:noFill/>
+          <a:ln/>
+        </p:spPr>
+        <p:txBody>
+          <a:bodyPr wrap="square" lIns="0" tIns="0" rIns="0" bIns="0" rtlCol="0" anchor="ctr"/>
+          <a:lstStyle/>
+          <a:p>
+            <a:pPr indent="0" marL="0">
+              <a:buNone/>
+            </a:pPr>
+            <a:r>
+              <a:rPr lang="en-US" sz="1100" b="1" spc="250" kern="0" dirty="0">
+                <a:solidFill>
+                  <a:srgbClr val="3B6B4A"/>
+                </a:solidFill>
+                <a:latin typeface="Yu Gothic" pitchFamily="34" charset="0"/>
+                <a:ea typeface="Yu Gothic" pitchFamily="34" charset="-122"/>
+                <a:cs typeface="Yu Gothic" pitchFamily="34" charset="-120"/>
+              </a:rPr>
+              <a:t>次回まで</a:t>
+            </a:r>
+            <a:endParaRPr lang="en-US" sz="1100" dirty="0"/>
+          </a:p>
+        </p:txBody>
+      </p:sp>
+      <p:sp>
+        <p:nvSpPr>
+          <p:cNvPr id="3" name="Text 1"/>
+          <p:cNvSpPr txBox="1"/>
+          <p:nvPr/>
+        </p:nvSpPr>
+        <p:spPr>
+          <a:xfrm>
+            <a:off x="777240" y="896112"/>
+            <a:ext cx="10607040" cy="640080"/>
+          </a:xfrm>
+          <a:prstGeom prst="rect">
+            <a:avLst/>
+          </a:prstGeom>
+          <a:noFill/>
+          <a:ln/>
+        </p:spPr>
+        <p:txBody>
+          <a:bodyPr wrap="square" lIns="0" tIns="0" rIns="0" bIns="0" rtlCol="0" anchor="ctr"/>
+          <a:lstStyle/>
+          <a:p>
+            <a:pPr indent="0" marL="0">
+              <a:buNone/>
+            </a:pPr>
+            <a:r>
+              <a:rPr lang="en-US" sz="2600" b="1" dirty="0">
+                <a:solidFill>
+                  <a:srgbClr val="23201D"/>
+                </a:solidFill>
+                <a:latin typeface="Yu Gothic" pitchFamily="34" charset="0"/>
+                <a:ea typeface="Yu Gothic" pitchFamily="34" charset="-122"/>
+                <a:cs typeface="Yu Gothic" pitchFamily="34" charset="-120"/>
+              </a:rPr>
+              <a:t>次回は「社内へのお披露目と12か月計画【社員同席】」</a:t>
+            </a:r>
+            <a:endParaRPr lang="en-US" sz="2600" dirty="0"/>
+          </a:p>
+        </p:txBody>
+      </p:sp>
+      <p:sp>
+        <p:nvSpPr>
+          <p:cNvPr id="4" name="Text 2"/>
+          <p:cNvSpPr txBox="1"/>
+          <p:nvPr/>
+        </p:nvSpPr>
+        <p:spPr>
+          <a:xfrm>
+            <a:off x="777240" y="1572768"/>
+            <a:ext cx="9546336" cy="457200"/>
+          </a:xfrm>
+          <a:prstGeom prst="rect">
+            <a:avLst/>
+          </a:prstGeom>
+          <a:noFill/>
+          <a:ln/>
+        </p:spPr>
+        <p:txBody>
+          <a:bodyPr wrap="square" lIns="0" tIns="0" rIns="0" bIns="0" rtlCol="0" anchor="ctr"/>
+          <a:lstStyle/>
+          <a:p>
+            <a:pPr indent="0" marL="0">
+              <a:buNone/>
+            </a:pPr>
+            <a:r>
+              <a:rPr lang="en-US" sz="1400" b="1" dirty="0">
+                <a:solidFill>
+                  <a:srgbClr val="3B6B4A"/>
+                </a:solidFill>
+                <a:latin typeface="Yu Gothic" pitchFamily="34" charset="0"/>
+                <a:ea typeface="Yu Gothic" pitchFamily="34" charset="-122"/>
+                <a:cs typeface="Yu Gothic" pitchFamily="34" charset="-120"/>
+              </a:rPr>
+              <a:t>次回は社員の方が同席します。日程と出席者を、今日のうちに確定させます。</a:t>
+            </a:r>
+            <a:endParaRPr lang="en-US" sz="1400" dirty="0"/>
+          </a:p>
+        </p:txBody>
+      </p:sp>
+      <p:sp>
+        <p:nvSpPr>
+          <p:cNvPr id="5" name="Shape 3"/>
+          <p:cNvSpPr/>
+          <p:nvPr/>
+        </p:nvSpPr>
+        <p:spPr>
+          <a:xfrm>
+            <a:off x="777240" y="2240280"/>
+            <a:ext cx="4985309" cy="2286000"/>
+          </a:xfrm>
+          <a:prstGeom prst="rect">
+            <a:avLst/>
+          </a:prstGeom>
+          <a:solidFill>
+            <a:srgbClr val="FFFFFF"/>
+          </a:solidFill>
+          <a:ln w="12700">
+            <a:solidFill>
+              <a:srgbClr val="EDE7DB"/>
+            </a:solidFill>
+            <a:prstDash val="solid"/>
+          </a:ln>
+        </p:spPr>
+      </p:sp>
+      <p:sp>
+        <p:nvSpPr>
+          <p:cNvPr id="6" name="Text 4"/>
+          <p:cNvSpPr txBox="1"/>
+          <p:nvPr/>
+        </p:nvSpPr>
+        <p:spPr>
+          <a:xfrm>
+            <a:off x="1051560" y="2377440"/>
+            <a:ext cx="4242816" cy="274320"/>
+          </a:xfrm>
+          <a:prstGeom prst="rect">
+            <a:avLst/>
+          </a:prstGeom>
+          <a:noFill/>
+          <a:ln/>
+        </p:spPr>
+        <p:txBody>
+          <a:bodyPr wrap="square" lIns="0" tIns="0" rIns="0" bIns="0" rtlCol="0" anchor="ctr"/>
+          <a:lstStyle/>
+          <a:p>
+            <a:pPr indent="0" marL="0">
+              <a:buNone/>
+            </a:pPr>
+            <a:r>
+              <a:rPr lang="en-US" sz="1000" b="1" spc="150" kern="0" dirty="0">
+                <a:solidFill>
+                  <a:srgbClr val="B04A2F"/>
+                </a:solidFill>
+                <a:latin typeface="Yu Gothic" pitchFamily="34" charset="0"/>
+                <a:ea typeface="Yu Gothic" pitchFamily="34" charset="-122"/>
+                <a:cs typeface="Yu Gothic" pitchFamily="34" charset="-120"/>
+              </a:rPr>
+              <a:t>次回までにやること</a:t>
+            </a:r>
+            <a:endParaRPr lang="en-US" sz="1000" dirty="0"/>
+          </a:p>
+        </p:txBody>
+      </p:sp>
+      <p:sp>
+        <p:nvSpPr>
+          <p:cNvPr id="7" name="Text 5"/>
+          <p:cNvSpPr txBox="1"/>
+          <p:nvPr/>
+        </p:nvSpPr>
+        <p:spPr>
+          <a:xfrm>
+            <a:off x="1051560" y="2743200"/>
+            <a:ext cx="4436669" cy="1554480"/>
+          </a:xfrm>
+          <a:prstGeom prst="rect">
+            <a:avLst/>
+          </a:prstGeom>
+          <a:noFill/>
+          <a:ln/>
+        </p:spPr>
+        <p:txBody>
+          <a:bodyPr wrap="square" lIns="0" tIns="0" rIns="0" bIns="0" rtlCol="0" anchor="ctr"/>
+          <a:lstStyle/>
+          <a:p>
+            <a:pPr indent="0" marL="0">
+              <a:lnSpc>
+                <a:spcPct val="140000"/>
+              </a:lnSpc>
+              <a:buNone/>
+            </a:pPr>
+            <a:r>
+              <a:rPr lang="en-US" sz="1400" dirty="0">
+                <a:solidFill>
+                  <a:srgbClr val="23201D"/>
+                </a:solidFill>
+                <a:latin typeface="Yu Gothic" pitchFamily="34" charset="0"/>
+                <a:ea typeface="Yu Gothic" pitchFamily="34" charset="-122"/>
+                <a:cs typeface="Yu Gothic" pitchFamily="34" charset="-120"/>
+              </a:rPr>
+              <a:t>作った専用AIを、推進候補の社員1名に触ってもらい感想を聞く</a:t>
+            </a:r>
+            <a:endParaRPr lang="en-US" sz="1400" dirty="0"/>
+          </a:p>
+        </p:txBody>
+      </p:sp>
+      <p:sp>
+        <p:nvSpPr>
+          <p:cNvPr id="8" name="Shape 6"/>
+          <p:cNvSpPr/>
+          <p:nvPr/>
+        </p:nvSpPr>
+        <p:spPr>
+          <a:xfrm>
+            <a:off x="6398971" y="2240280"/>
+            <a:ext cx="4985309" cy="2286000"/>
+          </a:xfrm>
+          <a:prstGeom prst="rect">
+            <a:avLst/>
+          </a:prstGeom>
+          <a:solidFill>
+            <a:srgbClr val="FFFFFF"/>
+          </a:solidFill>
+          <a:ln w="12700">
+            <a:solidFill>
+              <a:srgbClr val="EDE7DB"/>
+            </a:solidFill>
+            <a:prstDash val="solid"/>
+          </a:ln>
+        </p:spPr>
+      </p:sp>
+      <p:sp>
+        <p:nvSpPr>
+          <p:cNvPr id="9" name="Text 7"/>
+          <p:cNvSpPr txBox="1"/>
+          <p:nvPr/>
+        </p:nvSpPr>
+        <p:spPr>
+          <a:xfrm>
+            <a:off x="6673291" y="2377440"/>
+            <a:ext cx="4242816" cy="274320"/>
+          </a:xfrm>
+          <a:prstGeom prst="rect">
+            <a:avLst/>
+          </a:prstGeom>
+          <a:noFill/>
+          <a:ln/>
+        </p:spPr>
+        <p:txBody>
+          <a:bodyPr wrap="square" lIns="0" tIns="0" rIns="0" bIns="0" rtlCol="0" anchor="ctr"/>
+          <a:lstStyle/>
+          <a:p>
+            <a:pPr indent="0" marL="0">
+              <a:buNone/>
+            </a:pPr>
+            <a:r>
+              <a:rPr lang="en-US" sz="1000" b="1" spc="150" kern="0" dirty="0">
+                <a:solidFill>
+                  <a:srgbClr val="3B6B4A"/>
+                </a:solidFill>
+                <a:latin typeface="Yu Gothic" pitchFamily="34" charset="0"/>
+                <a:ea typeface="Yu Gothic" pitchFamily="34" charset="-122"/>
+                <a:cs typeface="Yu Gothic" pitchFamily="34" charset="-120"/>
+              </a:rPr>
+              <a:t>次回の持ち物</a:t>
+            </a:r>
+            <a:endParaRPr lang="en-US" sz="1000" dirty="0"/>
+          </a:p>
+        </p:txBody>
+      </p:sp>
+      <p:sp>
+        <p:nvSpPr>
+          <p:cNvPr id="10" name="Text 8"/>
+          <p:cNvSpPr txBox="1"/>
+          <p:nvPr/>
+        </p:nvSpPr>
+        <p:spPr>
+          <a:xfrm>
+            <a:off x="6673291" y="2743200"/>
+            <a:ext cx="4436669" cy="694944"/>
+          </a:xfrm>
+          <a:prstGeom prst="rect">
+            <a:avLst/>
+          </a:prstGeom>
+          <a:noFill/>
+          <a:ln/>
+        </p:spPr>
+        <p:txBody>
+          <a:bodyPr wrap="square" lIns="0" tIns="0" rIns="0" bIns="0" rtlCol="0" anchor="ctr"/>
+          <a:lstStyle/>
+          <a:p>
+            <a:pPr indent="0" marL="0">
+              <a:lnSpc>
+                <a:spcPct val="130000"/>
+              </a:lnSpc>
+              <a:buNone/>
+            </a:pPr>
+            <a:r>
+              <a:rPr lang="en-US" sz="1250" dirty="0">
+                <a:solidFill>
+                  <a:srgbClr val="23201D"/>
+                </a:solidFill>
+                <a:latin typeface="Yu Gothic" pitchFamily="34" charset="0"/>
+                <a:ea typeface="Yu Gothic" pitchFamily="34" charset="-122"/>
+                <a:cs typeface="Yu Gothic" pitchFamily="34" charset="-120"/>
+              </a:rPr>
+              <a:t>・発表資料（5枚以内・1週間前の壁打ちで一緒に作ります）</a:t>
+            </a:r>
+            <a:endParaRPr lang="en-US" sz="1250" dirty="0"/>
+          </a:p>
+        </p:txBody>
+      </p:sp>
+      <p:sp>
+        <p:nvSpPr>
+          <p:cNvPr id="11" name="Text 9"/>
+          <p:cNvSpPr txBox="1"/>
+          <p:nvPr/>
+        </p:nvSpPr>
+        <p:spPr>
+          <a:xfrm>
+            <a:off x="6673291" y="3474720"/>
+            <a:ext cx="4436669" cy="694944"/>
+          </a:xfrm>
+          <a:prstGeom prst="rect">
+            <a:avLst/>
+          </a:prstGeom>
+          <a:noFill/>
+          <a:ln/>
+        </p:spPr>
+        <p:txBody>
+          <a:bodyPr wrap="square" lIns="0" tIns="0" rIns="0" bIns="0" rtlCol="0" anchor="ctr"/>
+          <a:lstStyle/>
+          <a:p>
+            <a:pPr indent="0" marL="0">
+              <a:lnSpc>
+                <a:spcPct val="130000"/>
+              </a:lnSpc>
+              <a:buNone/>
+            </a:pPr>
+            <a:r>
+              <a:rPr lang="en-US" sz="1250" dirty="0">
+                <a:solidFill>
+                  <a:srgbClr val="23201D"/>
+                </a:solidFill>
+                <a:latin typeface="Yu Gothic" pitchFamily="34" charset="0"/>
+                <a:ea typeface="Yu Gothic" pitchFamily="34" charset="-122"/>
+                <a:cs typeface="Yu Gothic" pitchFamily="34" charset="-120"/>
+              </a:rPr>
+              <a:t>・社員3名以上の出席確保</a:t>
+            </a:r>
+            <a:endParaRPr lang="en-US" sz="1250" dirty="0"/>
+          </a:p>
+        </p:txBody>
+      </p:sp>
+      <p:sp>
+        <p:nvSpPr>
+          <p:cNvPr id="12" name="Shape 10"/>
+          <p:cNvSpPr/>
+          <p:nvPr/>
+        </p:nvSpPr>
+        <p:spPr>
+          <a:xfrm>
+            <a:off x="777240" y="4800600"/>
+            <a:ext cx="10607040" cy="777240"/>
+          </a:xfrm>
+          <a:prstGeom prst="rect">
+            <a:avLst/>
+          </a:prstGeom>
+          <a:solidFill>
+            <a:srgbClr val="EDE7DB"/>
+          </a:solidFill>
+          <a:ln w="12700">
+            <a:solidFill>
+              <a:srgbClr val="333333"/>
+            </a:solidFill>
+            <a:prstDash val="solid"/>
+          </a:ln>
+        </p:spPr>
+      </p:sp>
+      <p:sp>
+        <p:nvSpPr>
+          <p:cNvPr id="13" name="Text 11"/>
+          <p:cNvSpPr txBox="1"/>
+          <p:nvPr/>
+        </p:nvSpPr>
+        <p:spPr>
+          <a:xfrm>
+            <a:off x="1097280" y="4800600"/>
+            <a:ext cx="9966960" cy="777240"/>
+          </a:xfrm>
+          <a:prstGeom prst="rect">
+            <a:avLst/>
+          </a:prstGeom>
+          <a:noFill/>
+          <a:ln/>
+        </p:spPr>
+        <p:txBody>
+          <a:bodyPr wrap="square" lIns="0" tIns="0" rIns="0" bIns="0" rtlCol="0" anchor="ctr"/>
+          <a:lstStyle/>
+          <a:p>
+            <a:pPr indent="0" marL="0">
+              <a:buNone/>
+            </a:pPr>
+            <a:r>
+              <a:rPr lang="en-US" sz="1250" dirty="0">
+                <a:solidFill>
+                  <a:srgbClr val="5A534A"/>
+                </a:solidFill>
+                <a:latin typeface="Yu Gothic" pitchFamily="34" charset="0"/>
+                <a:ea typeface="Yu Gothic" pitchFamily="34" charset="-122"/>
+                <a:cs typeface="Yu Gothic" pitchFamily="34" charset="-120"/>
+              </a:rPr>
+              <a:t>この内容は、次回の3日前にあらためてお送りします。</a:t>
+            </a:r>
+            <a:endParaRPr lang="en-US" sz="1250" dirty="0"/>
+          </a:p>
+        </p:txBody>
+      </p:sp>
+      <p:sp>
+        <p:nvSpPr>
+          <p:cNvPr id="14" name="Text 12"/>
+          <p:cNvSpPr txBox="1"/>
+          <p:nvPr/>
+        </p:nvSpPr>
+        <p:spPr>
+          <a:xfrm>
+            <a:off x="777240" y="6382512"/>
+            <a:ext cx="7424928" cy="256032"/>
+          </a:xfrm>
+          <a:prstGeom prst="rect">
+            <a:avLst/>
+          </a:prstGeom>
+          <a:noFill/>
+          <a:ln/>
+        </p:spPr>
+        <p:txBody>
+          <a:bodyPr wrap="square" lIns="0" tIns="0" rIns="0" bIns="0" rtlCol="0" anchor="ctr"/>
+          <a:lstStyle/>
+          <a:p>
+            <a:pPr indent="0" marL="0">
+              <a:buNone/>
+            </a:pPr>
+            <a:r>
+              <a:rPr lang="en-US" sz="900" dirty="0">
+                <a:solidFill>
+                  <a:srgbClr val="8A8177"/>
+                </a:solidFill>
+                <a:latin typeface="Yu Gothic" pitchFamily="34" charset="0"/>
+                <a:ea typeface="Yu Gothic" pitchFamily="34" charset="-122"/>
+                <a:cs typeface="Yu Gothic" pitchFamily="34" charset="-120"/>
+              </a:rPr>
+              <a:t>第5回　自社専用AIをつくる</a:t>
+            </a:r>
+            <a:endParaRPr lang="en-US" sz="900" dirty="0"/>
+          </a:p>
+        </p:txBody>
+      </p:sp>
+      <p:sp>
+        <p:nvSpPr>
+          <p:cNvPr id="15" name="Text 13"/>
+          <p:cNvSpPr txBox="1"/>
+          <p:nvPr/>
+        </p:nvSpPr>
+        <p:spPr>
+          <a:xfrm>
+            <a:off x="8202168" y="6382512"/>
+            <a:ext cx="3182112" cy="256032"/>
+          </a:xfrm>
+          <a:prstGeom prst="rect">
+            <a:avLst/>
+          </a:prstGeom>
+          <a:noFill/>
+          <a:ln/>
+        </p:spPr>
+        <p:txBody>
+          <a:bodyPr wrap="square" lIns="0" tIns="0" rIns="0" bIns="0" rtlCol="0" anchor="ctr"/>
+          <a:lstStyle/>
+          <a:p>
+            <a:pPr algn="r" indent="0" marL="0">
+              <a:buNone/>
+            </a:pPr>
+            <a:r>
+              <a:rPr lang="en-US" sz="900" dirty="0">
+                <a:solidFill>
+                  <a:srgbClr val="8A8177"/>
+                </a:solidFill>
+                <a:latin typeface="Yu Gothic" pitchFamily="34" charset="0"/>
+                <a:ea typeface="Yu Gothic" pitchFamily="34" charset="-122"/>
+                <a:cs typeface="Yu Gothic" pitchFamily="34" charset="-120"/>
+              </a:rPr>
+              <a:t>次回まで</a:t>
+            </a:r>
+            <a:endParaRPr lang="en-US" sz="900" dirty="0"/>
+          </a:p>
+        </p:txBody>
+      </p:sp>
+    </p:spTree>
+  </p:cSld>
+  <p:clrMapOvr>
+    <a:masterClrMapping/>
+  </p:clrMapOvr>
+</p:sld>
+</file>
+
+<file path=ppt/slides/slide15.xml><?xml version="1.0" encoding="utf-8"?>
+<p:sld xmlns:a="http://schemas.openxmlformats.org/drawingml/2006/main" xmlns:r="http://schemas.openxmlformats.org/officeDocument/2006/relationships" xmlns:p="http://schemas.openxmlformats.org/presentationml/2006/main">
+  <p:cSld name="Slide 15">
     <p:bg>
       <p:bgPr>
         <a:solidFill>
@@ -8388,13 +10566,13 @@
             <a:r>
               <a:rPr lang="en-US" sz="1100" b="1" spc="250" kern="0" dirty="0">
                 <a:solidFill>
-                  <a:srgbClr val="2F4F6B"/>
-                </a:solidFill>
-                <a:latin typeface="Yu Gothic" pitchFamily="34" charset="0"/>
-                <a:ea typeface="Yu Gothic" pitchFamily="34" charset="-122"/>
-                <a:cs typeface="Yu Gothic" pitchFamily="34" charset="-120"/>
-              </a:rPr>
-              <a:t>演習</a:t>
+                  <a:srgbClr val="B04A2F"/>
+                </a:solidFill>
+                <a:latin typeface="Yu Gothic" pitchFamily="34" charset="0"/>
+                <a:ea typeface="Yu Gothic" pitchFamily="34" charset="-122"/>
+                <a:cs typeface="Yu Gothic" pitchFamily="34" charset="-120"/>
+              </a:rPr>
+              <a:t>想定問答</a:t>
             </a:r>
             <a:endParaRPr lang="en-US" sz="1100" dirty="0"/>
           </a:p>
@@ -8433,7 +10611,7 @@
                 <a:ea typeface="Yu Gothic" pitchFamily="34" charset="-122"/>
                 <a:cs typeface="Yu Gothic" pitchFamily="34" charset="-120"/>
               </a:rPr>
-              <a:t>今日、一緒にやること</a:t>
+              <a:t>この回で、よく聞かれること</a:t>
             </a:r>
             <a:endParaRPr lang="en-US" sz="2600" dirty="0"/>
           </a:p>
@@ -8441,53 +10619,14 @@
       </p:sp>
       <p:sp>
         <p:nvSpPr>
-          <p:cNvPr id="4" name="Text 2"/>
-          <p:cNvSpPr txBox="1"/>
-          <p:nvPr/>
-        </p:nvSpPr>
-        <p:spPr>
-          <a:xfrm>
-            <a:off x="777240" y="1572768"/>
-            <a:ext cx="10607040" cy="320040"/>
-          </a:xfrm>
-          <a:prstGeom prst="rect">
-            <a:avLst/>
-          </a:prstGeom>
-          <a:noFill/>
-          <a:ln/>
-        </p:spPr>
-        <p:txBody>
-          <a:bodyPr wrap="square" lIns="0" tIns="0" rIns="0" bIns="0" rtlCol="0" anchor="ctr"/>
-          <a:lstStyle/>
-          <a:p>
-            <a:pPr indent="0" marL="0">
-              <a:buNone/>
-            </a:pPr>
-            <a:r>
-              <a:rPr lang="en-US" sz="1250" b="1" dirty="0">
-                <a:solidFill>
-                  <a:srgbClr val="2F4F6B"/>
-                </a:solidFill>
-                <a:latin typeface="Yu Gothic" pitchFamily="34" charset="0"/>
-                <a:ea typeface="Yu Gothic" pitchFamily="34" charset="-122"/>
-                <a:cs typeface="Yu Gothic" pitchFamily="34" charset="-120"/>
-              </a:rPr>
-              <a:t>55分。操作するのはご自身です。</a:t>
-            </a:r>
-            <a:endParaRPr lang="en-US" sz="1250" dirty="0"/>
-          </a:p>
-        </p:txBody>
-      </p:sp>
-      <p:sp>
-        <p:nvSpPr>
-          <p:cNvPr id="5" name="Shape 3"/>
+          <p:cNvPr id="4" name="Shape 2"/>
           <p:cNvSpPr/>
           <p:nvPr/>
         </p:nvSpPr>
         <p:spPr>
           <a:xfrm>
-            <a:off x="777240" y="2148840"/>
-            <a:ext cx="3383280" cy="2880360"/>
+            <a:off x="777240" y="1737360"/>
+            <a:ext cx="10607040" cy="1170432"/>
           </a:xfrm>
           <a:prstGeom prst="rect">
             <a:avLst/>
@@ -8505,16 +10644,16 @@
       </p:sp>
       <p:sp>
         <p:nvSpPr>
-          <p:cNvPr id="6" name="Shape 4"/>
+          <p:cNvPr id="5" name="Shape 3"/>
           <p:cNvSpPr/>
           <p:nvPr/>
         </p:nvSpPr>
         <p:spPr>
           <a:xfrm>
-            <a:off x="1051560" y="2395728"/>
-            <a:ext cx="438912" cy="438912"/>
-          </a:xfrm>
-          <a:prstGeom prst="ellipse">
+            <a:off x="777240" y="1737360"/>
+            <a:ext cx="54864" cy="1170432"/>
+          </a:xfrm>
+          <a:prstGeom prst="rect">
             <a:avLst/>
           </a:prstGeom>
           <a:solidFill>
@@ -8530,95 +10669,53 @@
       </p:sp>
       <p:sp>
         <p:nvSpPr>
+          <p:cNvPr id="6" name="Text 4"/>
+          <p:cNvSpPr txBox="1"/>
+          <p:nvPr/>
+        </p:nvSpPr>
+        <p:spPr>
+          <a:xfrm>
+            <a:off x="1097280" y="1828800"/>
+            <a:ext cx="9966960" cy="384048"/>
+          </a:xfrm>
+          <a:prstGeom prst="rect">
+            <a:avLst/>
+          </a:prstGeom>
+          <a:noFill/>
+          <a:ln/>
+        </p:spPr>
+        <p:txBody>
+          <a:bodyPr wrap="square" lIns="0" tIns="0" rIns="0" bIns="0" rtlCol="0" anchor="ctr"/>
+          <a:lstStyle/>
+          <a:p>
+            <a:pPr indent="0" marL="0">
+              <a:buNone/>
+            </a:pPr>
+            <a:r>
+              <a:rPr lang="en-US" sz="1400" b="1" dirty="0">
+                <a:solidFill>
+                  <a:srgbClr val="2F4F6B"/>
+                </a:solidFill>
+                <a:latin typeface="Yu Gothic" pitchFamily="34" charset="0"/>
+                <a:ea typeface="Yu Gothic" pitchFamily="34" charset="-122"/>
+                <a:cs typeface="Yu Gothic" pitchFamily="34" charset="-120"/>
+              </a:rPr>
+              <a:t>「資料は何本くらい載せればいいですか」</a:t>
+            </a:r>
+            <a:endParaRPr lang="en-US" sz="1400" dirty="0"/>
+          </a:p>
+        </p:txBody>
+      </p:sp>
+      <p:sp>
+        <p:nvSpPr>
           <p:cNvPr id="7" name="Text 5"/>
           <p:cNvSpPr txBox="1"/>
           <p:nvPr/>
         </p:nvSpPr>
         <p:spPr>
           <a:xfrm>
-            <a:off x="1051560" y="2395728"/>
-            <a:ext cx="438912" cy="438912"/>
-          </a:xfrm>
-          <a:prstGeom prst="rect">
-            <a:avLst/>
-          </a:prstGeom>
-          <a:noFill/>
-          <a:ln/>
-        </p:spPr>
-        <p:txBody>
-          <a:bodyPr wrap="square" lIns="0" tIns="0" rIns="0" bIns="0" rtlCol="0" anchor="ctr"/>
-          <a:lstStyle/>
-          <a:p>
-            <a:pPr algn="ctr" indent="0" marL="0">
-              <a:buNone/>
-            </a:pPr>
-            <a:r>
-              <a:rPr lang="en-US" sz="1300" b="1" dirty="0">
-                <a:solidFill>
-                  <a:srgbClr val="FFFFFF"/>
-                </a:solidFill>
-                <a:latin typeface="Yu Gothic" pitchFamily="34" charset="0"/>
-                <a:ea typeface="Yu Gothic" pitchFamily="34" charset="-122"/>
-                <a:cs typeface="Yu Gothic" pitchFamily="34" charset="-120"/>
-              </a:rPr>
-              <a:t>1</a:t>
-            </a:r>
-            <a:endParaRPr lang="en-US" sz="1300" dirty="0"/>
-          </a:p>
-        </p:txBody>
-      </p:sp>
-      <p:sp>
-        <p:nvSpPr>
-          <p:cNvPr id="8" name="Text 6"/>
-          <p:cNvSpPr txBox="1"/>
-          <p:nvPr/>
-        </p:nvSpPr>
-        <p:spPr>
-          <a:xfrm>
-            <a:off x="1051560" y="2944368"/>
-            <a:ext cx="2834640" cy="731520"/>
-          </a:xfrm>
-          <a:prstGeom prst="rect">
-            <a:avLst/>
-          </a:prstGeom>
-          <a:noFill/>
-          <a:ln/>
-        </p:spPr>
-        <p:txBody>
-          <a:bodyPr wrap="square" lIns="0" tIns="0" rIns="0" bIns="0" rtlCol="0" anchor="ctr"/>
-          <a:lstStyle/>
-          <a:p>
-            <a:pPr indent="0" marL="0">
-              <a:lnSpc>
-                <a:spcPct val="125000"/>
-              </a:lnSpc>
-              <a:buNone/>
-            </a:pPr>
-            <a:r>
-              <a:rPr lang="en-US" sz="1450" b="1" dirty="0">
-                <a:solidFill>
-                  <a:srgbClr val="23201D"/>
-                </a:solidFill>
-                <a:latin typeface="Yu Gothic" pitchFamily="34" charset="0"/>
-                <a:ea typeface="Yu Gothic" pitchFamily="34" charset="-122"/>
-                <a:cs typeface="Yu Gothic" pitchFamily="34" charset="-120"/>
-              </a:rPr>
-              <a:t>専用AIを1つ作る</a:t>
-            </a:r>
-            <a:endParaRPr lang="en-US" sz="1450" dirty="0"/>
-          </a:p>
-        </p:txBody>
-      </p:sp>
-      <p:sp>
-        <p:nvSpPr>
-          <p:cNvPr id="9" name="Text 7"/>
-          <p:cNvSpPr txBox="1"/>
-          <p:nvPr/>
-        </p:nvSpPr>
-        <p:spPr>
-          <a:xfrm>
-            <a:off x="1051560" y="3703320"/>
-            <a:ext cx="2834640" cy="1188720"/>
+            <a:off x="1097280" y="2231136"/>
+            <a:ext cx="9966960" cy="603504"/>
           </a:xfrm>
           <a:prstGeom prst="rect">
             <a:avLst/>
@@ -8637,30 +10734,30 @@
               <a:buNone/>
             </a:pPr>
             <a:r>
-              <a:rPr lang="en-US" sz="1150" dirty="0">
-                <a:solidFill>
-                  <a:srgbClr val="5A534A"/>
-                </a:solidFill>
-                <a:latin typeface="Yu Gothic" pitchFamily="34" charset="0"/>
-                <a:ea typeface="Yu Gothic" pitchFamily="34" charset="-122"/>
-                <a:cs typeface="Yu Gothic" pitchFamily="34" charset="-120"/>
-              </a:rPr>
-              <a:t>載せる資料は3本で十分。まず動かすことを優先します</a:t>
-            </a:r>
-            <a:endParaRPr lang="en-US" sz="1150" dirty="0"/>
-          </a:p>
-        </p:txBody>
-      </p:sp>
-      <p:sp>
-        <p:nvSpPr>
-          <p:cNvPr id="10" name="Shape 8"/>
+              <a:rPr lang="en-US" sz="1250" dirty="0">
+                <a:solidFill>
+                  <a:srgbClr val="3F3933"/>
+                </a:solidFill>
+                <a:latin typeface="Yu Gothic" pitchFamily="34" charset="0"/>
+                <a:ea typeface="Yu Gothic" pitchFamily="34" charset="-122"/>
+                <a:cs typeface="Yu Gothic" pitchFamily="34" charset="-120"/>
+              </a:rPr>
+              <a:t>3本で始めます。多いほど良いわけではなく、むしろ増やすと精度が落ちます。足りないものは第8回で回収します。</a:t>
+            </a:r>
+            <a:endParaRPr lang="en-US" sz="1250" dirty="0"/>
+          </a:p>
+        </p:txBody>
+      </p:sp>
+      <p:sp>
+        <p:nvSpPr>
+          <p:cNvPr id="8" name="Shape 6"/>
           <p:cNvSpPr/>
           <p:nvPr/>
         </p:nvSpPr>
         <p:spPr>
           <a:xfrm>
-            <a:off x="4389120" y="2148840"/>
-            <a:ext cx="3383280" cy="2880360"/>
+            <a:off x="777240" y="3035808"/>
+            <a:ext cx="10607040" cy="1170432"/>
           </a:xfrm>
           <a:prstGeom prst="rect">
             <a:avLst/>
@@ -8678,16 +10775,16 @@
       </p:sp>
       <p:sp>
         <p:nvSpPr>
-          <p:cNvPr id="11" name="Shape 9"/>
+          <p:cNvPr id="9" name="Shape 7"/>
           <p:cNvSpPr/>
           <p:nvPr/>
         </p:nvSpPr>
         <p:spPr>
           <a:xfrm>
-            <a:off x="4663440" y="2395728"/>
-            <a:ext cx="438912" cy="438912"/>
-          </a:xfrm>
-          <a:prstGeom prst="ellipse">
+            <a:off x="777240" y="3035808"/>
+            <a:ext cx="54864" cy="1170432"/>
+          </a:xfrm>
+          <a:prstGeom prst="rect">
             <a:avLst/>
           </a:prstGeom>
           <a:solidFill>
@@ -8703,95 +10800,53 @@
       </p:sp>
       <p:sp>
         <p:nvSpPr>
-          <p:cNvPr id="12" name="Text 10"/>
-          <p:cNvSpPr txBox="1"/>
-          <p:nvPr/>
-        </p:nvSpPr>
-        <p:spPr>
-          <a:xfrm>
-            <a:off x="4663440" y="2395728"/>
-            <a:ext cx="438912" cy="438912"/>
-          </a:xfrm>
-          <a:prstGeom prst="rect">
-            <a:avLst/>
-          </a:prstGeom>
-          <a:noFill/>
-          <a:ln/>
-        </p:spPr>
-        <p:txBody>
-          <a:bodyPr wrap="square" lIns="0" tIns="0" rIns="0" bIns="0" rtlCol="0" anchor="ctr"/>
-          <a:lstStyle/>
-          <a:p>
-            <a:pPr algn="ctr" indent="0" marL="0">
-              <a:buNone/>
-            </a:pPr>
-            <a:r>
-              <a:rPr lang="en-US" sz="1300" b="1" dirty="0">
-                <a:solidFill>
-                  <a:srgbClr val="FFFFFF"/>
-                </a:solidFill>
-                <a:latin typeface="Yu Gothic" pitchFamily="34" charset="0"/>
-                <a:ea typeface="Yu Gothic" pitchFamily="34" charset="-122"/>
-                <a:cs typeface="Yu Gothic" pitchFamily="34" charset="-120"/>
-              </a:rPr>
-              <a:t>2</a:t>
-            </a:r>
-            <a:endParaRPr lang="en-US" sz="1300" dirty="0"/>
-          </a:p>
-        </p:txBody>
-      </p:sp>
-      <p:sp>
-        <p:nvSpPr>
-          <p:cNvPr id="13" name="Text 11"/>
-          <p:cNvSpPr txBox="1"/>
-          <p:nvPr/>
-        </p:nvSpPr>
-        <p:spPr>
-          <a:xfrm>
-            <a:off x="4663440" y="2944368"/>
-            <a:ext cx="2834640" cy="731520"/>
-          </a:xfrm>
-          <a:prstGeom prst="rect">
-            <a:avLst/>
-          </a:prstGeom>
-          <a:noFill/>
-          <a:ln/>
-        </p:spPr>
-        <p:txBody>
-          <a:bodyPr wrap="square" lIns="0" tIns="0" rIns="0" bIns="0" rtlCol="0" anchor="ctr"/>
-          <a:lstStyle/>
-          <a:p>
-            <a:pPr indent="0" marL="0">
-              <a:lnSpc>
-                <a:spcPct val="125000"/>
-              </a:lnSpc>
-              <a:buNone/>
-            </a:pPr>
-            <a:r>
-              <a:rPr lang="en-US" sz="1450" b="1" dirty="0">
-                <a:solidFill>
-                  <a:srgbClr val="23201D"/>
-                </a:solidFill>
-                <a:latin typeface="Yu Gothic" pitchFamily="34" charset="0"/>
-                <a:ea typeface="Yu Gothic" pitchFamily="34" charset="-122"/>
-                <a:cs typeface="Yu Gothic" pitchFamily="34" charset="-120"/>
-              </a:rPr>
-              <a:t>実データで動かす</a:t>
-            </a:r>
-            <a:endParaRPr lang="en-US" sz="1450" dirty="0"/>
-          </a:p>
-        </p:txBody>
-      </p:sp>
-      <p:sp>
-        <p:nvSpPr>
-          <p:cNvPr id="14" name="Text 12"/>
-          <p:cNvSpPr txBox="1"/>
-          <p:nvPr/>
-        </p:nvSpPr>
-        <p:spPr>
-          <a:xfrm>
-            <a:off x="4663440" y="3703320"/>
-            <a:ext cx="2834640" cy="1188720"/>
+          <p:cNvPr id="10" name="Text 8"/>
+          <p:cNvSpPr txBox="1"/>
+          <p:nvPr/>
+        </p:nvSpPr>
+        <p:spPr>
+          <a:xfrm>
+            <a:off x="1097280" y="3127248"/>
+            <a:ext cx="9966960" cy="384048"/>
+          </a:xfrm>
+          <a:prstGeom prst="rect">
+            <a:avLst/>
+          </a:prstGeom>
+          <a:noFill/>
+          <a:ln/>
+        </p:spPr>
+        <p:txBody>
+          <a:bodyPr wrap="square" lIns="0" tIns="0" rIns="0" bIns="0" rtlCol="0" anchor="ctr"/>
+          <a:lstStyle/>
+          <a:p>
+            <a:pPr indent="0" marL="0">
+              <a:buNone/>
+            </a:pPr>
+            <a:r>
+              <a:rPr lang="en-US" sz="1400" b="1" dirty="0">
+                <a:solidFill>
+                  <a:srgbClr val="2F4F6B"/>
+                </a:solidFill>
+                <a:latin typeface="Yu Gothic" pitchFamily="34" charset="0"/>
+                <a:ea typeface="Yu Gothic" pitchFamily="34" charset="-122"/>
+                <a:cs typeface="Yu Gothic" pitchFamily="34" charset="-120"/>
+              </a:rPr>
+              <a:t>「社員が変なことを聞いたらどうなりますか」</a:t>
+            </a:r>
+            <a:endParaRPr lang="en-US" sz="1400" dirty="0"/>
+          </a:p>
+        </p:txBody>
+      </p:sp>
+      <p:sp>
+        <p:nvSpPr>
+          <p:cNvPr id="11" name="Text 9"/>
+          <p:cNvSpPr txBox="1"/>
+          <p:nvPr/>
+        </p:nvSpPr>
+        <p:spPr>
+          <a:xfrm>
+            <a:off x="1097280" y="3529584"/>
+            <a:ext cx="9966960" cy="603504"/>
           </a:xfrm>
           <a:prstGeom prst="rect">
             <a:avLst/>
@@ -8810,30 +10865,30 @@
               <a:buNone/>
             </a:pPr>
             <a:r>
-              <a:rPr lang="en-US" sz="1150" dirty="0">
-                <a:solidFill>
-                  <a:srgbClr val="5A534A"/>
-                </a:solidFill>
-                <a:latin typeface="Yu Gothic" pitchFamily="34" charset="0"/>
-                <a:ea typeface="Yu Gothic" pitchFamily="34" charset="-122"/>
-                <a:cs typeface="Yu Gothic" pitchFamily="34" charset="-120"/>
-              </a:rPr>
-              <a:t>実際の案件を投げて、出力を見ながら指示文を直します</a:t>
-            </a:r>
-            <a:endParaRPr lang="en-US" sz="1150" dirty="0"/>
-          </a:p>
-        </p:txBody>
-      </p:sp>
-      <p:sp>
-        <p:nvSpPr>
-          <p:cNvPr id="15" name="Shape 13"/>
+              <a:rPr lang="en-US" sz="1250" dirty="0">
+                <a:solidFill>
+                  <a:srgbClr val="3F3933"/>
+                </a:solidFill>
+                <a:latin typeface="Yu Gothic" pitchFamily="34" charset="0"/>
+                <a:ea typeface="Yu Gothic" pitchFamily="34" charset="-122"/>
+                <a:cs typeface="Yu Gothic" pitchFamily="34" charset="-120"/>
+              </a:rPr>
+              <a:t>『資料に記載がありません』と答えます。今日その設定を入れます。答えないAIのほうが、実務では安全です。</a:t>
+            </a:r>
+            <a:endParaRPr lang="en-US" sz="1250" dirty="0"/>
+          </a:p>
+        </p:txBody>
+      </p:sp>
+      <p:sp>
+        <p:nvSpPr>
+          <p:cNvPr id="12" name="Shape 10"/>
           <p:cNvSpPr/>
           <p:nvPr/>
         </p:nvSpPr>
         <p:spPr>
           <a:xfrm>
-            <a:off x="8001000" y="2148840"/>
-            <a:ext cx="3383280" cy="2880360"/>
+            <a:off x="777240" y="4334256"/>
+            <a:ext cx="10607040" cy="1170432"/>
           </a:xfrm>
           <a:prstGeom prst="rect">
             <a:avLst/>
@@ -8851,16 +10906,16 @@
       </p:sp>
       <p:sp>
         <p:nvSpPr>
-          <p:cNvPr id="16" name="Shape 14"/>
+          <p:cNvPr id="13" name="Shape 11"/>
           <p:cNvSpPr/>
           <p:nvPr/>
         </p:nvSpPr>
         <p:spPr>
           <a:xfrm>
-            <a:off x="8275320" y="2395728"/>
-            <a:ext cx="438912" cy="438912"/>
-          </a:xfrm>
-          <a:prstGeom prst="ellipse">
+            <a:off x="777240" y="4334256"/>
+            <a:ext cx="54864" cy="1170432"/>
+          </a:xfrm>
+          <a:prstGeom prst="rect">
             <a:avLst/>
           </a:prstGeom>
           <a:solidFill>
@@ -8876,95 +10931,53 @@
       </p:sp>
       <p:sp>
         <p:nvSpPr>
-          <p:cNvPr id="17" name="Text 15"/>
-          <p:cNvSpPr txBox="1"/>
-          <p:nvPr/>
-        </p:nvSpPr>
-        <p:spPr>
-          <a:xfrm>
-            <a:off x="8275320" y="2395728"/>
-            <a:ext cx="438912" cy="438912"/>
-          </a:xfrm>
-          <a:prstGeom prst="rect">
-            <a:avLst/>
-          </a:prstGeom>
-          <a:noFill/>
-          <a:ln/>
-        </p:spPr>
-        <p:txBody>
-          <a:bodyPr wrap="square" lIns="0" tIns="0" rIns="0" bIns="0" rtlCol="0" anchor="ctr"/>
-          <a:lstStyle/>
-          <a:p>
-            <a:pPr algn="ctr" indent="0" marL="0">
-              <a:buNone/>
-            </a:pPr>
-            <a:r>
-              <a:rPr lang="en-US" sz="1300" b="1" dirty="0">
-                <a:solidFill>
-                  <a:srgbClr val="FFFFFF"/>
-                </a:solidFill>
-                <a:latin typeface="Yu Gothic" pitchFamily="34" charset="0"/>
-                <a:ea typeface="Yu Gothic" pitchFamily="34" charset="-122"/>
-                <a:cs typeface="Yu Gothic" pitchFamily="34" charset="-120"/>
-              </a:rPr>
-              <a:t>3</a:t>
-            </a:r>
-            <a:endParaRPr lang="en-US" sz="1300" dirty="0"/>
-          </a:p>
-        </p:txBody>
-      </p:sp>
-      <p:sp>
-        <p:nvSpPr>
-          <p:cNvPr id="18" name="Text 16"/>
-          <p:cNvSpPr txBox="1"/>
-          <p:nvPr/>
-        </p:nvSpPr>
-        <p:spPr>
-          <a:xfrm>
-            <a:off x="8275320" y="2944368"/>
-            <a:ext cx="2834640" cy="731520"/>
-          </a:xfrm>
-          <a:prstGeom prst="rect">
-            <a:avLst/>
-          </a:prstGeom>
-          <a:noFill/>
-          <a:ln/>
-        </p:spPr>
-        <p:txBody>
-          <a:bodyPr wrap="square" lIns="0" tIns="0" rIns="0" bIns="0" rtlCol="0" anchor="ctr"/>
-          <a:lstStyle/>
-          <a:p>
-            <a:pPr indent="0" marL="0">
-              <a:lnSpc>
-                <a:spcPct val="125000"/>
-              </a:lnSpc>
-              <a:buNone/>
-            </a:pPr>
-            <a:r>
-              <a:rPr lang="en-US" sz="1450" b="1" dirty="0">
-                <a:solidFill>
-                  <a:srgbClr val="23201D"/>
-                </a:solidFill>
-                <a:latin typeface="Yu Gothic" pitchFamily="34" charset="0"/>
-                <a:ea typeface="Yu Gothic" pitchFamily="34" charset="-122"/>
-                <a:cs typeface="Yu Gothic" pitchFamily="34" charset="-120"/>
-              </a:rPr>
-              <a:t>利用ルールをA4一枚で書く</a:t>
-            </a:r>
-            <a:endParaRPr lang="en-US" sz="1450" dirty="0"/>
-          </a:p>
-        </p:txBody>
-      </p:sp>
-      <p:sp>
-        <p:nvSpPr>
-          <p:cNvPr id="19" name="Text 17"/>
-          <p:cNvSpPr txBox="1"/>
-          <p:nvPr/>
-        </p:nvSpPr>
-        <p:spPr>
-          <a:xfrm>
-            <a:off x="8275320" y="3703320"/>
-            <a:ext cx="2834640" cy="1188720"/>
+          <p:cNvPr id="14" name="Text 12"/>
+          <p:cNvSpPr txBox="1"/>
+          <p:nvPr/>
+        </p:nvSpPr>
+        <p:spPr>
+          <a:xfrm>
+            <a:off x="1097280" y="4425696"/>
+            <a:ext cx="9966960" cy="384048"/>
+          </a:xfrm>
+          <a:prstGeom prst="rect">
+            <a:avLst/>
+          </a:prstGeom>
+          <a:noFill/>
+          <a:ln/>
+        </p:spPr>
+        <p:txBody>
+          <a:bodyPr wrap="square" lIns="0" tIns="0" rIns="0" bIns="0" rtlCol="0" anchor="ctr"/>
+          <a:lstStyle/>
+          <a:p>
+            <a:pPr indent="0" marL="0">
+              <a:buNone/>
+            </a:pPr>
+            <a:r>
+              <a:rPr lang="en-US" sz="1400" b="1" dirty="0">
+                <a:solidFill>
+                  <a:srgbClr val="2F4F6B"/>
+                </a:solidFill>
+                <a:latin typeface="Yu Gothic" pitchFamily="34" charset="0"/>
+                <a:ea typeface="Yu Gothic" pitchFamily="34" charset="-122"/>
+                <a:cs typeface="Yu Gothic" pitchFamily="34" charset="-120"/>
+              </a:rPr>
+              <a:t>「作ったものは、私しか直せないのでは」</a:t>
+            </a:r>
+            <a:endParaRPr lang="en-US" sz="1400" dirty="0"/>
+          </a:p>
+        </p:txBody>
+      </p:sp>
+      <p:sp>
+        <p:nvSpPr>
+          <p:cNvPr id="15" name="Text 13"/>
+          <p:cNvSpPr txBox="1"/>
+          <p:nvPr/>
+        </p:nvSpPr>
+        <p:spPr>
+          <a:xfrm>
+            <a:off x="1097280" y="4828032"/>
+            <a:ext cx="9966960" cy="603504"/>
           </a:xfrm>
           <a:prstGeom prst="rect">
             <a:avLst/>
@@ -8983,23 +10996,23 @@
               <a:buNone/>
             </a:pPr>
             <a:r>
-              <a:rPr lang="en-US" sz="1150" dirty="0">
-                <a:solidFill>
-                  <a:srgbClr val="5A534A"/>
-                </a:solidFill>
-                <a:latin typeface="Yu Gothic" pitchFamily="34" charset="0"/>
-                <a:ea typeface="Yu Gothic" pitchFamily="34" charset="-122"/>
-                <a:cs typeface="Yu Gothic" pitchFamily="34" charset="-120"/>
-              </a:rPr>
-              <a:t>使ってよいAI／入れてはいけない情報／確認責任／相談先／見直し時期</a:t>
-            </a:r>
-            <a:endParaRPr lang="en-US" sz="1150" dirty="0"/>
-          </a:p>
-        </p:txBody>
-      </p:sp>
-      <p:sp>
-        <p:nvSpPr>
-          <p:cNvPr id="20" name="Text 18"/>
+              <a:rPr lang="en-US" sz="1250" dirty="0">
+                <a:solidFill>
+                  <a:srgbClr val="3F3933"/>
+                </a:solidFill>
+                <a:latin typeface="Yu Gothic" pitchFamily="34" charset="0"/>
+                <a:ea typeface="Yu Gothic" pitchFamily="34" charset="-122"/>
+                <a:cs typeface="Yu Gothic" pitchFamily="34" charset="-120"/>
+              </a:rPr>
+              <a:t>仕様書6行を残すので、担当者が替わっても作り直せます。直す人は第11回で決めます。外注でも構いません。</a:t>
+            </a:r>
+            <a:endParaRPr lang="en-US" sz="1250" dirty="0"/>
+          </a:p>
+        </p:txBody>
+      </p:sp>
+      <p:sp>
+        <p:nvSpPr>
+          <p:cNvPr id="16" name="Text 14"/>
           <p:cNvSpPr txBox="1"/>
           <p:nvPr/>
         </p:nvSpPr>
@@ -9038,7 +11051,7 @@
       </p:sp>
       <p:sp>
         <p:nvSpPr>
-          <p:cNvPr id="21" name="Text 19"/>
+          <p:cNvPr id="17" name="Text 15"/>
           <p:cNvSpPr txBox="1"/>
           <p:nvPr/>
         </p:nvSpPr>
@@ -9069,7 +11082,7 @@
                 <a:ea typeface="Yu Gothic" pitchFamily="34" charset="-122"/>
                 <a:cs typeface="Yu Gothic" pitchFamily="34" charset="-120"/>
               </a:rPr>
-              <a:t>演習</a:t>
+              <a:t>想定問答</a:t>
             </a:r>
             <a:endParaRPr lang="en-US" sz="900" dirty="0"/>
           </a:p>

--- a/slides/pptx/第05回_自社専用AIをつくる.pptx
+++ b/slides/pptx/第05回_自社専用AIをつくる.pptx
@@ -4604,7 +4604,7 @@
                 <a:ea typeface="Yu Gothic" pitchFamily="34" charset="-122"/>
                 <a:cs typeface="Yu Gothic" pitchFamily="34" charset="-120"/>
               </a:rPr>
-              <a:t>他社では</a:t>
+              <a:t>よくある型</a:t>
             </a:r>
             <a:endParaRPr lang="en-US" sz="900" dirty="0"/>
           </a:p>
@@ -4646,7 +4646,7 @@
                 <a:ea typeface="Yu Gothic" pitchFamily="34" charset="-122"/>
                 <a:cs typeface="Yu Gothic" pitchFamily="34" charset="-120"/>
               </a:rPr>
-              <a:t>就業規則を載せた社内問い合わせAIを作った会社では、総務への質問が減ったこと以上に、「規則に書いていないこと」が可視化されたのが収穫でした。結果として規則の改訂につながりました。</a:t>
+              <a:t>規則を載せた社内問い合わせAIで価値が出るのは、質問が減ることより「規則に書いていないこと」が見えることのほう。規則の改訂に接続することがある。</a:t>
             </a:r>
             <a:endParaRPr lang="en-US" sz="1250" dirty="0"/>
           </a:p>

--- a/slides/pptx/第05回_自社専用AIをつくる.pptx
+++ b/slides/pptx/第05回_自社専用AIをつくる.pptx
@@ -2618,7 +2618,7 @@
                 <a:ea typeface="Yu Gothic" pitchFamily="34" charset="-122"/>
                 <a:cs typeface="Yu Gothic" pitchFamily="34" charset="-120"/>
               </a:rPr>
-              <a:t>自社の資料と指示をあらかじめ仕込んだAI。社員に渡せます</a:t>
+              <a:t>自社の資料と指示を入れた「プロジェクト」。無料プランでも作れます</a:t>
             </a:r>
             <a:endParaRPr lang="en-US" sz="1250" dirty="0"/>
           </a:p>
@@ -3277,7 +3277,7 @@
                 <a:ea typeface="Yu Gothic" pitchFamily="34" charset="-122"/>
                 <a:cs typeface="Yu Gothic" pitchFamily="34" charset="-120"/>
               </a:rPr>
-              <a:t>専用AIを1つ作る</a:t>
+              <a:t>プロジェクトを1つ作る</a:t>
             </a:r>
             <a:endParaRPr lang="en-US" sz="1450" dirty="0"/>
           </a:p>
@@ -3319,7 +3319,7 @@
                 <a:ea typeface="Yu Gothic" pitchFamily="34" charset="-122"/>
                 <a:cs typeface="Yu Gothic" pitchFamily="34" charset="-120"/>
               </a:rPr>
-              <a:t>載せる資料は3本で十分。まず動かすことを優先します</a:t>
+              <a:t>資料は3本で十分。まず動かすことを優先します</a:t>
             </a:r>
             <a:endParaRPr lang="en-US" sz="1150" dirty="0"/>
           </a:p>
@@ -3665,7 +3665,7 @@
                 <a:ea typeface="Yu Gothic" pitchFamily="34" charset="-122"/>
                 <a:cs typeface="Yu Gothic" pitchFamily="34" charset="-120"/>
               </a:rPr>
-              <a:t>使ってよいAI／入れてはいけない情報／確認責任／相談先／見直し時期</a:t>
+              <a:t>入れてよい情報／入れてはいけない情報／出力の扱い／アカウントと費用／窓口</a:t>
             </a:r>
             <a:endParaRPr lang="en-US" sz="1150" dirty="0"/>
           </a:p>
@@ -10317,7 +10317,7 @@
                 <a:ea typeface="Yu Gothic" pitchFamily="34" charset="-122"/>
                 <a:cs typeface="Yu Gothic" pitchFamily="34" charset="-120"/>
               </a:rPr>
-              <a:t>ルールが10項目に増える</a:t>
+              <a:t>「作成」ボタンが見つからない</a:t>
             </a:r>
             <a:endParaRPr lang="en-US" sz="1350" dirty="0"/>
           </a:p>
@@ -10423,7 +10423,7 @@
                 <a:ea typeface="Yu Gothic" pitchFamily="34" charset="-122"/>
                 <a:cs typeface="Yu Gothic" pitchFamily="34" charset="-120"/>
               </a:rPr>
-              <a:t>5項目で止めます。増やすと読まれず、読まれないルールは無いのと同じです</a:t>
+              <a:t>GPTsは個人プランでは新規作成できません。プロジェクト機能で作ります。無料プランでも動きます</a:t>
             </a:r>
             <a:endParaRPr lang="en-US" sz="1250" dirty="0"/>
           </a:p>

--- a/slides/pptx/第05回_自社専用AIをつくる.pptx
+++ b/slides/pptx/第05回_自社専用AIをつくる.pptx
@@ -604,7 +604,7 @@
           <a:p>
             <a:r>
               <a:rPr lang="en-US" dirty="0"/>
-              <a:t>仕様書6行を『引き継ぎ書』と言い換えると、経営者には価値が伝わりやすい。事業承継の文脈に接続できる。</a:t>
+              <a:t>仕様書7行を『引き継ぎ書』と言い換えると、経営者には価値が伝わりやすい。事業承継の文脈に接続できる。</a:t>
             </a:r>
             <a:endParaRPr lang="en-US" dirty="0"/>
           </a:p>
@@ -1396,7 +1396,7 @@
           <a:p>
             <a:r>
               <a:rPr lang="en-US" dirty="0"/>
-              <a:t>6行の仕様書は、その場で埋めながら作る。特に「守ること」の行を、次のデモで実証する。</a:t>
+              <a:t>7行の仕様書は、その場で埋めながら作る。特に④やらせないことの行を、次のデモで実証する。テンプレート集⑤と同じ様式なので、紙を開かせて同時に埋めさせる。</a:t>
             </a:r>
             <a:endParaRPr lang="en-US" dirty="0"/>
           </a:p>
@@ -2749,7 +2749,7 @@
                 <a:ea typeface="Yu Gothic" pitchFamily="34" charset="-122"/>
                 <a:cs typeface="Yu Gothic" pitchFamily="34" charset="-120"/>
               </a:rPr>
-              <a:t>名称・役割・参照資料・守ること・出力形式・使う人の6行。これが引き継ぎ書になります</a:t>
+              <a:t>名前・誰に使わせるか・できること・やらせないこと・載せる資料・出力形式・人が確認する箇所の7行。これが引き継ぎ書になります</a:t>
             </a:r>
             <a:endParaRPr lang="en-US" sz="1250" dirty="0"/>
           </a:p>
@@ -7650,7 +7650,7 @@
                 <a:ea typeface="Yu Gothic" pitchFamily="34" charset="-122"/>
                 <a:cs typeface="Yu Gothic" pitchFamily="34" charset="-120"/>
               </a:rPr>
-              <a:t>仕様書は、この6行で足ります</a:t>
+              <a:t>仕様書は、この7行で足ります</a:t>
             </a:r>
             <a:endParaRPr lang="en-US" sz="2600" dirty="0"/>
           </a:p>
@@ -7665,7 +7665,7 @@
         <p:spPr>
           <a:xfrm>
             <a:off x="777240" y="1691640"/>
-            <a:ext cx="10607040" cy="3931920"/>
+            <a:ext cx="10607040" cy="4462272"/>
           </a:xfrm>
           <a:prstGeom prst="rect">
             <a:avLst/>
@@ -7781,7 +7781,7 @@
                 <a:ea typeface="Yu Gothic" pitchFamily="34" charset="-122"/>
                 <a:cs typeface="Yu Gothic" pitchFamily="34" charset="-120"/>
               </a:rPr>
-              <a:t>名称</a:t>
+              <a:t>① 名前</a:t>
             </a:r>
             <a:endParaRPr lang="en-US" sz="1100" dirty="0"/>
           </a:p>
@@ -7865,7 +7865,7 @@
                 <a:ea typeface="Yu Gothic" pitchFamily="34" charset="-122"/>
                 <a:cs typeface="Yu Gothic" pitchFamily="34" charset="-120"/>
               </a:rPr>
-              <a:t>役割</a:t>
+              <a:t>② 誰に使わせるか</a:t>
             </a:r>
             <a:endParaRPr lang="en-US" sz="1100" dirty="0"/>
           </a:p>
@@ -7907,7 +7907,7 @@
                 <a:ea typeface="Consolas" pitchFamily="34" charset="-122"/>
                 <a:cs typeface="Consolas" pitchFamily="34" charset="-120"/>
               </a:rPr>
-              <a:t>過去の見積実績から、概算金額と根拠になった類似案件を提示する</a:t>
+              <a:t>社長・営業2名（第6回時点で事務1名にも展開）</a:t>
             </a:r>
             <a:endParaRPr lang="en-US" sz="1150" dirty="0"/>
           </a:p>
@@ -7949,7 +7949,7 @@
                 <a:ea typeface="Yu Gothic" pitchFamily="34" charset="-122"/>
                 <a:cs typeface="Yu Gothic" pitchFamily="34" charset="-120"/>
               </a:rPr>
-              <a:t>参照する資料</a:t>
+              <a:t>③ できること</a:t>
             </a:r>
             <a:endParaRPr lang="en-US" sz="1100" dirty="0"/>
           </a:p>
@@ -7991,7 +7991,7 @@
                 <a:ea typeface="Consolas" pitchFamily="34" charset="-122"/>
                 <a:cs typeface="Consolas" pitchFamily="34" charset="-120"/>
               </a:rPr>
-              <a:t>過去3年の見積書142件（顧客名は記号化）／材料単価表／標準工数表</a:t>
+              <a:t>過去の見積実績から、概算金額と根拠になった類似案件を提示する</a:t>
             </a:r>
             <a:endParaRPr lang="en-US" sz="1150" dirty="0"/>
           </a:p>
@@ -8033,7 +8033,7 @@
                 <a:ea typeface="Yu Gothic" pitchFamily="34" charset="-122"/>
                 <a:cs typeface="Yu Gothic" pitchFamily="34" charset="-120"/>
               </a:rPr>
-              <a:t>守ること</a:t>
+              <a:t>④ やらせないこと</a:t>
             </a:r>
             <a:endParaRPr lang="en-US" sz="1100" dirty="0"/>
           </a:p>
@@ -8075,7 +8075,7 @@
                 <a:ea typeface="Consolas" pitchFamily="34" charset="-122"/>
                 <a:cs typeface="Consolas" pitchFamily="34" charset="-120"/>
               </a:rPr>
-              <a:t>記載がなければ推測しない／金額は社長が確認してから提出／単価は最新版で検算</a:t>
+              <a:t>金額を確定しない／客先に直接出す文面は書かない／記載がなければ推測しない</a:t>
             </a:r>
             <a:endParaRPr lang="en-US" sz="1150" dirty="0"/>
           </a:p>
@@ -8117,7 +8117,7 @@
                 <a:ea typeface="Yu Gothic" pitchFamily="34" charset="-122"/>
                 <a:cs typeface="Yu Gothic" pitchFamily="34" charset="-120"/>
               </a:rPr>
-              <a:t>出力形式</a:t>
+              <a:t>⑤ 載せる資料</a:t>
             </a:r>
             <a:endParaRPr lang="en-US" sz="1100" dirty="0"/>
           </a:p>
@@ -8159,7 +8159,7 @@
                 <a:ea typeface="Consolas" pitchFamily="34" charset="-122"/>
                 <a:cs typeface="Consolas" pitchFamily="34" charset="-120"/>
               </a:rPr>
-              <a:t>①概算金額（幅で）②内訳 ③根拠になった過去案件3件と相違点</a:t>
+              <a:t>過去3年の見積書142件（顧客名は記号化）／材料単価表（2026年4月版）／標準工数表</a:t>
             </a:r>
             <a:endParaRPr lang="en-US" sz="1150" dirty="0"/>
           </a:p>
@@ -8201,7 +8201,7 @@
                 <a:ea typeface="Yu Gothic" pitchFamily="34" charset="-122"/>
                 <a:cs typeface="Yu Gothic" pitchFamily="34" charset="-120"/>
               </a:rPr>
-              <a:t>使う人</a:t>
+              <a:t>⑥ 出力形式</a:t>
             </a:r>
             <a:endParaRPr lang="en-US" sz="1100" dirty="0"/>
           </a:p>
@@ -8243,7 +8243,7 @@
                 <a:ea typeface="Consolas" pitchFamily="34" charset="-122"/>
                 <a:cs typeface="Consolas" pitchFamily="34" charset="-120"/>
               </a:rPr>
-              <a:t>社長・営業2名（第6回時点で事務1名にも展開）</a:t>
+              <a:t>①概算金額（幅で）②内訳 ③根拠になった過去案件3件と相違点</a:t>
             </a:r>
             <a:endParaRPr lang="en-US" sz="1150" dirty="0"/>
           </a:p>
@@ -8257,7 +8257,91 @@
         </p:nvSpPr>
         <p:spPr>
           <a:xfrm>
-            <a:off x="777240" y="5769864"/>
+            <a:off x="1097280" y="5513832"/>
+            <a:ext cx="2057400" cy="530352"/>
+          </a:xfrm>
+          <a:prstGeom prst="rect">
+            <a:avLst/>
+          </a:prstGeom>
+          <a:noFill/>
+          <a:ln/>
+        </p:spPr>
+        <p:txBody>
+          <a:bodyPr wrap="square" lIns="0" tIns="0" rIns="0" bIns="0" rtlCol="0" anchor="ctr"/>
+          <a:lstStyle/>
+          <a:p>
+            <a:pPr indent="0" marL="0">
+              <a:lnSpc>
+                <a:spcPct val="110000"/>
+              </a:lnSpc>
+              <a:buNone/>
+            </a:pPr>
+            <a:r>
+              <a:rPr lang="en-US" sz="1100" b="1" dirty="0">
+                <a:solidFill>
+                  <a:srgbClr val="2F4F6B"/>
+                </a:solidFill>
+                <a:latin typeface="Yu Gothic" pitchFamily="34" charset="0"/>
+                <a:ea typeface="Yu Gothic" pitchFamily="34" charset="-122"/>
+                <a:cs typeface="Yu Gothic" pitchFamily="34" charset="-120"/>
+              </a:rPr>
+              <a:t>⑦ 人が確認する箇所</a:t>
+            </a:r>
+            <a:endParaRPr lang="en-US" sz="1100" dirty="0"/>
+          </a:p>
+        </p:txBody>
+      </p:sp>
+      <p:sp>
+        <p:nvSpPr>
+          <p:cNvPr id="20" name="Text 18"/>
+          <p:cNvSpPr txBox="1"/>
+          <p:nvPr/>
+        </p:nvSpPr>
+        <p:spPr>
+          <a:xfrm>
+            <a:off x="3291840" y="5513832"/>
+            <a:ext cx="7772400" cy="530352"/>
+          </a:xfrm>
+          <a:prstGeom prst="rect">
+            <a:avLst/>
+          </a:prstGeom>
+          <a:noFill/>
+          <a:ln/>
+        </p:spPr>
+        <p:txBody>
+          <a:bodyPr wrap="square" lIns="0" tIns="0" rIns="0" bIns="0" rtlCol="0" anchor="ctr"/>
+          <a:lstStyle/>
+          <a:p>
+            <a:pPr indent="0" marL="0">
+              <a:lnSpc>
+                <a:spcPct val="115000"/>
+              </a:lnSpc>
+              <a:buNone/>
+            </a:pPr>
+            <a:r>
+              <a:rPr lang="en-US" sz="1150" dirty="0">
+                <a:solidFill>
+                  <a:srgbClr val="23201D"/>
+                </a:solidFill>
+                <a:latin typeface="Consolas" pitchFamily="34" charset="0"/>
+                <a:ea typeface="Consolas" pitchFamily="34" charset="-122"/>
+                <a:cs typeface="Consolas" pitchFamily="34" charset="-120"/>
+              </a:rPr>
+              <a:t>材料単価が最新版か／類似案件の品番が実在するか</a:t>
+            </a:r>
+            <a:endParaRPr lang="en-US" sz="1150" dirty="0"/>
+          </a:p>
+        </p:txBody>
+      </p:sp>
+      <p:sp>
+        <p:nvSpPr>
+          <p:cNvPr id="21" name="Text 19"/>
+          <p:cNvSpPr txBox="1"/>
+          <p:nvPr/>
+        </p:nvSpPr>
+        <p:spPr>
+          <a:xfrm>
+            <a:off x="777240" y="6300216"/>
             <a:ext cx="10607040" cy="548640"/>
           </a:xfrm>
           <a:prstGeom prst="rect">
@@ -8285,7 +8369,7 @@
                 <a:ea typeface="Yu Gothic" pitchFamily="34" charset="-122"/>
                 <a:cs typeface="Yu Gothic" pitchFamily="34" charset="-120"/>
               </a:rPr>
-              <a:t>この6行が、そのまま仕様書になります。担当者が替わっても、これがあれば作り直せます。</a:t>
+              <a:t>この7行が、そのまま仕様書になります。テンプレート集の⑤と同じ様式です。担当者が替わっても、これがあれば作り直せます。</a:t>
             </a:r>
             <a:endParaRPr lang="en-US" sz="1250" dirty="0"/>
           </a:p>
@@ -8293,7 +8377,7 @@
       </p:sp>
       <p:sp>
         <p:nvSpPr>
-          <p:cNvPr id="20" name="Text 18"/>
+          <p:cNvPr id="22" name="Text 20"/>
           <p:cNvSpPr txBox="1"/>
           <p:nvPr/>
         </p:nvSpPr>
@@ -8332,7 +8416,7 @@
       </p:sp>
       <p:sp>
         <p:nvSpPr>
-          <p:cNvPr id="21" name="Text 19"/>
+          <p:cNvPr id="23" name="Text 21"/>
           <p:cNvSpPr txBox="1"/>
           <p:nvPr/>
         </p:nvSpPr>
@@ -11004,7 +11088,7 @@
                 <a:ea typeface="Yu Gothic" pitchFamily="34" charset="-122"/>
                 <a:cs typeface="Yu Gothic" pitchFamily="34" charset="-120"/>
               </a:rPr>
-              <a:t>仕様書6行を残すので、担当者が替わっても作り直せます。直す人は第11回で決めます。外注でも構いません。</a:t>
+              <a:t>仕様書7行を残すので、担当者が替わっても作り直せます。直す人は第11回で決めます。外注でも構いません。</a:t>
             </a:r>
             <a:endParaRPr lang="en-US" sz="1250" dirty="0"/>
           </a:p>

--- a/slides/pptx/第05回_自社専用AIをつくる.pptx
+++ b/slides/pptx/第05回_自社専用AIをつくる.pptx
@@ -3146,7 +3146,7 @@
                 <a:ea typeface="Yu Gothic" pitchFamily="34" charset="-122"/>
                 <a:cs typeface="Yu Gothic" pitchFamily="34" charset="-120"/>
               </a:rPr>
-              <a:t>55分。操作するのはご自身です。</a:t>
+              <a:t>65分。操作するのはご自身です。</a:t>
             </a:r>
             <a:endParaRPr lang="en-US" sz="1250" dirty="0"/>
           </a:p>
@@ -6052,7 +6052,7 @@
                 <a:ea typeface="Yu Gothic" pitchFamily="34" charset="-122"/>
                 <a:cs typeface="Yu Gothic" pitchFamily="34" charset="-120"/>
               </a:rPr>
-              <a:t>今日、それを1つのツールに束ねます。社員が触れる形にします。</a:t>
+              <a:t>今日、それを1つのツールに束ねます。毎日開く道具にします。</a:t>
             </a:r>
             <a:endParaRPr lang="en-US" sz="1800" dirty="0"/>
           </a:p>
@@ -6243,7 +6243,7 @@
                 <a:ea typeface="Yu Gothic" pitchFamily="34" charset="-122"/>
                 <a:cs typeface="Yu Gothic" pitchFamily="34" charset="-120"/>
               </a:rPr>
-              <a:t>自社資料を読む専用AIを1つ動かし、社員の方が触れる状態にします。あわせて最低限のルールを決めます。</a:t>
+              <a:t>自社資料を読む専用AIを1つ動かし、明日から毎日開ける状態にします。あわせて最低限のルールを決めます。</a:t>
             </a:r>
             <a:endParaRPr lang="en-US" sz="2600" dirty="0"/>
           </a:p>
@@ -7665,7 +7665,7 @@
         <p:spPr>
           <a:xfrm>
             <a:off x="777240" y="1691640"/>
-            <a:ext cx="10607040" cy="4462272"/>
+            <a:ext cx="10607040" cy="3931920"/>
           </a:xfrm>
           <a:prstGeom prst="rect">
             <a:avLst/>
@@ -7754,7 +7754,7 @@
         <p:spPr>
           <a:xfrm>
             <a:off x="1097280" y="2331720"/>
-            <a:ext cx="2057400" cy="530352"/>
+            <a:ext cx="2057400" cy="454587"/>
           </a:xfrm>
           <a:prstGeom prst="rect">
             <a:avLst/>
@@ -7796,7 +7796,7 @@
         <p:spPr>
           <a:xfrm>
             <a:off x="3291840" y="2331720"/>
-            <a:ext cx="7772400" cy="530352"/>
+            <a:ext cx="7772400" cy="454587"/>
           </a:xfrm>
           <a:prstGeom prst="rect">
             <a:avLst/>
@@ -7837,8 +7837,8 @@
         </p:nvSpPr>
         <p:spPr>
           <a:xfrm>
-            <a:off x="1097280" y="2862072"/>
-            <a:ext cx="2057400" cy="530352"/>
+            <a:off x="1097280" y="2786307"/>
+            <a:ext cx="2057400" cy="454587"/>
           </a:xfrm>
           <a:prstGeom prst="rect">
             <a:avLst/>
@@ -7879,8 +7879,8 @@
         </p:nvSpPr>
         <p:spPr>
           <a:xfrm>
-            <a:off x="3291840" y="2862072"/>
-            <a:ext cx="7772400" cy="530352"/>
+            <a:off x="3291840" y="2786307"/>
+            <a:ext cx="7772400" cy="454587"/>
           </a:xfrm>
           <a:prstGeom prst="rect">
             <a:avLst/>
@@ -7921,8 +7921,8 @@
         </p:nvSpPr>
         <p:spPr>
           <a:xfrm>
-            <a:off x="1097280" y="3392424"/>
-            <a:ext cx="2057400" cy="530352"/>
+            <a:off x="1097280" y="3240895"/>
+            <a:ext cx="2057400" cy="454587"/>
           </a:xfrm>
           <a:prstGeom prst="rect">
             <a:avLst/>
@@ -7963,8 +7963,8 @@
         </p:nvSpPr>
         <p:spPr>
           <a:xfrm>
-            <a:off x="3291840" y="3392424"/>
-            <a:ext cx="7772400" cy="530352"/>
+            <a:off x="3291840" y="3240895"/>
+            <a:ext cx="7772400" cy="454587"/>
           </a:xfrm>
           <a:prstGeom prst="rect">
             <a:avLst/>
@@ -8005,8 +8005,8 @@
         </p:nvSpPr>
         <p:spPr>
           <a:xfrm>
-            <a:off x="1097280" y="3922776"/>
-            <a:ext cx="2057400" cy="530352"/>
+            <a:off x="1097280" y="3695482"/>
+            <a:ext cx="2057400" cy="454587"/>
           </a:xfrm>
           <a:prstGeom prst="rect">
             <a:avLst/>
@@ -8047,8 +8047,8 @@
         </p:nvSpPr>
         <p:spPr>
           <a:xfrm>
-            <a:off x="3291840" y="3922776"/>
-            <a:ext cx="7772400" cy="530352"/>
+            <a:off x="3291840" y="3695482"/>
+            <a:ext cx="7772400" cy="454587"/>
           </a:xfrm>
           <a:prstGeom prst="rect">
             <a:avLst/>
@@ -8089,8 +8089,8 @@
         </p:nvSpPr>
         <p:spPr>
           <a:xfrm>
-            <a:off x="1097280" y="4453128"/>
-            <a:ext cx="2057400" cy="530352"/>
+            <a:off x="1097280" y="4150070"/>
+            <a:ext cx="2057400" cy="454587"/>
           </a:xfrm>
           <a:prstGeom prst="rect">
             <a:avLst/>
@@ -8131,8 +8131,8 @@
         </p:nvSpPr>
         <p:spPr>
           <a:xfrm>
-            <a:off x="3291840" y="4453128"/>
-            <a:ext cx="7772400" cy="530352"/>
+            <a:off x="3291840" y="4150070"/>
+            <a:ext cx="7772400" cy="454587"/>
           </a:xfrm>
           <a:prstGeom prst="rect">
             <a:avLst/>
@@ -8173,8 +8173,8 @@
         </p:nvSpPr>
         <p:spPr>
           <a:xfrm>
-            <a:off x="1097280" y="4983480"/>
-            <a:ext cx="2057400" cy="530352"/>
+            <a:off x="1097280" y="4604657"/>
+            <a:ext cx="2057400" cy="454587"/>
           </a:xfrm>
           <a:prstGeom prst="rect">
             <a:avLst/>
@@ -8215,8 +8215,8 @@
         </p:nvSpPr>
         <p:spPr>
           <a:xfrm>
-            <a:off x="3291840" y="4983480"/>
-            <a:ext cx="7772400" cy="530352"/>
+            <a:off x="3291840" y="4604657"/>
+            <a:ext cx="7772400" cy="454587"/>
           </a:xfrm>
           <a:prstGeom prst="rect">
             <a:avLst/>
@@ -8257,8 +8257,8 @@
         </p:nvSpPr>
         <p:spPr>
           <a:xfrm>
-            <a:off x="1097280" y="5513832"/>
-            <a:ext cx="2057400" cy="530352"/>
+            <a:off x="1097280" y="5059245"/>
+            <a:ext cx="2057400" cy="454587"/>
           </a:xfrm>
           <a:prstGeom prst="rect">
             <a:avLst/>
@@ -8299,8 +8299,8 @@
         </p:nvSpPr>
         <p:spPr>
           <a:xfrm>
-            <a:off x="3291840" y="5513832"/>
-            <a:ext cx="7772400" cy="530352"/>
+            <a:off x="3291840" y="5059245"/>
+            <a:ext cx="7772400" cy="454587"/>
           </a:xfrm>
           <a:prstGeom prst="rect">
             <a:avLst/>
@@ -8341,7 +8341,7 @@
         </p:nvSpPr>
         <p:spPr>
           <a:xfrm>
-            <a:off x="777240" y="6300216"/>
+            <a:off x="777240" y="5769864"/>
             <a:ext cx="10607040" cy="548640"/>
           </a:xfrm>
           <a:prstGeom prst="rect">

--- a/slides/pptx/第05回_自社専用AIをつくる.pptx
+++ b/slides/pptx/第05回_自社専用AIをつくる.pptx
@@ -6350,7 +6350,7 @@
         <p:spPr>
           <a:xfrm>
             <a:off x="960120" y="4873752"/>
-            <a:ext cx="1956816" cy="237744"/>
+            <a:ext cx="2468880" cy="237744"/>
           </a:xfrm>
           <a:prstGeom prst="rect">
             <a:avLst/>
@@ -6389,7 +6389,7 @@
         <p:spPr>
           <a:xfrm>
             <a:off x="960120" y="5111496"/>
-            <a:ext cx="1956816" cy="384048"/>
+            <a:ext cx="2468880" cy="384048"/>
           </a:xfrm>
           <a:prstGeom prst="rect">
             <a:avLst/>
@@ -6427,8 +6427,8 @@
         </p:nvSpPr>
         <p:spPr>
           <a:xfrm>
-            <a:off x="3008376" y="4873752"/>
-            <a:ext cx="1956816" cy="237744"/>
+            <a:off x="3520440" y="4873752"/>
+            <a:ext cx="2468880" cy="237744"/>
           </a:xfrm>
           <a:prstGeom prst="rect">
             <a:avLst/>
@@ -6466,8 +6466,8 @@
         </p:nvSpPr>
         <p:spPr>
           <a:xfrm>
-            <a:off x="3008376" y="5111496"/>
-            <a:ext cx="1956816" cy="384048"/>
+            <a:off x="3520440" y="5111496"/>
+            <a:ext cx="2468880" cy="384048"/>
           </a:xfrm>
           <a:prstGeom prst="rect">
             <a:avLst/>
@@ -6505,8 +6505,8 @@
         </p:nvSpPr>
         <p:spPr>
           <a:xfrm>
-            <a:off x="5056632" y="4873752"/>
-            <a:ext cx="1956816" cy="237744"/>
+            <a:off x="6080760" y="4873752"/>
+            <a:ext cx="2468880" cy="237744"/>
           </a:xfrm>
           <a:prstGeom prst="rect">
             <a:avLst/>
@@ -6530,7 +6530,7 @@
                 <a:ea typeface="Yu Gothic" pitchFamily="34" charset="-122"/>
                 <a:cs typeface="Yu Gothic" pitchFamily="34" charset="-120"/>
               </a:rPr>
-              <a:t>35-90分</a:t>
+              <a:t>35-100分</a:t>
             </a:r>
             <a:endParaRPr lang="en-US" sz="900" dirty="0"/>
           </a:p>
@@ -6544,8 +6544,8 @@
         </p:nvSpPr>
         <p:spPr>
           <a:xfrm>
-            <a:off x="5056632" y="5111496"/>
-            <a:ext cx="1956816" cy="384048"/>
+            <a:off x="6080760" y="5111496"/>
+            <a:ext cx="2468880" cy="384048"/>
           </a:xfrm>
           <a:prstGeom prst="rect">
             <a:avLst/>
@@ -6583,8 +6583,8 @@
         </p:nvSpPr>
         <p:spPr>
           <a:xfrm>
-            <a:off x="7104888" y="4873752"/>
-            <a:ext cx="1956816" cy="237744"/>
+            <a:off x="8641080" y="4873752"/>
+            <a:ext cx="2468880" cy="237744"/>
           </a:xfrm>
           <a:prstGeom prst="rect">
             <a:avLst/>
@@ -6608,7 +6608,7 @@
                 <a:ea typeface="Yu Gothic" pitchFamily="34" charset="-122"/>
                 <a:cs typeface="Yu Gothic" pitchFamily="34" charset="-120"/>
               </a:rPr>
-              <a:t>90-105分</a:t>
+              <a:t>100-120分</a:t>
             </a:r>
             <a:endParaRPr lang="en-US" sz="900" dirty="0"/>
           </a:p>
@@ -6622,8 +6622,8 @@
         </p:nvSpPr>
         <p:spPr>
           <a:xfrm>
-            <a:off x="7104888" y="5111496"/>
-            <a:ext cx="1956816" cy="384048"/>
+            <a:off x="8641080" y="5111496"/>
+            <a:ext cx="2468880" cy="384048"/>
           </a:xfrm>
           <a:prstGeom prst="rect">
             <a:avLst/>
@@ -6647,7 +6647,7 @@
                 <a:ea typeface="Yu Gothic" pitchFamily="34" charset="-122"/>
                 <a:cs typeface="Yu Gothic" pitchFamily="34" charset="-120"/>
               </a:rPr>
-              <a:t>業務への組み込み</a:t>
+              <a:t>組み込み・宿題・記録</a:t>
             </a:r>
             <a:endParaRPr lang="en-US" sz="1100" dirty="0"/>
           </a:p>
@@ -6656,84 +6656,6 @@
       <p:sp>
         <p:nvSpPr>
           <p:cNvPr id="15" name="Text 13"/>
-          <p:cNvSpPr txBox="1"/>
-          <p:nvPr/>
-        </p:nvSpPr>
-        <p:spPr>
-          <a:xfrm>
-            <a:off x="9153144" y="4873752"/>
-            <a:ext cx="1956816" cy="237744"/>
-          </a:xfrm>
-          <a:prstGeom prst="rect">
-            <a:avLst/>
-          </a:prstGeom>
-          <a:noFill/>
-          <a:ln/>
-        </p:spPr>
-        <p:txBody>
-          <a:bodyPr wrap="square" lIns="0" tIns="0" rIns="0" bIns="0" rtlCol="0" anchor="ctr"/>
-          <a:lstStyle/>
-          <a:p>
-            <a:pPr indent="0" marL="0">
-              <a:buNone/>
-            </a:pPr>
-            <a:r>
-              <a:rPr lang="en-US" sz="900" b="1" dirty="0">
-                <a:solidFill>
-                  <a:srgbClr val="B04A2F"/>
-                </a:solidFill>
-                <a:latin typeface="Yu Gothic" pitchFamily="34" charset="0"/>
-                <a:ea typeface="Yu Gothic" pitchFamily="34" charset="-122"/>
-                <a:cs typeface="Yu Gothic" pitchFamily="34" charset="-120"/>
-              </a:rPr>
-              <a:t>105-120分</a:t>
-            </a:r>
-            <a:endParaRPr lang="en-US" sz="900" dirty="0"/>
-          </a:p>
-        </p:txBody>
-      </p:sp>
-      <p:sp>
-        <p:nvSpPr>
-          <p:cNvPr id="16" name="Text 14"/>
-          <p:cNvSpPr txBox="1"/>
-          <p:nvPr/>
-        </p:nvSpPr>
-        <p:spPr>
-          <a:xfrm>
-            <a:off x="9153144" y="5111496"/>
-            <a:ext cx="1956816" cy="384048"/>
-          </a:xfrm>
-          <a:prstGeom prst="rect">
-            <a:avLst/>
-          </a:prstGeom>
-          <a:noFill/>
-          <a:ln/>
-        </p:spPr>
-        <p:txBody>
-          <a:bodyPr wrap="square" lIns="0" tIns="0" rIns="0" bIns="0" rtlCol="0" anchor="ctr"/>
-          <a:lstStyle/>
-          <a:p>
-            <a:pPr indent="0" marL="0">
-              <a:buNone/>
-            </a:pPr>
-            <a:r>
-              <a:rPr lang="en-US" sz="1100" dirty="0">
-                <a:solidFill>
-                  <a:srgbClr val="23201D"/>
-                </a:solidFill>
-                <a:latin typeface="Yu Gothic" pitchFamily="34" charset="0"/>
-                <a:ea typeface="Yu Gothic" pitchFamily="34" charset="-122"/>
-                <a:cs typeface="Yu Gothic" pitchFamily="34" charset="-120"/>
-              </a:rPr>
-              <a:t>宿題・記録</a:t>
-            </a:r>
-            <a:endParaRPr lang="en-US" sz="1100" dirty="0"/>
-          </a:p>
-        </p:txBody>
-      </p:sp>
-      <p:sp>
-        <p:nvSpPr>
-          <p:cNvPr id="17" name="Text 15"/>
           <p:cNvSpPr txBox="1"/>
           <p:nvPr/>
         </p:nvSpPr>
@@ -6772,7 +6694,7 @@
       </p:sp>
       <p:sp>
         <p:nvSpPr>
-          <p:cNvPr id="18" name="Text 16"/>
+          <p:cNvPr id="16" name="Text 14"/>
           <p:cNvSpPr txBox="1"/>
           <p:nvPr/>
         </p:nvSpPr>

--- a/slides/pptx/第05回_自社専用AIをつくる.pptx
+++ b/slides/pptx/第05回_自社専用AIをつくる.pptx
@@ -2304,6 +2304,10 @@
             <a:prstDash val="solid"/>
           </a:ln>
         </p:spPr>
+        <p:txBody>
+          <a:bodyPr/>
+          <a:p/>
+        </p:txBody>
       </p:sp>
       <p:sp>
         <p:nvSpPr>
@@ -2517,6 +2521,10 @@
             <a:prstDash val="solid"/>
           </a:ln>
         </p:spPr>
+        <p:txBody>
+          <a:bodyPr/>
+          <a:p/>
+        </p:txBody>
       </p:sp>
       <p:sp>
         <p:nvSpPr>
@@ -2581,6 +2589,10 @@
             <a:prstDash val="solid"/>
           </a:ln>
         </p:spPr>
+        <p:txBody>
+          <a:bodyPr/>
+          <a:p/>
+        </p:txBody>
       </p:sp>
       <p:sp>
         <p:nvSpPr>
@@ -2648,6 +2660,10 @@
             <a:prstDash val="solid"/>
           </a:ln>
         </p:spPr>
+        <p:txBody>
+          <a:bodyPr/>
+          <a:p/>
+        </p:txBody>
       </p:sp>
       <p:sp>
         <p:nvSpPr>
@@ -2712,6 +2728,10 @@
             <a:prstDash val="solid"/>
           </a:ln>
         </p:spPr>
+        <p:txBody>
+          <a:bodyPr/>
+          <a:p/>
+        </p:txBody>
       </p:sp>
       <p:sp>
         <p:nvSpPr>
@@ -2779,6 +2799,10 @@
             <a:prstDash val="solid"/>
           </a:ln>
         </p:spPr>
+        <p:txBody>
+          <a:bodyPr/>
+          <a:p/>
+        </p:txBody>
       </p:sp>
       <p:sp>
         <p:nvSpPr>
@@ -2843,6 +2867,10 @@
             <a:prstDash val="solid"/>
           </a:ln>
         </p:spPr>
+        <p:txBody>
+          <a:bodyPr/>
+          <a:p/>
+        </p:txBody>
       </p:sp>
       <p:sp>
         <p:nvSpPr>
@@ -3068,7 +3096,7 @@
                 <a:ea typeface="Yu Gothic" pitchFamily="34" charset="-122"/>
                 <a:cs typeface="Yu Gothic" pitchFamily="34" charset="-120"/>
               </a:rPr>
-              <a:t>演習</a:t>
+              <a:t>実演</a:t>
             </a:r>
             <a:endParaRPr lang="en-US" sz="1100" dirty="0"/>
           </a:p>
@@ -3107,7 +3135,7 @@
                 <a:ea typeface="Yu Gothic" pitchFamily="34" charset="-122"/>
                 <a:cs typeface="Yu Gothic" pitchFamily="34" charset="-120"/>
               </a:rPr>
-              <a:t>今日、一緒にやること</a:t>
+              <a:t>今日、画面でお見せすること</a:t>
             </a:r>
             <a:endParaRPr lang="en-US" sz="2600" dirty="0"/>
           </a:p>
@@ -3146,7 +3174,7 @@
                 <a:ea typeface="Yu Gothic" pitchFamily="34" charset="-122"/>
                 <a:cs typeface="Yu Gothic" pitchFamily="34" charset="-120"/>
               </a:rPr>
-              <a:t>65分。操作するのはご自身です。</a:t>
+              <a:t>65分。講師の画面でお見せします。</a:t>
             </a:r>
             <a:endParaRPr lang="en-US" sz="1250" dirty="0"/>
           </a:p>
@@ -3176,6 +3204,10 @@
             <a:prstDash val="solid"/>
           </a:ln>
         </p:spPr>
+        <p:txBody>
+          <a:bodyPr/>
+          <a:p/>
+        </p:txBody>
       </p:sp>
       <p:sp>
         <p:nvSpPr>
@@ -3201,6 +3233,10 @@
             <a:prstDash val="solid"/>
           </a:ln>
         </p:spPr>
+        <p:txBody>
+          <a:bodyPr/>
+          <a:p/>
+        </p:txBody>
       </p:sp>
       <p:sp>
         <p:nvSpPr>
@@ -3349,6 +3385,10 @@
             <a:prstDash val="solid"/>
           </a:ln>
         </p:spPr>
+        <p:txBody>
+          <a:bodyPr/>
+          <a:p/>
+        </p:txBody>
       </p:sp>
       <p:sp>
         <p:nvSpPr>
@@ -3374,6 +3414,10 @@
             <a:prstDash val="solid"/>
           </a:ln>
         </p:spPr>
+        <p:txBody>
+          <a:bodyPr/>
+          <a:p/>
+        </p:txBody>
       </p:sp>
       <p:sp>
         <p:nvSpPr>
@@ -3522,6 +3566,10 @@
             <a:prstDash val="solid"/>
           </a:ln>
         </p:spPr>
+        <p:txBody>
+          <a:bodyPr/>
+          <a:p/>
+        </p:txBody>
       </p:sp>
       <p:sp>
         <p:nvSpPr>
@@ -3547,6 +3595,10 @@
             <a:prstDash val="solid"/>
           </a:ln>
         </p:spPr>
+        <p:txBody>
+          <a:bodyPr/>
+          <a:p/>
+        </p:txBody>
       </p:sp>
       <p:sp>
         <p:nvSpPr>
@@ -3743,7 +3795,7 @@
                 <a:ea typeface="Yu Gothic" pitchFamily="34" charset="-122"/>
                 <a:cs typeface="Yu Gothic" pitchFamily="34" charset="-120"/>
               </a:rPr>
-              <a:t>演習</a:t>
+              <a:t>実演</a:t>
             </a:r>
             <a:endParaRPr lang="en-US" sz="900" dirty="0"/>
           </a:p>
@@ -3922,6 +3974,10 @@
             <a:prstDash val="solid"/>
           </a:ln>
         </p:spPr>
+        <p:txBody>
+          <a:bodyPr/>
+          <a:p/>
+        </p:txBody>
       </p:sp>
       <p:sp>
         <p:nvSpPr>
@@ -3947,6 +4003,10 @@
             <a:prstDash val="solid"/>
           </a:ln>
         </p:spPr>
+        <p:txBody>
+          <a:bodyPr/>
+          <a:p/>
+        </p:txBody>
       </p:sp>
       <p:sp>
         <p:nvSpPr>
@@ -4053,6 +4113,10 @@
             <a:prstDash val="solid"/>
           </a:ln>
         </p:spPr>
+        <p:txBody>
+          <a:bodyPr/>
+          <a:p/>
+        </p:txBody>
       </p:sp>
       <p:sp>
         <p:nvSpPr>
@@ -4078,6 +4142,10 @@
             <a:prstDash val="solid"/>
           </a:ln>
         </p:spPr>
+        <p:txBody>
+          <a:bodyPr/>
+          <a:p/>
+        </p:txBody>
       </p:sp>
       <p:sp>
         <p:nvSpPr>
@@ -4184,6 +4252,10 @@
             <a:prstDash val="solid"/>
           </a:ln>
         </p:spPr>
+        <p:txBody>
+          <a:bodyPr/>
+          <a:p/>
+        </p:txBody>
       </p:sp>
       <p:sp>
         <p:nvSpPr>
@@ -4209,6 +4281,10 @@
             <a:prstDash val="solid"/>
           </a:ln>
         </p:spPr>
+        <p:txBody>
+          <a:bodyPr/>
+          <a:p/>
+        </p:txBody>
       </p:sp>
       <p:sp>
         <p:nvSpPr>
@@ -4503,6 +4579,10 @@
             <a:prstDash val="solid"/>
           </a:ln>
         </p:spPr>
+        <p:txBody>
+          <a:bodyPr/>
+          <a:p/>
+        </p:txBody>
       </p:sp>
       <p:sp>
         <p:nvSpPr>
@@ -4570,6 +4650,10 @@
             <a:prstDash val="solid"/>
           </a:ln>
         </p:spPr>
+        <p:txBody>
+          <a:bodyPr/>
+          <a:p/>
+        </p:txBody>
       </p:sp>
       <p:sp>
         <p:nvSpPr>
@@ -4903,6 +4987,10 @@
             <a:prstDash val="solid"/>
           </a:ln>
         </p:spPr>
+        <p:txBody>
+          <a:bodyPr/>
+          <a:p/>
+        </p:txBody>
       </p:sp>
       <p:sp>
         <p:nvSpPr>
@@ -5009,6 +5097,10 @@
             <a:prstDash val="solid"/>
           </a:ln>
         </p:spPr>
+        <p:txBody>
+          <a:bodyPr/>
+          <a:p/>
+        </p:txBody>
       </p:sp>
       <p:sp>
         <p:nvSpPr>
@@ -5157,6 +5249,10 @@
             <a:prstDash val="solid"/>
           </a:ln>
         </p:spPr>
+        <p:txBody>
+          <a:bodyPr/>
+          <a:p/>
+        </p:txBody>
       </p:sp>
       <p:sp>
         <p:nvSpPr>
@@ -5409,6 +5505,10 @@
             <a:prstDash val="solid"/>
           </a:ln>
         </p:spPr>
+        <p:txBody>
+          <a:bodyPr/>
+          <a:p/>
+        </p:txBody>
       </p:sp>
       <p:sp>
         <p:nvSpPr>
@@ -5706,6 +5806,10 @@
             <a:prstDash val="solid"/>
           </a:ln>
         </p:spPr>
+        <p:txBody>
+          <a:bodyPr/>
+          <a:p/>
+        </p:txBody>
       </p:sp>
       <p:sp>
         <p:nvSpPr>
@@ -5809,6 +5913,10 @@
             <a:prstDash val="solid"/>
           </a:ln>
         </p:spPr>
+        <p:txBody>
+          <a:bodyPr/>
+          <a:p/>
+        </p:txBody>
       </p:sp>
       <p:sp>
         <p:nvSpPr>
@@ -5912,6 +6020,10 @@
             <a:prstDash val="solid"/>
           </a:ln>
         </p:spPr>
+        <p:txBody>
+          <a:bodyPr/>
+          <a:p/>
+        </p:txBody>
       </p:sp>
       <p:sp>
         <p:nvSpPr>
@@ -6015,6 +6127,10 @@
             <a:prstDash val="solid"/>
           </a:ln>
         </p:spPr>
+        <p:txBody>
+          <a:bodyPr/>
+          <a:p/>
+        </p:txBody>
       </p:sp>
       <p:sp>
         <p:nvSpPr>
@@ -6273,6 +6389,10 @@
             <a:prstDash val="solid"/>
           </a:ln>
         </p:spPr>
+        <p:txBody>
+          <a:bodyPr/>
+          <a:p/>
+        </p:txBody>
       </p:sp>
       <p:sp>
         <p:nvSpPr>
@@ -6340,6 +6460,10 @@
             <a:prstDash val="solid"/>
           </a:ln>
         </p:spPr>
+        <p:txBody>
+          <a:bodyPr/>
+          <a:p/>
+        </p:txBody>
       </p:sp>
       <p:sp>
         <p:nvSpPr>
@@ -6569,7 +6693,7 @@
                 <a:ea typeface="Yu Gothic" pitchFamily="34" charset="-122"/>
                 <a:cs typeface="Yu Gothic" pitchFamily="34" charset="-120"/>
               </a:rPr>
-              <a:t>一緒に手を動かす</a:t>
+              <a:t>画面で順にお見せする</a:t>
             </a:r>
             <a:endParaRPr lang="en-US" sz="1100" dirty="0"/>
           </a:p>
@@ -6865,6 +6989,10 @@
             <a:prstDash val="solid"/>
           </a:ln>
         </p:spPr>
+        <p:txBody>
+          <a:bodyPr/>
+          <a:p/>
+        </p:txBody>
       </p:sp>
       <p:sp>
         <p:nvSpPr>
@@ -6890,6 +7018,10 @@
             <a:prstDash val="solid"/>
           </a:ln>
         </p:spPr>
+        <p:txBody>
+          <a:bodyPr/>
+          <a:p/>
+        </p:txBody>
       </p:sp>
       <p:sp>
         <p:nvSpPr>
@@ -7035,6 +7167,10 @@
             <a:prstDash val="solid"/>
           </a:ln>
         </p:spPr>
+        <p:txBody>
+          <a:bodyPr/>
+          <a:p/>
+        </p:txBody>
       </p:sp>
       <p:sp>
         <p:nvSpPr>
@@ -7060,6 +7196,10 @@
             <a:prstDash val="solid"/>
           </a:ln>
         </p:spPr>
+        <p:txBody>
+          <a:bodyPr/>
+          <a:p/>
+        </p:txBody>
       </p:sp>
       <p:sp>
         <p:nvSpPr>
@@ -7205,6 +7345,10 @@
             <a:prstDash val="solid"/>
           </a:ln>
         </p:spPr>
+        <p:txBody>
+          <a:bodyPr/>
+          <a:p/>
+        </p:txBody>
       </p:sp>
       <p:sp>
         <p:nvSpPr>
@@ -7230,6 +7374,10 @@
             <a:prstDash val="solid"/>
           </a:ln>
         </p:spPr>
+        <p:txBody>
+          <a:bodyPr/>
+          <a:p/>
+        </p:txBody>
       </p:sp>
       <p:sp>
         <p:nvSpPr>
@@ -7602,6 +7750,10 @@
             <a:prstDash val="solid"/>
           </a:ln>
         </p:spPr>
+        <p:txBody>
+          <a:bodyPr/>
+          <a:p/>
+        </p:txBody>
       </p:sp>
       <p:sp>
         <p:nvSpPr>
@@ -7627,6 +7779,10 @@
             <a:prstDash val="solid"/>
           </a:ln>
         </p:spPr>
+        <p:txBody>
+          <a:bodyPr/>
+          <a:p/>
+        </p:txBody>
       </p:sp>
       <p:sp>
         <p:nvSpPr>
@@ -8509,6 +8665,10 @@
             <a:prstDash val="solid"/>
           </a:ln>
         </p:spPr>
+        <p:txBody>
+          <a:bodyPr/>
+          <a:p/>
+        </p:txBody>
       </p:sp>
       <p:sp>
         <p:nvSpPr>
@@ -8615,6 +8775,10 @@
             <a:prstDash val="solid"/>
           </a:ln>
         </p:spPr>
+        <p:txBody>
+          <a:bodyPr/>
+          <a:p/>
+        </p:txBody>
       </p:sp>
       <p:sp>
         <p:nvSpPr>
@@ -8847,6 +9011,10 @@
             <a:prstDash val="solid"/>
           </a:ln>
         </p:spPr>
+        <p:txBody>
+          <a:bodyPr/>
+          <a:p/>
+        </p:txBody>
       </p:sp>
       <p:sp>
         <p:nvSpPr>
@@ -8914,6 +9082,10 @@
             <a:prstDash val="solid"/>
           </a:ln>
         </p:spPr>
+        <p:txBody>
+          <a:bodyPr/>
+          <a:p/>
+        </p:txBody>
       </p:sp>
       <p:sp>
         <p:nvSpPr>
@@ -9166,6 +9338,10 @@
             <a:prstDash val="solid"/>
           </a:ln>
         </p:spPr>
+        <p:txBody>
+          <a:bodyPr/>
+          <a:p/>
+        </p:txBody>
       </p:sp>
       <p:sp>
         <p:nvSpPr>
@@ -9272,6 +9448,10 @@
             <a:prstDash val="solid"/>
           </a:ln>
         </p:spPr>
+        <p:txBody>
+          <a:bodyPr/>
+          <a:p/>
+        </p:txBody>
       </p:sp>
       <p:sp>
         <p:nvSpPr>
@@ -9504,6 +9684,10 @@
             <a:prstDash val="solid"/>
           </a:ln>
         </p:spPr>
+        <p:txBody>
+          <a:bodyPr/>
+          <a:p/>
+        </p:txBody>
       </p:sp>
       <p:sp>
         <p:nvSpPr>
@@ -9571,6 +9755,10 @@
             <a:prstDash val="solid"/>
           </a:ln>
         </p:spPr>
+        <p:txBody>
+          <a:bodyPr/>
+          <a:p/>
+        </p:txBody>
       </p:sp>
       <p:sp>
         <p:nvSpPr>
@@ -9823,6 +10011,10 @@
             <a:prstDash val="solid"/>
           </a:ln>
         </p:spPr>
+        <p:txBody>
+          <a:bodyPr/>
+          <a:p/>
+        </p:txBody>
       </p:sp>
       <p:sp>
         <p:nvSpPr>
@@ -9929,6 +10121,10 @@
             <a:prstDash val="solid"/>
           </a:ln>
         </p:spPr>
+        <p:txBody>
+          <a:bodyPr/>
+          <a:p/>
+        </p:txBody>
       </p:sp>
       <p:sp>
         <p:nvSpPr>
@@ -10035,6 +10231,10 @@
             <a:prstDash val="solid"/>
           </a:ln>
         </p:spPr>
+        <p:txBody>
+          <a:bodyPr/>
+          <a:p/>
+        </p:txBody>
       </p:sp>
       <p:sp>
         <p:nvSpPr>
@@ -10141,6 +10341,10 @@
             <a:prstDash val="solid"/>
           </a:ln>
         </p:spPr>
+        <p:txBody>
+          <a:bodyPr/>
+          <a:p/>
+        </p:txBody>
       </p:sp>
       <p:sp>
         <p:nvSpPr>
@@ -10247,6 +10451,10 @@
             <a:prstDash val="solid"/>
           </a:ln>
         </p:spPr>
+        <p:txBody>
+          <a:bodyPr/>
+          <a:p/>
+        </p:txBody>
       </p:sp>
       <p:sp>
         <p:nvSpPr>
@@ -10353,6 +10561,10 @@
             <a:prstDash val="solid"/>
           </a:ln>
         </p:spPr>
+        <p:txBody>
+          <a:bodyPr/>
+          <a:p/>
+        </p:txBody>
       </p:sp>
       <p:sp>
         <p:nvSpPr>
@@ -10429,7 +10641,7 @@
                 <a:ea typeface="Yu Gothic" pitchFamily="34" charset="-122"/>
                 <a:cs typeface="Yu Gothic" pitchFamily="34" charset="-120"/>
               </a:rPr>
-              <a:t>GPTsは個人プランでは新規作成できません。プロジェクト機能で作ります。無料プランでも動きます</a:t>
+              <a:t>GPTsは個人プランでは新規作成できず、提供終了も予定されています。プロジェクト機能で作ります。無料プランでも動きます</a:t>
             </a:r>
             <a:endParaRPr lang="en-US" sz="1250" dirty="0"/>
           </a:p>
@@ -10647,6 +10859,10 @@
             <a:prstDash val="solid"/>
           </a:ln>
         </p:spPr>
+        <p:txBody>
+          <a:bodyPr/>
+          <a:p/>
+        </p:txBody>
       </p:sp>
       <p:sp>
         <p:nvSpPr>
@@ -10672,6 +10888,10 @@
             <a:prstDash val="solid"/>
           </a:ln>
         </p:spPr>
+        <p:txBody>
+          <a:bodyPr/>
+          <a:p/>
+        </p:txBody>
       </p:sp>
       <p:sp>
         <p:nvSpPr>
@@ -10778,6 +10998,10 @@
             <a:prstDash val="solid"/>
           </a:ln>
         </p:spPr>
+        <p:txBody>
+          <a:bodyPr/>
+          <a:p/>
+        </p:txBody>
       </p:sp>
       <p:sp>
         <p:nvSpPr>
@@ -10803,6 +11027,10 @@
             <a:prstDash val="solid"/>
           </a:ln>
         </p:spPr>
+        <p:txBody>
+          <a:bodyPr/>
+          <a:p/>
+        </p:txBody>
       </p:sp>
       <p:sp>
         <p:nvSpPr>
@@ -10909,6 +11137,10 @@
             <a:prstDash val="solid"/>
           </a:ln>
         </p:spPr>
+        <p:txBody>
+          <a:bodyPr/>
+          <a:p/>
+        </p:txBody>
       </p:sp>
       <p:sp>
         <p:nvSpPr>
@@ -10934,6 +11166,10 @@
             <a:prstDash val="solid"/>
           </a:ln>
         </p:spPr>
+        <p:txBody>
+          <a:bodyPr/>
+          <a:p/>
+        </p:txBody>
       </p:sp>
       <p:sp>
         <p:nvSpPr>
